--- a/graphics/graphics.pptx
+++ b/graphics/graphics.pptx
@@ -6,7 +6,7 @@
     <p:sldMasterId id="2147483660" r:id="rId2"/>
   </p:sldMasterIdLst>
   <p:notesMasterIdLst>
-    <p:notesMasterId r:id="rId11"/>
+    <p:notesMasterId r:id="rId12"/>
   </p:notesMasterIdLst>
   <p:sldIdLst>
     <p:sldId id="259" r:id="rId3"/>
@@ -17,6 +17,7 @@
     <p:sldId id="263" r:id="rId8"/>
     <p:sldId id="264" r:id="rId9"/>
     <p:sldId id="265" r:id="rId10"/>
+    <p:sldId id="266" r:id="rId11"/>
   </p:sldIdLst>
   <p:sldSz cx="12192000" cy="6858000"/>
   <p:notesSz cx="6858000" cy="9144000"/>
@@ -205,7 +206,7 @@
           <a:p>
             <a:fld id="{B8404A9E-F80D-47A3-9ABE-4E375F8C7A58}" type="datetimeFigureOut">
               <a:rPr lang="fr-CA" smtClean="0"/>
-              <a:t>2026-02-26</a:t>
+              <a:t>2026-03-19</a:t>
             </a:fld>
             <a:endParaRPr lang="fr-CA"/>
           </a:p>
@@ -622,7 +623,7 @@
           <a:p>
             <a:fld id="{B1B97C2F-ED53-40B2-8245-274A53568F1F}" type="datetimeFigureOut">
               <a:rPr lang="fr-CA" smtClean="0"/>
-              <a:t>2026-02-26</a:t>
+              <a:t>2026-03-19</a:t>
             </a:fld>
             <a:endParaRPr lang="fr-CA"/>
           </a:p>
@@ -822,7 +823,7 @@
           <a:p>
             <a:fld id="{B1B97C2F-ED53-40B2-8245-274A53568F1F}" type="datetimeFigureOut">
               <a:rPr lang="fr-CA" smtClean="0"/>
-              <a:t>2026-02-26</a:t>
+              <a:t>2026-03-19</a:t>
             </a:fld>
             <a:endParaRPr lang="fr-CA"/>
           </a:p>
@@ -1032,7 +1033,7 @@
           <a:p>
             <a:fld id="{B1B97C2F-ED53-40B2-8245-274A53568F1F}" type="datetimeFigureOut">
               <a:rPr lang="fr-CA" smtClean="0"/>
-              <a:t>2026-02-26</a:t>
+              <a:t>2026-03-19</a:t>
             </a:fld>
             <a:endParaRPr lang="fr-CA"/>
           </a:p>
@@ -1254,7 +1255,7 @@
           <a:p>
             <a:fld id="{3CFA78C3-2C03-4D26-BA08-5201FB292C09}" type="datetimeFigureOut">
               <a:rPr lang="fr-CA" smtClean="0"/>
-              <a:t>2026-02-26</a:t>
+              <a:t>2026-03-19</a:t>
             </a:fld>
             <a:endParaRPr lang="fr-CA"/>
           </a:p>
@@ -1454,7 +1455,7 @@
           <a:p>
             <a:fld id="{3CFA78C3-2C03-4D26-BA08-5201FB292C09}" type="datetimeFigureOut">
               <a:rPr lang="fr-CA" smtClean="0"/>
-              <a:t>2026-02-26</a:t>
+              <a:t>2026-03-19</a:t>
             </a:fld>
             <a:endParaRPr lang="fr-CA"/>
           </a:p>
@@ -1730,7 +1731,7 @@
           <a:p>
             <a:fld id="{3CFA78C3-2C03-4D26-BA08-5201FB292C09}" type="datetimeFigureOut">
               <a:rPr lang="fr-CA" smtClean="0"/>
-              <a:t>2026-02-26</a:t>
+              <a:t>2026-03-19</a:t>
             </a:fld>
             <a:endParaRPr lang="fr-CA"/>
           </a:p>
@@ -1998,7 +1999,7 @@
           <a:p>
             <a:fld id="{3CFA78C3-2C03-4D26-BA08-5201FB292C09}" type="datetimeFigureOut">
               <a:rPr lang="fr-CA" smtClean="0"/>
-              <a:t>2026-02-26</a:t>
+              <a:t>2026-03-19</a:t>
             </a:fld>
             <a:endParaRPr lang="fr-CA"/>
           </a:p>
@@ -2413,7 +2414,7 @@
           <a:p>
             <a:fld id="{3CFA78C3-2C03-4D26-BA08-5201FB292C09}" type="datetimeFigureOut">
               <a:rPr lang="fr-CA" smtClean="0"/>
-              <a:t>2026-02-26</a:t>
+              <a:t>2026-03-19</a:t>
             </a:fld>
             <a:endParaRPr lang="fr-CA"/>
           </a:p>
@@ -2555,7 +2556,7 @@
           <a:p>
             <a:fld id="{3CFA78C3-2C03-4D26-BA08-5201FB292C09}" type="datetimeFigureOut">
               <a:rPr lang="fr-CA" smtClean="0"/>
-              <a:t>2026-02-26</a:t>
+              <a:t>2026-03-19</a:t>
             </a:fld>
             <a:endParaRPr lang="fr-CA"/>
           </a:p>
@@ -2668,7 +2669,7 @@
           <a:p>
             <a:fld id="{3CFA78C3-2C03-4D26-BA08-5201FB292C09}" type="datetimeFigureOut">
               <a:rPr lang="fr-CA" smtClean="0"/>
-              <a:t>2026-02-26</a:t>
+              <a:t>2026-03-19</a:t>
             </a:fld>
             <a:endParaRPr lang="fr-CA"/>
           </a:p>
@@ -2981,7 +2982,7 @@
           <a:p>
             <a:fld id="{3CFA78C3-2C03-4D26-BA08-5201FB292C09}" type="datetimeFigureOut">
               <a:rPr lang="fr-CA" smtClean="0"/>
-              <a:t>2026-02-26</a:t>
+              <a:t>2026-03-19</a:t>
             </a:fld>
             <a:endParaRPr lang="fr-CA"/>
           </a:p>
@@ -3181,7 +3182,7 @@
           <a:p>
             <a:fld id="{B1B97C2F-ED53-40B2-8245-274A53568F1F}" type="datetimeFigureOut">
               <a:rPr lang="fr-CA" smtClean="0"/>
-              <a:t>2026-02-26</a:t>
+              <a:t>2026-03-19</a:t>
             </a:fld>
             <a:endParaRPr lang="fr-CA"/>
           </a:p>
@@ -3470,7 +3471,7 @@
           <a:p>
             <a:fld id="{3CFA78C3-2C03-4D26-BA08-5201FB292C09}" type="datetimeFigureOut">
               <a:rPr lang="fr-CA" smtClean="0"/>
-              <a:t>2026-02-26</a:t>
+              <a:t>2026-03-19</a:t>
             </a:fld>
             <a:endParaRPr lang="fr-CA"/>
           </a:p>
@@ -3670,7 +3671,7 @@
           <a:p>
             <a:fld id="{3CFA78C3-2C03-4D26-BA08-5201FB292C09}" type="datetimeFigureOut">
               <a:rPr lang="fr-CA" smtClean="0"/>
-              <a:t>2026-02-26</a:t>
+              <a:t>2026-03-19</a:t>
             </a:fld>
             <a:endParaRPr lang="fr-CA"/>
           </a:p>
@@ -3880,7 +3881,7 @@
           <a:p>
             <a:fld id="{3CFA78C3-2C03-4D26-BA08-5201FB292C09}" type="datetimeFigureOut">
               <a:rPr lang="fr-CA" smtClean="0"/>
-              <a:t>2026-02-26</a:t>
+              <a:t>2026-03-19</a:t>
             </a:fld>
             <a:endParaRPr lang="fr-CA"/>
           </a:p>
@@ -4156,7 +4157,7 @@
           <a:p>
             <a:fld id="{B1B97C2F-ED53-40B2-8245-274A53568F1F}" type="datetimeFigureOut">
               <a:rPr lang="fr-CA" smtClean="0"/>
-              <a:t>2026-02-26</a:t>
+              <a:t>2026-03-19</a:t>
             </a:fld>
             <a:endParaRPr lang="fr-CA"/>
           </a:p>
@@ -4424,7 +4425,7 @@
           <a:p>
             <a:fld id="{B1B97C2F-ED53-40B2-8245-274A53568F1F}" type="datetimeFigureOut">
               <a:rPr lang="fr-CA" smtClean="0"/>
-              <a:t>2026-02-26</a:t>
+              <a:t>2026-03-19</a:t>
             </a:fld>
             <a:endParaRPr lang="fr-CA"/>
           </a:p>
@@ -4839,7 +4840,7 @@
           <a:p>
             <a:fld id="{B1B97C2F-ED53-40B2-8245-274A53568F1F}" type="datetimeFigureOut">
               <a:rPr lang="fr-CA" smtClean="0"/>
-              <a:t>2026-02-26</a:t>
+              <a:t>2026-03-19</a:t>
             </a:fld>
             <a:endParaRPr lang="fr-CA"/>
           </a:p>
@@ -4981,7 +4982,7 @@
           <a:p>
             <a:fld id="{B1B97C2F-ED53-40B2-8245-274A53568F1F}" type="datetimeFigureOut">
               <a:rPr lang="fr-CA" smtClean="0"/>
-              <a:t>2026-02-26</a:t>
+              <a:t>2026-03-19</a:t>
             </a:fld>
             <a:endParaRPr lang="fr-CA"/>
           </a:p>
@@ -5094,7 +5095,7 @@
           <a:p>
             <a:fld id="{B1B97C2F-ED53-40B2-8245-274A53568F1F}" type="datetimeFigureOut">
               <a:rPr lang="fr-CA" smtClean="0"/>
-              <a:t>2026-02-26</a:t>
+              <a:t>2026-03-19</a:t>
             </a:fld>
             <a:endParaRPr lang="fr-CA"/>
           </a:p>
@@ -5407,7 +5408,7 @@
           <a:p>
             <a:fld id="{B1B97C2F-ED53-40B2-8245-274A53568F1F}" type="datetimeFigureOut">
               <a:rPr lang="fr-CA" smtClean="0"/>
-              <a:t>2026-02-26</a:t>
+              <a:t>2026-03-19</a:t>
             </a:fld>
             <a:endParaRPr lang="fr-CA"/>
           </a:p>
@@ -5696,7 +5697,7 @@
           <a:p>
             <a:fld id="{B1B97C2F-ED53-40B2-8245-274A53568F1F}" type="datetimeFigureOut">
               <a:rPr lang="fr-CA" smtClean="0"/>
-              <a:t>2026-02-26</a:t>
+              <a:t>2026-03-19</a:t>
             </a:fld>
             <a:endParaRPr lang="fr-CA"/>
           </a:p>
@@ -5939,7 +5940,7 @@
           <a:p>
             <a:fld id="{B1B97C2F-ED53-40B2-8245-274A53568F1F}" type="datetimeFigureOut">
               <a:rPr lang="fr-CA" smtClean="0"/>
-              <a:t>2026-02-26</a:t>
+              <a:t>2026-03-19</a:t>
             </a:fld>
             <a:endParaRPr lang="fr-CA"/>
           </a:p>
@@ -6509,7 +6510,7 @@
           <a:p>
             <a:fld id="{3CFA78C3-2C03-4D26-BA08-5201FB292C09}" type="datetimeFigureOut">
               <a:rPr lang="fr-CA" smtClean="0"/>
-              <a:t>2026-02-26</a:t>
+              <a:t>2026-03-19</a:t>
             </a:fld>
             <a:endParaRPr lang="fr-CA"/>
           </a:p>
@@ -8800,6 +8801,7 @@
           <a:solidFill>
             <a:srgbClr val="E32E36"/>
           </a:solidFill>
+          <a:ln w="25400"/>
         </p:spPr>
         <p:style>
           <a:lnRef idx="2">
@@ -9104,12 +9106,90 @@
           </a:p>
         </p:txBody>
       </p:sp>
+      <p:sp>
+        <p:nvSpPr>
+          <p:cNvPr id="4" name="Ellipse 3">
+            <a:extLst>
+              <a:ext uri="{FF2B5EF4-FFF2-40B4-BE49-F238E27FC236}">
+                <a16:creationId xmlns:a16="http://schemas.microsoft.com/office/drawing/2014/main" id="{4681F7E5-A3DB-1479-3EEA-0D1191E58396}"/>
+              </a:ext>
+            </a:extLst>
+          </p:cNvPr>
+          <p:cNvSpPr/>
+          <p:nvPr/>
+        </p:nvSpPr>
+        <p:spPr>
+          <a:xfrm>
+            <a:off x="3104228" y="2978498"/>
+            <a:ext cx="2517058" cy="2517058"/>
+          </a:xfrm>
+          <a:prstGeom prst="ellipse">
+            <a:avLst/>
+          </a:prstGeom>
+          <a:solidFill>
+            <a:srgbClr val="8FAADC"/>
+          </a:solidFill>
+        </p:spPr>
+        <p:style>
+          <a:lnRef idx="2">
+            <a:schemeClr val="accent1">
+              <a:shade val="15000"/>
+            </a:schemeClr>
+          </a:lnRef>
+          <a:fillRef idx="1">
+            <a:schemeClr val="accent1"/>
+          </a:fillRef>
+          <a:effectRef idx="0">
+            <a:schemeClr val="accent1"/>
+          </a:effectRef>
+          <a:fontRef idx="minor">
+            <a:schemeClr val="lt1"/>
+          </a:fontRef>
+        </p:style>
+        <p:txBody>
+          <a:bodyPr rtlCol="0" anchor="ctr"/>
+          <a:lstStyle/>
+          <a:p>
+            <a:pPr algn="ctr">
+              <a:spcBef>
+                <a:spcPts val="600"/>
+              </a:spcBef>
+            </a:pPr>
+            <a:r>
+              <a:rPr lang="fr-CA" sz="1000" b="1" dirty="0">
+                <a:ln>
+                  <a:solidFill>
+                    <a:schemeClr val="tx1"/>
+                  </a:solidFill>
+                </a:ln>
+                <a:latin typeface="Aptos Display" panose="020B0004020202020204" pitchFamily="34" charset="0"/>
+                <a:ea typeface="Noto Serif" panose="02020502060505020204" pitchFamily="18"/>
+                <a:cs typeface="Noto Serif" panose="02020502060505020204" pitchFamily="18"/>
+              </a:rPr>
+              <a:t>  </a:t>
+            </a:r>
+            <a:r>
+              <a:rPr lang="fr-CA" sz="22000" b="1" dirty="0">
+                <a:ln>
+                  <a:solidFill>
+                    <a:schemeClr val="tx1"/>
+                  </a:solidFill>
+                </a:ln>
+                <a:latin typeface="Aptos Display" panose="020B0004020202020204" pitchFamily="34" charset="0"/>
+                <a:ea typeface="Noto Serif" panose="02020502060505020204" pitchFamily="18"/>
+                <a:cs typeface="Noto Serif" panose="02020502060505020204" pitchFamily="18"/>
+              </a:rPr>
+              <a:t>?</a:t>
+            </a:r>
+          </a:p>
+        </p:txBody>
+      </p:sp>
       <p:grpSp>
         <p:nvGrpSpPr>
-          <p:cNvPr id="35" name="Groupe 34">
+          <p:cNvPr id="21" name="Groupe 20">
             <a:extLst>
               <a:ext uri="{FF2B5EF4-FFF2-40B4-BE49-F238E27FC236}">
-                <a16:creationId xmlns:a16="http://schemas.microsoft.com/office/drawing/2014/main" id="{64284F23-32DC-5DBB-3B68-E78F9EB3CB18}"/>
+                <a16:creationId xmlns:a16="http://schemas.microsoft.com/office/drawing/2014/main" id="{C5B4C247-3847-3F10-A4F8-C80227234CDC}"/>
               </a:ext>
             </a:extLst>
           </p:cNvPr>
@@ -9118,10 +9198,10 @@
         </p:nvGrpSpPr>
         <p:grpSpPr>
           <a:xfrm>
-            <a:off x="8997309" y="200778"/>
-            <a:ext cx="2777720" cy="3337506"/>
-            <a:chOff x="3472746" y="2876251"/>
-            <a:chExt cx="2605387" cy="3130443"/>
+            <a:off x="9006834" y="200778"/>
+            <a:ext cx="2777720" cy="2777720"/>
+            <a:chOff x="8997309" y="200778"/>
+            <a:chExt cx="2777720" cy="2777720"/>
           </a:xfrm>
         </p:grpSpPr>
         <p:grpSp>
@@ -9138,11 +9218,14 @@
           </p:nvGrpSpPr>
           <p:grpSpPr>
             <a:xfrm>
-              <a:off x="3472746" y="2876251"/>
-              <a:ext cx="2605387" cy="2605387"/>
+              <a:off x="8997309" y="200778"/>
+              <a:ext cx="2777720" cy="2777720"/>
               <a:chOff x="3383431" y="2921592"/>
               <a:chExt cx="2424516" cy="2424516"/>
             </a:xfrm>
+            <a:solidFill>
+              <a:srgbClr val="FFFF00"/>
+            </a:solidFill>
           </p:grpSpPr>
           <p:pic>
             <p:nvPicPr>
@@ -9194,19 +9277,15 @@
             </p:nvSpPr>
             <p:spPr>
               <a:xfrm>
-                <a:off x="4362757" y="3516277"/>
-                <a:ext cx="430307" cy="1427704"/>
+                <a:off x="4392735" y="3516277"/>
+                <a:ext cx="400327" cy="1427704"/>
               </a:xfrm>
               <a:prstGeom prst="rect">
                 <a:avLst/>
               </a:prstGeom>
-              <a:solidFill>
-                <a:srgbClr val="F2E600"/>
-              </a:solidFill>
-              <a:ln w="3175">
-                <a:solidFill>
-                  <a:srgbClr val="F2E600"/>
-                </a:solidFill>
+              <a:noFill/>
+              <a:ln w="57150">
+                <a:noFill/>
               </a:ln>
             </p:spPr>
             <p:style>
@@ -9237,127 +9316,176 @@
         </p:grpSp>
         <p:sp>
           <p:nvSpPr>
-            <p:cNvPr id="32" name="ZoneTexte 31">
+            <p:cNvPr id="20" name="Rectangle : coins arrondis 19">
               <a:extLst>
                 <a:ext uri="{FF2B5EF4-FFF2-40B4-BE49-F238E27FC236}">
-                  <a16:creationId xmlns:a16="http://schemas.microsoft.com/office/drawing/2014/main" id="{9FDF3485-4C8E-3053-AD8B-D4459FA42DC5}"/>
+                  <a16:creationId xmlns:a16="http://schemas.microsoft.com/office/drawing/2014/main" id="{EB5F34E0-1237-910E-8D3A-42F7430DF70E}"/>
                 </a:ext>
               </a:extLst>
             </p:cNvPr>
-            <p:cNvSpPr txBox="1"/>
+            <p:cNvSpPr/>
             <p:nvPr/>
           </p:nvSpPr>
           <p:spPr>
             <a:xfrm>
-              <a:off x="4295275" y="2959706"/>
-              <a:ext cx="960329" cy="3046988"/>
+              <a:off x="10188300" y="882097"/>
+              <a:ext cx="389344" cy="1635692"/>
             </a:xfrm>
-            <a:prstGeom prst="rect">
-              <a:avLst/>
+            <a:prstGeom prst="roundRect">
+              <a:avLst>
+                <a:gd name="adj" fmla="val 0"/>
+              </a:avLst>
             </a:prstGeom>
-            <a:noFill/>
+            <a:solidFill>
+              <a:srgbClr val="FFFF00"/>
+            </a:solidFill>
+            <a:ln w="139700">
+              <a:noFill/>
+            </a:ln>
           </p:spPr>
+          <p:style>
+            <a:lnRef idx="2">
+              <a:schemeClr val="accent1">
+                <a:shade val="15000"/>
+              </a:schemeClr>
+            </a:lnRef>
+            <a:fillRef idx="1">
+              <a:schemeClr val="accent1"/>
+            </a:fillRef>
+            <a:effectRef idx="0">
+              <a:schemeClr val="accent1"/>
+            </a:effectRef>
+            <a:fontRef idx="minor">
+              <a:schemeClr val="lt1"/>
+            </a:fontRef>
+          </p:style>
           <p:txBody>
-            <a:bodyPr wrap="square" rtlCol="0">
-              <a:spAutoFit/>
-            </a:bodyPr>
+            <a:bodyPr rtlCol="0" anchor="ctr"/>
             <a:lstStyle/>
             <a:p>
-              <a:r>
-                <a:rPr lang="fr-CA" sz="18500" b="1" dirty="0">
-                  <a:ln>
-                    <a:solidFill>
-                      <a:schemeClr val="tx1"/>
-                    </a:solidFill>
-                  </a:ln>
-                  <a:solidFill>
-                    <a:schemeClr val="bg1"/>
-                  </a:solidFill>
-                </a:rPr>
-                <a:t>!</a:t>
-              </a:r>
+              <a:pPr algn="ctr"/>
+              <a:endParaRPr lang="fr-CA"/>
+            </a:p>
+          </p:txBody>
+        </p:sp>
+        <p:sp>
+          <p:nvSpPr>
+            <p:cNvPr id="8" name="Rectangle : coins arrondis 7">
+              <a:extLst>
+                <a:ext uri="{FF2B5EF4-FFF2-40B4-BE49-F238E27FC236}">
+                  <a16:creationId xmlns:a16="http://schemas.microsoft.com/office/drawing/2014/main" id="{3DDBB0D9-9C0C-713F-1CFF-2BA2919449C4}"/>
+                </a:ext>
+              </a:extLst>
+            </p:cNvPr>
+            <p:cNvSpPr/>
+            <p:nvPr/>
+          </p:nvSpPr>
+          <p:spPr>
+            <a:xfrm>
+              <a:off x="10261986" y="2145249"/>
+              <a:ext cx="248366" cy="248445"/>
+            </a:xfrm>
+            <a:prstGeom prst="roundRect">
+              <a:avLst>
+                <a:gd name="adj" fmla="val 33334"/>
+              </a:avLst>
+            </a:prstGeom>
+            <a:solidFill>
+              <a:schemeClr val="bg1">
+                <a:lumMod val="95000"/>
+              </a:schemeClr>
+            </a:solidFill>
+            <a:ln w="76200">
+              <a:solidFill>
+                <a:schemeClr val="tx1"/>
+              </a:solidFill>
+            </a:ln>
+          </p:spPr>
+          <p:style>
+            <a:lnRef idx="2">
+              <a:schemeClr val="accent1">
+                <a:shade val="15000"/>
+              </a:schemeClr>
+            </a:lnRef>
+            <a:fillRef idx="1">
+              <a:schemeClr val="accent1"/>
+            </a:fillRef>
+            <a:effectRef idx="0">
+              <a:schemeClr val="accent1"/>
+            </a:effectRef>
+            <a:fontRef idx="minor">
+              <a:schemeClr val="lt1"/>
+            </a:fontRef>
+          </p:style>
+          <p:txBody>
+            <a:bodyPr rtlCol="0" anchor="ctr"/>
+            <a:lstStyle/>
+            <a:p>
+              <a:pPr algn="ctr"/>
+              <a:endParaRPr lang="en-CA"/>
+            </a:p>
+          </p:txBody>
+        </p:sp>
+        <p:sp>
+          <p:nvSpPr>
+            <p:cNvPr id="11" name="Rectangle : avec coins rognés en haut 10">
+              <a:extLst>
+                <a:ext uri="{FF2B5EF4-FFF2-40B4-BE49-F238E27FC236}">
+                  <a16:creationId xmlns:a16="http://schemas.microsoft.com/office/drawing/2014/main" id="{33945E3D-D3B3-9AEE-DFD7-22DAE87AD36F}"/>
+                </a:ext>
+              </a:extLst>
+            </p:cNvPr>
+            <p:cNvSpPr/>
+            <p:nvPr/>
+          </p:nvSpPr>
+          <p:spPr>
+            <a:xfrm rot="10800000">
+              <a:off x="10261986" y="954073"/>
+              <a:ext cx="248366" cy="992616"/>
+            </a:xfrm>
+            <a:prstGeom prst="snip2SameRect">
+              <a:avLst>
+                <a:gd name="adj1" fmla="val 24126"/>
+                <a:gd name="adj2" fmla="val 12622"/>
+              </a:avLst>
+            </a:prstGeom>
+            <a:solidFill>
+              <a:schemeClr val="bg1">
+                <a:lumMod val="95000"/>
+              </a:schemeClr>
+            </a:solidFill>
+            <a:ln w="76200">
+              <a:solidFill>
+                <a:schemeClr val="tx1"/>
+              </a:solidFill>
+            </a:ln>
+          </p:spPr>
+          <p:style>
+            <a:lnRef idx="2">
+              <a:schemeClr val="accent1">
+                <a:shade val="15000"/>
+              </a:schemeClr>
+            </a:lnRef>
+            <a:fillRef idx="1">
+              <a:schemeClr val="accent1"/>
+            </a:fillRef>
+            <a:effectRef idx="0">
+              <a:schemeClr val="accent1"/>
+            </a:effectRef>
+            <a:fontRef idx="minor">
+              <a:schemeClr val="lt1"/>
+            </a:fontRef>
+          </p:style>
+          <p:txBody>
+            <a:bodyPr rtlCol="0" anchor="ctr"/>
+            <a:lstStyle/>
+            <a:p>
+              <a:pPr algn="ctr"/>
+              <a:endParaRPr lang="en-CA"/>
             </a:p>
           </p:txBody>
         </p:sp>
       </p:grpSp>
-      <p:sp>
-        <p:nvSpPr>
-          <p:cNvPr id="4" name="Ellipse 3">
-            <a:extLst>
-              <a:ext uri="{FF2B5EF4-FFF2-40B4-BE49-F238E27FC236}">
-                <a16:creationId xmlns:a16="http://schemas.microsoft.com/office/drawing/2014/main" id="{4681F7E5-A3DB-1479-3EEA-0D1191E58396}"/>
-              </a:ext>
-            </a:extLst>
-          </p:cNvPr>
-          <p:cNvSpPr/>
-          <p:nvPr/>
-        </p:nvSpPr>
-        <p:spPr>
-          <a:xfrm>
-            <a:off x="3104228" y="2978498"/>
-            <a:ext cx="2517058" cy="2517058"/>
-          </a:xfrm>
-          <a:prstGeom prst="ellipse">
-            <a:avLst/>
-          </a:prstGeom>
-          <a:solidFill>
-            <a:srgbClr val="8FAADC"/>
-          </a:solidFill>
-        </p:spPr>
-        <p:style>
-          <a:lnRef idx="2">
-            <a:schemeClr val="accent1">
-              <a:shade val="15000"/>
-            </a:schemeClr>
-          </a:lnRef>
-          <a:fillRef idx="1">
-            <a:schemeClr val="accent1"/>
-          </a:fillRef>
-          <a:effectRef idx="0">
-            <a:schemeClr val="accent1"/>
-          </a:effectRef>
-          <a:fontRef idx="minor">
-            <a:schemeClr val="lt1"/>
-          </a:fontRef>
-        </p:style>
-        <p:txBody>
-          <a:bodyPr rtlCol="0" anchor="ctr"/>
-          <a:lstStyle/>
-          <a:p>
-            <a:pPr algn="ctr">
-              <a:spcBef>
-                <a:spcPts val="600"/>
-              </a:spcBef>
-            </a:pPr>
-            <a:r>
-              <a:rPr lang="fr-CA" sz="1000" b="1" dirty="0">
-                <a:ln>
-                  <a:solidFill>
-                    <a:schemeClr val="tx1"/>
-                  </a:solidFill>
-                </a:ln>
-                <a:latin typeface="Aptos Display" panose="020B0004020202020204" pitchFamily="34" charset="0"/>
-                <a:ea typeface="Noto Serif" panose="02020502060505020204" pitchFamily="18"/>
-                <a:cs typeface="Noto Serif" panose="02020502060505020204" pitchFamily="18"/>
-              </a:rPr>
-              <a:t>  </a:t>
-            </a:r>
-            <a:r>
-              <a:rPr lang="fr-CA" sz="22000" b="1" dirty="0">
-                <a:ln>
-                  <a:solidFill>
-                    <a:schemeClr val="tx1"/>
-                  </a:solidFill>
-                </a:ln>
-                <a:latin typeface="Aptos Display" panose="020B0004020202020204" pitchFamily="34" charset="0"/>
-                <a:ea typeface="Noto Serif" panose="02020502060505020204" pitchFamily="18"/>
-                <a:cs typeface="Noto Serif" panose="02020502060505020204" pitchFamily="18"/>
-              </a:rPr>
-              <a:t>?</a:t>
-            </a:r>
-          </a:p>
-        </p:txBody>
-      </p:sp>
     </p:spTree>
     <p:extLst>
       <p:ext uri="{BB962C8B-B14F-4D97-AF65-F5344CB8AC3E}">
@@ -16034,7 +16162,7 @@
         </p:nvGrpSpPr>
         <p:grpSpPr>
           <a:xfrm>
-            <a:off x="8696100" y="-175400"/>
+            <a:off x="5910432" y="-497550"/>
             <a:ext cx="3159354" cy="4894095"/>
             <a:chOff x="5986431" y="1491165"/>
             <a:chExt cx="3159354" cy="4894095"/>
@@ -17665,7 +17793,7 @@
         </p:nvGrpSpPr>
         <p:grpSpPr>
           <a:xfrm>
-            <a:off x="3699583" y="4220269"/>
+            <a:off x="3629458" y="2346002"/>
             <a:ext cx="1848051" cy="1848051"/>
             <a:chOff x="3699583" y="4220269"/>
             <a:chExt cx="1848051" cy="1848051"/>
@@ -17857,10 +17985,1194 @@
           </p:cxnSp>
         </p:grpSp>
       </p:grpSp>
+      <p:grpSp>
+        <p:nvGrpSpPr>
+          <p:cNvPr id="40" name="Groupe 39">
+            <a:extLst>
+              <a:ext uri="{FF2B5EF4-FFF2-40B4-BE49-F238E27FC236}">
+                <a16:creationId xmlns:a16="http://schemas.microsoft.com/office/drawing/2014/main" id="{0C807909-694C-48E2-8143-D22AE60CA5B0}"/>
+              </a:ext>
+            </a:extLst>
+          </p:cNvPr>
+          <p:cNvGrpSpPr/>
+          <p:nvPr/>
+        </p:nvGrpSpPr>
+        <p:grpSpPr>
+          <a:xfrm>
+            <a:off x="3753743" y="4796700"/>
+            <a:ext cx="1723766" cy="1731267"/>
+            <a:chOff x="7149517" y="4041575"/>
+            <a:chExt cx="1723766" cy="1731267"/>
+          </a:xfrm>
+        </p:grpSpPr>
+        <p:cxnSp>
+          <p:nvCxnSpPr>
+            <p:cNvPr id="24" name="Connecteur droit avec flèche 23">
+              <a:extLst>
+                <a:ext uri="{FF2B5EF4-FFF2-40B4-BE49-F238E27FC236}">
+                  <a16:creationId xmlns:a16="http://schemas.microsoft.com/office/drawing/2014/main" id="{5147A507-7533-AC79-EE31-36BE616EB885}"/>
+                </a:ext>
+              </a:extLst>
+            </p:cNvPr>
+            <p:cNvCxnSpPr>
+              <a:cxnSpLocks/>
+            </p:cNvCxnSpPr>
+            <p:nvPr/>
+          </p:nvCxnSpPr>
+          <p:spPr>
+            <a:xfrm flipH="1">
+              <a:off x="7506689" y="4090737"/>
+              <a:ext cx="10642" cy="1643313"/>
+            </a:xfrm>
+            <a:prstGeom prst="straightConnector1">
+              <a:avLst/>
+            </a:prstGeom>
+            <a:ln w="152400" cap="rnd">
+              <a:solidFill>
+                <a:schemeClr val="tx1"/>
+              </a:solidFill>
+              <a:headEnd type="triangle"/>
+              <a:tailEnd type="triangle"/>
+            </a:ln>
+          </p:spPr>
+          <p:style>
+            <a:lnRef idx="1">
+              <a:schemeClr val="accent1"/>
+            </a:lnRef>
+            <a:fillRef idx="0">
+              <a:schemeClr val="accent1"/>
+            </a:fillRef>
+            <a:effectRef idx="0">
+              <a:schemeClr val="accent1"/>
+            </a:effectRef>
+            <a:fontRef idx="minor">
+              <a:schemeClr val="tx1"/>
+            </a:fontRef>
+          </p:style>
+        </p:cxnSp>
+        <p:sp>
+          <p:nvSpPr>
+            <p:cNvPr id="25" name="ZoneTexte 24">
+              <a:extLst>
+                <a:ext uri="{FF2B5EF4-FFF2-40B4-BE49-F238E27FC236}">
+                  <a16:creationId xmlns:a16="http://schemas.microsoft.com/office/drawing/2014/main" id="{761FF51F-DA73-E6DC-B68A-D177342CAF07}"/>
+                </a:ext>
+              </a:extLst>
+            </p:cNvPr>
+            <p:cNvSpPr txBox="1"/>
+            <p:nvPr/>
+          </p:nvSpPr>
+          <p:spPr>
+            <a:xfrm>
+              <a:off x="7946426" y="4304561"/>
+              <a:ext cx="926857" cy="1323439"/>
+            </a:xfrm>
+            <a:prstGeom prst="rect">
+              <a:avLst/>
+            </a:prstGeom>
+            <a:noFill/>
+          </p:spPr>
+          <p:txBody>
+            <a:bodyPr wrap="none" rtlCol="0">
+              <a:spAutoFit/>
+            </a:bodyPr>
+            <a:lstStyle/>
+            <a:p>
+              <a:r>
+                <a:rPr lang="en-CA" sz="8000" b="1" dirty="0">
+                  <a:latin typeface="DejaVu Sans" panose="020B0603030804020204" pitchFamily="34" charset="0"/>
+                  <a:ea typeface="DejaVu Sans" panose="020B0603030804020204" pitchFamily="34" charset="0"/>
+                  <a:cs typeface="DejaVu Sans" panose="020B0603030804020204" pitchFamily="34" charset="0"/>
+                </a:rPr>
+                <a:t>Y</a:t>
+              </a:r>
+            </a:p>
+          </p:txBody>
+        </p:sp>
+        <p:cxnSp>
+          <p:nvCxnSpPr>
+            <p:cNvPr id="29" name="Connecteur droit 28">
+              <a:extLst>
+                <a:ext uri="{FF2B5EF4-FFF2-40B4-BE49-F238E27FC236}">
+                  <a16:creationId xmlns:a16="http://schemas.microsoft.com/office/drawing/2014/main" id="{669D8279-5C49-A9EC-C982-6691525F8774}"/>
+                </a:ext>
+              </a:extLst>
+            </p:cNvPr>
+            <p:cNvCxnSpPr>
+              <a:cxnSpLocks/>
+            </p:cNvCxnSpPr>
+            <p:nvPr/>
+          </p:nvCxnSpPr>
+          <p:spPr>
+            <a:xfrm flipH="1">
+              <a:off x="7149518" y="4041575"/>
+              <a:ext cx="1242007" cy="0"/>
+            </a:xfrm>
+            <a:prstGeom prst="line">
+              <a:avLst/>
+            </a:prstGeom>
+            <a:ln w="127000" cap="rnd">
+              <a:solidFill>
+                <a:schemeClr val="tx1"/>
+              </a:solidFill>
+            </a:ln>
+          </p:spPr>
+          <p:style>
+            <a:lnRef idx="1">
+              <a:schemeClr val="accent1"/>
+            </a:lnRef>
+            <a:fillRef idx="0">
+              <a:schemeClr val="accent1"/>
+            </a:fillRef>
+            <a:effectRef idx="0">
+              <a:schemeClr val="accent1"/>
+            </a:effectRef>
+            <a:fontRef idx="minor">
+              <a:schemeClr val="tx1"/>
+            </a:fontRef>
+          </p:style>
+        </p:cxnSp>
+        <p:cxnSp>
+          <p:nvCxnSpPr>
+            <p:cNvPr id="31" name="Connecteur droit 30">
+              <a:extLst>
+                <a:ext uri="{FF2B5EF4-FFF2-40B4-BE49-F238E27FC236}">
+                  <a16:creationId xmlns:a16="http://schemas.microsoft.com/office/drawing/2014/main" id="{2CCEC863-6B5B-E31D-287D-B2AD2F87E672}"/>
+                </a:ext>
+              </a:extLst>
+            </p:cNvPr>
+            <p:cNvCxnSpPr>
+              <a:cxnSpLocks/>
+            </p:cNvCxnSpPr>
+            <p:nvPr/>
+          </p:nvCxnSpPr>
+          <p:spPr>
+            <a:xfrm flipH="1">
+              <a:off x="7149517" y="5772842"/>
+              <a:ext cx="1242008" cy="0"/>
+            </a:xfrm>
+            <a:prstGeom prst="line">
+              <a:avLst/>
+            </a:prstGeom>
+            <a:ln w="127000" cap="rnd">
+              <a:solidFill>
+                <a:schemeClr val="tx1"/>
+              </a:solidFill>
+            </a:ln>
+          </p:spPr>
+          <p:style>
+            <a:lnRef idx="1">
+              <a:schemeClr val="accent1"/>
+            </a:lnRef>
+            <a:fillRef idx="0">
+              <a:schemeClr val="accent1"/>
+            </a:fillRef>
+            <a:effectRef idx="0">
+              <a:schemeClr val="accent1"/>
+            </a:effectRef>
+            <a:fontRef idx="minor">
+              <a:schemeClr val="tx1"/>
+            </a:fontRef>
+          </p:style>
+        </p:cxnSp>
+      </p:grpSp>
+      <p:grpSp>
+        <p:nvGrpSpPr>
+          <p:cNvPr id="45" name="Groupe 44">
+            <a:extLst>
+              <a:ext uri="{FF2B5EF4-FFF2-40B4-BE49-F238E27FC236}">
+                <a16:creationId xmlns:a16="http://schemas.microsoft.com/office/drawing/2014/main" id="{157710FA-9069-88B6-659B-D92B4E215526}"/>
+              </a:ext>
+            </a:extLst>
+          </p:cNvPr>
+          <p:cNvGrpSpPr/>
+          <p:nvPr/>
+        </p:nvGrpSpPr>
+        <p:grpSpPr>
+          <a:xfrm>
+            <a:off x="8617633" y="625034"/>
+            <a:ext cx="3104786" cy="3162299"/>
+            <a:chOff x="8531458" y="378718"/>
+            <a:chExt cx="3104786" cy="3162299"/>
+          </a:xfrm>
+        </p:grpSpPr>
+        <p:grpSp>
+          <p:nvGrpSpPr>
+            <p:cNvPr id="46" name="Groupe 45">
+              <a:extLst>
+                <a:ext uri="{FF2B5EF4-FFF2-40B4-BE49-F238E27FC236}">
+                  <a16:creationId xmlns:a16="http://schemas.microsoft.com/office/drawing/2014/main" id="{0C65B518-6D94-57FB-76F9-7D2363FBC88F}"/>
+                </a:ext>
+              </a:extLst>
+            </p:cNvPr>
+            <p:cNvGrpSpPr/>
+            <p:nvPr/>
+          </p:nvGrpSpPr>
+          <p:grpSpPr>
+            <a:xfrm>
+              <a:off x="8531458" y="378718"/>
+              <a:ext cx="3104786" cy="3162299"/>
+              <a:chOff x="567328" y="408215"/>
+              <a:chExt cx="3889829" cy="3960000"/>
+            </a:xfrm>
+          </p:grpSpPr>
+          <p:sp>
+            <p:nvSpPr>
+              <p:cNvPr id="49" name="Rectangle : coins arrondis 48">
+                <a:extLst>
+                  <a:ext uri="{FF2B5EF4-FFF2-40B4-BE49-F238E27FC236}">
+                    <a16:creationId xmlns:a16="http://schemas.microsoft.com/office/drawing/2014/main" id="{9950D84D-0E9A-C5E1-83AD-1827F99B9B25}"/>
+                  </a:ext>
+                </a:extLst>
+              </p:cNvPr>
+              <p:cNvSpPr/>
+              <p:nvPr/>
+            </p:nvSpPr>
+            <p:spPr>
+              <a:xfrm>
+                <a:off x="1072243" y="408215"/>
+                <a:ext cx="2880000" cy="3960000"/>
+              </a:xfrm>
+              <a:prstGeom prst="roundRect">
+                <a:avLst>
+                  <a:gd name="adj" fmla="val 2997"/>
+                </a:avLst>
+              </a:prstGeom>
+              <a:solidFill>
+                <a:schemeClr val="bg1"/>
+              </a:solidFill>
+              <a:ln w="177800">
+                <a:solidFill>
+                  <a:srgbClr val="2F528F"/>
+                </a:solidFill>
+              </a:ln>
+            </p:spPr>
+            <p:style>
+              <a:lnRef idx="2">
+                <a:schemeClr val="accent1">
+                  <a:shade val="15000"/>
+                </a:schemeClr>
+              </a:lnRef>
+              <a:fillRef idx="1">
+                <a:schemeClr val="accent1"/>
+              </a:fillRef>
+              <a:effectRef idx="0">
+                <a:schemeClr val="accent1"/>
+              </a:effectRef>
+              <a:fontRef idx="minor">
+                <a:schemeClr val="lt1"/>
+              </a:fontRef>
+            </p:style>
+            <p:txBody>
+              <a:bodyPr rtlCol="0" anchor="ctr"/>
+              <a:lstStyle/>
+              <a:p>
+                <a:pPr algn="ctr"/>
+                <a:endParaRPr lang="fr-CA"/>
+              </a:p>
+            </p:txBody>
+          </p:sp>
+          <p:sp>
+            <p:nvSpPr>
+              <p:cNvPr id="50" name="Rectangle 49">
+                <a:extLst>
+                  <a:ext uri="{FF2B5EF4-FFF2-40B4-BE49-F238E27FC236}">
+                    <a16:creationId xmlns:a16="http://schemas.microsoft.com/office/drawing/2014/main" id="{58F58EB1-4B81-019A-4D4C-F42DAC87782B}"/>
+                  </a:ext>
+                </a:extLst>
+              </p:cNvPr>
+              <p:cNvSpPr/>
+              <p:nvPr/>
+            </p:nvSpPr>
+            <p:spPr>
+              <a:xfrm>
+                <a:off x="567328" y="2562226"/>
+                <a:ext cx="3889829" cy="1240064"/>
+              </a:xfrm>
+              <a:prstGeom prst="rect">
+                <a:avLst/>
+              </a:prstGeom>
+              <a:solidFill>
+                <a:srgbClr val="8FAADC"/>
+              </a:solidFill>
+              <a:ln w="190500">
+                <a:solidFill>
+                  <a:srgbClr val="2F528F"/>
+                </a:solidFill>
+              </a:ln>
+              <a:effectLst>
+                <a:glow>
+                  <a:schemeClr val="accent1">
+                    <a:alpha val="40000"/>
+                  </a:schemeClr>
+                </a:glow>
+                <a:softEdge rad="0"/>
+              </a:effectLst>
+            </p:spPr>
+            <p:style>
+              <a:lnRef idx="2">
+                <a:schemeClr val="accent6">
+                  <a:shade val="15000"/>
+                </a:schemeClr>
+              </a:lnRef>
+              <a:fillRef idx="1">
+                <a:schemeClr val="accent6"/>
+              </a:fillRef>
+              <a:effectRef idx="0">
+                <a:schemeClr val="accent6"/>
+              </a:effectRef>
+              <a:fontRef idx="minor">
+                <a:schemeClr val="lt1"/>
+              </a:fontRef>
+            </p:style>
+            <p:txBody>
+              <a:bodyPr rtlCol="0" anchor="ctr"/>
+              <a:lstStyle/>
+              <a:p>
+                <a:pPr algn="ctr"/>
+                <a:r>
+                  <a:rPr lang="fr-CA" sz="7000" b="1" dirty="0" err="1">
+                    <a:solidFill>
+                      <a:schemeClr val="bg1"/>
+                    </a:solidFill>
+                    <a:latin typeface="DejaVu Sans" panose="020B0603030804020204" pitchFamily="34" charset="0"/>
+                    <a:ea typeface="DejaVu Sans" panose="020B0603030804020204" pitchFamily="34" charset="0"/>
+                    <a:cs typeface="DejaVu Sans" panose="020B0603030804020204" pitchFamily="34" charset="0"/>
+                  </a:rPr>
+                  <a:t>scval</a:t>
+                </a:r>
+                <a:endParaRPr lang="fr-CA" sz="7000" b="1" dirty="0">
+                  <a:solidFill>
+                    <a:schemeClr val="bg1"/>
+                  </a:solidFill>
+                  <a:latin typeface="DejaVu Sans" panose="020B0603030804020204" pitchFamily="34" charset="0"/>
+                  <a:ea typeface="DejaVu Sans" panose="020B0603030804020204" pitchFamily="34" charset="0"/>
+                  <a:cs typeface="DejaVu Sans" panose="020B0603030804020204" pitchFamily="34" charset="0"/>
+                </a:endParaRPr>
+              </a:p>
+            </p:txBody>
+          </p:sp>
+          <p:cxnSp>
+            <p:nvCxnSpPr>
+              <p:cNvPr id="51" name="Connecteur droit 50">
+                <a:extLst>
+                  <a:ext uri="{FF2B5EF4-FFF2-40B4-BE49-F238E27FC236}">
+                    <a16:creationId xmlns:a16="http://schemas.microsoft.com/office/drawing/2014/main" id="{7728EE1A-ACCA-81A0-9C55-10EF013ADE80}"/>
+                  </a:ext>
+                </a:extLst>
+              </p:cNvPr>
+              <p:cNvCxnSpPr/>
+              <p:nvPr/>
+            </p:nvCxnSpPr>
+            <p:spPr>
+              <a:xfrm>
+                <a:off x="1613762" y="939288"/>
+                <a:ext cx="1582057" cy="0"/>
+              </a:xfrm>
+              <a:prstGeom prst="line">
+                <a:avLst/>
+              </a:prstGeom>
+              <a:ln w="139700" cap="rnd">
+                <a:solidFill>
+                  <a:srgbClr val="2F528F"/>
+                </a:solidFill>
+              </a:ln>
+            </p:spPr>
+            <p:style>
+              <a:lnRef idx="1">
+                <a:schemeClr val="accent1"/>
+              </a:lnRef>
+              <a:fillRef idx="0">
+                <a:schemeClr val="accent1"/>
+              </a:fillRef>
+              <a:effectRef idx="0">
+                <a:schemeClr val="accent1"/>
+              </a:effectRef>
+              <a:fontRef idx="minor">
+                <a:schemeClr val="tx1"/>
+              </a:fontRef>
+            </p:style>
+          </p:cxnSp>
+        </p:grpSp>
+        <p:cxnSp>
+          <p:nvCxnSpPr>
+            <p:cNvPr id="47" name="Connecteur droit 46">
+              <a:extLst>
+                <a:ext uri="{FF2B5EF4-FFF2-40B4-BE49-F238E27FC236}">
+                  <a16:creationId xmlns:a16="http://schemas.microsoft.com/office/drawing/2014/main" id="{B5209644-F71B-B89D-A38C-6527A3444238}"/>
+                </a:ext>
+              </a:extLst>
+            </p:cNvPr>
+            <p:cNvCxnSpPr/>
+            <p:nvPr/>
+          </p:nvCxnSpPr>
+          <p:spPr>
+            <a:xfrm>
+              <a:off x="9366701" y="1269845"/>
+              <a:ext cx="1262767" cy="0"/>
+            </a:xfrm>
+            <a:prstGeom prst="line">
+              <a:avLst/>
+            </a:prstGeom>
+            <a:ln w="139700" cap="rnd">
+              <a:solidFill>
+                <a:srgbClr val="2F528F"/>
+              </a:solidFill>
+            </a:ln>
+          </p:spPr>
+          <p:style>
+            <a:lnRef idx="1">
+              <a:schemeClr val="accent1"/>
+            </a:lnRef>
+            <a:fillRef idx="0">
+              <a:schemeClr val="accent1"/>
+            </a:fillRef>
+            <a:effectRef idx="0">
+              <a:schemeClr val="accent1"/>
+            </a:effectRef>
+            <a:fontRef idx="minor">
+              <a:schemeClr val="tx1"/>
+            </a:fontRef>
+          </p:style>
+        </p:cxnSp>
+        <p:cxnSp>
+          <p:nvCxnSpPr>
+            <p:cNvPr id="48" name="Connecteur droit 47">
+              <a:extLst>
+                <a:ext uri="{FF2B5EF4-FFF2-40B4-BE49-F238E27FC236}">
+                  <a16:creationId xmlns:a16="http://schemas.microsoft.com/office/drawing/2014/main" id="{C2DE41F9-FF19-0D18-591E-60A6718C7E06}"/>
+                </a:ext>
+              </a:extLst>
+            </p:cNvPr>
+            <p:cNvCxnSpPr/>
+            <p:nvPr/>
+          </p:nvCxnSpPr>
+          <p:spPr>
+            <a:xfrm>
+              <a:off x="9366701" y="1731960"/>
+              <a:ext cx="1262767" cy="0"/>
+            </a:xfrm>
+            <a:prstGeom prst="line">
+              <a:avLst/>
+            </a:prstGeom>
+            <a:ln w="139700" cap="rnd">
+              <a:solidFill>
+                <a:srgbClr val="2F528F"/>
+              </a:solidFill>
+            </a:ln>
+          </p:spPr>
+          <p:style>
+            <a:lnRef idx="1">
+              <a:schemeClr val="accent1"/>
+            </a:lnRef>
+            <a:fillRef idx="0">
+              <a:schemeClr val="accent1"/>
+            </a:fillRef>
+            <a:effectRef idx="0">
+              <a:schemeClr val="accent1"/>
+            </a:effectRef>
+            <a:fontRef idx="minor">
+              <a:schemeClr val="tx1"/>
+            </a:fontRef>
+          </p:style>
+        </p:cxnSp>
+      </p:grpSp>
     </p:spTree>
     <p:extLst>
       <p:ext uri="{BB962C8B-B14F-4D97-AF65-F5344CB8AC3E}">
         <p14:creationId xmlns:p14="http://schemas.microsoft.com/office/powerpoint/2010/main" val="3550470372"/>
+      </p:ext>
+    </p:extLst>
+  </p:cSld>
+  <p:clrMapOvr>
+    <a:masterClrMapping/>
+  </p:clrMapOvr>
+</p:sld>
+</file>
+
+<file path=ppt/slides/slide9.xml><?xml version="1.0" encoding="utf-8"?>
+<p:sld xmlns:a="http://schemas.openxmlformats.org/drawingml/2006/main" xmlns:r="http://schemas.openxmlformats.org/officeDocument/2006/relationships" xmlns:p="http://schemas.openxmlformats.org/presentationml/2006/main">
+  <p:cSld>
+    <p:spTree>
+      <p:nvGrpSpPr>
+        <p:cNvPr id="1" name=""/>
+        <p:cNvGrpSpPr/>
+        <p:nvPr/>
+      </p:nvGrpSpPr>
+      <p:grpSpPr>
+        <a:xfrm>
+          <a:off x="0" y="0"/>
+          <a:ext cx="0" cy="0"/>
+          <a:chOff x="0" y="0"/>
+          <a:chExt cx="0" cy="0"/>
+        </a:xfrm>
+      </p:grpSpPr>
+      <p:grpSp>
+        <p:nvGrpSpPr>
+          <p:cNvPr id="8" name="Groupe 7">
+            <a:extLst>
+              <a:ext uri="{FF2B5EF4-FFF2-40B4-BE49-F238E27FC236}">
+                <a16:creationId xmlns:a16="http://schemas.microsoft.com/office/drawing/2014/main" id="{7252CEEE-CBC4-AF76-1AB4-9F87A4D5E203}"/>
+              </a:ext>
+            </a:extLst>
+          </p:cNvPr>
+          <p:cNvGrpSpPr/>
+          <p:nvPr/>
+        </p:nvGrpSpPr>
+        <p:grpSpPr>
+          <a:xfrm>
+            <a:off x="586550" y="570132"/>
+            <a:ext cx="1699855" cy="1611093"/>
+            <a:chOff x="5322094" y="2762250"/>
+            <a:chExt cx="1163261" cy="1102519"/>
+          </a:xfrm>
+          <a:solidFill>
+            <a:schemeClr val="accent4">
+              <a:lumMod val="60000"/>
+              <a:lumOff val="40000"/>
+            </a:schemeClr>
+          </a:solidFill>
+        </p:grpSpPr>
+        <p:sp>
+          <p:nvSpPr>
+            <p:cNvPr id="7" name="Forme libre : forme 6">
+              <a:extLst>
+                <a:ext uri="{FF2B5EF4-FFF2-40B4-BE49-F238E27FC236}">
+                  <a16:creationId xmlns:a16="http://schemas.microsoft.com/office/drawing/2014/main" id="{57DF3538-558F-6BC6-E117-4E7B05DF4CA9}"/>
+                </a:ext>
+              </a:extLst>
+            </p:cNvPr>
+            <p:cNvSpPr/>
+            <p:nvPr/>
+          </p:nvSpPr>
+          <p:spPr>
+            <a:xfrm>
+              <a:off x="5322094" y="2762250"/>
+              <a:ext cx="1030664" cy="1102519"/>
+            </a:xfrm>
+            <a:custGeom>
+              <a:avLst/>
+              <a:gdLst>
+                <a:gd name="csX0" fmla="*/ 26194 w 1026319"/>
+                <a:gd name="csY0" fmla="*/ 1102519 h 1102519"/>
+                <a:gd name="csX1" fmla="*/ 0 w 1026319"/>
+                <a:gd name="csY1" fmla="*/ 135731 h 1102519"/>
+                <a:gd name="csX2" fmla="*/ 116681 w 1026319"/>
+                <a:gd name="csY2" fmla="*/ 14288 h 1102519"/>
+                <a:gd name="csX3" fmla="*/ 397669 w 1026319"/>
+                <a:gd name="csY3" fmla="*/ 0 h 1102519"/>
+                <a:gd name="csX4" fmla="*/ 538162 w 1026319"/>
+                <a:gd name="csY4" fmla="*/ 130969 h 1102519"/>
+                <a:gd name="csX5" fmla="*/ 1023937 w 1026319"/>
+                <a:gd name="csY5" fmla="*/ 71438 h 1102519"/>
+                <a:gd name="csX6" fmla="*/ 1026319 w 1026319"/>
+                <a:gd name="csY6" fmla="*/ 180975 h 1102519"/>
+                <a:gd name="csX7" fmla="*/ 595312 w 1026319"/>
+                <a:gd name="csY7" fmla="*/ 219075 h 1102519"/>
+                <a:gd name="csX8" fmla="*/ 459581 w 1026319"/>
+                <a:gd name="csY8" fmla="*/ 323850 h 1102519"/>
+                <a:gd name="csX9" fmla="*/ 128587 w 1026319"/>
+                <a:gd name="csY9" fmla="*/ 354806 h 1102519"/>
+                <a:gd name="csX10" fmla="*/ 26194 w 1026319"/>
+                <a:gd name="csY10" fmla="*/ 1102519 h 1102519"/>
+                <a:gd name="csX0" fmla="*/ 26194 w 1026319"/>
+                <a:gd name="csY0" fmla="*/ 1102519 h 1102519"/>
+                <a:gd name="csX1" fmla="*/ 0 w 1026319"/>
+                <a:gd name="csY1" fmla="*/ 135731 h 1102519"/>
+                <a:gd name="csX2" fmla="*/ 116681 w 1026319"/>
+                <a:gd name="csY2" fmla="*/ 14288 h 1102519"/>
+                <a:gd name="csX3" fmla="*/ 397669 w 1026319"/>
+                <a:gd name="csY3" fmla="*/ 0 h 1102519"/>
+                <a:gd name="csX4" fmla="*/ 546853 w 1026319"/>
+                <a:gd name="csY4" fmla="*/ 109242 h 1102519"/>
+                <a:gd name="csX5" fmla="*/ 1023937 w 1026319"/>
+                <a:gd name="csY5" fmla="*/ 71438 h 1102519"/>
+                <a:gd name="csX6" fmla="*/ 1026319 w 1026319"/>
+                <a:gd name="csY6" fmla="*/ 180975 h 1102519"/>
+                <a:gd name="csX7" fmla="*/ 595312 w 1026319"/>
+                <a:gd name="csY7" fmla="*/ 219075 h 1102519"/>
+                <a:gd name="csX8" fmla="*/ 459581 w 1026319"/>
+                <a:gd name="csY8" fmla="*/ 323850 h 1102519"/>
+                <a:gd name="csX9" fmla="*/ 128587 w 1026319"/>
+                <a:gd name="csY9" fmla="*/ 354806 h 1102519"/>
+                <a:gd name="csX10" fmla="*/ 26194 w 1026319"/>
+                <a:gd name="csY10" fmla="*/ 1102519 h 1102519"/>
+                <a:gd name="csX0" fmla="*/ 26194 w 1030664"/>
+                <a:gd name="csY0" fmla="*/ 1102519 h 1102519"/>
+                <a:gd name="csX1" fmla="*/ 0 w 1030664"/>
+                <a:gd name="csY1" fmla="*/ 135731 h 1102519"/>
+                <a:gd name="csX2" fmla="*/ 116681 w 1030664"/>
+                <a:gd name="csY2" fmla="*/ 14288 h 1102519"/>
+                <a:gd name="csX3" fmla="*/ 397669 w 1030664"/>
+                <a:gd name="csY3" fmla="*/ 0 h 1102519"/>
+                <a:gd name="csX4" fmla="*/ 546853 w 1030664"/>
+                <a:gd name="csY4" fmla="*/ 109242 h 1102519"/>
+                <a:gd name="csX5" fmla="*/ 1023937 w 1030664"/>
+                <a:gd name="csY5" fmla="*/ 71438 h 1102519"/>
+                <a:gd name="csX6" fmla="*/ 1030664 w 1030664"/>
+                <a:gd name="csY6" fmla="*/ 217912 h 1102519"/>
+                <a:gd name="csX7" fmla="*/ 595312 w 1030664"/>
+                <a:gd name="csY7" fmla="*/ 219075 h 1102519"/>
+                <a:gd name="csX8" fmla="*/ 459581 w 1030664"/>
+                <a:gd name="csY8" fmla="*/ 323850 h 1102519"/>
+                <a:gd name="csX9" fmla="*/ 128587 w 1030664"/>
+                <a:gd name="csY9" fmla="*/ 354806 h 1102519"/>
+                <a:gd name="csX10" fmla="*/ 26194 w 1030664"/>
+                <a:gd name="csY10" fmla="*/ 1102519 h 1102519"/>
+                <a:gd name="csX0" fmla="*/ 26194 w 1030664"/>
+                <a:gd name="csY0" fmla="*/ 1102519 h 1102519"/>
+                <a:gd name="csX1" fmla="*/ 0 w 1030664"/>
+                <a:gd name="csY1" fmla="*/ 135731 h 1102519"/>
+                <a:gd name="csX2" fmla="*/ 116681 w 1030664"/>
+                <a:gd name="csY2" fmla="*/ 14288 h 1102519"/>
+                <a:gd name="csX3" fmla="*/ 397669 w 1030664"/>
+                <a:gd name="csY3" fmla="*/ 0 h 1102519"/>
+                <a:gd name="csX4" fmla="*/ 546853 w 1030664"/>
+                <a:gd name="csY4" fmla="*/ 109242 h 1102519"/>
+                <a:gd name="csX5" fmla="*/ 1023937 w 1030664"/>
+                <a:gd name="csY5" fmla="*/ 71438 h 1102519"/>
+                <a:gd name="csX6" fmla="*/ 1030664 w 1030664"/>
+                <a:gd name="csY6" fmla="*/ 217912 h 1102519"/>
+                <a:gd name="csX7" fmla="*/ 599657 w 1030664"/>
+                <a:gd name="csY7" fmla="*/ 240803 h 1102519"/>
+                <a:gd name="csX8" fmla="*/ 459581 w 1030664"/>
+                <a:gd name="csY8" fmla="*/ 323850 h 1102519"/>
+                <a:gd name="csX9" fmla="*/ 128587 w 1030664"/>
+                <a:gd name="csY9" fmla="*/ 354806 h 1102519"/>
+                <a:gd name="csX10" fmla="*/ 26194 w 1030664"/>
+                <a:gd name="csY10" fmla="*/ 1102519 h 1102519"/>
+                <a:gd name="csX0" fmla="*/ 26194 w 1030664"/>
+                <a:gd name="csY0" fmla="*/ 1102519 h 1102519"/>
+                <a:gd name="csX1" fmla="*/ 0 w 1030664"/>
+                <a:gd name="csY1" fmla="*/ 135731 h 1102519"/>
+                <a:gd name="csX2" fmla="*/ 116681 w 1030664"/>
+                <a:gd name="csY2" fmla="*/ 14288 h 1102519"/>
+                <a:gd name="csX3" fmla="*/ 397669 w 1030664"/>
+                <a:gd name="csY3" fmla="*/ 0 h 1102519"/>
+                <a:gd name="csX4" fmla="*/ 546853 w 1030664"/>
+                <a:gd name="csY4" fmla="*/ 109242 h 1102519"/>
+                <a:gd name="csX5" fmla="*/ 1023937 w 1030664"/>
+                <a:gd name="csY5" fmla="*/ 71438 h 1102519"/>
+                <a:gd name="csX6" fmla="*/ 1030664 w 1030664"/>
+                <a:gd name="csY6" fmla="*/ 217912 h 1102519"/>
+                <a:gd name="csX7" fmla="*/ 599657 w 1030664"/>
+                <a:gd name="csY7" fmla="*/ 240803 h 1102519"/>
+                <a:gd name="csX8" fmla="*/ 455235 w 1030664"/>
+                <a:gd name="csY8" fmla="*/ 360787 h 1102519"/>
+                <a:gd name="csX9" fmla="*/ 128587 w 1030664"/>
+                <a:gd name="csY9" fmla="*/ 354806 h 1102519"/>
+                <a:gd name="csX10" fmla="*/ 26194 w 1030664"/>
+                <a:gd name="csY10" fmla="*/ 1102519 h 1102519"/>
+                <a:gd name="csX0" fmla="*/ 26194 w 1030664"/>
+                <a:gd name="csY0" fmla="*/ 1102519 h 1102519"/>
+                <a:gd name="csX1" fmla="*/ 0 w 1030664"/>
+                <a:gd name="csY1" fmla="*/ 135731 h 1102519"/>
+                <a:gd name="csX2" fmla="*/ 116681 w 1030664"/>
+                <a:gd name="csY2" fmla="*/ 14288 h 1102519"/>
+                <a:gd name="csX3" fmla="*/ 397669 w 1030664"/>
+                <a:gd name="csY3" fmla="*/ 0 h 1102519"/>
+                <a:gd name="csX4" fmla="*/ 546853 w 1030664"/>
+                <a:gd name="csY4" fmla="*/ 109242 h 1102519"/>
+                <a:gd name="csX5" fmla="*/ 1023937 w 1030664"/>
+                <a:gd name="csY5" fmla="*/ 71438 h 1102519"/>
+                <a:gd name="csX6" fmla="*/ 1030664 w 1030664"/>
+                <a:gd name="csY6" fmla="*/ 217912 h 1102519"/>
+                <a:gd name="csX7" fmla="*/ 599657 w 1030664"/>
+                <a:gd name="csY7" fmla="*/ 240803 h 1102519"/>
+                <a:gd name="csX8" fmla="*/ 455235 w 1030664"/>
+                <a:gd name="csY8" fmla="*/ 360787 h 1102519"/>
+                <a:gd name="csX9" fmla="*/ 128587 w 1030664"/>
+                <a:gd name="csY9" fmla="*/ 380879 h 1102519"/>
+                <a:gd name="csX10" fmla="*/ 26194 w 1030664"/>
+                <a:gd name="csY10" fmla="*/ 1102519 h 1102519"/>
+              </a:gdLst>
+              <a:ahLst/>
+              <a:cxnLst>
+                <a:cxn ang="0">
+                  <a:pos x="csX0" y="csY0"/>
+                </a:cxn>
+                <a:cxn ang="0">
+                  <a:pos x="csX1" y="csY1"/>
+                </a:cxn>
+                <a:cxn ang="0">
+                  <a:pos x="csX2" y="csY2"/>
+                </a:cxn>
+                <a:cxn ang="0">
+                  <a:pos x="csX3" y="csY3"/>
+                </a:cxn>
+                <a:cxn ang="0">
+                  <a:pos x="csX4" y="csY4"/>
+                </a:cxn>
+                <a:cxn ang="0">
+                  <a:pos x="csX5" y="csY5"/>
+                </a:cxn>
+                <a:cxn ang="0">
+                  <a:pos x="csX6" y="csY6"/>
+                </a:cxn>
+                <a:cxn ang="0">
+                  <a:pos x="csX7" y="csY7"/>
+                </a:cxn>
+                <a:cxn ang="0">
+                  <a:pos x="csX8" y="csY8"/>
+                </a:cxn>
+                <a:cxn ang="0">
+                  <a:pos x="csX9" y="csY9"/>
+                </a:cxn>
+                <a:cxn ang="0">
+                  <a:pos x="csX10" y="csY10"/>
+                </a:cxn>
+              </a:cxnLst>
+              <a:rect l="l" t="t" r="r" b="b"/>
+              <a:pathLst>
+                <a:path w="1030664" h="1102519">
+                  <a:moveTo>
+                    <a:pt x="26194" y="1102519"/>
+                  </a:moveTo>
+                  <a:lnTo>
+                    <a:pt x="0" y="135731"/>
+                  </a:lnTo>
+                  <a:lnTo>
+                    <a:pt x="116681" y="14288"/>
+                  </a:lnTo>
+                  <a:lnTo>
+                    <a:pt x="397669" y="0"/>
+                  </a:lnTo>
+                  <a:lnTo>
+                    <a:pt x="546853" y="109242"/>
+                  </a:lnTo>
+                  <a:lnTo>
+                    <a:pt x="1023937" y="71438"/>
+                  </a:lnTo>
+                  <a:lnTo>
+                    <a:pt x="1030664" y="217912"/>
+                  </a:lnTo>
+                  <a:lnTo>
+                    <a:pt x="599657" y="240803"/>
+                  </a:lnTo>
+                  <a:lnTo>
+                    <a:pt x="455235" y="360787"/>
+                  </a:lnTo>
+                  <a:lnTo>
+                    <a:pt x="128587" y="380879"/>
+                  </a:lnTo>
+                  <a:lnTo>
+                    <a:pt x="26194" y="1102519"/>
+                  </a:lnTo>
+                  <a:close/>
+                </a:path>
+              </a:pathLst>
+            </a:custGeom>
+            <a:solidFill>
+              <a:srgbClr val="FFCF37"/>
+            </a:solidFill>
+            <a:ln w="63500">
+              <a:solidFill>
+                <a:schemeClr val="accent4">
+                  <a:lumMod val="75000"/>
+                </a:schemeClr>
+              </a:solidFill>
+            </a:ln>
+          </p:spPr>
+          <p:style>
+            <a:lnRef idx="2">
+              <a:schemeClr val="accent4">
+                <a:shade val="15000"/>
+              </a:schemeClr>
+            </a:lnRef>
+            <a:fillRef idx="1">
+              <a:schemeClr val="accent4"/>
+            </a:fillRef>
+            <a:effectRef idx="0">
+              <a:schemeClr val="accent4"/>
+            </a:effectRef>
+            <a:fontRef idx="minor">
+              <a:schemeClr val="lt1"/>
+            </a:fontRef>
+          </p:style>
+          <p:txBody>
+            <a:bodyPr rtlCol="0" anchor="ctr"/>
+            <a:lstStyle/>
+            <a:p>
+              <a:pPr algn="ctr"/>
+              <a:endParaRPr lang="en-CA" dirty="0"/>
+            </a:p>
+          </p:txBody>
+        </p:sp>
+        <p:sp>
+          <p:nvSpPr>
+            <p:cNvPr id="6" name="Forme libre : forme 5">
+              <a:extLst>
+                <a:ext uri="{FF2B5EF4-FFF2-40B4-BE49-F238E27FC236}">
+                  <a16:creationId xmlns:a16="http://schemas.microsoft.com/office/drawing/2014/main" id="{FAE5C2F3-1A6D-945D-471A-7CF7CD009B7A}"/>
+                </a:ext>
+              </a:extLst>
+            </p:cNvPr>
+            <p:cNvSpPr/>
+            <p:nvPr/>
+          </p:nvSpPr>
+          <p:spPr>
+            <a:xfrm>
+              <a:off x="5353050" y="2972809"/>
+              <a:ext cx="1132305" cy="887991"/>
+            </a:xfrm>
+            <a:custGeom>
+              <a:avLst/>
+              <a:gdLst>
+                <a:gd name="csX0" fmla="*/ 0 w 1136650"/>
+                <a:gd name="csY0" fmla="*/ 927100 h 927100"/>
+                <a:gd name="csX1" fmla="*/ 95250 w 1136650"/>
+                <a:gd name="csY1" fmla="*/ 184150 h 927100"/>
+                <a:gd name="csX2" fmla="*/ 431800 w 1136650"/>
+                <a:gd name="csY2" fmla="*/ 152400 h 927100"/>
+                <a:gd name="csX3" fmla="*/ 565150 w 1136650"/>
+                <a:gd name="csY3" fmla="*/ 44450 h 927100"/>
+                <a:gd name="csX4" fmla="*/ 1136650 w 1136650"/>
+                <a:gd name="csY4" fmla="*/ 0 h 927100"/>
+                <a:gd name="csX5" fmla="*/ 996950 w 1136650"/>
+                <a:gd name="csY5" fmla="*/ 781050 h 927100"/>
+                <a:gd name="csX6" fmla="*/ 0 w 1136650"/>
+                <a:gd name="csY6" fmla="*/ 927100 h 927100"/>
+                <a:gd name="csX0" fmla="*/ 0 w 1132305"/>
+                <a:gd name="csY0" fmla="*/ 887991 h 887991"/>
+                <a:gd name="csX1" fmla="*/ 95250 w 1132305"/>
+                <a:gd name="csY1" fmla="*/ 145041 h 887991"/>
+                <a:gd name="csX2" fmla="*/ 431800 w 1132305"/>
+                <a:gd name="csY2" fmla="*/ 113291 h 887991"/>
+                <a:gd name="csX3" fmla="*/ 565150 w 1132305"/>
+                <a:gd name="csY3" fmla="*/ 5341 h 887991"/>
+                <a:gd name="csX4" fmla="*/ 1132305 w 1132305"/>
+                <a:gd name="csY4" fmla="*/ 0 h 887991"/>
+                <a:gd name="csX5" fmla="*/ 996950 w 1132305"/>
+                <a:gd name="csY5" fmla="*/ 741941 h 887991"/>
+                <a:gd name="csX6" fmla="*/ 0 w 1132305"/>
+                <a:gd name="csY6" fmla="*/ 887991 h 887991"/>
+                <a:gd name="csX0" fmla="*/ 0 w 1132305"/>
+                <a:gd name="csY0" fmla="*/ 887991 h 887991"/>
+                <a:gd name="csX1" fmla="*/ 95250 w 1132305"/>
+                <a:gd name="csY1" fmla="*/ 145041 h 887991"/>
+                <a:gd name="csX2" fmla="*/ 431800 w 1132305"/>
+                <a:gd name="csY2" fmla="*/ 113291 h 887991"/>
+                <a:gd name="csX3" fmla="*/ 562978 w 1132305"/>
+                <a:gd name="csY3" fmla="*/ 35760 h 887991"/>
+                <a:gd name="csX4" fmla="*/ 1132305 w 1132305"/>
+                <a:gd name="csY4" fmla="*/ 0 h 887991"/>
+                <a:gd name="csX5" fmla="*/ 996950 w 1132305"/>
+                <a:gd name="csY5" fmla="*/ 741941 h 887991"/>
+                <a:gd name="csX6" fmla="*/ 0 w 1132305"/>
+                <a:gd name="csY6" fmla="*/ 887991 h 887991"/>
+                <a:gd name="csX0" fmla="*/ 0 w 1132305"/>
+                <a:gd name="csY0" fmla="*/ 887991 h 887991"/>
+                <a:gd name="csX1" fmla="*/ 95250 w 1132305"/>
+                <a:gd name="csY1" fmla="*/ 145041 h 887991"/>
+                <a:gd name="csX2" fmla="*/ 433429 w 1132305"/>
+                <a:gd name="csY2" fmla="*/ 124697 h 887991"/>
+                <a:gd name="csX3" fmla="*/ 562978 w 1132305"/>
+                <a:gd name="csY3" fmla="*/ 35760 h 887991"/>
+                <a:gd name="csX4" fmla="*/ 1132305 w 1132305"/>
+                <a:gd name="csY4" fmla="*/ 0 h 887991"/>
+                <a:gd name="csX5" fmla="*/ 996950 w 1132305"/>
+                <a:gd name="csY5" fmla="*/ 741941 h 887991"/>
+                <a:gd name="csX6" fmla="*/ 0 w 1132305"/>
+                <a:gd name="csY6" fmla="*/ 887991 h 887991"/>
+              </a:gdLst>
+              <a:ahLst/>
+              <a:cxnLst>
+                <a:cxn ang="0">
+                  <a:pos x="csX0" y="csY0"/>
+                </a:cxn>
+                <a:cxn ang="0">
+                  <a:pos x="csX1" y="csY1"/>
+                </a:cxn>
+                <a:cxn ang="0">
+                  <a:pos x="csX2" y="csY2"/>
+                </a:cxn>
+                <a:cxn ang="0">
+                  <a:pos x="csX3" y="csY3"/>
+                </a:cxn>
+                <a:cxn ang="0">
+                  <a:pos x="csX4" y="csY4"/>
+                </a:cxn>
+                <a:cxn ang="0">
+                  <a:pos x="csX5" y="csY5"/>
+                </a:cxn>
+                <a:cxn ang="0">
+                  <a:pos x="csX6" y="csY6"/>
+                </a:cxn>
+              </a:cxnLst>
+              <a:rect l="l" t="t" r="r" b="b"/>
+              <a:pathLst>
+                <a:path w="1132305" h="887991">
+                  <a:moveTo>
+                    <a:pt x="0" y="887991"/>
+                  </a:moveTo>
+                  <a:lnTo>
+                    <a:pt x="95250" y="145041"/>
+                  </a:lnTo>
+                  <a:lnTo>
+                    <a:pt x="433429" y="124697"/>
+                  </a:lnTo>
+                  <a:lnTo>
+                    <a:pt x="562978" y="35760"/>
+                  </a:lnTo>
+                  <a:lnTo>
+                    <a:pt x="1132305" y="0"/>
+                  </a:lnTo>
+                  <a:lnTo>
+                    <a:pt x="996950" y="741941"/>
+                  </a:lnTo>
+                  <a:lnTo>
+                    <a:pt x="0" y="887991"/>
+                  </a:lnTo>
+                  <a:close/>
+                </a:path>
+              </a:pathLst>
+            </a:custGeom>
+            <a:solidFill>
+              <a:schemeClr val="accent4">
+                <a:lumMod val="40000"/>
+                <a:lumOff val="60000"/>
+              </a:schemeClr>
+            </a:solidFill>
+            <a:ln w="69850">
+              <a:solidFill>
+                <a:schemeClr val="accent4">
+                  <a:lumMod val="75000"/>
+                </a:schemeClr>
+              </a:solidFill>
+              <a:extLst>
+                <a:ext uri="{C807C97D-BFC1-408E-A445-0C87EB9F89A2}">
+                  <ask:lineSketchStyleProps xmlns:ask="http://schemas.microsoft.com/office/drawing/2018/sketchyshapes" sd="1219033472">
+                    <a:custGeom>
+                      <a:avLst/>
+                      <a:gdLst>
+                        <a:gd name="csX0" fmla="*/ 0 w 1654619"/>
+                        <a:gd name="csY0" fmla="*/ 1297607 h 1297607"/>
+                        <a:gd name="csX1" fmla="*/ 72377 w 1654619"/>
+                        <a:gd name="csY1" fmla="*/ 733063 h 1297607"/>
+                        <a:gd name="csX2" fmla="*/ 139187 w 1654619"/>
+                        <a:gd name="csY2" fmla="*/ 211946 h 1297607"/>
+                        <a:gd name="csX3" fmla="*/ 630982 w 1654619"/>
+                        <a:gd name="csY3" fmla="*/ 165550 h 1297607"/>
+                        <a:gd name="csX4" fmla="*/ 822670 w 1654619"/>
+                        <a:gd name="csY4" fmla="*/ 52255 h 1297607"/>
+                        <a:gd name="csX5" fmla="*/ 1222006 w 1654619"/>
+                        <a:gd name="csY5" fmla="*/ 27173 h 1297607"/>
+                        <a:gd name="csX6" fmla="*/ 1654619 w 1654619"/>
+                        <a:gd name="csY6" fmla="*/ 0 h 1297607"/>
+                        <a:gd name="csX7" fmla="*/ 1551767 w 1654619"/>
+                        <a:gd name="csY7" fmla="*/ 563777 h 1297607"/>
+                        <a:gd name="csX8" fmla="*/ 1456826 w 1654619"/>
+                        <a:gd name="csY8" fmla="*/ 1084186 h 1297607"/>
+                        <a:gd name="csX9" fmla="*/ 971217 w 1654619"/>
+                        <a:gd name="csY9" fmla="*/ 1155326 h 1297607"/>
+                        <a:gd name="csX10" fmla="*/ 485609 w 1654619"/>
+                        <a:gd name="csY10" fmla="*/ 1226467 h 1297607"/>
+                        <a:gd name="csX11" fmla="*/ 0 w 1654619"/>
+                        <a:gd name="csY11" fmla="*/ 1297607 h 1297607"/>
+                      </a:gdLst>
+                      <a:ahLst/>
+                      <a:cxnLst>
+                        <a:cxn ang="0">
+                          <a:pos x="csX0" y="csY0"/>
+                        </a:cxn>
+                        <a:cxn ang="0">
+                          <a:pos x="csX1" y="csY1"/>
+                        </a:cxn>
+                        <a:cxn ang="0">
+                          <a:pos x="csX2" y="csY2"/>
+                        </a:cxn>
+                        <a:cxn ang="0">
+                          <a:pos x="csX3" y="csY3"/>
+                        </a:cxn>
+                        <a:cxn ang="0">
+                          <a:pos x="csX4" y="csY4"/>
+                        </a:cxn>
+                        <a:cxn ang="0">
+                          <a:pos x="csX5" y="csY5"/>
+                        </a:cxn>
+                        <a:cxn ang="0">
+                          <a:pos x="csX6" y="csY6"/>
+                        </a:cxn>
+                        <a:cxn ang="0">
+                          <a:pos x="csX7" y="csY7"/>
+                        </a:cxn>
+                        <a:cxn ang="0">
+                          <a:pos x="csX8" y="csY8"/>
+                        </a:cxn>
+                        <a:cxn ang="0">
+                          <a:pos x="csX9" y="csY9"/>
+                        </a:cxn>
+                        <a:cxn ang="0">
+                          <a:pos x="csX10" y="csY10"/>
+                        </a:cxn>
+                        <a:cxn ang="0">
+                          <a:pos x="csX11" y="csY11"/>
+                        </a:cxn>
+                      </a:cxnLst>
+                      <a:rect l="l" t="t" r="r" b="b"/>
+                      <a:pathLst>
+                        <a:path w="1654619" h="1297607" fill="none" extrusionOk="0">
+                          <a:moveTo>
+                            <a:pt x="0" y="1297607"/>
+                          </a:moveTo>
+                          <a:cubicBezTo>
+                            <a:pt x="5602" y="1155706"/>
+                            <a:pt x="101668" y="954816"/>
+                            <a:pt x="72377" y="733063"/>
+                          </a:cubicBezTo>
+                          <a:cubicBezTo>
+                            <a:pt x="43086" y="511310"/>
+                            <a:pt x="161276" y="406076"/>
+                            <a:pt x="139187" y="211946"/>
+                          </a:cubicBezTo>
+                          <a:cubicBezTo>
+                            <a:pt x="306247" y="179667"/>
+                            <a:pt x="440475" y="211059"/>
+                            <a:pt x="630982" y="165550"/>
+                          </a:cubicBezTo>
+                          <a:cubicBezTo>
+                            <a:pt x="715782" y="107491"/>
+                            <a:pt x="744254" y="110610"/>
+                            <a:pt x="822670" y="52255"/>
+                          </a:cubicBezTo>
+                          <a:cubicBezTo>
+                            <a:pt x="1006857" y="23108"/>
+                            <a:pt x="1036070" y="71690"/>
+                            <a:pt x="1222006" y="27173"/>
+                          </a:cubicBezTo>
+                          <a:cubicBezTo>
+                            <a:pt x="1407942" y="-17344"/>
+                            <a:pt x="1553848" y="57463"/>
+                            <a:pt x="1654619" y="0"/>
+                          </a:cubicBezTo>
+                          <a:cubicBezTo>
+                            <a:pt x="1653992" y="252064"/>
+                            <a:pt x="1572797" y="406842"/>
+                            <a:pt x="1551767" y="563777"/>
+                          </a:cubicBezTo>
+                          <a:cubicBezTo>
+                            <a:pt x="1530737" y="720712"/>
+                            <a:pt x="1494318" y="831711"/>
+                            <a:pt x="1456826" y="1084186"/>
+                          </a:cubicBezTo>
+                          <a:cubicBezTo>
+                            <a:pt x="1296779" y="1124336"/>
+                            <a:pt x="1119171" y="1123775"/>
+                            <a:pt x="971217" y="1155326"/>
+                          </a:cubicBezTo>
+                          <a:cubicBezTo>
+                            <a:pt x="823263" y="1186877"/>
+                            <a:pt x="615451" y="1196856"/>
+                            <a:pt x="485609" y="1226467"/>
+                          </a:cubicBezTo>
+                          <a:cubicBezTo>
+                            <a:pt x="355767" y="1256077"/>
+                            <a:pt x="102512" y="1241430"/>
+                            <a:pt x="0" y="1297607"/>
+                          </a:cubicBezTo>
+                          <a:close/>
+                        </a:path>
+                        <a:path w="1654619" h="1297607" stroke="0" extrusionOk="0">
+                          <a:moveTo>
+                            <a:pt x="0" y="1297607"/>
+                          </a:moveTo>
+                          <a:cubicBezTo>
+                            <a:pt x="-13771" y="1052173"/>
+                            <a:pt x="50588" y="1014082"/>
+                            <a:pt x="68202" y="765633"/>
+                          </a:cubicBezTo>
+                          <a:cubicBezTo>
+                            <a:pt x="85815" y="517184"/>
+                            <a:pt x="113703" y="415483"/>
+                            <a:pt x="139187" y="211946"/>
+                          </a:cubicBezTo>
+                          <a:cubicBezTo>
+                            <a:pt x="247491" y="165253"/>
+                            <a:pt x="498541" y="220952"/>
+                            <a:pt x="630982" y="165550"/>
+                          </a:cubicBezTo>
+                          <a:cubicBezTo>
+                            <a:pt x="707710" y="100337"/>
+                            <a:pt x="758751" y="100894"/>
+                            <a:pt x="822670" y="52255"/>
+                          </a:cubicBezTo>
+                          <a:cubicBezTo>
+                            <a:pt x="1013725" y="30009"/>
+                            <a:pt x="1068628" y="63648"/>
+                            <a:pt x="1230325" y="26650"/>
+                          </a:cubicBezTo>
+                          <a:cubicBezTo>
+                            <a:pt x="1392022" y="-10348"/>
+                            <a:pt x="1498009" y="46742"/>
+                            <a:pt x="1654619" y="0"/>
+                          </a:cubicBezTo>
+                          <a:cubicBezTo>
+                            <a:pt x="1670578" y="264432"/>
+                            <a:pt x="1569474" y="425489"/>
+                            <a:pt x="1551767" y="563777"/>
+                          </a:cubicBezTo>
+                          <a:cubicBezTo>
+                            <a:pt x="1534060" y="702065"/>
+                            <a:pt x="1458783" y="860675"/>
+                            <a:pt x="1456826" y="1084186"/>
+                          </a:cubicBezTo>
+                          <a:cubicBezTo>
+                            <a:pt x="1306143" y="1163186"/>
+                            <a:pt x="1162417" y="1121717"/>
+                            <a:pt x="971217" y="1155326"/>
+                          </a:cubicBezTo>
+                          <a:cubicBezTo>
+                            <a:pt x="780017" y="1188935"/>
+                            <a:pt x="623000" y="1159539"/>
+                            <a:pt x="500177" y="1224332"/>
+                          </a:cubicBezTo>
+                          <a:cubicBezTo>
+                            <a:pt x="377354" y="1289125"/>
+                            <a:pt x="105842" y="1228026"/>
+                            <a:pt x="0" y="1297607"/>
+                          </a:cubicBezTo>
+                          <a:close/>
+                        </a:path>
+                      </a:pathLst>
+                    </a:custGeom>
+                    <ask:type>
+                      <ask:lineSketchNone/>
+                    </ask:type>
+                  </ask:lineSketchStyleProps>
+                </a:ext>
+              </a:extLst>
+            </a:ln>
+          </p:spPr>
+          <p:style>
+            <a:lnRef idx="2">
+              <a:schemeClr val="accent4">
+                <a:shade val="15000"/>
+              </a:schemeClr>
+            </a:lnRef>
+            <a:fillRef idx="1">
+              <a:schemeClr val="accent4"/>
+            </a:fillRef>
+            <a:effectRef idx="0">
+              <a:schemeClr val="accent4"/>
+            </a:effectRef>
+            <a:fontRef idx="minor">
+              <a:schemeClr val="lt1"/>
+            </a:fontRef>
+          </p:style>
+          <p:txBody>
+            <a:bodyPr rtlCol="0" anchor="ctr"/>
+            <a:lstStyle/>
+            <a:p>
+              <a:pPr algn="ctr"/>
+              <a:endParaRPr lang="en-CA"/>
+            </a:p>
+          </p:txBody>
+        </p:sp>
+      </p:grpSp>
+    </p:spTree>
+    <p:extLst>
+      <p:ext uri="{BB962C8B-B14F-4D97-AF65-F5344CB8AC3E}">
+        <p14:creationId xmlns:p14="http://schemas.microsoft.com/office/powerpoint/2010/main" val="2959125613"/>
       </p:ext>
     </p:extLst>
   </p:cSld>

--- a/graphics/graphics.pptx
+++ b/graphics/graphics.pptx
@@ -6,7 +6,7 @@
     <p:sldMasterId id="2147483660" r:id="rId2"/>
   </p:sldMasterIdLst>
   <p:notesMasterIdLst>
-    <p:notesMasterId r:id="rId12"/>
+    <p:notesMasterId r:id="rId14"/>
   </p:notesMasterIdLst>
   <p:sldIdLst>
     <p:sldId id="259" r:id="rId3"/>
@@ -18,6 +18,8 @@
     <p:sldId id="264" r:id="rId9"/>
     <p:sldId id="265" r:id="rId10"/>
     <p:sldId id="266" r:id="rId11"/>
+    <p:sldId id="268" r:id="rId12"/>
+    <p:sldId id="269" r:id="rId13"/>
   </p:sldIdLst>
   <p:sldSz cx="12192000" cy="6858000"/>
   <p:notesSz cx="6858000" cy="9144000"/>
@@ -206,7 +208,7 @@
           <a:p>
             <a:fld id="{B8404A9E-F80D-47A3-9ABE-4E375F8C7A58}" type="datetimeFigureOut">
               <a:rPr lang="fr-CA" smtClean="0"/>
-              <a:t>2026-03-19</a:t>
+              <a:t>2026-03-25</a:t>
             </a:fld>
             <a:endParaRPr lang="fr-CA"/>
           </a:p>
@@ -474,6 +476,90 @@
 </p:notesMaster>
 </file>
 
+<file path=ppt/notesSlides/notesSlide1.xml><?xml version="1.0" encoding="utf-8"?>
+<p:notes xmlns:a="http://schemas.openxmlformats.org/drawingml/2006/main" xmlns:r="http://schemas.openxmlformats.org/officeDocument/2006/relationships" xmlns:p="http://schemas.openxmlformats.org/presentationml/2006/main">
+  <p:cSld>
+    <p:spTree>
+      <p:nvGrpSpPr>
+        <p:cNvPr id="1" name=""/>
+        <p:cNvGrpSpPr/>
+        <p:nvPr/>
+      </p:nvGrpSpPr>
+      <p:grpSpPr>
+        <a:xfrm>
+          <a:off x="0" y="0"/>
+          <a:ext cx="0" cy="0"/>
+          <a:chOff x="0" y="0"/>
+          <a:chExt cx="0" cy="0"/>
+        </a:xfrm>
+      </p:grpSpPr>
+      <p:sp>
+        <p:nvSpPr>
+          <p:cNvPr id="2" name="Espace réservé de l'image des diapositives 1"/>
+          <p:cNvSpPr>
+            <a:spLocks noGrp="1" noRot="1" noChangeAspect="1"/>
+          </p:cNvSpPr>
+          <p:nvPr>
+            <p:ph type="sldImg"/>
+          </p:nvPr>
+        </p:nvSpPr>
+        <p:spPr/>
+      </p:sp>
+      <p:sp>
+        <p:nvSpPr>
+          <p:cNvPr id="3" name="Espace réservé des notes 2"/>
+          <p:cNvSpPr>
+            <a:spLocks noGrp="1"/>
+          </p:cNvSpPr>
+          <p:nvPr>
+            <p:ph type="body" idx="1"/>
+          </p:nvPr>
+        </p:nvSpPr>
+        <p:spPr/>
+        <p:txBody>
+          <a:bodyPr/>
+          <a:lstStyle/>
+          <a:p>
+            <a:endParaRPr lang="en-CA" dirty="0"/>
+          </a:p>
+        </p:txBody>
+      </p:sp>
+      <p:sp>
+        <p:nvSpPr>
+          <p:cNvPr id="4" name="Espace réservé du numéro de diapositive 3"/>
+          <p:cNvSpPr>
+            <a:spLocks noGrp="1"/>
+          </p:cNvSpPr>
+          <p:nvPr>
+            <p:ph type="sldNum" sz="quarter" idx="5"/>
+          </p:nvPr>
+        </p:nvSpPr>
+        <p:spPr/>
+        <p:txBody>
+          <a:bodyPr/>
+          <a:lstStyle/>
+          <a:p>
+            <a:fld id="{618211CF-4BFB-4EDA-B871-566ED73F112B}" type="slidenum">
+              <a:rPr lang="en-CA" smtClean="0"/>
+              <a:t>10</a:t>
+            </a:fld>
+            <a:endParaRPr lang="en-CA"/>
+          </a:p>
+        </p:txBody>
+      </p:sp>
+    </p:spTree>
+    <p:extLst>
+      <p:ext uri="{BB962C8B-B14F-4D97-AF65-F5344CB8AC3E}">
+        <p14:creationId xmlns:p14="http://schemas.microsoft.com/office/powerpoint/2010/main" val="1265492288"/>
+      </p:ext>
+    </p:extLst>
+  </p:cSld>
+  <p:clrMapOvr>
+    <a:masterClrMapping/>
+  </p:clrMapOvr>
+</p:notes>
+</file>
+
 <file path=ppt/slideLayouts/slideLayout1.xml><?xml version="1.0" encoding="utf-8"?>
 <p:sldLayout xmlns:a="http://schemas.openxmlformats.org/drawingml/2006/main" xmlns:r="http://schemas.openxmlformats.org/officeDocument/2006/relationships" xmlns:p="http://schemas.openxmlformats.org/presentationml/2006/main" type="title" preserve="1">
   <p:cSld name="Diapositive de titre">
@@ -623,7 +709,7 @@
           <a:p>
             <a:fld id="{B1B97C2F-ED53-40B2-8245-274A53568F1F}" type="datetimeFigureOut">
               <a:rPr lang="fr-CA" smtClean="0"/>
-              <a:t>2026-03-19</a:t>
+              <a:t>2026-03-25</a:t>
             </a:fld>
             <a:endParaRPr lang="fr-CA"/>
           </a:p>
@@ -823,7 +909,7 @@
           <a:p>
             <a:fld id="{B1B97C2F-ED53-40B2-8245-274A53568F1F}" type="datetimeFigureOut">
               <a:rPr lang="fr-CA" smtClean="0"/>
-              <a:t>2026-03-19</a:t>
+              <a:t>2026-03-25</a:t>
             </a:fld>
             <a:endParaRPr lang="fr-CA"/>
           </a:p>
@@ -1033,7 +1119,7 @@
           <a:p>
             <a:fld id="{B1B97C2F-ED53-40B2-8245-274A53568F1F}" type="datetimeFigureOut">
               <a:rPr lang="fr-CA" smtClean="0"/>
-              <a:t>2026-03-19</a:t>
+              <a:t>2026-03-25</a:t>
             </a:fld>
             <a:endParaRPr lang="fr-CA"/>
           </a:p>
@@ -1255,7 +1341,7 @@
           <a:p>
             <a:fld id="{3CFA78C3-2C03-4D26-BA08-5201FB292C09}" type="datetimeFigureOut">
               <a:rPr lang="fr-CA" smtClean="0"/>
-              <a:t>2026-03-19</a:t>
+              <a:t>2026-03-25</a:t>
             </a:fld>
             <a:endParaRPr lang="fr-CA"/>
           </a:p>
@@ -1455,7 +1541,7 @@
           <a:p>
             <a:fld id="{3CFA78C3-2C03-4D26-BA08-5201FB292C09}" type="datetimeFigureOut">
               <a:rPr lang="fr-CA" smtClean="0"/>
-              <a:t>2026-03-19</a:t>
+              <a:t>2026-03-25</a:t>
             </a:fld>
             <a:endParaRPr lang="fr-CA"/>
           </a:p>
@@ -1731,7 +1817,7 @@
           <a:p>
             <a:fld id="{3CFA78C3-2C03-4D26-BA08-5201FB292C09}" type="datetimeFigureOut">
               <a:rPr lang="fr-CA" smtClean="0"/>
-              <a:t>2026-03-19</a:t>
+              <a:t>2026-03-25</a:t>
             </a:fld>
             <a:endParaRPr lang="fr-CA"/>
           </a:p>
@@ -1999,7 +2085,7 @@
           <a:p>
             <a:fld id="{3CFA78C3-2C03-4D26-BA08-5201FB292C09}" type="datetimeFigureOut">
               <a:rPr lang="fr-CA" smtClean="0"/>
-              <a:t>2026-03-19</a:t>
+              <a:t>2026-03-25</a:t>
             </a:fld>
             <a:endParaRPr lang="fr-CA"/>
           </a:p>
@@ -2414,7 +2500,7 @@
           <a:p>
             <a:fld id="{3CFA78C3-2C03-4D26-BA08-5201FB292C09}" type="datetimeFigureOut">
               <a:rPr lang="fr-CA" smtClean="0"/>
-              <a:t>2026-03-19</a:t>
+              <a:t>2026-03-25</a:t>
             </a:fld>
             <a:endParaRPr lang="fr-CA"/>
           </a:p>
@@ -2556,7 +2642,7 @@
           <a:p>
             <a:fld id="{3CFA78C3-2C03-4D26-BA08-5201FB292C09}" type="datetimeFigureOut">
               <a:rPr lang="fr-CA" smtClean="0"/>
-              <a:t>2026-03-19</a:t>
+              <a:t>2026-03-25</a:t>
             </a:fld>
             <a:endParaRPr lang="fr-CA"/>
           </a:p>
@@ -2669,7 +2755,7 @@
           <a:p>
             <a:fld id="{3CFA78C3-2C03-4D26-BA08-5201FB292C09}" type="datetimeFigureOut">
               <a:rPr lang="fr-CA" smtClean="0"/>
-              <a:t>2026-03-19</a:t>
+              <a:t>2026-03-25</a:t>
             </a:fld>
             <a:endParaRPr lang="fr-CA"/>
           </a:p>
@@ -2982,7 +3068,7 @@
           <a:p>
             <a:fld id="{3CFA78C3-2C03-4D26-BA08-5201FB292C09}" type="datetimeFigureOut">
               <a:rPr lang="fr-CA" smtClean="0"/>
-              <a:t>2026-03-19</a:t>
+              <a:t>2026-03-25</a:t>
             </a:fld>
             <a:endParaRPr lang="fr-CA"/>
           </a:p>
@@ -3182,7 +3268,7 @@
           <a:p>
             <a:fld id="{B1B97C2F-ED53-40B2-8245-274A53568F1F}" type="datetimeFigureOut">
               <a:rPr lang="fr-CA" smtClean="0"/>
-              <a:t>2026-03-19</a:t>
+              <a:t>2026-03-25</a:t>
             </a:fld>
             <a:endParaRPr lang="fr-CA"/>
           </a:p>
@@ -3471,7 +3557,7 @@
           <a:p>
             <a:fld id="{3CFA78C3-2C03-4D26-BA08-5201FB292C09}" type="datetimeFigureOut">
               <a:rPr lang="fr-CA" smtClean="0"/>
-              <a:t>2026-03-19</a:t>
+              <a:t>2026-03-25</a:t>
             </a:fld>
             <a:endParaRPr lang="fr-CA"/>
           </a:p>
@@ -3671,7 +3757,7 @@
           <a:p>
             <a:fld id="{3CFA78C3-2C03-4D26-BA08-5201FB292C09}" type="datetimeFigureOut">
               <a:rPr lang="fr-CA" smtClean="0"/>
-              <a:t>2026-03-19</a:t>
+              <a:t>2026-03-25</a:t>
             </a:fld>
             <a:endParaRPr lang="fr-CA"/>
           </a:p>
@@ -3881,7 +3967,7 @@
           <a:p>
             <a:fld id="{3CFA78C3-2C03-4D26-BA08-5201FB292C09}" type="datetimeFigureOut">
               <a:rPr lang="fr-CA" smtClean="0"/>
-              <a:t>2026-03-19</a:t>
+              <a:t>2026-03-25</a:t>
             </a:fld>
             <a:endParaRPr lang="fr-CA"/>
           </a:p>
@@ -4157,7 +4243,7 @@
           <a:p>
             <a:fld id="{B1B97C2F-ED53-40B2-8245-274A53568F1F}" type="datetimeFigureOut">
               <a:rPr lang="fr-CA" smtClean="0"/>
-              <a:t>2026-03-19</a:t>
+              <a:t>2026-03-25</a:t>
             </a:fld>
             <a:endParaRPr lang="fr-CA"/>
           </a:p>
@@ -4425,7 +4511,7 @@
           <a:p>
             <a:fld id="{B1B97C2F-ED53-40B2-8245-274A53568F1F}" type="datetimeFigureOut">
               <a:rPr lang="fr-CA" smtClean="0"/>
-              <a:t>2026-03-19</a:t>
+              <a:t>2026-03-25</a:t>
             </a:fld>
             <a:endParaRPr lang="fr-CA"/>
           </a:p>
@@ -4840,7 +4926,7 @@
           <a:p>
             <a:fld id="{B1B97C2F-ED53-40B2-8245-274A53568F1F}" type="datetimeFigureOut">
               <a:rPr lang="fr-CA" smtClean="0"/>
-              <a:t>2026-03-19</a:t>
+              <a:t>2026-03-25</a:t>
             </a:fld>
             <a:endParaRPr lang="fr-CA"/>
           </a:p>
@@ -4982,7 +5068,7 @@
           <a:p>
             <a:fld id="{B1B97C2F-ED53-40B2-8245-274A53568F1F}" type="datetimeFigureOut">
               <a:rPr lang="fr-CA" smtClean="0"/>
-              <a:t>2026-03-19</a:t>
+              <a:t>2026-03-25</a:t>
             </a:fld>
             <a:endParaRPr lang="fr-CA"/>
           </a:p>
@@ -5095,7 +5181,7 @@
           <a:p>
             <a:fld id="{B1B97C2F-ED53-40B2-8245-274A53568F1F}" type="datetimeFigureOut">
               <a:rPr lang="fr-CA" smtClean="0"/>
-              <a:t>2026-03-19</a:t>
+              <a:t>2026-03-25</a:t>
             </a:fld>
             <a:endParaRPr lang="fr-CA"/>
           </a:p>
@@ -5408,7 +5494,7 @@
           <a:p>
             <a:fld id="{B1B97C2F-ED53-40B2-8245-274A53568F1F}" type="datetimeFigureOut">
               <a:rPr lang="fr-CA" smtClean="0"/>
-              <a:t>2026-03-19</a:t>
+              <a:t>2026-03-25</a:t>
             </a:fld>
             <a:endParaRPr lang="fr-CA"/>
           </a:p>
@@ -5697,7 +5783,7 @@
           <a:p>
             <a:fld id="{B1B97C2F-ED53-40B2-8245-274A53568F1F}" type="datetimeFigureOut">
               <a:rPr lang="fr-CA" smtClean="0"/>
-              <a:t>2026-03-19</a:t>
+              <a:t>2026-03-25</a:t>
             </a:fld>
             <a:endParaRPr lang="fr-CA"/>
           </a:p>
@@ -5940,7 +6026,7 @@
           <a:p>
             <a:fld id="{B1B97C2F-ED53-40B2-8245-274A53568F1F}" type="datetimeFigureOut">
               <a:rPr lang="fr-CA" smtClean="0"/>
-              <a:t>2026-03-19</a:t>
+              <a:t>2026-03-25</a:t>
             </a:fld>
             <a:endParaRPr lang="fr-CA"/>
           </a:p>
@@ -6510,7 +6596,7 @@
           <a:p>
             <a:fld id="{3CFA78C3-2C03-4D26-BA08-5201FB292C09}" type="datetimeFigureOut">
               <a:rPr lang="fr-CA" smtClean="0"/>
-              <a:t>2026-03-19</a:t>
+              <a:t>2026-03-25</a:t>
             </a:fld>
             <a:endParaRPr lang="fr-CA"/>
           </a:p>
@@ -8389,6 +8475,1778 @@
     <p:extLst>
       <p:ext uri="{BB962C8B-B14F-4D97-AF65-F5344CB8AC3E}">
         <p14:creationId xmlns:p14="http://schemas.microsoft.com/office/powerpoint/2010/main" val="1653587489"/>
+      </p:ext>
+    </p:extLst>
+  </p:cSld>
+  <p:clrMapOvr>
+    <a:masterClrMapping/>
+  </p:clrMapOvr>
+</p:sld>
+</file>
+
+<file path=ppt/slides/slide10.xml><?xml version="1.0" encoding="utf-8"?>
+<p:sld xmlns:a="http://schemas.openxmlformats.org/drawingml/2006/main" xmlns:r="http://schemas.openxmlformats.org/officeDocument/2006/relationships" xmlns:p="http://schemas.openxmlformats.org/presentationml/2006/main">
+  <p:cSld>
+    <p:spTree>
+      <p:nvGrpSpPr>
+        <p:cNvPr id="1" name=""/>
+        <p:cNvGrpSpPr/>
+        <p:nvPr/>
+      </p:nvGrpSpPr>
+      <p:grpSpPr>
+        <a:xfrm>
+          <a:off x="0" y="0"/>
+          <a:ext cx="0" cy="0"/>
+          <a:chOff x="0" y="0"/>
+          <a:chExt cx="0" cy="0"/>
+        </a:xfrm>
+      </p:grpSpPr>
+      <p:pic>
+        <p:nvPicPr>
+          <p:cNvPr id="5" name="Image 4">
+            <a:extLst>
+              <a:ext uri="{FF2B5EF4-FFF2-40B4-BE49-F238E27FC236}">
+                <a16:creationId xmlns:a16="http://schemas.microsoft.com/office/drawing/2014/main" id="{62555159-C2BB-4DBE-5396-731C16B17DB7}"/>
+              </a:ext>
+            </a:extLst>
+          </p:cNvPr>
+          <p:cNvPicPr>
+            <a:picLocks noChangeAspect="1"/>
+          </p:cNvPicPr>
+          <p:nvPr/>
+        </p:nvPicPr>
+        <p:blipFill>
+          <a:blip r:embed="rId3"/>
+          <a:stretch>
+            <a:fillRect/>
+          </a:stretch>
+        </p:blipFill>
+        <p:spPr>
+          <a:xfrm>
+            <a:off x="0" y="129651"/>
+            <a:ext cx="12192000" cy="6598698"/>
+          </a:xfrm>
+          <a:prstGeom prst="rect">
+            <a:avLst/>
+          </a:prstGeom>
+        </p:spPr>
+      </p:pic>
+      <p:sp>
+        <p:nvSpPr>
+          <p:cNvPr id="6" name="Rectangle : coins arrondis 5">
+            <a:extLst>
+              <a:ext uri="{FF2B5EF4-FFF2-40B4-BE49-F238E27FC236}">
+                <a16:creationId xmlns:a16="http://schemas.microsoft.com/office/drawing/2014/main" id="{77CE7DEF-91F6-8B33-A624-3217C2851430}"/>
+              </a:ext>
+            </a:extLst>
+          </p:cNvPr>
+          <p:cNvSpPr/>
+          <p:nvPr/>
+        </p:nvSpPr>
+        <p:spPr>
+          <a:xfrm>
+            <a:off x="0" y="457200"/>
+            <a:ext cx="538480" cy="5984240"/>
+          </a:xfrm>
+          <a:prstGeom prst="roundRect">
+            <a:avLst>
+              <a:gd name="adj" fmla="val 0"/>
+            </a:avLst>
+          </a:prstGeom>
+          <a:solidFill>
+            <a:schemeClr val="accent6">
+              <a:lumMod val="40000"/>
+              <a:lumOff val="60000"/>
+              <a:alpha val="25000"/>
+            </a:schemeClr>
+          </a:solidFill>
+          <a:ln>
+            <a:solidFill>
+              <a:srgbClr val="FF0000"/>
+            </a:solidFill>
+          </a:ln>
+        </p:spPr>
+        <p:style>
+          <a:lnRef idx="2">
+            <a:schemeClr val="accent1">
+              <a:shade val="15000"/>
+            </a:schemeClr>
+          </a:lnRef>
+          <a:fillRef idx="1">
+            <a:schemeClr val="accent1"/>
+          </a:fillRef>
+          <a:effectRef idx="0">
+            <a:schemeClr val="accent1"/>
+          </a:effectRef>
+          <a:fontRef idx="minor">
+            <a:schemeClr val="lt1"/>
+          </a:fontRef>
+        </p:style>
+        <p:txBody>
+          <a:bodyPr rtlCol="0" anchor="ctr"/>
+          <a:lstStyle/>
+          <a:p>
+            <a:pPr algn="ctr"/>
+            <a:endParaRPr lang="en-CA" dirty="0"/>
+          </a:p>
+        </p:txBody>
+      </p:sp>
+      <p:sp>
+        <p:nvSpPr>
+          <p:cNvPr id="7" name="Rectangle : coins arrondis 6">
+            <a:extLst>
+              <a:ext uri="{FF2B5EF4-FFF2-40B4-BE49-F238E27FC236}">
+                <a16:creationId xmlns:a16="http://schemas.microsoft.com/office/drawing/2014/main" id="{B7696919-AB0B-CB43-7947-AA1B322F89AE}"/>
+              </a:ext>
+            </a:extLst>
+          </p:cNvPr>
+          <p:cNvSpPr/>
+          <p:nvPr/>
+        </p:nvSpPr>
+        <p:spPr>
+          <a:xfrm>
+            <a:off x="0" y="6532881"/>
+            <a:ext cx="11948160" cy="195468"/>
+          </a:xfrm>
+          <a:prstGeom prst="roundRect">
+            <a:avLst>
+              <a:gd name="adj" fmla="val 5346"/>
+            </a:avLst>
+          </a:prstGeom>
+          <a:solidFill>
+            <a:schemeClr val="accent5">
+              <a:lumMod val="40000"/>
+              <a:lumOff val="60000"/>
+              <a:alpha val="25000"/>
+            </a:schemeClr>
+          </a:solidFill>
+          <a:ln>
+            <a:solidFill>
+              <a:srgbClr val="FF0000">
+                <a:alpha val="25000"/>
+              </a:srgbClr>
+            </a:solidFill>
+          </a:ln>
+        </p:spPr>
+        <p:style>
+          <a:lnRef idx="2">
+            <a:schemeClr val="accent1">
+              <a:shade val="15000"/>
+            </a:schemeClr>
+          </a:lnRef>
+          <a:fillRef idx="1">
+            <a:schemeClr val="accent1"/>
+          </a:fillRef>
+          <a:effectRef idx="0">
+            <a:schemeClr val="accent1"/>
+          </a:effectRef>
+          <a:fontRef idx="minor">
+            <a:schemeClr val="lt1"/>
+          </a:fontRef>
+        </p:style>
+        <p:txBody>
+          <a:bodyPr rtlCol="0" anchor="ctr"/>
+          <a:lstStyle/>
+          <a:p>
+            <a:pPr algn="ctr"/>
+            <a:r>
+              <a:rPr lang="en-CA" sz="1600" dirty="0">
+                <a:solidFill>
+                  <a:srgbClr val="FF0000"/>
+                </a:solidFill>
+              </a:rPr>
+              <a:t>Status bar</a:t>
+            </a:r>
+          </a:p>
+        </p:txBody>
+      </p:sp>
+      <p:sp>
+        <p:nvSpPr>
+          <p:cNvPr id="8" name="Rectangle : coins arrondis 7">
+            <a:extLst>
+              <a:ext uri="{FF2B5EF4-FFF2-40B4-BE49-F238E27FC236}">
+                <a16:creationId xmlns:a16="http://schemas.microsoft.com/office/drawing/2014/main" id="{1F8BDC99-8F4A-48A9-0806-3F6CED7075B7}"/>
+              </a:ext>
+            </a:extLst>
+          </p:cNvPr>
+          <p:cNvSpPr/>
+          <p:nvPr/>
+        </p:nvSpPr>
+        <p:spPr>
+          <a:xfrm>
+            <a:off x="531812" y="457200"/>
+            <a:ext cx="11409680" cy="5991942"/>
+          </a:xfrm>
+          <a:prstGeom prst="roundRect">
+            <a:avLst>
+              <a:gd name="adj" fmla="val 0"/>
+            </a:avLst>
+          </a:prstGeom>
+          <a:solidFill>
+            <a:schemeClr val="accent1">
+              <a:alpha val="25000"/>
+            </a:schemeClr>
+          </a:solidFill>
+          <a:ln>
+            <a:solidFill>
+              <a:srgbClr val="FF0000"/>
+            </a:solidFill>
+          </a:ln>
+        </p:spPr>
+        <p:style>
+          <a:lnRef idx="2">
+            <a:schemeClr val="accent1">
+              <a:shade val="15000"/>
+            </a:schemeClr>
+          </a:lnRef>
+          <a:fillRef idx="1">
+            <a:schemeClr val="accent1"/>
+          </a:fillRef>
+          <a:effectRef idx="0">
+            <a:schemeClr val="accent1"/>
+          </a:effectRef>
+          <a:fontRef idx="minor">
+            <a:schemeClr val="lt1"/>
+          </a:fontRef>
+        </p:style>
+        <p:txBody>
+          <a:bodyPr rtlCol="0" anchor="ctr"/>
+          <a:lstStyle/>
+          <a:p>
+            <a:pPr algn="ctr"/>
+            <a:r>
+              <a:rPr lang="en-CA" sz="2800" dirty="0">
+                <a:solidFill>
+                  <a:srgbClr val="FF0000"/>
+                </a:solidFill>
+              </a:rPr>
+              <a:t>DASHBOARD</a:t>
+            </a:r>
+          </a:p>
+        </p:txBody>
+      </p:sp>
+      <p:sp>
+        <p:nvSpPr>
+          <p:cNvPr id="9" name="ZoneTexte 8">
+            <a:extLst>
+              <a:ext uri="{FF2B5EF4-FFF2-40B4-BE49-F238E27FC236}">
+                <a16:creationId xmlns:a16="http://schemas.microsoft.com/office/drawing/2014/main" id="{71E00549-A450-FA64-4BE5-E34EA348A3B0}"/>
+              </a:ext>
+            </a:extLst>
+          </p:cNvPr>
+          <p:cNvSpPr txBox="1"/>
+          <p:nvPr/>
+        </p:nvSpPr>
+        <p:spPr>
+          <a:xfrm rot="18419661">
+            <a:off x="-157480" y="3948210"/>
+            <a:ext cx="919480" cy="307777"/>
+          </a:xfrm>
+          <a:prstGeom prst="rect">
+            <a:avLst/>
+          </a:prstGeom>
+          <a:noFill/>
+        </p:spPr>
+        <p:txBody>
+          <a:bodyPr wrap="square" rtlCol="0">
+            <a:spAutoFit/>
+          </a:bodyPr>
+          <a:lstStyle/>
+          <a:p>
+            <a:r>
+              <a:rPr lang="en-CA" sz="1400" dirty="0">
+                <a:solidFill>
+                  <a:srgbClr val="FF0000"/>
+                </a:solidFill>
+              </a:rPr>
+              <a:t>Sidebar</a:t>
+            </a:r>
+          </a:p>
+        </p:txBody>
+      </p:sp>
+      <p:sp>
+        <p:nvSpPr>
+          <p:cNvPr id="10" name="ZoneTexte 9">
+            <a:extLst>
+              <a:ext uri="{FF2B5EF4-FFF2-40B4-BE49-F238E27FC236}">
+                <a16:creationId xmlns:a16="http://schemas.microsoft.com/office/drawing/2014/main" id="{4D527F47-B1BB-AE43-9EFD-A9CB6F3984EB}"/>
+              </a:ext>
+            </a:extLst>
+          </p:cNvPr>
+          <p:cNvSpPr txBox="1"/>
+          <p:nvPr/>
+        </p:nvSpPr>
+        <p:spPr>
+          <a:xfrm>
+            <a:off x="4864100" y="201710"/>
+            <a:ext cx="919480" cy="307777"/>
+          </a:xfrm>
+          <a:prstGeom prst="rect">
+            <a:avLst/>
+          </a:prstGeom>
+          <a:noFill/>
+        </p:spPr>
+        <p:txBody>
+          <a:bodyPr wrap="square" rtlCol="0">
+            <a:spAutoFit/>
+          </a:bodyPr>
+          <a:lstStyle/>
+          <a:p>
+            <a:r>
+              <a:rPr lang="en-CA" sz="1400" dirty="0">
+                <a:solidFill>
+                  <a:srgbClr val="FF0000"/>
+                </a:solidFill>
+              </a:rPr>
+              <a:t>Menu bar</a:t>
+            </a:r>
+          </a:p>
+        </p:txBody>
+      </p:sp>
+      <p:sp>
+        <p:nvSpPr>
+          <p:cNvPr id="11" name="ZoneTexte 10">
+            <a:extLst>
+              <a:ext uri="{FF2B5EF4-FFF2-40B4-BE49-F238E27FC236}">
+                <a16:creationId xmlns:a16="http://schemas.microsoft.com/office/drawing/2014/main" id="{81161226-DF20-7233-3CF8-F7D193BA2C46}"/>
+              </a:ext>
+            </a:extLst>
+          </p:cNvPr>
+          <p:cNvSpPr txBox="1"/>
+          <p:nvPr/>
+        </p:nvSpPr>
+        <p:spPr>
+          <a:xfrm>
+            <a:off x="9644379" y="825479"/>
+            <a:ext cx="1395095" cy="307777"/>
+          </a:xfrm>
+          <a:prstGeom prst="rect">
+            <a:avLst/>
+          </a:prstGeom>
+          <a:noFill/>
+        </p:spPr>
+        <p:txBody>
+          <a:bodyPr wrap="square" rtlCol="0">
+            <a:spAutoFit/>
+          </a:bodyPr>
+          <a:lstStyle/>
+          <a:p>
+            <a:r>
+              <a:rPr lang="en-CA" sz="1400" dirty="0">
+                <a:solidFill>
+                  <a:srgbClr val="FF0000"/>
+                </a:solidFill>
+              </a:rPr>
+              <a:t>Variable list</a:t>
+            </a:r>
+          </a:p>
+        </p:txBody>
+      </p:sp>
+      <p:cxnSp>
+        <p:nvCxnSpPr>
+          <p:cNvPr id="13" name="Connecteur droit avec flèche 12">
+            <a:extLst>
+              <a:ext uri="{FF2B5EF4-FFF2-40B4-BE49-F238E27FC236}">
+                <a16:creationId xmlns:a16="http://schemas.microsoft.com/office/drawing/2014/main" id="{A90744C7-18D8-13D0-D6EE-6D60B549423C}"/>
+              </a:ext>
+            </a:extLst>
+          </p:cNvPr>
+          <p:cNvCxnSpPr>
+            <a:cxnSpLocks/>
+          </p:cNvCxnSpPr>
+          <p:nvPr/>
+        </p:nvCxnSpPr>
+        <p:spPr>
+          <a:xfrm flipV="1">
+            <a:off x="10753725" y="744636"/>
+            <a:ext cx="1103948" cy="234731"/>
+          </a:xfrm>
+          <a:prstGeom prst="straightConnector1">
+            <a:avLst/>
+          </a:prstGeom>
+          <a:ln w="25400">
+            <a:solidFill>
+              <a:srgbClr val="FF0000"/>
+            </a:solidFill>
+            <a:tailEnd type="triangle"/>
+          </a:ln>
+        </p:spPr>
+        <p:style>
+          <a:lnRef idx="2">
+            <a:schemeClr val="accent1"/>
+          </a:lnRef>
+          <a:fillRef idx="0">
+            <a:schemeClr val="accent1"/>
+          </a:fillRef>
+          <a:effectRef idx="1">
+            <a:schemeClr val="accent1"/>
+          </a:effectRef>
+          <a:fontRef idx="minor">
+            <a:schemeClr val="tx1"/>
+          </a:fontRef>
+        </p:style>
+      </p:cxnSp>
+      <p:sp>
+        <p:nvSpPr>
+          <p:cNvPr id="16" name="ZoneTexte 15">
+            <a:extLst>
+              <a:ext uri="{FF2B5EF4-FFF2-40B4-BE49-F238E27FC236}">
+                <a16:creationId xmlns:a16="http://schemas.microsoft.com/office/drawing/2014/main" id="{B0C3522A-5663-CB18-D4D9-97978B132405}"/>
+              </a:ext>
+            </a:extLst>
+          </p:cNvPr>
+          <p:cNvSpPr txBox="1"/>
+          <p:nvPr/>
+        </p:nvSpPr>
+        <p:spPr>
+          <a:xfrm>
+            <a:off x="1306193" y="876277"/>
+            <a:ext cx="1395095" cy="307777"/>
+          </a:xfrm>
+          <a:prstGeom prst="rect">
+            <a:avLst/>
+          </a:prstGeom>
+          <a:noFill/>
+        </p:spPr>
+        <p:txBody>
+          <a:bodyPr wrap="square" rtlCol="0">
+            <a:spAutoFit/>
+          </a:bodyPr>
+          <a:lstStyle/>
+          <a:p>
+            <a:r>
+              <a:rPr lang="en-CA" sz="1400" dirty="0">
+                <a:solidFill>
+                  <a:srgbClr val="FF0000"/>
+                </a:solidFill>
+              </a:rPr>
+              <a:t>Single instance</a:t>
+            </a:r>
+          </a:p>
+        </p:txBody>
+      </p:sp>
+      <p:sp>
+        <p:nvSpPr>
+          <p:cNvPr id="17" name="ZoneTexte 16">
+            <a:extLst>
+              <a:ext uri="{FF2B5EF4-FFF2-40B4-BE49-F238E27FC236}">
+                <a16:creationId xmlns:a16="http://schemas.microsoft.com/office/drawing/2014/main" id="{1D3CE282-434E-99B0-B38D-C607DC6AF49A}"/>
+              </a:ext>
+            </a:extLst>
+          </p:cNvPr>
+          <p:cNvSpPr txBox="1"/>
+          <p:nvPr/>
+        </p:nvSpPr>
+        <p:spPr>
+          <a:xfrm>
+            <a:off x="1306194" y="1814315"/>
+            <a:ext cx="1395095" cy="307777"/>
+          </a:xfrm>
+          <a:prstGeom prst="rect">
+            <a:avLst/>
+          </a:prstGeom>
+          <a:noFill/>
+        </p:spPr>
+        <p:txBody>
+          <a:bodyPr wrap="square" rtlCol="0">
+            <a:spAutoFit/>
+          </a:bodyPr>
+          <a:lstStyle/>
+          <a:p>
+            <a:r>
+              <a:rPr lang="en-CA" sz="1400" dirty="0">
+                <a:solidFill>
+                  <a:srgbClr val="FF0000"/>
+                </a:solidFill>
+              </a:rPr>
+              <a:t>Multi instance</a:t>
+            </a:r>
+          </a:p>
+        </p:txBody>
+      </p:sp>
+      <p:cxnSp>
+        <p:nvCxnSpPr>
+          <p:cNvPr id="18" name="Connecteur droit avec flèche 17">
+            <a:extLst>
+              <a:ext uri="{FF2B5EF4-FFF2-40B4-BE49-F238E27FC236}">
+                <a16:creationId xmlns:a16="http://schemas.microsoft.com/office/drawing/2014/main" id="{ACDD1501-75DE-6117-BC22-9EF6E61394AC}"/>
+              </a:ext>
+            </a:extLst>
+          </p:cNvPr>
+          <p:cNvCxnSpPr>
+            <a:cxnSpLocks/>
+            <a:stCxn id="17" idx="1"/>
+          </p:cNvCxnSpPr>
+          <p:nvPr/>
+        </p:nvCxnSpPr>
+        <p:spPr>
+          <a:xfrm flipH="1" flipV="1">
+            <a:off x="762000" y="1968203"/>
+            <a:ext cx="544194" cy="1"/>
+          </a:xfrm>
+          <a:prstGeom prst="straightConnector1">
+            <a:avLst/>
+          </a:prstGeom>
+          <a:ln w="25400">
+            <a:solidFill>
+              <a:srgbClr val="FF0000"/>
+            </a:solidFill>
+            <a:tailEnd type="triangle"/>
+          </a:ln>
+        </p:spPr>
+        <p:style>
+          <a:lnRef idx="2">
+            <a:schemeClr val="accent1"/>
+          </a:lnRef>
+          <a:fillRef idx="0">
+            <a:schemeClr val="accent1"/>
+          </a:fillRef>
+          <a:effectRef idx="1">
+            <a:schemeClr val="accent1"/>
+          </a:effectRef>
+          <a:fontRef idx="minor">
+            <a:schemeClr val="tx1"/>
+          </a:fontRef>
+        </p:style>
+      </p:cxnSp>
+      <p:cxnSp>
+        <p:nvCxnSpPr>
+          <p:cNvPr id="21" name="Connecteur droit avec flèche 20">
+            <a:extLst>
+              <a:ext uri="{FF2B5EF4-FFF2-40B4-BE49-F238E27FC236}">
+                <a16:creationId xmlns:a16="http://schemas.microsoft.com/office/drawing/2014/main" id="{A9BE5135-4054-7F5C-5ECB-D89829AFF3A2}"/>
+              </a:ext>
+            </a:extLst>
+          </p:cNvPr>
+          <p:cNvCxnSpPr>
+            <a:cxnSpLocks/>
+          </p:cNvCxnSpPr>
+          <p:nvPr/>
+        </p:nvCxnSpPr>
+        <p:spPr>
+          <a:xfrm flipH="1">
+            <a:off x="749379" y="1030165"/>
+            <a:ext cx="569436" cy="0"/>
+          </a:xfrm>
+          <a:prstGeom prst="straightConnector1">
+            <a:avLst/>
+          </a:prstGeom>
+          <a:ln w="25400">
+            <a:solidFill>
+              <a:srgbClr val="FF0000"/>
+            </a:solidFill>
+            <a:tailEnd type="triangle"/>
+          </a:ln>
+        </p:spPr>
+        <p:style>
+          <a:lnRef idx="2">
+            <a:schemeClr val="accent1"/>
+          </a:lnRef>
+          <a:fillRef idx="0">
+            <a:schemeClr val="accent1"/>
+          </a:fillRef>
+          <a:effectRef idx="1">
+            <a:schemeClr val="accent1"/>
+          </a:effectRef>
+          <a:fontRef idx="minor">
+            <a:schemeClr val="tx1"/>
+          </a:fontRef>
+        </p:style>
+      </p:cxnSp>
+      <p:cxnSp>
+        <p:nvCxnSpPr>
+          <p:cNvPr id="32" name="Connecteur droit 31">
+            <a:extLst>
+              <a:ext uri="{FF2B5EF4-FFF2-40B4-BE49-F238E27FC236}">
+                <a16:creationId xmlns:a16="http://schemas.microsoft.com/office/drawing/2014/main" id="{563CD4DF-C06E-C9F8-83F1-DAE8849C7267}"/>
+              </a:ext>
+            </a:extLst>
+          </p:cNvPr>
+          <p:cNvCxnSpPr>
+            <a:cxnSpLocks/>
+          </p:cNvCxnSpPr>
+          <p:nvPr/>
+        </p:nvCxnSpPr>
+        <p:spPr>
+          <a:xfrm flipH="1">
+            <a:off x="0" y="1381125"/>
+            <a:ext cx="538480" cy="0"/>
+          </a:xfrm>
+          <a:prstGeom prst="line">
+            <a:avLst/>
+          </a:prstGeom>
+          <a:ln>
+            <a:solidFill>
+              <a:srgbClr val="FF0000"/>
+            </a:solidFill>
+          </a:ln>
+        </p:spPr>
+        <p:style>
+          <a:lnRef idx="2">
+            <a:schemeClr val="accent1"/>
+          </a:lnRef>
+          <a:fillRef idx="0">
+            <a:schemeClr val="accent1"/>
+          </a:fillRef>
+          <a:effectRef idx="1">
+            <a:schemeClr val="accent1"/>
+          </a:effectRef>
+          <a:fontRef idx="minor">
+            <a:schemeClr val="tx1"/>
+          </a:fontRef>
+        </p:style>
+      </p:cxnSp>
+      <p:cxnSp>
+        <p:nvCxnSpPr>
+          <p:cNvPr id="42" name="Connecteur droit 41">
+            <a:extLst>
+              <a:ext uri="{FF2B5EF4-FFF2-40B4-BE49-F238E27FC236}">
+                <a16:creationId xmlns:a16="http://schemas.microsoft.com/office/drawing/2014/main" id="{A4F067D9-2C62-9BD8-5E60-C05223DC9FAB}"/>
+              </a:ext>
+            </a:extLst>
+          </p:cNvPr>
+          <p:cNvCxnSpPr>
+            <a:cxnSpLocks/>
+          </p:cNvCxnSpPr>
+          <p:nvPr/>
+        </p:nvCxnSpPr>
+        <p:spPr>
+          <a:xfrm flipH="1">
+            <a:off x="0" y="2741612"/>
+            <a:ext cx="531812" cy="0"/>
+          </a:xfrm>
+          <a:prstGeom prst="line">
+            <a:avLst/>
+          </a:prstGeom>
+          <a:ln>
+            <a:solidFill>
+              <a:srgbClr val="FF0000"/>
+            </a:solidFill>
+          </a:ln>
+        </p:spPr>
+        <p:style>
+          <a:lnRef idx="2">
+            <a:schemeClr val="accent1"/>
+          </a:lnRef>
+          <a:fillRef idx="0">
+            <a:schemeClr val="accent1"/>
+          </a:fillRef>
+          <a:effectRef idx="1">
+            <a:schemeClr val="accent1"/>
+          </a:effectRef>
+          <a:fontRef idx="minor">
+            <a:schemeClr val="tx1"/>
+          </a:fontRef>
+        </p:style>
+      </p:cxnSp>
+      <p:sp>
+        <p:nvSpPr>
+          <p:cNvPr id="45" name="ZoneTexte 44">
+            <a:extLst>
+              <a:ext uri="{FF2B5EF4-FFF2-40B4-BE49-F238E27FC236}">
+                <a16:creationId xmlns:a16="http://schemas.microsoft.com/office/drawing/2014/main" id="{151BA56F-C5B2-3C29-8BC7-CDEF9C55E002}"/>
+              </a:ext>
+            </a:extLst>
+          </p:cNvPr>
+          <p:cNvSpPr txBox="1"/>
+          <p:nvPr/>
+        </p:nvSpPr>
+        <p:spPr>
+          <a:xfrm>
+            <a:off x="545149" y="5403914"/>
+            <a:ext cx="1251902" cy="461665"/>
+          </a:xfrm>
+          <a:prstGeom prst="rect">
+            <a:avLst/>
+          </a:prstGeom>
+          <a:noFill/>
+        </p:spPr>
+        <p:txBody>
+          <a:bodyPr wrap="square" rtlCol="0">
+            <a:spAutoFit/>
+          </a:bodyPr>
+          <a:lstStyle/>
+          <a:p>
+            <a:pPr algn="ctr"/>
+            <a:r>
+              <a:rPr lang="en-CA" sz="1200" dirty="0">
+                <a:solidFill>
+                  <a:srgbClr val="FF0000"/>
+                </a:solidFill>
+              </a:rPr>
+              <a:t>Client/Server  comm.</a:t>
+            </a:r>
+          </a:p>
+        </p:txBody>
+      </p:sp>
+      <p:sp>
+        <p:nvSpPr>
+          <p:cNvPr id="46" name="ZoneTexte 45">
+            <a:extLst>
+              <a:ext uri="{FF2B5EF4-FFF2-40B4-BE49-F238E27FC236}">
+                <a16:creationId xmlns:a16="http://schemas.microsoft.com/office/drawing/2014/main" id="{08441340-7842-C899-C4E2-E329D7B0DA12}"/>
+              </a:ext>
+            </a:extLst>
+          </p:cNvPr>
+          <p:cNvSpPr txBox="1"/>
+          <p:nvPr/>
+        </p:nvSpPr>
+        <p:spPr>
+          <a:xfrm>
+            <a:off x="1318815" y="4911272"/>
+            <a:ext cx="1395095" cy="461665"/>
+          </a:xfrm>
+          <a:prstGeom prst="rect">
+            <a:avLst/>
+          </a:prstGeom>
+          <a:noFill/>
+        </p:spPr>
+        <p:txBody>
+          <a:bodyPr wrap="square" rtlCol="0">
+            <a:spAutoFit/>
+          </a:bodyPr>
+          <a:lstStyle/>
+          <a:p>
+            <a:pPr algn="ctr"/>
+            <a:r>
+              <a:rPr lang="en-CA" sz="1200" dirty="0">
+                <a:solidFill>
+                  <a:srgbClr val="FF0000"/>
+                </a:solidFill>
+              </a:rPr>
+              <a:t>Server/device comm. link</a:t>
+            </a:r>
+          </a:p>
+        </p:txBody>
+      </p:sp>
+      <p:sp>
+        <p:nvSpPr>
+          <p:cNvPr id="47" name="ZoneTexte 46">
+            <a:extLst>
+              <a:ext uri="{FF2B5EF4-FFF2-40B4-BE49-F238E27FC236}">
+                <a16:creationId xmlns:a16="http://schemas.microsoft.com/office/drawing/2014/main" id="{14928E59-C762-6AD7-C5DA-B6DDA78E094B}"/>
+              </a:ext>
+            </a:extLst>
+          </p:cNvPr>
+          <p:cNvSpPr txBox="1"/>
+          <p:nvPr/>
+        </p:nvSpPr>
+        <p:spPr>
+          <a:xfrm>
+            <a:off x="2031919" y="5445523"/>
+            <a:ext cx="1124032" cy="461665"/>
+          </a:xfrm>
+          <a:prstGeom prst="rect">
+            <a:avLst/>
+          </a:prstGeom>
+          <a:noFill/>
+        </p:spPr>
+        <p:txBody>
+          <a:bodyPr wrap="square" rtlCol="0">
+            <a:spAutoFit/>
+          </a:bodyPr>
+          <a:lstStyle/>
+          <a:p>
+            <a:pPr algn="ctr"/>
+            <a:r>
+              <a:rPr lang="en-CA" sz="1200" dirty="0">
+                <a:solidFill>
+                  <a:srgbClr val="FF0000"/>
+                </a:solidFill>
+              </a:rPr>
+              <a:t>Server/device </a:t>
+            </a:r>
+          </a:p>
+          <a:p>
+            <a:pPr algn="ctr"/>
+            <a:r>
+              <a:rPr lang="en-CA" sz="1200" dirty="0">
+                <a:solidFill>
+                  <a:srgbClr val="FF0000"/>
+                </a:solidFill>
+              </a:rPr>
+              <a:t>Comm.</a:t>
+            </a:r>
+          </a:p>
+        </p:txBody>
+      </p:sp>
+      <p:sp>
+        <p:nvSpPr>
+          <p:cNvPr id="48" name="ZoneTexte 47">
+            <a:extLst>
+              <a:ext uri="{FF2B5EF4-FFF2-40B4-BE49-F238E27FC236}">
+                <a16:creationId xmlns:a16="http://schemas.microsoft.com/office/drawing/2014/main" id="{A25DF06D-06AF-2A04-58B9-F1F6DED55B45}"/>
+              </a:ext>
+            </a:extLst>
+          </p:cNvPr>
+          <p:cNvSpPr txBox="1"/>
+          <p:nvPr/>
+        </p:nvSpPr>
+        <p:spPr>
+          <a:xfrm>
+            <a:off x="2981079" y="5079609"/>
+            <a:ext cx="1070040" cy="461665"/>
+          </a:xfrm>
+          <a:prstGeom prst="rect">
+            <a:avLst/>
+          </a:prstGeom>
+          <a:noFill/>
+        </p:spPr>
+        <p:txBody>
+          <a:bodyPr wrap="square" rtlCol="0">
+            <a:spAutoFit/>
+          </a:bodyPr>
+          <a:lstStyle/>
+          <a:p>
+            <a:pPr algn="ctr"/>
+            <a:r>
+              <a:rPr lang="en-CA" sz="1200" dirty="0">
+                <a:solidFill>
+                  <a:srgbClr val="FF0000"/>
+                </a:solidFill>
+              </a:rPr>
+              <a:t>Server Loaded SFD</a:t>
+            </a:r>
+          </a:p>
+        </p:txBody>
+      </p:sp>
+      <p:cxnSp>
+        <p:nvCxnSpPr>
+          <p:cNvPr id="49" name="Connecteur droit avec flèche 48">
+            <a:extLst>
+              <a:ext uri="{FF2B5EF4-FFF2-40B4-BE49-F238E27FC236}">
+                <a16:creationId xmlns:a16="http://schemas.microsoft.com/office/drawing/2014/main" id="{E4D198C3-205A-E2F1-5586-06B932BEB398}"/>
+              </a:ext>
+            </a:extLst>
+          </p:cNvPr>
+          <p:cNvCxnSpPr>
+            <a:cxnSpLocks/>
+            <a:stCxn id="45" idx="2"/>
+          </p:cNvCxnSpPr>
+          <p:nvPr/>
+        </p:nvCxnSpPr>
+        <p:spPr>
+          <a:xfrm flipH="1">
+            <a:off x="635773" y="5865579"/>
+            <a:ext cx="535327" cy="700017"/>
+          </a:xfrm>
+          <a:prstGeom prst="straightConnector1">
+            <a:avLst/>
+          </a:prstGeom>
+          <a:ln w="25400">
+            <a:solidFill>
+              <a:srgbClr val="FF0000"/>
+            </a:solidFill>
+            <a:tailEnd type="triangle"/>
+          </a:ln>
+        </p:spPr>
+        <p:style>
+          <a:lnRef idx="2">
+            <a:schemeClr val="accent1"/>
+          </a:lnRef>
+          <a:fillRef idx="0">
+            <a:schemeClr val="accent1"/>
+          </a:fillRef>
+          <a:effectRef idx="1">
+            <a:schemeClr val="accent1"/>
+          </a:effectRef>
+          <a:fontRef idx="minor">
+            <a:schemeClr val="tx1"/>
+          </a:fontRef>
+        </p:style>
+      </p:cxnSp>
+      <p:cxnSp>
+        <p:nvCxnSpPr>
+          <p:cNvPr id="52" name="Connecteur droit avec flèche 51">
+            <a:extLst>
+              <a:ext uri="{FF2B5EF4-FFF2-40B4-BE49-F238E27FC236}">
+                <a16:creationId xmlns:a16="http://schemas.microsoft.com/office/drawing/2014/main" id="{FC1EACDF-8453-3EB1-1C5A-47B96C5AB6D7}"/>
+              </a:ext>
+            </a:extLst>
+          </p:cNvPr>
+          <p:cNvCxnSpPr>
+            <a:cxnSpLocks/>
+          </p:cNvCxnSpPr>
+          <p:nvPr/>
+        </p:nvCxnSpPr>
+        <p:spPr>
+          <a:xfrm flipH="1">
+            <a:off x="1516380" y="5363412"/>
+            <a:ext cx="377964" cy="1201556"/>
+          </a:xfrm>
+          <a:prstGeom prst="straightConnector1">
+            <a:avLst/>
+          </a:prstGeom>
+          <a:ln w="25400">
+            <a:solidFill>
+              <a:srgbClr val="FF0000"/>
+            </a:solidFill>
+            <a:tailEnd type="triangle"/>
+          </a:ln>
+        </p:spPr>
+        <p:style>
+          <a:lnRef idx="2">
+            <a:schemeClr val="accent1"/>
+          </a:lnRef>
+          <a:fillRef idx="0">
+            <a:schemeClr val="accent1"/>
+          </a:fillRef>
+          <a:effectRef idx="1">
+            <a:schemeClr val="accent1"/>
+          </a:effectRef>
+          <a:fontRef idx="minor">
+            <a:schemeClr val="tx1"/>
+          </a:fontRef>
+        </p:style>
+      </p:cxnSp>
+      <p:cxnSp>
+        <p:nvCxnSpPr>
+          <p:cNvPr id="54" name="Connecteur droit avec flèche 53">
+            <a:extLst>
+              <a:ext uri="{FF2B5EF4-FFF2-40B4-BE49-F238E27FC236}">
+                <a16:creationId xmlns:a16="http://schemas.microsoft.com/office/drawing/2014/main" id="{E15BB5BA-AE57-3413-4A0C-54811F1A1DCF}"/>
+              </a:ext>
+            </a:extLst>
+          </p:cNvPr>
+          <p:cNvCxnSpPr>
+            <a:cxnSpLocks/>
+            <a:stCxn id="47" idx="2"/>
+          </p:cNvCxnSpPr>
+          <p:nvPr/>
+        </p:nvCxnSpPr>
+        <p:spPr>
+          <a:xfrm flipH="1">
+            <a:off x="2351502" y="5907188"/>
+            <a:ext cx="242433" cy="668976"/>
+          </a:xfrm>
+          <a:prstGeom prst="straightConnector1">
+            <a:avLst/>
+          </a:prstGeom>
+          <a:ln w="25400">
+            <a:solidFill>
+              <a:srgbClr val="FF0000"/>
+            </a:solidFill>
+            <a:tailEnd type="triangle"/>
+          </a:ln>
+        </p:spPr>
+        <p:style>
+          <a:lnRef idx="2">
+            <a:schemeClr val="accent1"/>
+          </a:lnRef>
+          <a:fillRef idx="0">
+            <a:schemeClr val="accent1"/>
+          </a:fillRef>
+          <a:effectRef idx="1">
+            <a:schemeClr val="accent1"/>
+          </a:effectRef>
+          <a:fontRef idx="minor">
+            <a:schemeClr val="tx1"/>
+          </a:fontRef>
+        </p:style>
+      </p:cxnSp>
+      <p:cxnSp>
+        <p:nvCxnSpPr>
+          <p:cNvPr id="56" name="Connecteur droit avec flèche 55">
+            <a:extLst>
+              <a:ext uri="{FF2B5EF4-FFF2-40B4-BE49-F238E27FC236}">
+                <a16:creationId xmlns:a16="http://schemas.microsoft.com/office/drawing/2014/main" id="{1A5EE17C-0CA0-1DB7-45B4-5AFA9FBF47AB}"/>
+              </a:ext>
+            </a:extLst>
+          </p:cNvPr>
+          <p:cNvCxnSpPr>
+            <a:cxnSpLocks/>
+          </p:cNvCxnSpPr>
+          <p:nvPr/>
+        </p:nvCxnSpPr>
+        <p:spPr>
+          <a:xfrm flipH="1">
+            <a:off x="3467611" y="5557602"/>
+            <a:ext cx="96976" cy="1030486"/>
+          </a:xfrm>
+          <a:prstGeom prst="straightConnector1">
+            <a:avLst/>
+          </a:prstGeom>
+          <a:ln w="25400">
+            <a:solidFill>
+              <a:srgbClr val="FF0000"/>
+            </a:solidFill>
+            <a:tailEnd type="triangle"/>
+          </a:ln>
+        </p:spPr>
+        <p:style>
+          <a:lnRef idx="2">
+            <a:schemeClr val="accent1"/>
+          </a:lnRef>
+          <a:fillRef idx="0">
+            <a:schemeClr val="accent1"/>
+          </a:fillRef>
+          <a:effectRef idx="1">
+            <a:schemeClr val="accent1"/>
+          </a:effectRef>
+          <a:fontRef idx="minor">
+            <a:schemeClr val="tx1"/>
+          </a:fontRef>
+        </p:style>
+      </p:cxnSp>
+      <p:sp>
+        <p:nvSpPr>
+          <p:cNvPr id="60" name="ZoneTexte 59">
+            <a:extLst>
+              <a:ext uri="{FF2B5EF4-FFF2-40B4-BE49-F238E27FC236}">
+                <a16:creationId xmlns:a16="http://schemas.microsoft.com/office/drawing/2014/main" id="{F75DD10D-811B-C631-0D78-A1F2DCB9EF66}"/>
+              </a:ext>
+            </a:extLst>
+          </p:cNvPr>
+          <p:cNvSpPr txBox="1"/>
+          <p:nvPr/>
+        </p:nvSpPr>
+        <p:spPr>
+          <a:xfrm>
+            <a:off x="4103067" y="5260857"/>
+            <a:ext cx="1070040" cy="646331"/>
+          </a:xfrm>
+          <a:prstGeom prst="rect">
+            <a:avLst/>
+          </a:prstGeom>
+          <a:noFill/>
+        </p:spPr>
+        <p:txBody>
+          <a:bodyPr wrap="square" rtlCol="0">
+            <a:spAutoFit/>
+          </a:bodyPr>
+          <a:lstStyle/>
+          <a:p>
+            <a:pPr algn="ctr"/>
+            <a:r>
+              <a:rPr lang="en-CA" sz="1200" dirty="0">
+                <a:solidFill>
+                  <a:srgbClr val="FF0000"/>
+                </a:solidFill>
+              </a:rPr>
+              <a:t>Device Datalogger state</a:t>
+            </a:r>
+          </a:p>
+        </p:txBody>
+      </p:sp>
+      <p:cxnSp>
+        <p:nvCxnSpPr>
+          <p:cNvPr id="61" name="Connecteur droit avec flèche 60">
+            <a:extLst>
+              <a:ext uri="{FF2B5EF4-FFF2-40B4-BE49-F238E27FC236}">
+                <a16:creationId xmlns:a16="http://schemas.microsoft.com/office/drawing/2014/main" id="{B6657CAC-E3AC-0424-CDCE-B3277E813655}"/>
+              </a:ext>
+            </a:extLst>
+          </p:cNvPr>
+          <p:cNvCxnSpPr>
+            <a:cxnSpLocks/>
+            <a:stCxn id="60" idx="2"/>
+          </p:cNvCxnSpPr>
+          <p:nvPr/>
+        </p:nvCxnSpPr>
+        <p:spPr>
+          <a:xfrm flipH="1">
+            <a:off x="4511703" y="5907188"/>
+            <a:ext cx="126384" cy="657780"/>
+          </a:xfrm>
+          <a:prstGeom prst="straightConnector1">
+            <a:avLst/>
+          </a:prstGeom>
+          <a:ln w="25400">
+            <a:solidFill>
+              <a:srgbClr val="FF0000"/>
+            </a:solidFill>
+            <a:tailEnd type="triangle"/>
+          </a:ln>
+        </p:spPr>
+        <p:style>
+          <a:lnRef idx="2">
+            <a:schemeClr val="accent1"/>
+          </a:lnRef>
+          <a:fillRef idx="0">
+            <a:schemeClr val="accent1"/>
+          </a:fillRef>
+          <a:effectRef idx="1">
+            <a:schemeClr val="accent1"/>
+          </a:effectRef>
+          <a:fontRef idx="minor">
+            <a:schemeClr val="tx1"/>
+          </a:fontRef>
+        </p:style>
+      </p:cxnSp>
+    </p:spTree>
+    <p:extLst>
+      <p:ext uri="{BB962C8B-B14F-4D97-AF65-F5344CB8AC3E}">
+        <p14:creationId xmlns:p14="http://schemas.microsoft.com/office/powerpoint/2010/main" val="3139708477"/>
+      </p:ext>
+    </p:extLst>
+  </p:cSld>
+  <p:clrMapOvr>
+    <a:masterClrMapping/>
+  </p:clrMapOvr>
+</p:sld>
+</file>
+
+<file path=ppt/slides/slide11.xml><?xml version="1.0" encoding="utf-8"?>
+<p:sld xmlns:a="http://schemas.openxmlformats.org/drawingml/2006/main" xmlns:r="http://schemas.openxmlformats.org/officeDocument/2006/relationships" xmlns:p="http://schemas.openxmlformats.org/presentationml/2006/main">
+  <p:cSld>
+    <p:spTree>
+      <p:nvGrpSpPr>
+        <p:cNvPr id="1" name=""/>
+        <p:cNvGrpSpPr/>
+        <p:nvPr/>
+      </p:nvGrpSpPr>
+      <p:grpSpPr>
+        <a:xfrm>
+          <a:off x="0" y="0"/>
+          <a:ext cx="0" cy="0"/>
+          <a:chOff x="0" y="0"/>
+          <a:chExt cx="0" cy="0"/>
+        </a:xfrm>
+      </p:grpSpPr>
+      <p:pic>
+        <p:nvPicPr>
+          <p:cNvPr id="5" name="Image 4">
+            <a:extLst>
+              <a:ext uri="{FF2B5EF4-FFF2-40B4-BE49-F238E27FC236}">
+                <a16:creationId xmlns:a16="http://schemas.microsoft.com/office/drawing/2014/main" id="{2890FDCE-DDC0-EE73-BE0F-A8CA6F475BC8}"/>
+              </a:ext>
+            </a:extLst>
+          </p:cNvPr>
+          <p:cNvPicPr>
+            <a:picLocks noChangeAspect="1"/>
+          </p:cNvPicPr>
+          <p:nvPr/>
+        </p:nvPicPr>
+        <p:blipFill>
+          <a:blip r:embed="rId2"/>
+          <a:stretch>
+            <a:fillRect/>
+          </a:stretch>
+        </p:blipFill>
+        <p:spPr>
+          <a:xfrm>
+            <a:off x="1485625" y="323416"/>
+            <a:ext cx="3943900" cy="6211167"/>
+          </a:xfrm>
+          <a:prstGeom prst="rect">
+            <a:avLst/>
+          </a:prstGeom>
+        </p:spPr>
+      </p:pic>
+      <p:sp>
+        <p:nvSpPr>
+          <p:cNvPr id="6" name="ZoneTexte 5">
+            <a:extLst>
+              <a:ext uri="{FF2B5EF4-FFF2-40B4-BE49-F238E27FC236}">
+                <a16:creationId xmlns:a16="http://schemas.microsoft.com/office/drawing/2014/main" id="{0E56CDCA-C272-9E43-FB8E-8E10472E4A76}"/>
+              </a:ext>
+            </a:extLst>
+          </p:cNvPr>
+          <p:cNvSpPr txBox="1"/>
+          <p:nvPr/>
+        </p:nvSpPr>
+        <p:spPr>
+          <a:xfrm>
+            <a:off x="6094095" y="1087874"/>
+            <a:ext cx="2476500" cy="1015663"/>
+          </a:xfrm>
+          <a:prstGeom prst="rect">
+            <a:avLst/>
+          </a:prstGeom>
+          <a:noFill/>
+        </p:spPr>
+        <p:txBody>
+          <a:bodyPr wrap="square" rtlCol="0">
+            <a:spAutoFit/>
+          </a:bodyPr>
+          <a:lstStyle/>
+          <a:p>
+            <a:r>
+              <a:rPr lang="en-CA" sz="1200" dirty="0">
+                <a:solidFill>
+                  <a:schemeClr val="accent1"/>
+                </a:solidFill>
+              </a:rPr>
+              <a:t>Firmware hash</a:t>
+            </a:r>
+          </a:p>
+          <a:p>
+            <a:r>
+              <a:rPr lang="en-CA" sz="1200" dirty="0">
+                <a:solidFill>
+                  <a:schemeClr val="accent1"/>
+                </a:solidFill>
+              </a:rPr>
+              <a:t>Name set in the firmware</a:t>
+            </a:r>
+          </a:p>
+          <a:p>
+            <a:r>
+              <a:rPr lang="en-CA" sz="1200" dirty="0">
+                <a:solidFill>
+                  <a:schemeClr val="accent1"/>
+                </a:solidFill>
+              </a:rPr>
+              <a:t>Architecture pointer size</a:t>
+            </a:r>
+          </a:p>
+          <a:p>
+            <a:endParaRPr lang="en-CA" sz="1200" dirty="0">
+              <a:solidFill>
+                <a:schemeClr val="accent1"/>
+              </a:solidFill>
+            </a:endParaRPr>
+          </a:p>
+          <a:p>
+            <a:endParaRPr lang="en-CA" sz="1200" dirty="0">
+              <a:solidFill>
+                <a:schemeClr val="accent1"/>
+              </a:solidFill>
+            </a:endParaRPr>
+          </a:p>
+        </p:txBody>
+      </p:sp>
+      <p:sp>
+        <p:nvSpPr>
+          <p:cNvPr id="9" name="ZoneTexte 8">
+            <a:extLst>
+              <a:ext uri="{FF2B5EF4-FFF2-40B4-BE49-F238E27FC236}">
+                <a16:creationId xmlns:a16="http://schemas.microsoft.com/office/drawing/2014/main" id="{3011D599-9A3A-F687-8EA4-B93885670F10}"/>
+              </a:ext>
+            </a:extLst>
+          </p:cNvPr>
+          <p:cNvSpPr txBox="1"/>
+          <p:nvPr/>
+        </p:nvSpPr>
+        <p:spPr>
+          <a:xfrm>
+            <a:off x="6094095" y="1873270"/>
+            <a:ext cx="2476500" cy="461665"/>
+          </a:xfrm>
+          <a:prstGeom prst="rect">
+            <a:avLst/>
+          </a:prstGeom>
+          <a:noFill/>
+        </p:spPr>
+        <p:txBody>
+          <a:bodyPr wrap="square" rtlCol="0">
+            <a:spAutoFit/>
+          </a:bodyPr>
+          <a:lstStyle/>
+          <a:p>
+            <a:r>
+              <a:rPr lang="en-CA" sz="1200" dirty="0">
+                <a:solidFill>
+                  <a:schemeClr val="accent1"/>
+                </a:solidFill>
+              </a:rPr>
+              <a:t>Compile time features enabled</a:t>
+            </a:r>
+          </a:p>
+          <a:p>
+            <a:r>
+              <a:rPr lang="en-CA" sz="1200" dirty="0">
+                <a:solidFill>
+                  <a:schemeClr val="accent1"/>
+                </a:solidFill>
+              </a:rPr>
+              <a:t>(see instrumentation guide)</a:t>
+            </a:r>
+          </a:p>
+        </p:txBody>
+      </p:sp>
+      <p:sp>
+        <p:nvSpPr>
+          <p:cNvPr id="10" name="ZoneTexte 9">
+            <a:extLst>
+              <a:ext uri="{FF2B5EF4-FFF2-40B4-BE49-F238E27FC236}">
+                <a16:creationId xmlns:a16="http://schemas.microsoft.com/office/drawing/2014/main" id="{B9DD11F5-82DA-8483-0F22-B159320289AA}"/>
+              </a:ext>
+            </a:extLst>
+          </p:cNvPr>
+          <p:cNvSpPr txBox="1"/>
+          <p:nvPr/>
+        </p:nvSpPr>
+        <p:spPr>
+          <a:xfrm>
+            <a:off x="6096000" y="2450352"/>
+            <a:ext cx="2476500" cy="461665"/>
+          </a:xfrm>
+          <a:prstGeom prst="rect">
+            <a:avLst/>
+          </a:prstGeom>
+          <a:noFill/>
+        </p:spPr>
+        <p:txBody>
+          <a:bodyPr wrap="square" rtlCol="0">
+            <a:spAutoFit/>
+          </a:bodyPr>
+          <a:lstStyle/>
+          <a:p>
+            <a:r>
+              <a:rPr lang="en-CA" sz="1200" dirty="0">
+                <a:solidFill>
+                  <a:schemeClr val="accent1"/>
+                </a:solidFill>
+              </a:rPr>
+              <a:t>Protected memory regions defined in the firmware (if any)</a:t>
+            </a:r>
+          </a:p>
+        </p:txBody>
+      </p:sp>
+      <p:sp>
+        <p:nvSpPr>
+          <p:cNvPr id="11" name="ZoneTexte 10">
+            <a:extLst>
+              <a:ext uri="{FF2B5EF4-FFF2-40B4-BE49-F238E27FC236}">
+                <a16:creationId xmlns:a16="http://schemas.microsoft.com/office/drawing/2014/main" id="{00D4C973-B6B0-EE80-7D26-212FFA778F2A}"/>
+              </a:ext>
+            </a:extLst>
+          </p:cNvPr>
+          <p:cNvSpPr txBox="1"/>
+          <p:nvPr/>
+        </p:nvSpPr>
+        <p:spPr>
+          <a:xfrm>
+            <a:off x="6094095" y="3638824"/>
+            <a:ext cx="2476500" cy="461665"/>
+          </a:xfrm>
+          <a:prstGeom prst="rect">
+            <a:avLst/>
+          </a:prstGeom>
+          <a:noFill/>
+        </p:spPr>
+        <p:txBody>
+          <a:bodyPr wrap="square" rtlCol="0">
+            <a:spAutoFit/>
+          </a:bodyPr>
+          <a:lstStyle/>
+          <a:p>
+            <a:r>
+              <a:rPr lang="en-CA" sz="1200" dirty="0">
+                <a:solidFill>
+                  <a:schemeClr val="accent1"/>
+                </a:solidFill>
+              </a:rPr>
+              <a:t>Communication parameters set in the firmware</a:t>
+            </a:r>
+          </a:p>
+        </p:txBody>
+      </p:sp>
+      <p:sp>
+        <p:nvSpPr>
+          <p:cNvPr id="12" name="ZoneTexte 11">
+            <a:extLst>
+              <a:ext uri="{FF2B5EF4-FFF2-40B4-BE49-F238E27FC236}">
+                <a16:creationId xmlns:a16="http://schemas.microsoft.com/office/drawing/2014/main" id="{D46356CB-7CC4-4EDD-D4DA-20A325C32156}"/>
+              </a:ext>
+            </a:extLst>
+          </p:cNvPr>
+          <p:cNvSpPr txBox="1"/>
+          <p:nvPr/>
+        </p:nvSpPr>
+        <p:spPr>
+          <a:xfrm>
+            <a:off x="6094095" y="4271494"/>
+            <a:ext cx="1849755" cy="461665"/>
+          </a:xfrm>
+          <a:prstGeom prst="rect">
+            <a:avLst/>
+          </a:prstGeom>
+          <a:noFill/>
+        </p:spPr>
+        <p:txBody>
+          <a:bodyPr wrap="square" rtlCol="0">
+            <a:spAutoFit/>
+          </a:bodyPr>
+          <a:lstStyle/>
+          <a:p>
+            <a:r>
+              <a:rPr lang="en-CA" sz="1200" dirty="0">
+                <a:solidFill>
+                  <a:schemeClr val="accent1"/>
+                </a:solidFill>
+              </a:rPr>
+              <a:t>Firmware timeouts (compile-time constants)</a:t>
+            </a:r>
+          </a:p>
+        </p:txBody>
+      </p:sp>
+      <p:cxnSp>
+        <p:nvCxnSpPr>
+          <p:cNvPr id="17" name="Connecteur droit avec flèche 16">
+            <a:extLst>
+              <a:ext uri="{FF2B5EF4-FFF2-40B4-BE49-F238E27FC236}">
+                <a16:creationId xmlns:a16="http://schemas.microsoft.com/office/drawing/2014/main" id="{7177C276-5E60-8E78-FA9D-B811F5BFAB0C}"/>
+              </a:ext>
+            </a:extLst>
+          </p:cNvPr>
+          <p:cNvCxnSpPr>
+            <a:cxnSpLocks/>
+          </p:cNvCxnSpPr>
+          <p:nvPr/>
+        </p:nvCxnSpPr>
+        <p:spPr>
+          <a:xfrm flipH="1">
+            <a:off x="4063365" y="1411797"/>
+            <a:ext cx="2038350" cy="239"/>
+          </a:xfrm>
+          <a:prstGeom prst="straightConnector1">
+            <a:avLst/>
+          </a:prstGeom>
+          <a:ln>
+            <a:tailEnd type="triangle"/>
+          </a:ln>
+        </p:spPr>
+        <p:style>
+          <a:lnRef idx="1">
+            <a:schemeClr val="accent1"/>
+          </a:lnRef>
+          <a:fillRef idx="0">
+            <a:schemeClr val="accent1"/>
+          </a:fillRef>
+          <a:effectRef idx="0">
+            <a:schemeClr val="accent1"/>
+          </a:effectRef>
+          <a:fontRef idx="minor">
+            <a:schemeClr val="tx1"/>
+          </a:fontRef>
+        </p:style>
+      </p:cxnSp>
+      <p:cxnSp>
+        <p:nvCxnSpPr>
+          <p:cNvPr id="20" name="Connecteur droit avec flèche 19">
+            <a:extLst>
+              <a:ext uri="{FF2B5EF4-FFF2-40B4-BE49-F238E27FC236}">
+                <a16:creationId xmlns:a16="http://schemas.microsoft.com/office/drawing/2014/main" id="{7FB4CA50-DB36-2173-12A5-7888C7E37B98}"/>
+              </a:ext>
+            </a:extLst>
+          </p:cNvPr>
+          <p:cNvCxnSpPr>
+            <a:cxnSpLocks/>
+          </p:cNvCxnSpPr>
+          <p:nvPr/>
+        </p:nvCxnSpPr>
+        <p:spPr>
+          <a:xfrm flipH="1" flipV="1">
+            <a:off x="3695700" y="1596230"/>
+            <a:ext cx="2400300" cy="12123"/>
+          </a:xfrm>
+          <a:prstGeom prst="straightConnector1">
+            <a:avLst/>
+          </a:prstGeom>
+          <a:ln>
+            <a:tailEnd type="triangle"/>
+          </a:ln>
+        </p:spPr>
+        <p:style>
+          <a:lnRef idx="1">
+            <a:schemeClr val="accent1"/>
+          </a:lnRef>
+          <a:fillRef idx="0">
+            <a:schemeClr val="accent1"/>
+          </a:fillRef>
+          <a:effectRef idx="0">
+            <a:schemeClr val="accent1"/>
+          </a:effectRef>
+          <a:fontRef idx="minor">
+            <a:schemeClr val="tx1"/>
+          </a:fontRef>
+        </p:style>
+      </p:cxnSp>
+      <p:cxnSp>
+        <p:nvCxnSpPr>
+          <p:cNvPr id="23" name="Connecteur droit avec flèche 22">
+            <a:extLst>
+              <a:ext uri="{FF2B5EF4-FFF2-40B4-BE49-F238E27FC236}">
+                <a16:creationId xmlns:a16="http://schemas.microsoft.com/office/drawing/2014/main" id="{BE2097CB-D9A0-16B8-96BD-E5788A1FF56B}"/>
+              </a:ext>
+            </a:extLst>
+          </p:cNvPr>
+          <p:cNvCxnSpPr>
+            <a:cxnSpLocks/>
+            <a:stCxn id="9" idx="1"/>
+          </p:cNvCxnSpPr>
+          <p:nvPr/>
+        </p:nvCxnSpPr>
+        <p:spPr>
+          <a:xfrm flipH="1">
+            <a:off x="4505325" y="2104103"/>
+            <a:ext cx="1588770" cy="0"/>
+          </a:xfrm>
+          <a:prstGeom prst="straightConnector1">
+            <a:avLst/>
+          </a:prstGeom>
+          <a:ln>
+            <a:tailEnd type="triangle"/>
+          </a:ln>
+        </p:spPr>
+        <p:style>
+          <a:lnRef idx="1">
+            <a:schemeClr val="accent1"/>
+          </a:lnRef>
+          <a:fillRef idx="0">
+            <a:schemeClr val="accent1"/>
+          </a:fillRef>
+          <a:effectRef idx="0">
+            <a:schemeClr val="accent1"/>
+          </a:effectRef>
+          <a:fontRef idx="minor">
+            <a:schemeClr val="tx1"/>
+          </a:fontRef>
+        </p:style>
+      </p:cxnSp>
+      <p:cxnSp>
+        <p:nvCxnSpPr>
+          <p:cNvPr id="26" name="Connecteur droit avec flèche 25">
+            <a:extLst>
+              <a:ext uri="{FF2B5EF4-FFF2-40B4-BE49-F238E27FC236}">
+                <a16:creationId xmlns:a16="http://schemas.microsoft.com/office/drawing/2014/main" id="{AE6CA849-F084-3602-1721-E6A1F4FFF261}"/>
+              </a:ext>
+            </a:extLst>
+          </p:cNvPr>
+          <p:cNvCxnSpPr>
+            <a:cxnSpLocks/>
+            <a:stCxn id="10" idx="1"/>
+          </p:cNvCxnSpPr>
+          <p:nvPr/>
+        </p:nvCxnSpPr>
+        <p:spPr>
+          <a:xfrm flipH="1">
+            <a:off x="3695700" y="2681185"/>
+            <a:ext cx="2400300" cy="3451"/>
+          </a:xfrm>
+          <a:prstGeom prst="straightConnector1">
+            <a:avLst/>
+          </a:prstGeom>
+          <a:ln>
+            <a:tailEnd type="triangle"/>
+          </a:ln>
+        </p:spPr>
+        <p:style>
+          <a:lnRef idx="1">
+            <a:schemeClr val="accent1"/>
+          </a:lnRef>
+          <a:fillRef idx="0">
+            <a:schemeClr val="accent1"/>
+          </a:fillRef>
+          <a:effectRef idx="0">
+            <a:schemeClr val="accent1"/>
+          </a:effectRef>
+          <a:fontRef idx="minor">
+            <a:schemeClr val="tx1"/>
+          </a:fontRef>
+        </p:style>
+      </p:cxnSp>
+      <p:cxnSp>
+        <p:nvCxnSpPr>
+          <p:cNvPr id="43" name="Connecteur droit avec flèche 42">
+            <a:extLst>
+              <a:ext uri="{FF2B5EF4-FFF2-40B4-BE49-F238E27FC236}">
+                <a16:creationId xmlns:a16="http://schemas.microsoft.com/office/drawing/2014/main" id="{E7581825-A114-38CC-3E99-F925C778E91B}"/>
+              </a:ext>
+            </a:extLst>
+          </p:cNvPr>
+          <p:cNvCxnSpPr>
+            <a:cxnSpLocks/>
+            <a:stCxn id="12" idx="1"/>
+          </p:cNvCxnSpPr>
+          <p:nvPr/>
+        </p:nvCxnSpPr>
+        <p:spPr>
+          <a:xfrm flipH="1">
+            <a:off x="3595825" y="4502327"/>
+            <a:ext cx="2498270" cy="3451"/>
+          </a:xfrm>
+          <a:prstGeom prst="straightConnector1">
+            <a:avLst/>
+          </a:prstGeom>
+          <a:ln>
+            <a:tailEnd type="triangle"/>
+          </a:ln>
+        </p:spPr>
+        <p:style>
+          <a:lnRef idx="1">
+            <a:schemeClr val="accent1"/>
+          </a:lnRef>
+          <a:fillRef idx="0">
+            <a:schemeClr val="accent1"/>
+          </a:fillRef>
+          <a:effectRef idx="0">
+            <a:schemeClr val="accent1"/>
+          </a:effectRef>
+          <a:fontRef idx="minor">
+            <a:schemeClr val="tx1"/>
+          </a:fontRef>
+        </p:style>
+      </p:cxnSp>
+      <p:cxnSp>
+        <p:nvCxnSpPr>
+          <p:cNvPr id="46" name="Connecteur droit avec flèche 45">
+            <a:extLst>
+              <a:ext uri="{FF2B5EF4-FFF2-40B4-BE49-F238E27FC236}">
+                <a16:creationId xmlns:a16="http://schemas.microsoft.com/office/drawing/2014/main" id="{F311C648-2FB6-C158-74F8-B829060F2077}"/>
+              </a:ext>
+            </a:extLst>
+          </p:cNvPr>
+          <p:cNvCxnSpPr>
+            <a:cxnSpLocks/>
+            <a:stCxn id="11" idx="1"/>
+          </p:cNvCxnSpPr>
+          <p:nvPr/>
+        </p:nvCxnSpPr>
+        <p:spPr>
+          <a:xfrm flipH="1">
+            <a:off x="3595825" y="3869657"/>
+            <a:ext cx="2498270" cy="0"/>
+          </a:xfrm>
+          <a:prstGeom prst="straightConnector1">
+            <a:avLst/>
+          </a:prstGeom>
+          <a:ln>
+            <a:tailEnd type="triangle"/>
+          </a:ln>
+        </p:spPr>
+        <p:style>
+          <a:lnRef idx="1">
+            <a:schemeClr val="accent1"/>
+          </a:lnRef>
+          <a:fillRef idx="0">
+            <a:schemeClr val="accent1"/>
+          </a:fillRef>
+          <a:effectRef idx="0">
+            <a:schemeClr val="accent1"/>
+          </a:effectRef>
+          <a:fontRef idx="minor">
+            <a:schemeClr val="tx1"/>
+          </a:fontRef>
+        </p:style>
+      </p:cxnSp>
+      <p:cxnSp>
+        <p:nvCxnSpPr>
+          <p:cNvPr id="54" name="Connecteur droit avec flèche 53">
+            <a:extLst>
+              <a:ext uri="{FF2B5EF4-FFF2-40B4-BE49-F238E27FC236}">
+                <a16:creationId xmlns:a16="http://schemas.microsoft.com/office/drawing/2014/main" id="{8C243B74-CB26-BDF5-522D-0B0FE2AFB7C3}"/>
+              </a:ext>
+            </a:extLst>
+          </p:cNvPr>
+          <p:cNvCxnSpPr>
+            <a:cxnSpLocks/>
+          </p:cNvCxnSpPr>
+          <p:nvPr/>
+        </p:nvCxnSpPr>
+        <p:spPr>
+          <a:xfrm flipH="1">
+            <a:off x="5133975" y="1221196"/>
+            <a:ext cx="960120" cy="0"/>
+          </a:xfrm>
+          <a:prstGeom prst="straightConnector1">
+            <a:avLst/>
+          </a:prstGeom>
+          <a:ln>
+            <a:tailEnd type="triangle"/>
+          </a:ln>
+        </p:spPr>
+        <p:style>
+          <a:lnRef idx="1">
+            <a:schemeClr val="accent1"/>
+          </a:lnRef>
+          <a:fillRef idx="0">
+            <a:schemeClr val="accent1"/>
+          </a:fillRef>
+          <a:effectRef idx="0">
+            <a:schemeClr val="accent1"/>
+          </a:effectRef>
+          <a:fontRef idx="minor">
+            <a:schemeClr val="tx1"/>
+          </a:fontRef>
+        </p:style>
+      </p:cxnSp>
+      <p:sp>
+        <p:nvSpPr>
+          <p:cNvPr id="64" name="ZoneTexte 63">
+            <a:extLst>
+              <a:ext uri="{FF2B5EF4-FFF2-40B4-BE49-F238E27FC236}">
+                <a16:creationId xmlns:a16="http://schemas.microsoft.com/office/drawing/2014/main" id="{2A09E000-BB1B-3F92-D836-75373343838D}"/>
+              </a:ext>
+            </a:extLst>
+          </p:cNvPr>
+          <p:cNvSpPr txBox="1"/>
+          <p:nvPr/>
+        </p:nvSpPr>
+        <p:spPr>
+          <a:xfrm>
+            <a:off x="6094094" y="5604177"/>
+            <a:ext cx="1849755" cy="276999"/>
+          </a:xfrm>
+          <a:prstGeom prst="rect">
+            <a:avLst/>
+          </a:prstGeom>
+          <a:noFill/>
+        </p:spPr>
+        <p:txBody>
+          <a:bodyPr wrap="square" rtlCol="0">
+            <a:spAutoFit/>
+          </a:bodyPr>
+          <a:lstStyle/>
+          <a:p>
+            <a:r>
+              <a:rPr lang="en-CA" sz="1200" dirty="0">
+                <a:solidFill>
+                  <a:schemeClr val="accent1"/>
+                </a:solidFill>
+              </a:rPr>
+              <a:t>Datalogging configuration</a:t>
+            </a:r>
+          </a:p>
+        </p:txBody>
+      </p:sp>
+      <p:cxnSp>
+        <p:nvCxnSpPr>
+          <p:cNvPr id="65" name="Connecteur droit avec flèche 64">
+            <a:extLst>
+              <a:ext uri="{FF2B5EF4-FFF2-40B4-BE49-F238E27FC236}">
+                <a16:creationId xmlns:a16="http://schemas.microsoft.com/office/drawing/2014/main" id="{F5654439-1D05-A4D6-F8B9-86C00757BC82}"/>
+              </a:ext>
+            </a:extLst>
+          </p:cNvPr>
+          <p:cNvCxnSpPr>
+            <a:cxnSpLocks/>
+          </p:cNvCxnSpPr>
+          <p:nvPr/>
+        </p:nvCxnSpPr>
+        <p:spPr>
+          <a:xfrm flipH="1">
+            <a:off x="3457575" y="5776135"/>
+            <a:ext cx="2498270" cy="3451"/>
+          </a:xfrm>
+          <a:prstGeom prst="straightConnector1">
+            <a:avLst/>
+          </a:prstGeom>
+          <a:ln>
+            <a:tailEnd type="triangle"/>
+          </a:ln>
+        </p:spPr>
+        <p:style>
+          <a:lnRef idx="1">
+            <a:schemeClr val="accent1"/>
+          </a:lnRef>
+          <a:fillRef idx="0">
+            <a:schemeClr val="accent1"/>
+          </a:fillRef>
+          <a:effectRef idx="0">
+            <a:schemeClr val="accent1"/>
+          </a:effectRef>
+          <a:fontRef idx="minor">
+            <a:schemeClr val="tx1"/>
+          </a:fontRef>
+        </p:style>
+      </p:cxnSp>
+    </p:spTree>
+    <p:extLst>
+      <p:ext uri="{BB962C8B-B14F-4D97-AF65-F5344CB8AC3E}">
+        <p14:creationId xmlns:p14="http://schemas.microsoft.com/office/powerpoint/2010/main" val="455479419"/>
       </p:ext>
     </p:extLst>
   </p:cSld>

--- a/graphics/graphics.pptx
+++ b/graphics/graphics.pptx
@@ -6,7 +6,7 @@
     <p:sldMasterId id="2147483660" r:id="rId2"/>
   </p:sldMasterIdLst>
   <p:notesMasterIdLst>
-    <p:notesMasterId r:id="rId14"/>
+    <p:notesMasterId r:id="rId18"/>
   </p:notesMasterIdLst>
   <p:sldIdLst>
     <p:sldId id="259" r:id="rId3"/>
@@ -20,6 +20,10 @@
     <p:sldId id="266" r:id="rId11"/>
     <p:sldId id="268" r:id="rId12"/>
     <p:sldId id="269" r:id="rId13"/>
+    <p:sldId id="270" r:id="rId14"/>
+    <p:sldId id="271" r:id="rId15"/>
+    <p:sldId id="272" r:id="rId16"/>
+    <p:sldId id="273" r:id="rId17"/>
   </p:sldIdLst>
   <p:sldSz cx="12192000" cy="6858000"/>
   <p:notesSz cx="6858000" cy="9144000"/>
@@ -208,7 +212,7 @@
           <a:p>
             <a:fld id="{B8404A9E-F80D-47A3-9ABE-4E375F8C7A58}" type="datetimeFigureOut">
               <a:rPr lang="fr-CA" smtClean="0"/>
-              <a:t>2026-03-25</a:t>
+              <a:t>2026-03-28</a:t>
             </a:fld>
             <a:endParaRPr lang="fr-CA"/>
           </a:p>
@@ -709,7 +713,7 @@
           <a:p>
             <a:fld id="{B1B97C2F-ED53-40B2-8245-274A53568F1F}" type="datetimeFigureOut">
               <a:rPr lang="fr-CA" smtClean="0"/>
-              <a:t>2026-03-25</a:t>
+              <a:t>2026-03-28</a:t>
             </a:fld>
             <a:endParaRPr lang="fr-CA"/>
           </a:p>
@@ -909,7 +913,7 @@
           <a:p>
             <a:fld id="{B1B97C2F-ED53-40B2-8245-274A53568F1F}" type="datetimeFigureOut">
               <a:rPr lang="fr-CA" smtClean="0"/>
-              <a:t>2026-03-25</a:t>
+              <a:t>2026-03-28</a:t>
             </a:fld>
             <a:endParaRPr lang="fr-CA"/>
           </a:p>
@@ -1119,7 +1123,7 @@
           <a:p>
             <a:fld id="{B1B97C2F-ED53-40B2-8245-274A53568F1F}" type="datetimeFigureOut">
               <a:rPr lang="fr-CA" smtClean="0"/>
-              <a:t>2026-03-25</a:t>
+              <a:t>2026-03-28</a:t>
             </a:fld>
             <a:endParaRPr lang="fr-CA"/>
           </a:p>
@@ -1341,7 +1345,7 @@
           <a:p>
             <a:fld id="{3CFA78C3-2C03-4D26-BA08-5201FB292C09}" type="datetimeFigureOut">
               <a:rPr lang="fr-CA" smtClean="0"/>
-              <a:t>2026-03-25</a:t>
+              <a:t>2026-03-28</a:t>
             </a:fld>
             <a:endParaRPr lang="fr-CA"/>
           </a:p>
@@ -1541,7 +1545,7 @@
           <a:p>
             <a:fld id="{3CFA78C3-2C03-4D26-BA08-5201FB292C09}" type="datetimeFigureOut">
               <a:rPr lang="fr-CA" smtClean="0"/>
-              <a:t>2026-03-25</a:t>
+              <a:t>2026-03-28</a:t>
             </a:fld>
             <a:endParaRPr lang="fr-CA"/>
           </a:p>
@@ -1817,7 +1821,7 @@
           <a:p>
             <a:fld id="{3CFA78C3-2C03-4D26-BA08-5201FB292C09}" type="datetimeFigureOut">
               <a:rPr lang="fr-CA" smtClean="0"/>
-              <a:t>2026-03-25</a:t>
+              <a:t>2026-03-28</a:t>
             </a:fld>
             <a:endParaRPr lang="fr-CA"/>
           </a:p>
@@ -2085,7 +2089,7 @@
           <a:p>
             <a:fld id="{3CFA78C3-2C03-4D26-BA08-5201FB292C09}" type="datetimeFigureOut">
               <a:rPr lang="fr-CA" smtClean="0"/>
-              <a:t>2026-03-25</a:t>
+              <a:t>2026-03-28</a:t>
             </a:fld>
             <a:endParaRPr lang="fr-CA"/>
           </a:p>
@@ -2500,7 +2504,7 @@
           <a:p>
             <a:fld id="{3CFA78C3-2C03-4D26-BA08-5201FB292C09}" type="datetimeFigureOut">
               <a:rPr lang="fr-CA" smtClean="0"/>
-              <a:t>2026-03-25</a:t>
+              <a:t>2026-03-28</a:t>
             </a:fld>
             <a:endParaRPr lang="fr-CA"/>
           </a:p>
@@ -2642,7 +2646,7 @@
           <a:p>
             <a:fld id="{3CFA78C3-2C03-4D26-BA08-5201FB292C09}" type="datetimeFigureOut">
               <a:rPr lang="fr-CA" smtClean="0"/>
-              <a:t>2026-03-25</a:t>
+              <a:t>2026-03-28</a:t>
             </a:fld>
             <a:endParaRPr lang="fr-CA"/>
           </a:p>
@@ -2755,7 +2759,7 @@
           <a:p>
             <a:fld id="{3CFA78C3-2C03-4D26-BA08-5201FB292C09}" type="datetimeFigureOut">
               <a:rPr lang="fr-CA" smtClean="0"/>
-              <a:t>2026-03-25</a:t>
+              <a:t>2026-03-28</a:t>
             </a:fld>
             <a:endParaRPr lang="fr-CA"/>
           </a:p>
@@ -3068,7 +3072,7 @@
           <a:p>
             <a:fld id="{3CFA78C3-2C03-4D26-BA08-5201FB292C09}" type="datetimeFigureOut">
               <a:rPr lang="fr-CA" smtClean="0"/>
-              <a:t>2026-03-25</a:t>
+              <a:t>2026-03-28</a:t>
             </a:fld>
             <a:endParaRPr lang="fr-CA"/>
           </a:p>
@@ -3268,7 +3272,7 @@
           <a:p>
             <a:fld id="{B1B97C2F-ED53-40B2-8245-274A53568F1F}" type="datetimeFigureOut">
               <a:rPr lang="fr-CA" smtClean="0"/>
-              <a:t>2026-03-25</a:t>
+              <a:t>2026-03-28</a:t>
             </a:fld>
             <a:endParaRPr lang="fr-CA"/>
           </a:p>
@@ -3557,7 +3561,7 @@
           <a:p>
             <a:fld id="{3CFA78C3-2C03-4D26-BA08-5201FB292C09}" type="datetimeFigureOut">
               <a:rPr lang="fr-CA" smtClean="0"/>
-              <a:t>2026-03-25</a:t>
+              <a:t>2026-03-28</a:t>
             </a:fld>
             <a:endParaRPr lang="fr-CA"/>
           </a:p>
@@ -3757,7 +3761,7 @@
           <a:p>
             <a:fld id="{3CFA78C3-2C03-4D26-BA08-5201FB292C09}" type="datetimeFigureOut">
               <a:rPr lang="fr-CA" smtClean="0"/>
-              <a:t>2026-03-25</a:t>
+              <a:t>2026-03-28</a:t>
             </a:fld>
             <a:endParaRPr lang="fr-CA"/>
           </a:p>
@@ -3967,7 +3971,7 @@
           <a:p>
             <a:fld id="{3CFA78C3-2C03-4D26-BA08-5201FB292C09}" type="datetimeFigureOut">
               <a:rPr lang="fr-CA" smtClean="0"/>
-              <a:t>2026-03-25</a:t>
+              <a:t>2026-03-28</a:t>
             </a:fld>
             <a:endParaRPr lang="fr-CA"/>
           </a:p>
@@ -4243,7 +4247,7 @@
           <a:p>
             <a:fld id="{B1B97C2F-ED53-40B2-8245-274A53568F1F}" type="datetimeFigureOut">
               <a:rPr lang="fr-CA" smtClean="0"/>
-              <a:t>2026-03-25</a:t>
+              <a:t>2026-03-28</a:t>
             </a:fld>
             <a:endParaRPr lang="fr-CA"/>
           </a:p>
@@ -4511,7 +4515,7 @@
           <a:p>
             <a:fld id="{B1B97C2F-ED53-40B2-8245-274A53568F1F}" type="datetimeFigureOut">
               <a:rPr lang="fr-CA" smtClean="0"/>
-              <a:t>2026-03-25</a:t>
+              <a:t>2026-03-28</a:t>
             </a:fld>
             <a:endParaRPr lang="fr-CA"/>
           </a:p>
@@ -4926,7 +4930,7 @@
           <a:p>
             <a:fld id="{B1B97C2F-ED53-40B2-8245-274A53568F1F}" type="datetimeFigureOut">
               <a:rPr lang="fr-CA" smtClean="0"/>
-              <a:t>2026-03-25</a:t>
+              <a:t>2026-03-28</a:t>
             </a:fld>
             <a:endParaRPr lang="fr-CA"/>
           </a:p>
@@ -5068,7 +5072,7 @@
           <a:p>
             <a:fld id="{B1B97C2F-ED53-40B2-8245-274A53568F1F}" type="datetimeFigureOut">
               <a:rPr lang="fr-CA" smtClean="0"/>
-              <a:t>2026-03-25</a:t>
+              <a:t>2026-03-28</a:t>
             </a:fld>
             <a:endParaRPr lang="fr-CA"/>
           </a:p>
@@ -5181,7 +5185,7 @@
           <a:p>
             <a:fld id="{B1B97C2F-ED53-40B2-8245-274A53568F1F}" type="datetimeFigureOut">
               <a:rPr lang="fr-CA" smtClean="0"/>
-              <a:t>2026-03-25</a:t>
+              <a:t>2026-03-28</a:t>
             </a:fld>
             <a:endParaRPr lang="fr-CA"/>
           </a:p>
@@ -5494,7 +5498,7 @@
           <a:p>
             <a:fld id="{B1B97C2F-ED53-40B2-8245-274A53568F1F}" type="datetimeFigureOut">
               <a:rPr lang="fr-CA" smtClean="0"/>
-              <a:t>2026-03-25</a:t>
+              <a:t>2026-03-28</a:t>
             </a:fld>
             <a:endParaRPr lang="fr-CA"/>
           </a:p>
@@ -5783,7 +5787,7 @@
           <a:p>
             <a:fld id="{B1B97C2F-ED53-40B2-8245-274A53568F1F}" type="datetimeFigureOut">
               <a:rPr lang="fr-CA" smtClean="0"/>
-              <a:t>2026-03-25</a:t>
+              <a:t>2026-03-28</a:t>
             </a:fld>
             <a:endParaRPr lang="fr-CA"/>
           </a:p>
@@ -6026,7 +6030,7 @@
           <a:p>
             <a:fld id="{B1B97C2F-ED53-40B2-8245-274A53568F1F}" type="datetimeFigureOut">
               <a:rPr lang="fr-CA" smtClean="0"/>
-              <a:t>2026-03-25</a:t>
+              <a:t>2026-03-28</a:t>
             </a:fld>
             <a:endParaRPr lang="fr-CA"/>
           </a:p>
@@ -6596,7 +6600,7 @@
           <a:p>
             <a:fld id="{3CFA78C3-2C03-4D26-BA08-5201FB292C09}" type="datetimeFigureOut">
               <a:rPr lang="fr-CA" smtClean="0"/>
-              <a:t>2026-03-25</a:t>
+              <a:t>2026-03-28</a:t>
             </a:fld>
             <a:endParaRPr lang="fr-CA"/>
           </a:p>
@@ -10247,6 +10251,1134 @@
     <p:extLst>
       <p:ext uri="{BB962C8B-B14F-4D97-AF65-F5344CB8AC3E}">
         <p14:creationId xmlns:p14="http://schemas.microsoft.com/office/powerpoint/2010/main" val="455479419"/>
+      </p:ext>
+    </p:extLst>
+  </p:cSld>
+  <p:clrMapOvr>
+    <a:masterClrMapping/>
+  </p:clrMapOvr>
+</p:sld>
+</file>
+
+<file path=ppt/slides/slide12.xml><?xml version="1.0" encoding="utf-8"?>
+<p:sld xmlns:a="http://schemas.openxmlformats.org/drawingml/2006/main" xmlns:r="http://schemas.openxmlformats.org/officeDocument/2006/relationships" xmlns:p="http://schemas.openxmlformats.org/presentationml/2006/main">
+  <p:cSld>
+    <p:spTree>
+      <p:nvGrpSpPr>
+        <p:cNvPr id="1" name=""/>
+        <p:cNvGrpSpPr/>
+        <p:nvPr/>
+      </p:nvGrpSpPr>
+      <p:grpSpPr>
+        <a:xfrm>
+          <a:off x="0" y="0"/>
+          <a:ext cx="0" cy="0"/>
+          <a:chOff x="0" y="0"/>
+          <a:chExt cx="0" cy="0"/>
+        </a:xfrm>
+      </p:grpSpPr>
+      <p:pic>
+        <p:nvPicPr>
+          <p:cNvPr id="5" name="Image 4">
+            <a:extLst>
+              <a:ext uri="{FF2B5EF4-FFF2-40B4-BE49-F238E27FC236}">
+                <a16:creationId xmlns:a16="http://schemas.microsoft.com/office/drawing/2014/main" id="{2C3753BE-E7E8-0AE1-BB45-95966A2A30D7}"/>
+              </a:ext>
+            </a:extLst>
+          </p:cNvPr>
+          <p:cNvPicPr>
+            <a:picLocks noChangeAspect="1"/>
+          </p:cNvPicPr>
+          <p:nvPr/>
+        </p:nvPicPr>
+        <p:blipFill>
+          <a:blip r:embed="rId2">
+            <a:extLst>
+              <a:ext uri="{28A0092B-C50C-407E-A947-70E740481C1C}">
+                <a14:useLocalDpi xmlns:a14="http://schemas.microsoft.com/office/drawing/2010/main" val="0"/>
+              </a:ext>
+            </a:extLst>
+          </a:blip>
+          <a:stretch>
+            <a:fillRect/>
+          </a:stretch>
+        </p:blipFill>
+        <p:spPr>
+          <a:xfrm>
+            <a:off x="1499082" y="480686"/>
+            <a:ext cx="6735115" cy="4677428"/>
+          </a:xfrm>
+          <a:prstGeom prst="rect">
+            <a:avLst/>
+          </a:prstGeom>
+        </p:spPr>
+      </p:pic>
+      <p:sp>
+        <p:nvSpPr>
+          <p:cNvPr id="6" name="ZoneTexte 5">
+            <a:extLst>
+              <a:ext uri="{FF2B5EF4-FFF2-40B4-BE49-F238E27FC236}">
+                <a16:creationId xmlns:a16="http://schemas.microsoft.com/office/drawing/2014/main" id="{2DA519D9-BA4C-84D0-9FA5-B86E62127C36}"/>
+              </a:ext>
+            </a:extLst>
+          </p:cNvPr>
+          <p:cNvSpPr txBox="1"/>
+          <p:nvPr/>
+        </p:nvSpPr>
+        <p:spPr>
+          <a:xfrm>
+            <a:off x="4210050" y="1238250"/>
+            <a:ext cx="1028295" cy="307777"/>
+          </a:xfrm>
+          <a:prstGeom prst="rect">
+            <a:avLst/>
+          </a:prstGeom>
+          <a:noFill/>
+        </p:spPr>
+        <p:txBody>
+          <a:bodyPr wrap="none" rtlCol="0">
+            <a:spAutoFit/>
+          </a:bodyPr>
+          <a:lstStyle/>
+          <a:p>
+            <a:r>
+              <a:rPr lang="en-CA" sz="1400" dirty="0">
+                <a:solidFill>
+                  <a:schemeClr val="accent1"/>
+                </a:solidFill>
+              </a:rPr>
+              <a:t>Pointed Var</a:t>
+            </a:r>
+          </a:p>
+        </p:txBody>
+      </p:sp>
+      <p:cxnSp>
+        <p:nvCxnSpPr>
+          <p:cNvPr id="8" name="Connecteur droit avec flèche 7">
+            <a:extLst>
+              <a:ext uri="{FF2B5EF4-FFF2-40B4-BE49-F238E27FC236}">
+                <a16:creationId xmlns:a16="http://schemas.microsoft.com/office/drawing/2014/main" id="{160644AB-2972-09EE-F04D-28D16357C6AE}"/>
+              </a:ext>
+            </a:extLst>
+          </p:cNvPr>
+          <p:cNvCxnSpPr>
+            <a:stCxn id="6" idx="1"/>
+          </p:cNvCxnSpPr>
+          <p:nvPr/>
+        </p:nvCxnSpPr>
+        <p:spPr>
+          <a:xfrm flipH="1">
+            <a:off x="2838450" y="1392139"/>
+            <a:ext cx="1371600" cy="84236"/>
+          </a:xfrm>
+          <a:prstGeom prst="straightConnector1">
+            <a:avLst/>
+          </a:prstGeom>
+          <a:ln>
+            <a:tailEnd type="triangle"/>
+          </a:ln>
+        </p:spPr>
+        <p:style>
+          <a:lnRef idx="1">
+            <a:schemeClr val="accent1"/>
+          </a:lnRef>
+          <a:fillRef idx="0">
+            <a:schemeClr val="accent1"/>
+          </a:fillRef>
+          <a:effectRef idx="0">
+            <a:schemeClr val="accent1"/>
+          </a:effectRef>
+          <a:fontRef idx="minor">
+            <a:schemeClr val="tx1"/>
+          </a:fontRef>
+        </p:style>
+      </p:cxnSp>
+      <p:sp>
+        <p:nvSpPr>
+          <p:cNvPr id="9" name="ZoneTexte 8">
+            <a:extLst>
+              <a:ext uri="{FF2B5EF4-FFF2-40B4-BE49-F238E27FC236}">
+                <a16:creationId xmlns:a16="http://schemas.microsoft.com/office/drawing/2014/main" id="{FE36A922-4276-3B0B-F0BA-71A8E1C2507D}"/>
+              </a:ext>
+            </a:extLst>
+          </p:cNvPr>
+          <p:cNvSpPr txBox="1"/>
+          <p:nvPr/>
+        </p:nvSpPr>
+        <p:spPr>
+          <a:xfrm>
+            <a:off x="4713327" y="1566565"/>
+            <a:ext cx="721672" cy="307777"/>
+          </a:xfrm>
+          <a:prstGeom prst="rect">
+            <a:avLst/>
+          </a:prstGeom>
+          <a:noFill/>
+        </p:spPr>
+        <p:txBody>
+          <a:bodyPr wrap="none" rtlCol="0">
+            <a:spAutoFit/>
+          </a:bodyPr>
+          <a:lstStyle/>
+          <a:p>
+            <a:r>
+              <a:rPr lang="en-CA" sz="1400" dirty="0">
+                <a:solidFill>
+                  <a:schemeClr val="accent1"/>
+                </a:solidFill>
+              </a:rPr>
+              <a:t>Pointer</a:t>
+            </a:r>
+          </a:p>
+        </p:txBody>
+      </p:sp>
+      <p:cxnSp>
+        <p:nvCxnSpPr>
+          <p:cNvPr id="10" name="Connecteur droit avec flèche 9">
+            <a:extLst>
+              <a:ext uri="{FF2B5EF4-FFF2-40B4-BE49-F238E27FC236}">
+                <a16:creationId xmlns:a16="http://schemas.microsoft.com/office/drawing/2014/main" id="{55D8DAA8-24EE-3BE1-023A-2238074FF4B7}"/>
+              </a:ext>
+            </a:extLst>
+          </p:cNvPr>
+          <p:cNvCxnSpPr>
+            <a:cxnSpLocks/>
+          </p:cNvCxnSpPr>
+          <p:nvPr/>
+        </p:nvCxnSpPr>
+        <p:spPr>
+          <a:xfrm flipH="1">
+            <a:off x="3971925" y="1804690"/>
+            <a:ext cx="741402" cy="1100435"/>
+          </a:xfrm>
+          <a:prstGeom prst="straightConnector1">
+            <a:avLst/>
+          </a:prstGeom>
+          <a:ln>
+            <a:tailEnd type="triangle"/>
+          </a:ln>
+        </p:spPr>
+        <p:style>
+          <a:lnRef idx="1">
+            <a:schemeClr val="accent1"/>
+          </a:lnRef>
+          <a:fillRef idx="0">
+            <a:schemeClr val="accent1"/>
+          </a:fillRef>
+          <a:effectRef idx="0">
+            <a:schemeClr val="accent1"/>
+          </a:effectRef>
+          <a:fontRef idx="minor">
+            <a:schemeClr val="tx1"/>
+          </a:fontRef>
+        </p:style>
+      </p:cxnSp>
+    </p:spTree>
+    <p:extLst>
+      <p:ext uri="{BB962C8B-B14F-4D97-AF65-F5344CB8AC3E}">
+        <p14:creationId xmlns:p14="http://schemas.microsoft.com/office/powerpoint/2010/main" val="3966282147"/>
+      </p:ext>
+    </p:extLst>
+  </p:cSld>
+  <p:clrMapOvr>
+    <a:masterClrMapping/>
+  </p:clrMapOvr>
+</p:sld>
+</file>
+
+<file path=ppt/slides/slide13.xml><?xml version="1.0" encoding="utf-8"?>
+<p:sld xmlns:a="http://schemas.openxmlformats.org/drawingml/2006/main" xmlns:r="http://schemas.openxmlformats.org/officeDocument/2006/relationships" xmlns:p="http://schemas.openxmlformats.org/presentationml/2006/main">
+  <p:cSld>
+    <p:spTree>
+      <p:nvGrpSpPr>
+        <p:cNvPr id="1" name=""/>
+        <p:cNvGrpSpPr/>
+        <p:nvPr/>
+      </p:nvGrpSpPr>
+      <p:grpSpPr>
+        <a:xfrm>
+          <a:off x="0" y="0"/>
+          <a:ext cx="0" cy="0"/>
+          <a:chOff x="0" y="0"/>
+          <a:chExt cx="0" cy="0"/>
+        </a:xfrm>
+      </p:grpSpPr>
+      <p:pic>
+        <p:nvPicPr>
+          <p:cNvPr id="5" name="Image 4">
+            <a:extLst>
+              <a:ext uri="{FF2B5EF4-FFF2-40B4-BE49-F238E27FC236}">
+                <a16:creationId xmlns:a16="http://schemas.microsoft.com/office/drawing/2014/main" id="{E185E5E0-41F8-AF47-E5A2-EABE730AF8BD}"/>
+              </a:ext>
+            </a:extLst>
+          </p:cNvPr>
+          <p:cNvPicPr>
+            <a:picLocks noChangeAspect="1"/>
+          </p:cNvPicPr>
+          <p:nvPr/>
+        </p:nvPicPr>
+        <p:blipFill>
+          <a:blip r:embed="rId2"/>
+          <a:stretch>
+            <a:fillRect/>
+          </a:stretch>
+        </p:blipFill>
+        <p:spPr>
+          <a:xfrm>
+            <a:off x="904150" y="990259"/>
+            <a:ext cx="10383699" cy="4877481"/>
+          </a:xfrm>
+          <a:prstGeom prst="rect">
+            <a:avLst/>
+          </a:prstGeom>
+        </p:spPr>
+      </p:pic>
+      <p:sp>
+        <p:nvSpPr>
+          <p:cNvPr id="6" name="ZoneTexte 5">
+            <a:extLst>
+              <a:ext uri="{FF2B5EF4-FFF2-40B4-BE49-F238E27FC236}">
+                <a16:creationId xmlns:a16="http://schemas.microsoft.com/office/drawing/2014/main" id="{CF13000C-02BF-97DB-10E2-57A5DEF9A76F}"/>
+              </a:ext>
+            </a:extLst>
+          </p:cNvPr>
+          <p:cNvSpPr txBox="1"/>
+          <p:nvPr/>
+        </p:nvSpPr>
+        <p:spPr>
+          <a:xfrm>
+            <a:off x="6886575" y="990259"/>
+            <a:ext cx="731354" cy="307777"/>
+          </a:xfrm>
+          <a:prstGeom prst="rect">
+            <a:avLst/>
+          </a:prstGeom>
+          <a:noFill/>
+        </p:spPr>
+        <p:txBody>
+          <a:bodyPr wrap="none" rtlCol="0">
+            <a:spAutoFit/>
+          </a:bodyPr>
+          <a:lstStyle/>
+          <a:p>
+            <a:r>
+              <a:rPr lang="en-CA" sz="1400" dirty="0">
+                <a:solidFill>
+                  <a:schemeClr val="accent1"/>
+                </a:solidFill>
+              </a:rPr>
+              <a:t>Toolbar</a:t>
+            </a:r>
+          </a:p>
+        </p:txBody>
+      </p:sp>
+      <p:sp>
+        <p:nvSpPr>
+          <p:cNvPr id="7" name="ZoneTexte 6">
+            <a:extLst>
+              <a:ext uri="{FF2B5EF4-FFF2-40B4-BE49-F238E27FC236}">
+                <a16:creationId xmlns:a16="http://schemas.microsoft.com/office/drawing/2014/main" id="{59E11284-BE80-2DBC-160B-4C78782435A4}"/>
+              </a:ext>
+            </a:extLst>
+          </p:cNvPr>
+          <p:cNvSpPr txBox="1"/>
+          <p:nvPr/>
+        </p:nvSpPr>
+        <p:spPr>
+          <a:xfrm>
+            <a:off x="2756048" y="1033122"/>
+            <a:ext cx="541495" cy="307777"/>
+          </a:xfrm>
+          <a:prstGeom prst="rect">
+            <a:avLst/>
+          </a:prstGeom>
+          <a:noFill/>
+        </p:spPr>
+        <p:txBody>
+          <a:bodyPr wrap="none" rtlCol="0">
+            <a:spAutoFit/>
+          </a:bodyPr>
+          <a:lstStyle/>
+          <a:p>
+            <a:r>
+              <a:rPr lang="en-CA" sz="1400" dirty="0">
+                <a:solidFill>
+                  <a:schemeClr val="accent1"/>
+                </a:solidFill>
+              </a:rPr>
+              <a:t>Stats</a:t>
+            </a:r>
+          </a:p>
+        </p:txBody>
+      </p:sp>
+      <p:cxnSp>
+        <p:nvCxnSpPr>
+          <p:cNvPr id="8" name="Connecteur droit avec flèche 7">
+            <a:extLst>
+              <a:ext uri="{FF2B5EF4-FFF2-40B4-BE49-F238E27FC236}">
+                <a16:creationId xmlns:a16="http://schemas.microsoft.com/office/drawing/2014/main" id="{F70261C9-7217-F1A9-3A3A-EA5B89D47597}"/>
+              </a:ext>
+            </a:extLst>
+          </p:cNvPr>
+          <p:cNvCxnSpPr>
+            <a:cxnSpLocks/>
+            <a:stCxn id="6" idx="1"/>
+          </p:cNvCxnSpPr>
+          <p:nvPr/>
+        </p:nvCxnSpPr>
+        <p:spPr>
+          <a:xfrm flipH="1">
+            <a:off x="5619750" y="1144148"/>
+            <a:ext cx="1266825" cy="341752"/>
+          </a:xfrm>
+          <a:prstGeom prst="straightConnector1">
+            <a:avLst/>
+          </a:prstGeom>
+          <a:ln>
+            <a:tailEnd type="triangle"/>
+          </a:ln>
+        </p:spPr>
+        <p:style>
+          <a:lnRef idx="1">
+            <a:schemeClr val="accent1"/>
+          </a:lnRef>
+          <a:fillRef idx="0">
+            <a:schemeClr val="accent1"/>
+          </a:fillRef>
+          <a:effectRef idx="0">
+            <a:schemeClr val="accent1"/>
+          </a:effectRef>
+          <a:fontRef idx="minor">
+            <a:schemeClr val="tx1"/>
+          </a:fontRef>
+        </p:style>
+      </p:cxnSp>
+      <p:cxnSp>
+        <p:nvCxnSpPr>
+          <p:cNvPr id="11" name="Connecteur droit avec flèche 10">
+            <a:extLst>
+              <a:ext uri="{FF2B5EF4-FFF2-40B4-BE49-F238E27FC236}">
+                <a16:creationId xmlns:a16="http://schemas.microsoft.com/office/drawing/2014/main" id="{60A4FAAD-4BCE-922B-239C-1D123219071A}"/>
+              </a:ext>
+            </a:extLst>
+          </p:cNvPr>
+          <p:cNvCxnSpPr>
+            <a:cxnSpLocks/>
+          </p:cNvCxnSpPr>
+          <p:nvPr/>
+        </p:nvCxnSpPr>
+        <p:spPr>
+          <a:xfrm flipH="1">
+            <a:off x="2381250" y="1298036"/>
+            <a:ext cx="374798" cy="368839"/>
+          </a:xfrm>
+          <a:prstGeom prst="straightConnector1">
+            <a:avLst/>
+          </a:prstGeom>
+          <a:ln>
+            <a:tailEnd type="triangle"/>
+          </a:ln>
+        </p:spPr>
+        <p:style>
+          <a:lnRef idx="1">
+            <a:schemeClr val="accent1"/>
+          </a:lnRef>
+          <a:fillRef idx="0">
+            <a:schemeClr val="accent1"/>
+          </a:fillRef>
+          <a:effectRef idx="0">
+            <a:schemeClr val="accent1"/>
+          </a:effectRef>
+          <a:fontRef idx="minor">
+            <a:schemeClr val="tx1"/>
+          </a:fontRef>
+        </p:style>
+      </p:cxnSp>
+    </p:spTree>
+    <p:extLst>
+      <p:ext uri="{BB962C8B-B14F-4D97-AF65-F5344CB8AC3E}">
+        <p14:creationId xmlns:p14="http://schemas.microsoft.com/office/powerpoint/2010/main" val="3174626830"/>
+      </p:ext>
+    </p:extLst>
+  </p:cSld>
+  <p:clrMapOvr>
+    <a:masterClrMapping/>
+  </p:clrMapOvr>
+</p:sld>
+</file>
+
+<file path=ppt/slides/slide14.xml><?xml version="1.0" encoding="utf-8"?>
+<p:sld xmlns:a="http://schemas.openxmlformats.org/drawingml/2006/main" xmlns:r="http://schemas.openxmlformats.org/officeDocument/2006/relationships" xmlns:p="http://schemas.openxmlformats.org/presentationml/2006/main">
+  <p:cSld>
+    <p:spTree>
+      <p:nvGrpSpPr>
+        <p:cNvPr id="1" name=""/>
+        <p:cNvGrpSpPr/>
+        <p:nvPr/>
+      </p:nvGrpSpPr>
+      <p:grpSpPr>
+        <a:xfrm>
+          <a:off x="0" y="0"/>
+          <a:ext cx="0" cy="0"/>
+          <a:chOff x="0" y="0"/>
+          <a:chExt cx="0" cy="0"/>
+        </a:xfrm>
+      </p:grpSpPr>
+      <p:pic>
+        <p:nvPicPr>
+          <p:cNvPr id="5" name="Image 4">
+            <a:extLst>
+              <a:ext uri="{FF2B5EF4-FFF2-40B4-BE49-F238E27FC236}">
+                <a16:creationId xmlns:a16="http://schemas.microsoft.com/office/drawing/2014/main" id="{9D358124-D6B5-D1AA-7A45-948571992FCF}"/>
+              </a:ext>
+            </a:extLst>
+          </p:cNvPr>
+          <p:cNvPicPr>
+            <a:picLocks noChangeAspect="1"/>
+          </p:cNvPicPr>
+          <p:nvPr/>
+        </p:nvPicPr>
+        <p:blipFill>
+          <a:blip r:embed="rId2"/>
+          <a:stretch>
+            <a:fillRect/>
+          </a:stretch>
+        </p:blipFill>
+        <p:spPr>
+          <a:xfrm>
+            <a:off x="295047" y="461777"/>
+            <a:ext cx="3258005" cy="2657846"/>
+          </a:xfrm>
+          <a:prstGeom prst="rect">
+            <a:avLst/>
+          </a:prstGeom>
+        </p:spPr>
+      </p:pic>
+      <p:sp>
+        <p:nvSpPr>
+          <p:cNvPr id="6" name="ZoneTexte 5">
+            <a:extLst>
+              <a:ext uri="{FF2B5EF4-FFF2-40B4-BE49-F238E27FC236}">
+                <a16:creationId xmlns:a16="http://schemas.microsoft.com/office/drawing/2014/main" id="{C848044F-07ED-9138-7BB3-1AF7246ECC0F}"/>
+              </a:ext>
+            </a:extLst>
+          </p:cNvPr>
+          <p:cNvSpPr txBox="1"/>
+          <p:nvPr/>
+        </p:nvSpPr>
+        <p:spPr>
+          <a:xfrm>
+            <a:off x="4646295" y="1950392"/>
+            <a:ext cx="1525905" cy="461665"/>
+          </a:xfrm>
+          <a:prstGeom prst="rect">
+            <a:avLst/>
+          </a:prstGeom>
+          <a:noFill/>
+        </p:spPr>
+        <p:txBody>
+          <a:bodyPr wrap="square" rtlCol="0">
+            <a:spAutoFit/>
+          </a:bodyPr>
+          <a:lstStyle/>
+          <a:p>
+            <a:r>
+              <a:rPr lang="en-CA" sz="1200" dirty="0">
+                <a:solidFill>
+                  <a:schemeClr val="accent1"/>
+                </a:solidFill>
+              </a:rPr>
+              <a:t>Moving window size</a:t>
+            </a:r>
+            <a:br>
+              <a:rPr lang="en-CA" sz="1200" dirty="0">
+                <a:solidFill>
+                  <a:schemeClr val="accent1"/>
+                </a:solidFill>
+              </a:rPr>
+            </a:br>
+            <a:r>
+              <a:rPr lang="en-CA" sz="1200" dirty="0">
+                <a:solidFill>
+                  <a:schemeClr val="accent1"/>
+                </a:solidFill>
+              </a:rPr>
+              <a:t>(GUI Limit)</a:t>
+            </a:r>
+          </a:p>
+        </p:txBody>
+      </p:sp>
+      <p:cxnSp>
+        <p:nvCxnSpPr>
+          <p:cNvPr id="7" name="Connecteur droit avec flèche 6">
+            <a:extLst>
+              <a:ext uri="{FF2B5EF4-FFF2-40B4-BE49-F238E27FC236}">
+                <a16:creationId xmlns:a16="http://schemas.microsoft.com/office/drawing/2014/main" id="{5F517BDC-5D6B-1866-7F7A-171040827619}"/>
+              </a:ext>
+            </a:extLst>
+          </p:cNvPr>
+          <p:cNvCxnSpPr>
+            <a:cxnSpLocks/>
+          </p:cNvCxnSpPr>
+          <p:nvPr/>
+        </p:nvCxnSpPr>
+        <p:spPr>
+          <a:xfrm flipH="1">
+            <a:off x="3324225" y="2181225"/>
+            <a:ext cx="1152525" cy="0"/>
+          </a:xfrm>
+          <a:prstGeom prst="straightConnector1">
+            <a:avLst/>
+          </a:prstGeom>
+          <a:ln>
+            <a:tailEnd type="triangle"/>
+          </a:ln>
+        </p:spPr>
+        <p:style>
+          <a:lnRef idx="1">
+            <a:schemeClr val="accent1"/>
+          </a:lnRef>
+          <a:fillRef idx="0">
+            <a:schemeClr val="accent1"/>
+          </a:fillRef>
+          <a:effectRef idx="0">
+            <a:schemeClr val="accent1"/>
+          </a:effectRef>
+          <a:fontRef idx="minor">
+            <a:schemeClr val="tx1"/>
+          </a:fontRef>
+        </p:style>
+      </p:cxnSp>
+      <p:sp>
+        <p:nvSpPr>
+          <p:cNvPr id="10" name="ZoneTexte 9">
+            <a:extLst>
+              <a:ext uri="{FF2B5EF4-FFF2-40B4-BE49-F238E27FC236}">
+                <a16:creationId xmlns:a16="http://schemas.microsoft.com/office/drawing/2014/main" id="{F1BBD6F7-0CFC-F71F-BC4D-0526D0BB0B88}"/>
+              </a:ext>
+            </a:extLst>
+          </p:cNvPr>
+          <p:cNvSpPr txBox="1"/>
+          <p:nvPr/>
+        </p:nvSpPr>
+        <p:spPr>
+          <a:xfrm>
+            <a:off x="4646295" y="1112192"/>
+            <a:ext cx="1525905" cy="830997"/>
+          </a:xfrm>
+          <a:prstGeom prst="rect">
+            <a:avLst/>
+          </a:prstGeom>
+          <a:noFill/>
+        </p:spPr>
+        <p:txBody>
+          <a:bodyPr wrap="square" rtlCol="0">
+            <a:spAutoFit/>
+          </a:bodyPr>
+          <a:lstStyle/>
+          <a:p>
+            <a:r>
+              <a:rPr lang="en-CA" sz="1200" dirty="0">
+                <a:solidFill>
+                  <a:schemeClr val="accent1"/>
+                </a:solidFill>
+              </a:rPr>
+              <a:t>MyGraph_0000.csv</a:t>
+            </a:r>
+          </a:p>
+          <a:p>
+            <a:r>
+              <a:rPr lang="en-CA" sz="1200" dirty="0">
+                <a:solidFill>
+                  <a:schemeClr val="accent1"/>
+                </a:solidFill>
+              </a:rPr>
+              <a:t>MyGraph_0001.csv</a:t>
+            </a:r>
+            <a:br>
+              <a:rPr lang="en-CA" sz="1200" dirty="0">
+                <a:solidFill>
+                  <a:schemeClr val="accent1"/>
+                </a:solidFill>
+              </a:rPr>
+            </a:br>
+            <a:r>
+              <a:rPr lang="en-CA" sz="1200" dirty="0">
+                <a:solidFill>
+                  <a:schemeClr val="accent1"/>
+                </a:solidFill>
+              </a:rPr>
+              <a:t>…</a:t>
+            </a:r>
+          </a:p>
+          <a:p>
+            <a:endParaRPr lang="en-CA" sz="1200" dirty="0">
+              <a:solidFill>
+                <a:schemeClr val="accent1"/>
+              </a:solidFill>
+            </a:endParaRPr>
+          </a:p>
+        </p:txBody>
+      </p:sp>
+      <p:cxnSp>
+        <p:nvCxnSpPr>
+          <p:cNvPr id="11" name="Connecteur droit avec flèche 10">
+            <a:extLst>
+              <a:ext uri="{FF2B5EF4-FFF2-40B4-BE49-F238E27FC236}">
+                <a16:creationId xmlns:a16="http://schemas.microsoft.com/office/drawing/2014/main" id="{1CAEB01B-3C80-FA69-0BBF-F94E9D6F9931}"/>
+              </a:ext>
+            </a:extLst>
+          </p:cNvPr>
+          <p:cNvCxnSpPr>
+            <a:cxnSpLocks/>
+          </p:cNvCxnSpPr>
+          <p:nvPr/>
+        </p:nvCxnSpPr>
+        <p:spPr>
+          <a:xfrm flipH="1">
+            <a:off x="3324225" y="1352549"/>
+            <a:ext cx="1152525" cy="0"/>
+          </a:xfrm>
+          <a:prstGeom prst="straightConnector1">
+            <a:avLst/>
+          </a:prstGeom>
+          <a:ln>
+            <a:tailEnd type="triangle"/>
+          </a:ln>
+        </p:spPr>
+        <p:style>
+          <a:lnRef idx="1">
+            <a:schemeClr val="accent1"/>
+          </a:lnRef>
+          <a:fillRef idx="0">
+            <a:schemeClr val="accent1"/>
+          </a:fillRef>
+          <a:effectRef idx="0">
+            <a:schemeClr val="accent1"/>
+          </a:effectRef>
+          <a:fontRef idx="minor">
+            <a:schemeClr val="tx1"/>
+          </a:fontRef>
+        </p:style>
+      </p:cxnSp>
+      <p:grpSp>
+        <p:nvGrpSpPr>
+          <p:cNvPr id="16" name="Groupe 15">
+            <a:extLst>
+              <a:ext uri="{FF2B5EF4-FFF2-40B4-BE49-F238E27FC236}">
+                <a16:creationId xmlns:a16="http://schemas.microsoft.com/office/drawing/2014/main" id="{089DA399-8D32-6739-57E1-CC5D8D88E5DC}"/>
+              </a:ext>
+            </a:extLst>
+          </p:cNvPr>
+          <p:cNvGrpSpPr/>
+          <p:nvPr/>
+        </p:nvGrpSpPr>
+        <p:grpSpPr>
+          <a:xfrm>
+            <a:off x="4400131" y="3781425"/>
+            <a:ext cx="6001588" cy="2567199"/>
+            <a:chOff x="4400131" y="3781425"/>
+            <a:chExt cx="6001588" cy="2567199"/>
+          </a:xfrm>
+        </p:grpSpPr>
+        <p:pic>
+          <p:nvPicPr>
+            <p:cNvPr id="13" name="Image 12">
+              <a:extLst>
+                <a:ext uri="{FF2B5EF4-FFF2-40B4-BE49-F238E27FC236}">
+                  <a16:creationId xmlns:a16="http://schemas.microsoft.com/office/drawing/2014/main" id="{C22ECDFB-BE0D-E755-1A99-8C10AB66A4CA}"/>
+                </a:ext>
+              </a:extLst>
+            </p:cNvPr>
+            <p:cNvPicPr>
+              <a:picLocks noChangeAspect="1"/>
+            </p:cNvPicPr>
+            <p:nvPr/>
+          </p:nvPicPr>
+          <p:blipFill>
+            <a:blip r:embed="rId3"/>
+            <a:srcRect t="15522"/>
+            <a:stretch>
+              <a:fillRect/>
+            </a:stretch>
+          </p:blipFill>
+          <p:spPr>
+            <a:xfrm>
+              <a:off x="4400131" y="3781425"/>
+              <a:ext cx="6001588" cy="2567199"/>
+            </a:xfrm>
+            <a:prstGeom prst="rect">
+              <a:avLst/>
+            </a:prstGeom>
+          </p:spPr>
+        </p:pic>
+        <p:sp>
+          <p:nvSpPr>
+            <p:cNvPr id="14" name="Ellipse 13">
+              <a:extLst>
+                <a:ext uri="{FF2B5EF4-FFF2-40B4-BE49-F238E27FC236}">
+                  <a16:creationId xmlns:a16="http://schemas.microsoft.com/office/drawing/2014/main" id="{A791B99C-0AA8-04EE-079A-73DFBFCF299B}"/>
+                </a:ext>
+              </a:extLst>
+            </p:cNvPr>
+            <p:cNvSpPr/>
+            <p:nvPr/>
+          </p:nvSpPr>
+          <p:spPr>
+            <a:xfrm rot="19987058">
+              <a:off x="9528978" y="3880858"/>
+              <a:ext cx="238125" cy="927518"/>
+            </a:xfrm>
+            <a:prstGeom prst="ellipse">
+              <a:avLst/>
+            </a:prstGeom>
+            <a:noFill/>
+            <a:ln>
+              <a:solidFill>
+                <a:srgbClr val="FF0000"/>
+              </a:solidFill>
+            </a:ln>
+          </p:spPr>
+          <p:style>
+            <a:lnRef idx="2">
+              <a:schemeClr val="accent1">
+                <a:shade val="15000"/>
+              </a:schemeClr>
+            </a:lnRef>
+            <a:fillRef idx="1">
+              <a:schemeClr val="accent1"/>
+            </a:fillRef>
+            <a:effectRef idx="0">
+              <a:schemeClr val="accent1"/>
+            </a:effectRef>
+            <a:fontRef idx="minor">
+              <a:schemeClr val="lt1"/>
+            </a:fontRef>
+          </p:style>
+          <p:txBody>
+            <a:bodyPr rtlCol="0" anchor="ctr"/>
+            <a:lstStyle/>
+            <a:p>
+              <a:pPr algn="ctr"/>
+              <a:endParaRPr lang="en-CA"/>
+            </a:p>
+          </p:txBody>
+        </p:sp>
+        <p:sp>
+          <p:nvSpPr>
+            <p:cNvPr id="15" name="Ellipse 14">
+              <a:extLst>
+                <a:ext uri="{FF2B5EF4-FFF2-40B4-BE49-F238E27FC236}">
+                  <a16:creationId xmlns:a16="http://schemas.microsoft.com/office/drawing/2014/main" id="{18B7490E-74E6-3560-6ECC-1CA0E42F7B80}"/>
+                </a:ext>
+              </a:extLst>
+            </p:cNvPr>
+            <p:cNvSpPr/>
+            <p:nvPr/>
+          </p:nvSpPr>
+          <p:spPr>
+            <a:xfrm rot="19987058">
+              <a:off x="9528979" y="4649122"/>
+              <a:ext cx="238125" cy="927518"/>
+            </a:xfrm>
+            <a:prstGeom prst="ellipse">
+              <a:avLst/>
+            </a:prstGeom>
+            <a:noFill/>
+            <a:ln>
+              <a:solidFill>
+                <a:srgbClr val="FF0000"/>
+              </a:solidFill>
+            </a:ln>
+          </p:spPr>
+          <p:style>
+            <a:lnRef idx="2">
+              <a:schemeClr val="accent1">
+                <a:shade val="15000"/>
+              </a:schemeClr>
+            </a:lnRef>
+            <a:fillRef idx="1">
+              <a:schemeClr val="accent1"/>
+            </a:fillRef>
+            <a:effectRef idx="0">
+              <a:schemeClr val="accent1"/>
+            </a:effectRef>
+            <a:fontRef idx="minor">
+              <a:schemeClr val="lt1"/>
+            </a:fontRef>
+          </p:style>
+          <p:txBody>
+            <a:bodyPr rtlCol="0" anchor="ctr"/>
+            <a:lstStyle/>
+            <a:p>
+              <a:pPr algn="ctr"/>
+              <a:endParaRPr lang="en-CA"/>
+            </a:p>
+          </p:txBody>
+        </p:sp>
+      </p:grpSp>
+    </p:spTree>
+    <p:extLst>
+      <p:ext uri="{BB962C8B-B14F-4D97-AF65-F5344CB8AC3E}">
+        <p14:creationId xmlns:p14="http://schemas.microsoft.com/office/powerpoint/2010/main" val="2098059684"/>
+      </p:ext>
+    </p:extLst>
+  </p:cSld>
+  <p:clrMapOvr>
+    <a:masterClrMapping/>
+  </p:clrMapOvr>
+</p:sld>
+</file>
+
+<file path=ppt/slides/slide15.xml><?xml version="1.0" encoding="utf-8"?>
+<p:sld xmlns:a="http://schemas.openxmlformats.org/drawingml/2006/main" xmlns:r="http://schemas.openxmlformats.org/officeDocument/2006/relationships" xmlns:p="http://schemas.openxmlformats.org/presentationml/2006/main">
+  <p:cSld>
+    <p:spTree>
+      <p:nvGrpSpPr>
+        <p:cNvPr id="1" name=""/>
+        <p:cNvGrpSpPr/>
+        <p:nvPr/>
+      </p:nvGrpSpPr>
+      <p:grpSpPr>
+        <a:xfrm>
+          <a:off x="0" y="0"/>
+          <a:ext cx="0" cy="0"/>
+          <a:chOff x="0" y="0"/>
+          <a:chExt cx="0" cy="0"/>
+        </a:xfrm>
+      </p:grpSpPr>
+      <p:pic>
+        <p:nvPicPr>
+          <p:cNvPr id="5" name="Image 4">
+            <a:extLst>
+              <a:ext uri="{FF2B5EF4-FFF2-40B4-BE49-F238E27FC236}">
+                <a16:creationId xmlns:a16="http://schemas.microsoft.com/office/drawing/2014/main" id="{F9A279E6-A31B-D63E-D094-5A9C6A061378}"/>
+              </a:ext>
+            </a:extLst>
+          </p:cNvPr>
+          <p:cNvPicPr>
+            <a:picLocks noChangeAspect="1"/>
+          </p:cNvPicPr>
+          <p:nvPr/>
+        </p:nvPicPr>
+        <p:blipFill>
+          <a:blip r:embed="rId2">
+            <a:extLst>
+              <a:ext uri="{28A0092B-C50C-407E-A947-70E740481C1C}">
+                <a14:useLocalDpi xmlns:a14="http://schemas.microsoft.com/office/drawing/2010/main" val="0"/>
+              </a:ext>
+            </a:extLst>
+          </a:blip>
+          <a:stretch>
+            <a:fillRect/>
+          </a:stretch>
+        </p:blipFill>
+        <p:spPr>
+          <a:xfrm>
+            <a:off x="1147302" y="1104611"/>
+            <a:ext cx="6601746" cy="4134427"/>
+          </a:xfrm>
+          <a:prstGeom prst="rect">
+            <a:avLst/>
+          </a:prstGeom>
+        </p:spPr>
+      </p:pic>
+      <p:sp>
+        <p:nvSpPr>
+          <p:cNvPr id="6" name="ZoneTexte 5">
+            <a:extLst>
+              <a:ext uri="{FF2B5EF4-FFF2-40B4-BE49-F238E27FC236}">
+                <a16:creationId xmlns:a16="http://schemas.microsoft.com/office/drawing/2014/main" id="{361A756C-3B4A-C495-8CCF-1B63BFB16BEB}"/>
+              </a:ext>
+            </a:extLst>
+          </p:cNvPr>
+          <p:cNvSpPr txBox="1"/>
+          <p:nvPr/>
+        </p:nvSpPr>
+        <p:spPr>
+          <a:xfrm>
+            <a:off x="2622698" y="1618962"/>
+            <a:ext cx="2339827" cy="307777"/>
+          </a:xfrm>
+          <a:prstGeom prst="rect">
+            <a:avLst/>
+          </a:prstGeom>
+          <a:noFill/>
+        </p:spPr>
+        <p:txBody>
+          <a:bodyPr wrap="square" rtlCol="0">
+            <a:spAutoFit/>
+          </a:bodyPr>
+          <a:lstStyle/>
+          <a:p>
+            <a:r>
+              <a:rPr lang="en-CA" sz="1400" dirty="0">
+                <a:solidFill>
+                  <a:schemeClr val="accent1"/>
+                </a:solidFill>
+              </a:rPr>
+              <a:t>Upload: GUI </a:t>
+            </a:r>
+            <a:r>
+              <a:rPr lang="en-CA" sz="1400" dirty="0">
+                <a:solidFill>
+                  <a:schemeClr val="accent1"/>
+                </a:solidFill>
+                <a:sym typeface="Wingdings" panose="05000000000000000000" pitchFamily="2" charset="2"/>
+              </a:rPr>
+              <a:t> Server</a:t>
+            </a:r>
+            <a:endParaRPr lang="en-CA" sz="1400" dirty="0">
+              <a:solidFill>
+                <a:schemeClr val="accent1"/>
+              </a:solidFill>
+            </a:endParaRPr>
+          </a:p>
+        </p:txBody>
+      </p:sp>
+      <p:cxnSp>
+        <p:nvCxnSpPr>
+          <p:cNvPr id="7" name="Connecteur droit avec flèche 6">
+            <a:extLst>
+              <a:ext uri="{FF2B5EF4-FFF2-40B4-BE49-F238E27FC236}">
+                <a16:creationId xmlns:a16="http://schemas.microsoft.com/office/drawing/2014/main" id="{CAC0E080-37BF-D5AC-DD84-FECC7014C00D}"/>
+              </a:ext>
+            </a:extLst>
+          </p:cNvPr>
+          <p:cNvCxnSpPr>
+            <a:cxnSpLocks/>
+            <a:stCxn id="6" idx="1"/>
+          </p:cNvCxnSpPr>
+          <p:nvPr/>
+        </p:nvCxnSpPr>
+        <p:spPr>
+          <a:xfrm flipH="1" flipV="1">
+            <a:off x="1657350" y="1618962"/>
+            <a:ext cx="965348" cy="153889"/>
+          </a:xfrm>
+          <a:prstGeom prst="straightConnector1">
+            <a:avLst/>
+          </a:prstGeom>
+          <a:ln w="19050">
+            <a:tailEnd type="triangle"/>
+          </a:ln>
+        </p:spPr>
+        <p:style>
+          <a:lnRef idx="1">
+            <a:schemeClr val="accent1"/>
+          </a:lnRef>
+          <a:fillRef idx="0">
+            <a:schemeClr val="accent1"/>
+          </a:fillRef>
+          <a:effectRef idx="0">
+            <a:schemeClr val="accent1"/>
+          </a:effectRef>
+          <a:fontRef idx="minor">
+            <a:schemeClr val="tx1"/>
+          </a:fontRef>
+        </p:style>
+      </p:cxnSp>
+      <p:sp>
+        <p:nvSpPr>
+          <p:cNvPr id="11" name="ZoneTexte 10">
+            <a:extLst>
+              <a:ext uri="{FF2B5EF4-FFF2-40B4-BE49-F238E27FC236}">
+                <a16:creationId xmlns:a16="http://schemas.microsoft.com/office/drawing/2014/main" id="{60C6FFA1-8D56-8CCE-220C-E4742B167899}"/>
+              </a:ext>
+            </a:extLst>
+          </p:cNvPr>
+          <p:cNvSpPr txBox="1"/>
+          <p:nvPr/>
+        </p:nvSpPr>
+        <p:spPr>
+          <a:xfrm>
+            <a:off x="5694481" y="1618961"/>
+            <a:ext cx="2339827" cy="307777"/>
+          </a:xfrm>
+          <a:prstGeom prst="rect">
+            <a:avLst/>
+          </a:prstGeom>
+          <a:noFill/>
+        </p:spPr>
+        <p:txBody>
+          <a:bodyPr wrap="square" rtlCol="0">
+            <a:spAutoFit/>
+          </a:bodyPr>
+          <a:lstStyle/>
+          <a:p>
+            <a:r>
+              <a:rPr lang="en-CA" sz="1400" dirty="0">
+                <a:solidFill>
+                  <a:schemeClr val="accent1"/>
+                </a:solidFill>
+              </a:rPr>
+              <a:t>Download: Server </a:t>
+            </a:r>
+            <a:r>
+              <a:rPr lang="en-CA" sz="1400" dirty="0">
+                <a:solidFill>
+                  <a:schemeClr val="accent1"/>
+                </a:solidFill>
+                <a:sym typeface="Wingdings" panose="05000000000000000000" pitchFamily="2" charset="2"/>
+              </a:rPr>
+              <a:t> </a:t>
+            </a:r>
+            <a:r>
+              <a:rPr lang="en-CA" sz="1400" dirty="0">
+                <a:solidFill>
+                  <a:schemeClr val="accent1"/>
+                </a:solidFill>
+              </a:rPr>
+              <a:t>GUI </a:t>
+            </a:r>
+          </a:p>
+        </p:txBody>
+      </p:sp>
+      <p:cxnSp>
+        <p:nvCxnSpPr>
+          <p:cNvPr id="12" name="Connecteur droit avec flèche 11">
+            <a:extLst>
+              <a:ext uri="{FF2B5EF4-FFF2-40B4-BE49-F238E27FC236}">
+                <a16:creationId xmlns:a16="http://schemas.microsoft.com/office/drawing/2014/main" id="{FABE117C-34D1-F22D-A00F-7A69A3630F4E}"/>
+              </a:ext>
+            </a:extLst>
+          </p:cNvPr>
+          <p:cNvCxnSpPr>
+            <a:cxnSpLocks/>
+          </p:cNvCxnSpPr>
+          <p:nvPr/>
+        </p:nvCxnSpPr>
+        <p:spPr>
+          <a:xfrm flipH="1">
+            <a:off x="4962525" y="1926738"/>
+            <a:ext cx="1133475" cy="1597512"/>
+          </a:xfrm>
+          <a:prstGeom prst="straightConnector1">
+            <a:avLst/>
+          </a:prstGeom>
+          <a:ln w="19050">
+            <a:tailEnd type="triangle"/>
+          </a:ln>
+        </p:spPr>
+        <p:style>
+          <a:lnRef idx="1">
+            <a:schemeClr val="accent1"/>
+          </a:lnRef>
+          <a:fillRef idx="0">
+            <a:schemeClr val="accent1"/>
+          </a:fillRef>
+          <a:effectRef idx="0">
+            <a:schemeClr val="accent1"/>
+          </a:effectRef>
+          <a:fontRef idx="minor">
+            <a:schemeClr val="tx1"/>
+          </a:fontRef>
+        </p:style>
+      </p:cxnSp>
+    </p:spTree>
+    <p:extLst>
+      <p:ext uri="{BB962C8B-B14F-4D97-AF65-F5344CB8AC3E}">
+        <p14:creationId xmlns:p14="http://schemas.microsoft.com/office/powerpoint/2010/main" val="2275816658"/>
       </p:ext>
     </p:extLst>
   </p:cSld>

--- a/graphics/graphics.pptx
+++ b/graphics/graphics.pptx
@@ -212,7 +212,7 @@
           <a:p>
             <a:fld id="{B8404A9E-F80D-47A3-9ABE-4E375F8C7A58}" type="datetimeFigureOut">
               <a:rPr lang="fr-CA" smtClean="0"/>
-              <a:t>2026-03-28</a:t>
+              <a:t>2026-04-14</a:t>
             </a:fld>
             <a:endParaRPr lang="fr-CA"/>
           </a:p>
@@ -713,7 +713,7 @@
           <a:p>
             <a:fld id="{B1B97C2F-ED53-40B2-8245-274A53568F1F}" type="datetimeFigureOut">
               <a:rPr lang="fr-CA" smtClean="0"/>
-              <a:t>2026-03-28</a:t>
+              <a:t>2026-04-14</a:t>
             </a:fld>
             <a:endParaRPr lang="fr-CA"/>
           </a:p>
@@ -913,7 +913,7 @@
           <a:p>
             <a:fld id="{B1B97C2F-ED53-40B2-8245-274A53568F1F}" type="datetimeFigureOut">
               <a:rPr lang="fr-CA" smtClean="0"/>
-              <a:t>2026-03-28</a:t>
+              <a:t>2026-04-14</a:t>
             </a:fld>
             <a:endParaRPr lang="fr-CA"/>
           </a:p>
@@ -1123,7 +1123,7 @@
           <a:p>
             <a:fld id="{B1B97C2F-ED53-40B2-8245-274A53568F1F}" type="datetimeFigureOut">
               <a:rPr lang="fr-CA" smtClean="0"/>
-              <a:t>2026-03-28</a:t>
+              <a:t>2026-04-14</a:t>
             </a:fld>
             <a:endParaRPr lang="fr-CA"/>
           </a:p>
@@ -1345,7 +1345,7 @@
           <a:p>
             <a:fld id="{3CFA78C3-2C03-4D26-BA08-5201FB292C09}" type="datetimeFigureOut">
               <a:rPr lang="fr-CA" smtClean="0"/>
-              <a:t>2026-03-28</a:t>
+              <a:t>2026-04-14</a:t>
             </a:fld>
             <a:endParaRPr lang="fr-CA"/>
           </a:p>
@@ -1545,7 +1545,7 @@
           <a:p>
             <a:fld id="{3CFA78C3-2C03-4D26-BA08-5201FB292C09}" type="datetimeFigureOut">
               <a:rPr lang="fr-CA" smtClean="0"/>
-              <a:t>2026-03-28</a:t>
+              <a:t>2026-04-14</a:t>
             </a:fld>
             <a:endParaRPr lang="fr-CA"/>
           </a:p>
@@ -1821,7 +1821,7 @@
           <a:p>
             <a:fld id="{3CFA78C3-2C03-4D26-BA08-5201FB292C09}" type="datetimeFigureOut">
               <a:rPr lang="fr-CA" smtClean="0"/>
-              <a:t>2026-03-28</a:t>
+              <a:t>2026-04-14</a:t>
             </a:fld>
             <a:endParaRPr lang="fr-CA"/>
           </a:p>
@@ -2089,7 +2089,7 @@
           <a:p>
             <a:fld id="{3CFA78C3-2C03-4D26-BA08-5201FB292C09}" type="datetimeFigureOut">
               <a:rPr lang="fr-CA" smtClean="0"/>
-              <a:t>2026-03-28</a:t>
+              <a:t>2026-04-14</a:t>
             </a:fld>
             <a:endParaRPr lang="fr-CA"/>
           </a:p>
@@ -2504,7 +2504,7 @@
           <a:p>
             <a:fld id="{3CFA78C3-2C03-4D26-BA08-5201FB292C09}" type="datetimeFigureOut">
               <a:rPr lang="fr-CA" smtClean="0"/>
-              <a:t>2026-03-28</a:t>
+              <a:t>2026-04-14</a:t>
             </a:fld>
             <a:endParaRPr lang="fr-CA"/>
           </a:p>
@@ -2646,7 +2646,7 @@
           <a:p>
             <a:fld id="{3CFA78C3-2C03-4D26-BA08-5201FB292C09}" type="datetimeFigureOut">
               <a:rPr lang="fr-CA" smtClean="0"/>
-              <a:t>2026-03-28</a:t>
+              <a:t>2026-04-14</a:t>
             </a:fld>
             <a:endParaRPr lang="fr-CA"/>
           </a:p>
@@ -2759,7 +2759,7 @@
           <a:p>
             <a:fld id="{3CFA78C3-2C03-4D26-BA08-5201FB292C09}" type="datetimeFigureOut">
               <a:rPr lang="fr-CA" smtClean="0"/>
-              <a:t>2026-03-28</a:t>
+              <a:t>2026-04-14</a:t>
             </a:fld>
             <a:endParaRPr lang="fr-CA"/>
           </a:p>
@@ -3072,7 +3072,7 @@
           <a:p>
             <a:fld id="{3CFA78C3-2C03-4D26-BA08-5201FB292C09}" type="datetimeFigureOut">
               <a:rPr lang="fr-CA" smtClean="0"/>
-              <a:t>2026-03-28</a:t>
+              <a:t>2026-04-14</a:t>
             </a:fld>
             <a:endParaRPr lang="fr-CA"/>
           </a:p>
@@ -3272,7 +3272,7 @@
           <a:p>
             <a:fld id="{B1B97C2F-ED53-40B2-8245-274A53568F1F}" type="datetimeFigureOut">
               <a:rPr lang="fr-CA" smtClean="0"/>
-              <a:t>2026-03-28</a:t>
+              <a:t>2026-04-14</a:t>
             </a:fld>
             <a:endParaRPr lang="fr-CA"/>
           </a:p>
@@ -3561,7 +3561,7 @@
           <a:p>
             <a:fld id="{3CFA78C3-2C03-4D26-BA08-5201FB292C09}" type="datetimeFigureOut">
               <a:rPr lang="fr-CA" smtClean="0"/>
-              <a:t>2026-03-28</a:t>
+              <a:t>2026-04-14</a:t>
             </a:fld>
             <a:endParaRPr lang="fr-CA"/>
           </a:p>
@@ -3761,7 +3761,7 @@
           <a:p>
             <a:fld id="{3CFA78C3-2C03-4D26-BA08-5201FB292C09}" type="datetimeFigureOut">
               <a:rPr lang="fr-CA" smtClean="0"/>
-              <a:t>2026-03-28</a:t>
+              <a:t>2026-04-14</a:t>
             </a:fld>
             <a:endParaRPr lang="fr-CA"/>
           </a:p>
@@ -3971,7 +3971,7 @@
           <a:p>
             <a:fld id="{3CFA78C3-2C03-4D26-BA08-5201FB292C09}" type="datetimeFigureOut">
               <a:rPr lang="fr-CA" smtClean="0"/>
-              <a:t>2026-03-28</a:t>
+              <a:t>2026-04-14</a:t>
             </a:fld>
             <a:endParaRPr lang="fr-CA"/>
           </a:p>
@@ -4247,7 +4247,7 @@
           <a:p>
             <a:fld id="{B1B97C2F-ED53-40B2-8245-274A53568F1F}" type="datetimeFigureOut">
               <a:rPr lang="fr-CA" smtClean="0"/>
-              <a:t>2026-03-28</a:t>
+              <a:t>2026-04-14</a:t>
             </a:fld>
             <a:endParaRPr lang="fr-CA"/>
           </a:p>
@@ -4515,7 +4515,7 @@
           <a:p>
             <a:fld id="{B1B97C2F-ED53-40B2-8245-274A53568F1F}" type="datetimeFigureOut">
               <a:rPr lang="fr-CA" smtClean="0"/>
-              <a:t>2026-03-28</a:t>
+              <a:t>2026-04-14</a:t>
             </a:fld>
             <a:endParaRPr lang="fr-CA"/>
           </a:p>
@@ -4930,7 +4930,7 @@
           <a:p>
             <a:fld id="{B1B97C2F-ED53-40B2-8245-274A53568F1F}" type="datetimeFigureOut">
               <a:rPr lang="fr-CA" smtClean="0"/>
-              <a:t>2026-03-28</a:t>
+              <a:t>2026-04-14</a:t>
             </a:fld>
             <a:endParaRPr lang="fr-CA"/>
           </a:p>
@@ -5072,7 +5072,7 @@
           <a:p>
             <a:fld id="{B1B97C2F-ED53-40B2-8245-274A53568F1F}" type="datetimeFigureOut">
               <a:rPr lang="fr-CA" smtClean="0"/>
-              <a:t>2026-03-28</a:t>
+              <a:t>2026-04-14</a:t>
             </a:fld>
             <a:endParaRPr lang="fr-CA"/>
           </a:p>
@@ -5185,7 +5185,7 @@
           <a:p>
             <a:fld id="{B1B97C2F-ED53-40B2-8245-274A53568F1F}" type="datetimeFigureOut">
               <a:rPr lang="fr-CA" smtClean="0"/>
-              <a:t>2026-03-28</a:t>
+              <a:t>2026-04-14</a:t>
             </a:fld>
             <a:endParaRPr lang="fr-CA"/>
           </a:p>
@@ -5498,7 +5498,7 @@
           <a:p>
             <a:fld id="{B1B97C2F-ED53-40B2-8245-274A53568F1F}" type="datetimeFigureOut">
               <a:rPr lang="fr-CA" smtClean="0"/>
-              <a:t>2026-03-28</a:t>
+              <a:t>2026-04-14</a:t>
             </a:fld>
             <a:endParaRPr lang="fr-CA"/>
           </a:p>
@@ -5787,7 +5787,7 @@
           <a:p>
             <a:fld id="{B1B97C2F-ED53-40B2-8245-274A53568F1F}" type="datetimeFigureOut">
               <a:rPr lang="fr-CA" smtClean="0"/>
-              <a:t>2026-03-28</a:t>
+              <a:t>2026-04-14</a:t>
             </a:fld>
             <a:endParaRPr lang="fr-CA"/>
           </a:p>
@@ -6030,7 +6030,7 @@
           <a:p>
             <a:fld id="{B1B97C2F-ED53-40B2-8245-274A53568F1F}" type="datetimeFigureOut">
               <a:rPr lang="fr-CA" smtClean="0"/>
-              <a:t>2026-03-28</a:t>
+              <a:t>2026-04-14</a:t>
             </a:fld>
             <a:endParaRPr lang="fr-CA"/>
           </a:p>
@@ -6600,7 +6600,7 @@
           <a:p>
             <a:fld id="{3CFA78C3-2C03-4D26-BA08-5201FB292C09}" type="datetimeFigureOut">
               <a:rPr lang="fr-CA" smtClean="0"/>
-              <a:t>2026-03-28</a:t>
+              <a:t>2026-04-14</a:t>
             </a:fld>
             <a:endParaRPr lang="fr-CA"/>
           </a:p>
@@ -12232,10 +12232,10 @@
               <p:nvPr/>
             </p:nvPicPr>
             <p:blipFill>
-              <a:blip r:embed="rId2">
+              <a:blip>
                 <a:extLst>
                   <a:ext uri="{96DAC541-7B7A-43D3-8B79-37D633B846F1}">
-                    <asvg:svgBlip xmlns:asvg="http://schemas.microsoft.com/office/drawing/2016/SVG/main" r:embed="rId3"/>
+                    <asvg:svgBlip xmlns:asvg="http://schemas.microsoft.com/office/drawing/2016/SVG/main" r:embed="rId2"/>
                   </a:ext>
                 </a:extLst>
               </a:blip>
@@ -15232,10 +15232,10 @@
             <p:nvPr/>
           </p:nvPicPr>
           <p:blipFill>
-            <a:blip r:embed="rId2">
+            <a:blip>
               <a:extLst>
                 <a:ext uri="{96DAC541-7B7A-43D3-8B79-37D633B846F1}">
-                  <asvg:svgBlip xmlns:asvg="http://schemas.microsoft.com/office/drawing/2016/SVG/main" r:embed="rId3"/>
+                  <asvg:svgBlip xmlns:asvg="http://schemas.microsoft.com/office/drawing/2016/SVG/main" r:embed="rId2"/>
                 </a:ext>
               </a:extLst>
             </a:blip>
@@ -20116,10 +20116,10 @@
                 <p:nvPr/>
               </p:nvPicPr>
               <p:blipFill>
-                <a:blip r:embed="rId2">
+                <a:blip>
                   <a:extLst>
                     <a:ext uri="{96DAC541-7B7A-43D3-8B79-37D633B846F1}">
-                      <asvg:svgBlip xmlns:asvg="http://schemas.microsoft.com/office/drawing/2016/SVG/main" r:embed="rId3"/>
+                      <asvg:svgBlip xmlns:asvg="http://schemas.microsoft.com/office/drawing/2016/SVG/main" r:embed="rId2"/>
                     </a:ext>
                   </a:extLst>
                 </a:blip>
@@ -20364,10 +20364,10 @@
                   <p:nvPr/>
                 </p:nvPicPr>
                 <p:blipFill>
-                  <a:blip r:embed="rId2">
+                  <a:blip>
                     <a:extLst>
                       <a:ext uri="{96DAC541-7B7A-43D3-8B79-37D633B846F1}">
-                        <asvg:svgBlip xmlns:asvg="http://schemas.microsoft.com/office/drawing/2016/SVG/main" r:embed="rId3"/>
+                        <asvg:svgBlip xmlns:asvg="http://schemas.microsoft.com/office/drawing/2016/SVG/main" r:embed="rId2"/>
                       </a:ext>
                     </a:extLst>
                   </a:blip>
@@ -21467,39 +21467,9 @@
           </p:style>
         </p:cxnSp>
       </p:grpSp>
-    </p:spTree>
-    <p:extLst>
-      <p:ext uri="{BB962C8B-B14F-4D97-AF65-F5344CB8AC3E}">
-        <p14:creationId xmlns:p14="http://schemas.microsoft.com/office/powerpoint/2010/main" val="3550470372"/>
-      </p:ext>
-    </p:extLst>
-  </p:cSld>
-  <p:clrMapOvr>
-    <a:masterClrMapping/>
-  </p:clrMapOvr>
-</p:sld>
-</file>
-
-<file path=ppt/slides/slide9.xml><?xml version="1.0" encoding="utf-8"?>
-<p:sld xmlns:a="http://schemas.openxmlformats.org/drawingml/2006/main" xmlns:r="http://schemas.openxmlformats.org/officeDocument/2006/relationships" xmlns:p="http://schemas.openxmlformats.org/presentationml/2006/main">
-  <p:cSld>
-    <p:spTree>
-      <p:nvGrpSpPr>
-        <p:cNvPr id="1" name=""/>
-        <p:cNvGrpSpPr/>
-        <p:nvPr/>
-      </p:nvGrpSpPr>
-      <p:grpSpPr>
-        <a:xfrm>
-          <a:off x="0" y="0"/>
-          <a:ext cx="0" cy="0"/>
-          <a:chOff x="0" y="0"/>
-          <a:chExt cx="0" cy="0"/>
-        </a:xfrm>
-      </p:grpSpPr>
       <p:grpSp>
         <p:nvGrpSpPr>
-          <p:cNvPr id="8" name="Groupe 7">
+          <p:cNvPr id="15" name="Groupe 14">
             <a:extLst>
               <a:ext uri="{FF2B5EF4-FFF2-40B4-BE49-F238E27FC236}">
                 <a16:creationId xmlns:a16="http://schemas.microsoft.com/office/drawing/2014/main" id="{7252CEEE-CBC4-AF76-1AB4-9F87A4D5E203}"/>
@@ -21511,7 +21481,7 @@
         </p:nvGrpSpPr>
         <p:grpSpPr>
           <a:xfrm>
-            <a:off x="586550" y="570132"/>
+            <a:off x="7096498" y="4758549"/>
             <a:ext cx="1699855" cy="1611093"/>
             <a:chOff x="5322094" y="2762250"/>
             <a:chExt cx="1163261" cy="1102519"/>
@@ -21525,7 +21495,7 @@
         </p:grpSpPr>
         <p:sp>
           <p:nvSpPr>
-            <p:cNvPr id="7" name="Forme libre : forme 6">
+            <p:cNvPr id="27" name="Forme libre : forme 26">
               <a:extLst>
                 <a:ext uri="{FF2B5EF4-FFF2-40B4-BE49-F238E27FC236}">
                   <a16:creationId xmlns:a16="http://schemas.microsoft.com/office/drawing/2014/main" id="{57DF3538-558F-6BC6-E117-4E7B05DF4CA9}"/>
@@ -21790,7 +21760,7 @@
         </p:sp>
         <p:sp>
           <p:nvSpPr>
-            <p:cNvPr id="6" name="Forme libre : forme 5">
+            <p:cNvPr id="28" name="Forme libre : forme 27">
               <a:extLst>
                 <a:ext uri="{FF2B5EF4-FFF2-40B4-BE49-F238E27FC236}">
                   <a16:creationId xmlns:a16="http://schemas.microsoft.com/office/drawing/2014/main" id="{FAE5C2F3-1A6D-945D-471A-7CF7CD009B7A}"/>
@@ -22158,6 +22128,1253 @@
             </a:p>
           </p:txBody>
         </p:sp>
+      </p:grpSp>
+    </p:spTree>
+    <p:extLst>
+      <p:ext uri="{BB962C8B-B14F-4D97-AF65-F5344CB8AC3E}">
+        <p14:creationId xmlns:p14="http://schemas.microsoft.com/office/powerpoint/2010/main" val="3550470372"/>
+      </p:ext>
+    </p:extLst>
+  </p:cSld>
+  <p:clrMapOvr>
+    <a:masterClrMapping/>
+  </p:clrMapOvr>
+</p:sld>
+</file>
+
+<file path=ppt/slides/slide9.xml><?xml version="1.0" encoding="utf-8"?>
+<p:sld xmlns:a="http://schemas.openxmlformats.org/drawingml/2006/main" xmlns:r="http://schemas.openxmlformats.org/officeDocument/2006/relationships" xmlns:p="http://schemas.openxmlformats.org/presentationml/2006/main">
+  <p:cSld>
+    <p:spTree>
+      <p:nvGrpSpPr>
+        <p:cNvPr id="1" name=""/>
+        <p:cNvGrpSpPr/>
+        <p:nvPr/>
+      </p:nvGrpSpPr>
+      <p:grpSpPr>
+        <a:xfrm>
+          <a:off x="0" y="0"/>
+          <a:ext cx="0" cy="0"/>
+          <a:chOff x="0" y="0"/>
+          <a:chExt cx="0" cy="0"/>
+        </a:xfrm>
+      </p:grpSpPr>
+      <p:grpSp>
+        <p:nvGrpSpPr>
+          <p:cNvPr id="46" name="Groupe 45">
+            <a:extLst>
+              <a:ext uri="{FF2B5EF4-FFF2-40B4-BE49-F238E27FC236}">
+                <a16:creationId xmlns:a16="http://schemas.microsoft.com/office/drawing/2014/main" id="{5D0E48A9-6DD0-1A8C-7367-1633D79465D7}"/>
+              </a:ext>
+            </a:extLst>
+          </p:cNvPr>
+          <p:cNvGrpSpPr/>
+          <p:nvPr/>
+        </p:nvGrpSpPr>
+        <p:grpSpPr>
+          <a:xfrm>
+            <a:off x="8993505" y="239641"/>
+            <a:ext cx="2875280" cy="2875280"/>
+            <a:chOff x="8993505" y="239641"/>
+            <a:chExt cx="2875280" cy="2875280"/>
+          </a:xfrm>
+        </p:grpSpPr>
+        <p:sp>
+          <p:nvSpPr>
+            <p:cNvPr id="2" name="Ellipse 1">
+              <a:extLst>
+                <a:ext uri="{FF2B5EF4-FFF2-40B4-BE49-F238E27FC236}">
+                  <a16:creationId xmlns:a16="http://schemas.microsoft.com/office/drawing/2014/main" id="{8589D296-22A3-AF55-88DA-B5CF1293E986}"/>
+                </a:ext>
+              </a:extLst>
+            </p:cNvPr>
+            <p:cNvSpPr/>
+            <p:nvPr/>
+          </p:nvSpPr>
+          <p:spPr>
+            <a:xfrm>
+              <a:off x="8993505" y="239641"/>
+              <a:ext cx="2875280" cy="2875280"/>
+            </a:xfrm>
+            <a:prstGeom prst="ellipse">
+              <a:avLst/>
+            </a:prstGeom>
+            <a:ln w="38100"/>
+          </p:spPr>
+          <p:style>
+            <a:lnRef idx="2">
+              <a:schemeClr val="accent3">
+                <a:shade val="15000"/>
+              </a:schemeClr>
+            </a:lnRef>
+            <a:fillRef idx="1">
+              <a:schemeClr val="accent3"/>
+            </a:fillRef>
+            <a:effectRef idx="0">
+              <a:schemeClr val="accent3"/>
+            </a:effectRef>
+            <a:fontRef idx="minor">
+              <a:schemeClr val="lt1"/>
+            </a:fontRef>
+          </p:style>
+          <p:txBody>
+            <a:bodyPr rtlCol="0" anchor="ctr"/>
+            <a:lstStyle/>
+            <a:p>
+              <a:pPr algn="ctr"/>
+              <a:endParaRPr lang="en-CA"/>
+            </a:p>
+          </p:txBody>
+        </p:sp>
+        <p:sp>
+          <p:nvSpPr>
+            <p:cNvPr id="9" name="Ellipse 8">
+              <a:extLst>
+                <a:ext uri="{FF2B5EF4-FFF2-40B4-BE49-F238E27FC236}">
+                  <a16:creationId xmlns:a16="http://schemas.microsoft.com/office/drawing/2014/main" id="{22ED24C4-6932-CD0C-36E0-BDBFC8835E84}"/>
+                </a:ext>
+              </a:extLst>
+            </p:cNvPr>
+            <p:cNvSpPr/>
+            <p:nvPr/>
+          </p:nvSpPr>
+          <p:spPr>
+            <a:xfrm>
+              <a:off x="9111347" y="362563"/>
+              <a:ext cx="2629436" cy="2629436"/>
+            </a:xfrm>
+            <a:prstGeom prst="ellipse">
+              <a:avLst/>
+            </a:prstGeom>
+            <a:ln w="38100"/>
+          </p:spPr>
+          <p:style>
+            <a:lnRef idx="2">
+              <a:schemeClr val="accent3">
+                <a:shade val="15000"/>
+              </a:schemeClr>
+            </a:lnRef>
+            <a:fillRef idx="1">
+              <a:schemeClr val="accent3"/>
+            </a:fillRef>
+            <a:effectRef idx="0">
+              <a:schemeClr val="accent3"/>
+            </a:effectRef>
+            <a:fontRef idx="minor">
+              <a:schemeClr val="lt1"/>
+            </a:fontRef>
+          </p:style>
+          <p:txBody>
+            <a:bodyPr rtlCol="0" anchor="ctr"/>
+            <a:lstStyle/>
+            <a:p>
+              <a:pPr algn="ctr"/>
+              <a:endParaRPr lang="en-CA"/>
+            </a:p>
+          </p:txBody>
+        </p:sp>
+        <p:sp>
+          <p:nvSpPr>
+            <p:cNvPr id="40" name="Arc partiel 39">
+              <a:extLst>
+                <a:ext uri="{FF2B5EF4-FFF2-40B4-BE49-F238E27FC236}">
+                  <a16:creationId xmlns:a16="http://schemas.microsoft.com/office/drawing/2014/main" id="{960BCF47-3D07-32AB-0394-249EE94A9F99}"/>
+                </a:ext>
+              </a:extLst>
+            </p:cNvPr>
+            <p:cNvSpPr/>
+            <p:nvPr/>
+          </p:nvSpPr>
+          <p:spPr>
+            <a:xfrm rot="10800000">
+              <a:off x="9097374" y="358212"/>
+              <a:ext cx="2624356" cy="2624356"/>
+            </a:xfrm>
+            <a:prstGeom prst="pie">
+              <a:avLst>
+                <a:gd name="adj1" fmla="val 9614698"/>
+                <a:gd name="adj2" fmla="val 13441705"/>
+              </a:avLst>
+            </a:prstGeom>
+            <a:solidFill>
+              <a:srgbClr val="FF0000">
+                <a:alpha val="51000"/>
+              </a:srgbClr>
+            </a:solidFill>
+            <a:ln w="38100">
+              <a:noFill/>
+            </a:ln>
+          </p:spPr>
+          <p:style>
+            <a:lnRef idx="2">
+              <a:schemeClr val="accent1">
+                <a:shade val="15000"/>
+              </a:schemeClr>
+            </a:lnRef>
+            <a:fillRef idx="1">
+              <a:schemeClr val="accent1"/>
+            </a:fillRef>
+            <a:effectRef idx="0">
+              <a:schemeClr val="accent1"/>
+            </a:effectRef>
+            <a:fontRef idx="minor">
+              <a:schemeClr val="lt1"/>
+            </a:fontRef>
+          </p:style>
+          <p:txBody>
+            <a:bodyPr rtlCol="0" anchor="ctr"/>
+            <a:lstStyle/>
+            <a:p>
+              <a:pPr algn="ctr"/>
+              <a:endParaRPr lang="en-CA">
+                <a:solidFill>
+                  <a:schemeClr val="tx1"/>
+                </a:solidFill>
+              </a:endParaRPr>
+            </a:p>
+          </p:txBody>
+        </p:sp>
+        <p:sp>
+          <p:nvSpPr>
+            <p:cNvPr id="44" name="Arc partiel 43">
+              <a:extLst>
+                <a:ext uri="{FF2B5EF4-FFF2-40B4-BE49-F238E27FC236}">
+                  <a16:creationId xmlns:a16="http://schemas.microsoft.com/office/drawing/2014/main" id="{42731F46-9539-EBFC-3099-0696AC9F833A}"/>
+                </a:ext>
+              </a:extLst>
+            </p:cNvPr>
+            <p:cNvSpPr>
+              <a:spLocks/>
+            </p:cNvSpPr>
+            <p:nvPr/>
+          </p:nvSpPr>
+          <p:spPr>
+            <a:xfrm rot="10800000">
+              <a:off x="9111346" y="376900"/>
+              <a:ext cx="2610383" cy="2610383"/>
+            </a:xfrm>
+            <a:prstGeom prst="pie">
+              <a:avLst>
+                <a:gd name="adj1" fmla="val 5505347"/>
+                <a:gd name="adj2" fmla="val 9572217"/>
+              </a:avLst>
+            </a:prstGeom>
+            <a:solidFill>
+              <a:srgbClr val="FFFF00">
+                <a:alpha val="51000"/>
+              </a:srgbClr>
+            </a:solidFill>
+            <a:ln w="38100">
+              <a:noFill/>
+            </a:ln>
+          </p:spPr>
+          <p:style>
+            <a:lnRef idx="2">
+              <a:schemeClr val="accent1">
+                <a:shade val="15000"/>
+              </a:schemeClr>
+            </a:lnRef>
+            <a:fillRef idx="1">
+              <a:schemeClr val="accent1"/>
+            </a:fillRef>
+            <a:effectRef idx="0">
+              <a:schemeClr val="accent1"/>
+            </a:effectRef>
+            <a:fontRef idx="minor">
+              <a:schemeClr val="lt1"/>
+            </a:fontRef>
+          </p:style>
+          <p:txBody>
+            <a:bodyPr rtlCol="0" anchor="ctr"/>
+            <a:lstStyle/>
+            <a:p>
+              <a:pPr algn="ctr"/>
+              <a:endParaRPr lang="en-CA">
+                <a:solidFill>
+                  <a:schemeClr val="tx1"/>
+                </a:solidFill>
+              </a:endParaRPr>
+            </a:p>
+          </p:txBody>
+        </p:sp>
+        <p:sp>
+          <p:nvSpPr>
+            <p:cNvPr id="45" name="Arc partiel 44">
+              <a:extLst>
+                <a:ext uri="{FF2B5EF4-FFF2-40B4-BE49-F238E27FC236}">
+                  <a16:creationId xmlns:a16="http://schemas.microsoft.com/office/drawing/2014/main" id="{FCC95866-CD3F-9FEE-5292-5F74FBD6D56F}"/>
+                </a:ext>
+              </a:extLst>
+            </p:cNvPr>
+            <p:cNvSpPr>
+              <a:spLocks/>
+            </p:cNvSpPr>
+            <p:nvPr/>
+          </p:nvSpPr>
+          <p:spPr>
+            <a:xfrm rot="10800000">
+              <a:off x="9130399" y="376900"/>
+              <a:ext cx="2591330" cy="2585472"/>
+            </a:xfrm>
+            <a:prstGeom prst="pie">
+              <a:avLst>
+                <a:gd name="adj1" fmla="val 18885675"/>
+                <a:gd name="adj2" fmla="val 5453707"/>
+              </a:avLst>
+            </a:prstGeom>
+            <a:solidFill>
+              <a:srgbClr val="92D050">
+                <a:alpha val="51000"/>
+              </a:srgbClr>
+            </a:solidFill>
+            <a:ln w="38100">
+              <a:noFill/>
+            </a:ln>
+          </p:spPr>
+          <p:style>
+            <a:lnRef idx="2">
+              <a:schemeClr val="accent1">
+                <a:shade val="15000"/>
+              </a:schemeClr>
+            </a:lnRef>
+            <a:fillRef idx="1">
+              <a:schemeClr val="accent1"/>
+            </a:fillRef>
+            <a:effectRef idx="0">
+              <a:schemeClr val="accent1"/>
+            </a:effectRef>
+            <a:fontRef idx="minor">
+              <a:schemeClr val="lt1"/>
+            </a:fontRef>
+          </p:style>
+          <p:txBody>
+            <a:bodyPr rtlCol="0" anchor="ctr"/>
+            <a:lstStyle/>
+            <a:p>
+              <a:pPr algn="ctr"/>
+              <a:endParaRPr lang="en-CA">
+                <a:solidFill>
+                  <a:schemeClr val="tx1"/>
+                </a:solidFill>
+              </a:endParaRPr>
+            </a:p>
+          </p:txBody>
+        </p:sp>
+        <p:sp>
+          <p:nvSpPr>
+            <p:cNvPr id="43" name="Ellipse 42">
+              <a:extLst>
+                <a:ext uri="{FF2B5EF4-FFF2-40B4-BE49-F238E27FC236}">
+                  <a16:creationId xmlns:a16="http://schemas.microsoft.com/office/drawing/2014/main" id="{8D37D01E-CD36-792D-A24A-0A4630042571}"/>
+                </a:ext>
+              </a:extLst>
+            </p:cNvPr>
+            <p:cNvSpPr/>
+            <p:nvPr/>
+          </p:nvSpPr>
+          <p:spPr>
+            <a:xfrm>
+              <a:off x="9253011" y="483704"/>
+              <a:ext cx="2366007" cy="2366007"/>
+            </a:xfrm>
+            <a:prstGeom prst="ellipse">
+              <a:avLst/>
+            </a:prstGeom>
+            <a:ln w="38100">
+              <a:noFill/>
+            </a:ln>
+          </p:spPr>
+          <p:style>
+            <a:lnRef idx="2">
+              <a:schemeClr val="accent3">
+                <a:shade val="15000"/>
+              </a:schemeClr>
+            </a:lnRef>
+            <a:fillRef idx="1">
+              <a:schemeClr val="accent3"/>
+            </a:fillRef>
+            <a:effectRef idx="0">
+              <a:schemeClr val="accent3"/>
+            </a:effectRef>
+            <a:fontRef idx="minor">
+              <a:schemeClr val="lt1"/>
+            </a:fontRef>
+          </p:style>
+          <p:txBody>
+            <a:bodyPr rtlCol="0" anchor="ctr"/>
+            <a:lstStyle/>
+            <a:p>
+              <a:pPr algn="ctr"/>
+              <a:endParaRPr lang="en-CA"/>
+            </a:p>
+          </p:txBody>
+        </p:sp>
+        <p:sp>
+          <p:nvSpPr>
+            <p:cNvPr id="5" name="Triangle isocèle 4">
+              <a:extLst>
+                <a:ext uri="{FF2B5EF4-FFF2-40B4-BE49-F238E27FC236}">
+                  <a16:creationId xmlns:a16="http://schemas.microsoft.com/office/drawing/2014/main" id="{D8B5EDAD-94E5-143B-C0AD-31E9CFEC8C9E}"/>
+                </a:ext>
+              </a:extLst>
+            </p:cNvPr>
+            <p:cNvSpPr/>
+            <p:nvPr/>
+          </p:nvSpPr>
+          <p:spPr>
+            <a:xfrm rot="1542908">
+              <a:off x="10462101" y="538530"/>
+              <a:ext cx="510184" cy="1128020"/>
+            </a:xfrm>
+            <a:prstGeom prst="triangle">
+              <a:avLst>
+                <a:gd name="adj" fmla="val 54925"/>
+              </a:avLst>
+            </a:prstGeom>
+            <a:ln w="38100"/>
+          </p:spPr>
+          <p:style>
+            <a:lnRef idx="2">
+              <a:schemeClr val="accent2">
+                <a:shade val="15000"/>
+              </a:schemeClr>
+            </a:lnRef>
+            <a:fillRef idx="1">
+              <a:schemeClr val="accent2"/>
+            </a:fillRef>
+            <a:effectRef idx="0">
+              <a:schemeClr val="accent2"/>
+            </a:effectRef>
+            <a:fontRef idx="minor">
+              <a:schemeClr val="lt1"/>
+            </a:fontRef>
+          </p:style>
+          <p:txBody>
+            <a:bodyPr rtlCol="0" anchor="ctr"/>
+            <a:lstStyle/>
+            <a:p>
+              <a:pPr algn="ctr"/>
+              <a:endParaRPr lang="en-CA"/>
+            </a:p>
+          </p:txBody>
+        </p:sp>
+        <p:sp>
+          <p:nvSpPr>
+            <p:cNvPr id="3" name="Ellipse 2">
+              <a:extLst>
+                <a:ext uri="{FF2B5EF4-FFF2-40B4-BE49-F238E27FC236}">
+                  <a16:creationId xmlns:a16="http://schemas.microsoft.com/office/drawing/2014/main" id="{02C0C389-E847-A311-C3F8-A5C4953CE50B}"/>
+                </a:ext>
+              </a:extLst>
+            </p:cNvPr>
+            <p:cNvSpPr/>
+            <p:nvPr/>
+          </p:nvSpPr>
+          <p:spPr>
+            <a:xfrm>
+              <a:off x="10163109" y="1414391"/>
+              <a:ext cx="545813" cy="545813"/>
+            </a:xfrm>
+            <a:prstGeom prst="ellipse">
+              <a:avLst/>
+            </a:prstGeom>
+            <a:ln w="38100"/>
+          </p:spPr>
+          <p:style>
+            <a:lnRef idx="2">
+              <a:schemeClr val="accent2">
+                <a:shade val="15000"/>
+              </a:schemeClr>
+            </a:lnRef>
+            <a:fillRef idx="1">
+              <a:schemeClr val="accent2"/>
+            </a:fillRef>
+            <a:effectRef idx="0">
+              <a:schemeClr val="accent2"/>
+            </a:effectRef>
+            <a:fontRef idx="minor">
+              <a:schemeClr val="lt1"/>
+            </a:fontRef>
+          </p:style>
+          <p:txBody>
+            <a:bodyPr rtlCol="0" anchor="ctr"/>
+            <a:lstStyle/>
+            <a:p>
+              <a:pPr algn="ctr"/>
+              <a:endParaRPr lang="en-CA"/>
+            </a:p>
+          </p:txBody>
+        </p:sp>
+        <p:sp>
+          <p:nvSpPr>
+            <p:cNvPr id="37" name="Rectangle 36">
+              <a:extLst>
+                <a:ext uri="{FF2B5EF4-FFF2-40B4-BE49-F238E27FC236}">
+                  <a16:creationId xmlns:a16="http://schemas.microsoft.com/office/drawing/2014/main" id="{72F36938-DD6F-1A92-9B66-8FD78B53F37E}"/>
+                </a:ext>
+              </a:extLst>
+            </p:cNvPr>
+            <p:cNvSpPr/>
+            <p:nvPr/>
+          </p:nvSpPr>
+          <p:spPr>
+            <a:xfrm>
+              <a:off x="9872663" y="2040537"/>
+              <a:ext cx="1143000" cy="348799"/>
+            </a:xfrm>
+            <a:prstGeom prst="rect">
+              <a:avLst/>
+            </a:prstGeom>
+            <a:solidFill>
+              <a:schemeClr val="accent3">
+                <a:lumMod val="40000"/>
+                <a:lumOff val="60000"/>
+              </a:schemeClr>
+            </a:solidFill>
+            <a:ln w="28575">
+              <a:solidFill>
+                <a:schemeClr val="bg2">
+                  <a:lumMod val="25000"/>
+                </a:schemeClr>
+              </a:solidFill>
+            </a:ln>
+          </p:spPr>
+          <p:style>
+            <a:lnRef idx="2">
+              <a:schemeClr val="dk1"/>
+            </a:lnRef>
+            <a:fillRef idx="1">
+              <a:schemeClr val="lt1"/>
+            </a:fillRef>
+            <a:effectRef idx="0">
+              <a:schemeClr val="dk1"/>
+            </a:effectRef>
+            <a:fontRef idx="minor">
+              <a:schemeClr val="dk1"/>
+            </a:fontRef>
+          </p:style>
+          <p:txBody>
+            <a:bodyPr rtlCol="0" anchor="ctr"/>
+            <a:lstStyle/>
+            <a:p>
+              <a:pPr algn="ctr"/>
+              <a:r>
+                <a:rPr lang="en-CA" sz="2400" b="1" dirty="0">
+                  <a:solidFill>
+                    <a:srgbClr val="64310F"/>
+                  </a:solidFill>
+                  <a:latin typeface="Segoe UI" panose="020B0502040204020203" pitchFamily="34" charset="0"/>
+                  <a:cs typeface="Segoe UI" panose="020B0502040204020203" pitchFamily="34" charset="0"/>
+                </a:rPr>
+                <a:t>123.4</a:t>
+              </a:r>
+            </a:p>
+          </p:txBody>
+        </p:sp>
+        <p:cxnSp>
+          <p:nvCxnSpPr>
+            <p:cNvPr id="31" name="Connecteur droit 30">
+              <a:extLst>
+                <a:ext uri="{FF2B5EF4-FFF2-40B4-BE49-F238E27FC236}">
+                  <a16:creationId xmlns:a16="http://schemas.microsoft.com/office/drawing/2014/main" id="{4EE03CE4-593E-415A-660F-1EC0A58990B8}"/>
+                </a:ext>
+              </a:extLst>
+            </p:cNvPr>
+            <p:cNvCxnSpPr>
+              <a:cxnSpLocks/>
+            </p:cNvCxnSpPr>
+            <p:nvPr/>
+          </p:nvCxnSpPr>
+          <p:spPr>
+            <a:xfrm rot="18900000">
+              <a:off x="9355607" y="2544584"/>
+              <a:ext cx="412433" cy="0"/>
+            </a:xfrm>
+            <a:prstGeom prst="line">
+              <a:avLst/>
+            </a:prstGeom>
+            <a:ln w="38100">
+              <a:solidFill>
+                <a:schemeClr val="bg2">
+                  <a:lumMod val="25000"/>
+                </a:schemeClr>
+              </a:solidFill>
+            </a:ln>
+          </p:spPr>
+          <p:style>
+            <a:lnRef idx="1">
+              <a:schemeClr val="accent1"/>
+            </a:lnRef>
+            <a:fillRef idx="0">
+              <a:schemeClr val="accent1"/>
+            </a:fillRef>
+            <a:effectRef idx="0">
+              <a:schemeClr val="accent1"/>
+            </a:effectRef>
+            <a:fontRef idx="minor">
+              <a:schemeClr val="tx1"/>
+            </a:fontRef>
+          </p:style>
+        </p:cxnSp>
+        <p:cxnSp>
+          <p:nvCxnSpPr>
+            <p:cNvPr id="27" name="Connecteur droit 26">
+              <a:extLst>
+                <a:ext uri="{FF2B5EF4-FFF2-40B4-BE49-F238E27FC236}">
+                  <a16:creationId xmlns:a16="http://schemas.microsoft.com/office/drawing/2014/main" id="{F518E5BE-4DB5-D485-F9A8-1CE46941730E}"/>
+                </a:ext>
+              </a:extLst>
+            </p:cNvPr>
+            <p:cNvCxnSpPr>
+              <a:cxnSpLocks/>
+            </p:cNvCxnSpPr>
+            <p:nvPr/>
+          </p:nvCxnSpPr>
+          <p:spPr>
+            <a:xfrm rot="5400000">
+              <a:off x="10229800" y="450729"/>
+              <a:ext cx="412433" cy="0"/>
+            </a:xfrm>
+            <a:prstGeom prst="line">
+              <a:avLst/>
+            </a:prstGeom>
+            <a:ln w="38100">
+              <a:solidFill>
+                <a:schemeClr val="bg2">
+                  <a:lumMod val="25000"/>
+                </a:schemeClr>
+              </a:solidFill>
+            </a:ln>
+          </p:spPr>
+          <p:style>
+            <a:lnRef idx="1">
+              <a:schemeClr val="accent1"/>
+            </a:lnRef>
+            <a:fillRef idx="0">
+              <a:schemeClr val="accent1"/>
+            </a:fillRef>
+            <a:effectRef idx="0">
+              <a:schemeClr val="accent1"/>
+            </a:effectRef>
+            <a:fontRef idx="minor">
+              <a:schemeClr val="tx1"/>
+            </a:fontRef>
+          </p:style>
+        </p:cxnSp>
+        <p:cxnSp>
+          <p:nvCxnSpPr>
+            <p:cNvPr id="34" name="Connecteur droit 33">
+              <a:extLst>
+                <a:ext uri="{FF2B5EF4-FFF2-40B4-BE49-F238E27FC236}">
+                  <a16:creationId xmlns:a16="http://schemas.microsoft.com/office/drawing/2014/main" id="{CFC93AA2-2E4D-3F2E-6EF1-7893FAEFF648}"/>
+                </a:ext>
+              </a:extLst>
+            </p:cNvPr>
+            <p:cNvCxnSpPr>
+              <a:cxnSpLocks/>
+            </p:cNvCxnSpPr>
+            <p:nvPr/>
+          </p:nvCxnSpPr>
+          <p:spPr>
+            <a:xfrm rot="2700000">
+              <a:off x="9362496" y="803088"/>
+              <a:ext cx="412433" cy="0"/>
+            </a:xfrm>
+            <a:prstGeom prst="line">
+              <a:avLst/>
+            </a:prstGeom>
+            <a:ln w="38100">
+              <a:solidFill>
+                <a:schemeClr val="bg2">
+                  <a:lumMod val="25000"/>
+                </a:schemeClr>
+              </a:solidFill>
+            </a:ln>
+          </p:spPr>
+          <p:style>
+            <a:lnRef idx="1">
+              <a:schemeClr val="accent1"/>
+            </a:lnRef>
+            <a:fillRef idx="0">
+              <a:schemeClr val="accent1"/>
+            </a:fillRef>
+            <a:effectRef idx="0">
+              <a:schemeClr val="accent1"/>
+            </a:effectRef>
+            <a:fontRef idx="minor">
+              <a:schemeClr val="tx1"/>
+            </a:fontRef>
+          </p:style>
+        </p:cxnSp>
+        <p:cxnSp>
+          <p:nvCxnSpPr>
+            <p:cNvPr id="12" name="Connecteur droit 11">
+              <a:extLst>
+                <a:ext uri="{FF2B5EF4-FFF2-40B4-BE49-F238E27FC236}">
+                  <a16:creationId xmlns:a16="http://schemas.microsoft.com/office/drawing/2014/main" id="{34DB6CFF-6086-C51F-30CB-5939D142DE78}"/>
+                </a:ext>
+              </a:extLst>
+            </p:cNvPr>
+            <p:cNvCxnSpPr>
+              <a:cxnSpLocks/>
+              <a:stCxn id="2" idx="2"/>
+            </p:cNvCxnSpPr>
+            <p:nvPr/>
+          </p:nvCxnSpPr>
+          <p:spPr>
+            <a:xfrm>
+              <a:off x="8993505" y="1677281"/>
+              <a:ext cx="412433" cy="0"/>
+            </a:xfrm>
+            <a:prstGeom prst="line">
+              <a:avLst/>
+            </a:prstGeom>
+            <a:ln w="38100">
+              <a:solidFill>
+                <a:schemeClr val="bg2">
+                  <a:lumMod val="25000"/>
+                </a:schemeClr>
+              </a:solidFill>
+            </a:ln>
+          </p:spPr>
+          <p:style>
+            <a:lnRef idx="1">
+              <a:schemeClr val="accent1"/>
+            </a:lnRef>
+            <a:fillRef idx="0">
+              <a:schemeClr val="accent1"/>
+            </a:fillRef>
+            <a:effectRef idx="0">
+              <a:schemeClr val="accent1"/>
+            </a:effectRef>
+            <a:fontRef idx="minor">
+              <a:schemeClr val="tx1"/>
+            </a:fontRef>
+          </p:style>
+        </p:cxnSp>
+        <p:cxnSp>
+          <p:nvCxnSpPr>
+            <p:cNvPr id="35" name="Connecteur droit 34">
+              <a:extLst>
+                <a:ext uri="{FF2B5EF4-FFF2-40B4-BE49-F238E27FC236}">
+                  <a16:creationId xmlns:a16="http://schemas.microsoft.com/office/drawing/2014/main" id="{052F1008-0BC1-BCAA-AD13-5B923B97CC6A}"/>
+                </a:ext>
+              </a:extLst>
+            </p:cNvPr>
+            <p:cNvCxnSpPr>
+              <a:cxnSpLocks/>
+            </p:cNvCxnSpPr>
+            <p:nvPr/>
+          </p:nvCxnSpPr>
+          <p:spPr>
+            <a:xfrm rot="2700000">
+              <a:off x="11097103" y="2551473"/>
+              <a:ext cx="412433" cy="0"/>
+            </a:xfrm>
+            <a:prstGeom prst="line">
+              <a:avLst/>
+            </a:prstGeom>
+            <a:ln w="38100">
+              <a:solidFill>
+                <a:schemeClr val="bg2">
+                  <a:lumMod val="25000"/>
+                </a:schemeClr>
+              </a:solidFill>
+            </a:ln>
+          </p:spPr>
+          <p:style>
+            <a:lnRef idx="1">
+              <a:schemeClr val="accent1"/>
+            </a:lnRef>
+            <a:fillRef idx="0">
+              <a:schemeClr val="accent1"/>
+            </a:fillRef>
+            <a:effectRef idx="0">
+              <a:schemeClr val="accent1"/>
+            </a:effectRef>
+            <a:fontRef idx="minor">
+              <a:schemeClr val="tx1"/>
+            </a:fontRef>
+          </p:style>
+        </p:cxnSp>
+        <p:cxnSp>
+          <p:nvCxnSpPr>
+            <p:cNvPr id="17" name="Connecteur droit 16">
+              <a:extLst>
+                <a:ext uri="{FF2B5EF4-FFF2-40B4-BE49-F238E27FC236}">
+                  <a16:creationId xmlns:a16="http://schemas.microsoft.com/office/drawing/2014/main" id="{1D60F9FF-1374-0B0F-8A08-9E4962408520}"/>
+                </a:ext>
+              </a:extLst>
+            </p:cNvPr>
+            <p:cNvCxnSpPr>
+              <a:cxnSpLocks/>
+            </p:cNvCxnSpPr>
+            <p:nvPr/>
+          </p:nvCxnSpPr>
+          <p:spPr>
+            <a:xfrm>
+              <a:off x="11456352" y="1687024"/>
+              <a:ext cx="412433" cy="0"/>
+            </a:xfrm>
+            <a:prstGeom prst="line">
+              <a:avLst/>
+            </a:prstGeom>
+            <a:ln w="38100">
+              <a:solidFill>
+                <a:schemeClr val="bg2">
+                  <a:lumMod val="25000"/>
+                </a:schemeClr>
+              </a:solidFill>
+            </a:ln>
+          </p:spPr>
+          <p:style>
+            <a:lnRef idx="1">
+              <a:schemeClr val="accent1"/>
+            </a:lnRef>
+            <a:fillRef idx="0">
+              <a:schemeClr val="accent1"/>
+            </a:fillRef>
+            <a:effectRef idx="0">
+              <a:schemeClr val="accent1"/>
+            </a:effectRef>
+            <a:fontRef idx="minor">
+              <a:schemeClr val="tx1"/>
+            </a:fontRef>
+          </p:style>
+        </p:cxnSp>
+        <p:cxnSp>
+          <p:nvCxnSpPr>
+            <p:cNvPr id="32" name="Connecteur droit 31">
+              <a:extLst>
+                <a:ext uri="{FF2B5EF4-FFF2-40B4-BE49-F238E27FC236}">
+                  <a16:creationId xmlns:a16="http://schemas.microsoft.com/office/drawing/2014/main" id="{038C7C3F-9EE1-8663-4348-F17BC9A9C188}"/>
+                </a:ext>
+              </a:extLst>
+            </p:cNvPr>
+            <p:cNvCxnSpPr>
+              <a:cxnSpLocks/>
+            </p:cNvCxnSpPr>
+            <p:nvPr/>
+          </p:nvCxnSpPr>
+          <p:spPr>
+            <a:xfrm rot="18900000">
+              <a:off x="11103992" y="809977"/>
+              <a:ext cx="412433" cy="0"/>
+            </a:xfrm>
+            <a:prstGeom prst="line">
+              <a:avLst/>
+            </a:prstGeom>
+            <a:ln w="38100">
+              <a:solidFill>
+                <a:schemeClr val="bg2">
+                  <a:lumMod val="25000"/>
+                </a:schemeClr>
+              </a:solidFill>
+            </a:ln>
+          </p:spPr>
+          <p:style>
+            <a:lnRef idx="1">
+              <a:schemeClr val="accent1"/>
+            </a:lnRef>
+            <a:fillRef idx="0">
+              <a:schemeClr val="accent1"/>
+            </a:fillRef>
+            <a:effectRef idx="0">
+              <a:schemeClr val="accent1"/>
+            </a:effectRef>
+            <a:fontRef idx="minor">
+              <a:schemeClr val="tx1"/>
+            </a:fontRef>
+          </p:style>
+        </p:cxnSp>
+      </p:grpSp>
+      <p:sp>
+        <p:nvSpPr>
+          <p:cNvPr id="55" name="Rectangle : coins arrondis 54">
+            <a:extLst>
+              <a:ext uri="{FF2B5EF4-FFF2-40B4-BE49-F238E27FC236}">
+                <a16:creationId xmlns:a16="http://schemas.microsoft.com/office/drawing/2014/main" id="{8A28F081-C4BB-E83E-D072-D19DC5305406}"/>
+              </a:ext>
+            </a:extLst>
+          </p:cNvPr>
+          <p:cNvSpPr/>
+          <p:nvPr/>
+        </p:nvSpPr>
+        <p:spPr>
+          <a:xfrm>
+            <a:off x="5362735" y="483704"/>
+            <a:ext cx="2514173" cy="990266"/>
+          </a:xfrm>
+          <a:prstGeom prst="roundRect">
+            <a:avLst>
+              <a:gd name="adj" fmla="val 10511"/>
+            </a:avLst>
+          </a:prstGeom>
+          <a:solidFill>
+            <a:srgbClr val="DBDBDB"/>
+          </a:solidFill>
+          <a:ln w="76200">
+            <a:solidFill>
+              <a:srgbClr val="434343"/>
+            </a:solidFill>
+          </a:ln>
+        </p:spPr>
+        <p:style>
+          <a:lnRef idx="2">
+            <a:schemeClr val="accent1">
+              <a:shade val="15000"/>
+            </a:schemeClr>
+          </a:lnRef>
+          <a:fillRef idx="1">
+            <a:schemeClr val="accent1"/>
+          </a:fillRef>
+          <a:effectRef idx="0">
+            <a:schemeClr val="accent1"/>
+          </a:effectRef>
+          <a:fontRef idx="minor">
+            <a:schemeClr val="lt1"/>
+          </a:fontRef>
+        </p:style>
+        <p:txBody>
+          <a:bodyPr rtlCol="0" anchor="ctr"/>
+          <a:lstStyle/>
+          <a:p>
+            <a:pPr algn="ctr"/>
+            <a:r>
+              <a:rPr lang="en-CA" sz="5400" b="1" dirty="0">
+                <a:solidFill>
+                  <a:srgbClr val="64310F"/>
+                </a:solidFill>
+                <a:latin typeface="Segoe UI" panose="020B0502040204020203" pitchFamily="34" charset="0"/>
+                <a:cs typeface="Segoe UI" panose="020B0502040204020203" pitchFamily="34" charset="0"/>
+              </a:rPr>
+              <a:t>123.4</a:t>
+            </a:r>
+          </a:p>
+        </p:txBody>
+      </p:sp>
+      <p:grpSp>
+        <p:nvGrpSpPr>
+          <p:cNvPr id="20" name="Groupe 19">
+            <a:extLst>
+              <a:ext uri="{FF2B5EF4-FFF2-40B4-BE49-F238E27FC236}">
+                <a16:creationId xmlns:a16="http://schemas.microsoft.com/office/drawing/2014/main" id="{BC56F5FB-AD55-33EE-BBAF-52957F4C1ECB}"/>
+              </a:ext>
+            </a:extLst>
+          </p:cNvPr>
+          <p:cNvGrpSpPr/>
+          <p:nvPr/>
+        </p:nvGrpSpPr>
+        <p:grpSpPr>
+          <a:xfrm>
+            <a:off x="580907" y="247465"/>
+            <a:ext cx="3194762" cy="3194255"/>
+            <a:chOff x="580907" y="247465"/>
+            <a:chExt cx="3194762" cy="3194255"/>
+          </a:xfrm>
+        </p:grpSpPr>
+        <p:sp>
+          <p:nvSpPr>
+            <p:cNvPr id="19" name="Arc partiel 18">
+              <a:extLst>
+                <a:ext uri="{FF2B5EF4-FFF2-40B4-BE49-F238E27FC236}">
+                  <a16:creationId xmlns:a16="http://schemas.microsoft.com/office/drawing/2014/main" id="{5527027A-BA65-46D7-62E6-4C36399B7E2B}"/>
+                </a:ext>
+              </a:extLst>
+            </p:cNvPr>
+            <p:cNvSpPr/>
+            <p:nvPr/>
+          </p:nvSpPr>
+          <p:spPr>
+            <a:xfrm>
+              <a:off x="594134" y="260185"/>
+              <a:ext cx="3181535" cy="3181535"/>
+            </a:xfrm>
+            <a:prstGeom prst="pie">
+              <a:avLst>
+                <a:gd name="adj1" fmla="val 19395265"/>
+                <a:gd name="adj2" fmla="val 21594371"/>
+              </a:avLst>
+            </a:prstGeom>
+            <a:solidFill>
+              <a:srgbClr val="ED7D31"/>
+            </a:solidFill>
+            <a:ln>
+              <a:noFill/>
+            </a:ln>
+          </p:spPr>
+          <p:style>
+            <a:lnRef idx="2">
+              <a:schemeClr val="accent1">
+                <a:shade val="15000"/>
+              </a:schemeClr>
+            </a:lnRef>
+            <a:fillRef idx="1">
+              <a:schemeClr val="accent1"/>
+            </a:fillRef>
+            <a:effectRef idx="0">
+              <a:schemeClr val="accent1"/>
+            </a:effectRef>
+            <a:fontRef idx="minor">
+              <a:schemeClr val="lt1"/>
+            </a:fontRef>
+          </p:style>
+          <p:txBody>
+            <a:bodyPr rtlCol="0" anchor="ctr"/>
+            <a:lstStyle/>
+            <a:p>
+              <a:pPr algn="ctr"/>
+              <a:endParaRPr lang="en-CA">
+                <a:solidFill>
+                  <a:schemeClr val="tx1"/>
+                </a:solidFill>
+              </a:endParaRPr>
+            </a:p>
+          </p:txBody>
+        </p:sp>
+        <p:sp>
+          <p:nvSpPr>
+            <p:cNvPr id="4" name="Arc partiel 3">
+              <a:extLst>
+                <a:ext uri="{FF2B5EF4-FFF2-40B4-BE49-F238E27FC236}">
+                  <a16:creationId xmlns:a16="http://schemas.microsoft.com/office/drawing/2014/main" id="{DB02F5BC-6046-9111-1657-BA620010F8F0}"/>
+                </a:ext>
+              </a:extLst>
+            </p:cNvPr>
+            <p:cNvSpPr/>
+            <p:nvPr/>
+          </p:nvSpPr>
+          <p:spPr>
+            <a:xfrm>
+              <a:off x="580907" y="247465"/>
+              <a:ext cx="3181535" cy="3181535"/>
+            </a:xfrm>
+            <a:prstGeom prst="pie">
+              <a:avLst>
+                <a:gd name="adj1" fmla="val 10771407"/>
+                <a:gd name="adj2" fmla="val 19297323"/>
+              </a:avLst>
+            </a:prstGeom>
+            <a:solidFill>
+              <a:srgbClr val="5B9BD5"/>
+            </a:solidFill>
+            <a:ln>
+              <a:noFill/>
+            </a:ln>
+          </p:spPr>
+          <p:style>
+            <a:lnRef idx="2">
+              <a:schemeClr val="accent1">
+                <a:shade val="15000"/>
+              </a:schemeClr>
+            </a:lnRef>
+            <a:fillRef idx="1">
+              <a:schemeClr val="accent1"/>
+            </a:fillRef>
+            <a:effectRef idx="0">
+              <a:schemeClr val="accent1"/>
+            </a:effectRef>
+            <a:fontRef idx="minor">
+              <a:schemeClr val="lt1"/>
+            </a:fontRef>
+          </p:style>
+          <p:txBody>
+            <a:bodyPr rtlCol="0" anchor="ctr"/>
+            <a:lstStyle/>
+            <a:p>
+              <a:pPr algn="ctr"/>
+              <a:endParaRPr lang="en-CA">
+                <a:solidFill>
+                  <a:schemeClr val="tx1"/>
+                </a:solidFill>
+              </a:endParaRPr>
+            </a:p>
+          </p:txBody>
+        </p:sp>
+        <p:grpSp>
+          <p:nvGrpSpPr>
+            <p:cNvPr id="71" name="Groupe 70">
+              <a:extLst>
+                <a:ext uri="{FF2B5EF4-FFF2-40B4-BE49-F238E27FC236}">
+                  <a16:creationId xmlns:a16="http://schemas.microsoft.com/office/drawing/2014/main" id="{37B194D7-6BB5-EAD2-5DC3-3660217B797E}"/>
+                </a:ext>
+              </a:extLst>
+            </p:cNvPr>
+            <p:cNvGrpSpPr/>
+            <p:nvPr/>
+          </p:nvGrpSpPr>
+          <p:grpSpPr>
+            <a:xfrm>
+              <a:off x="968470" y="373920"/>
+              <a:ext cx="2397555" cy="2717664"/>
+              <a:chOff x="968470" y="373920"/>
+              <a:chExt cx="2397555" cy="2717664"/>
+            </a:xfrm>
+          </p:grpSpPr>
+          <p:sp>
+            <p:nvSpPr>
+              <p:cNvPr id="59" name="Arc partiel 58">
+                <a:extLst>
+                  <a:ext uri="{FF2B5EF4-FFF2-40B4-BE49-F238E27FC236}">
+                    <a16:creationId xmlns:a16="http://schemas.microsoft.com/office/drawing/2014/main" id="{84AACF56-B003-A8FE-88B5-B3D0D109EFAC}"/>
+                  </a:ext>
+                </a:extLst>
+              </p:cNvPr>
+              <p:cNvSpPr/>
+              <p:nvPr/>
+            </p:nvSpPr>
+            <p:spPr>
+              <a:xfrm>
+                <a:off x="968470" y="610322"/>
+                <a:ext cx="2397555" cy="2481262"/>
+              </a:xfrm>
+              <a:prstGeom prst="pie">
+                <a:avLst>
+                  <a:gd name="adj1" fmla="val 10501438"/>
+                  <a:gd name="adj2" fmla="val 263145"/>
+                </a:avLst>
+              </a:prstGeom>
+              <a:solidFill>
+                <a:schemeClr val="tx1"/>
+              </a:solidFill>
+              <a:ln w="38100">
+                <a:noFill/>
+              </a:ln>
+            </p:spPr>
+            <p:style>
+              <a:lnRef idx="2">
+                <a:schemeClr val="accent5">
+                  <a:shade val="15000"/>
+                </a:schemeClr>
+              </a:lnRef>
+              <a:fillRef idx="1">
+                <a:schemeClr val="accent5"/>
+              </a:fillRef>
+              <a:effectRef idx="0">
+                <a:schemeClr val="accent5"/>
+              </a:effectRef>
+              <a:fontRef idx="minor">
+                <a:schemeClr val="lt1"/>
+              </a:fontRef>
+            </p:style>
+            <p:txBody>
+              <a:bodyPr rtlCol="0" anchor="ctr"/>
+              <a:lstStyle/>
+              <a:p>
+                <a:pPr algn="ctr"/>
+                <a:endParaRPr lang="en-CA">
+                  <a:solidFill>
+                    <a:schemeClr val="tx1"/>
+                  </a:solidFill>
+                </a:endParaRPr>
+              </a:p>
+            </p:txBody>
+          </p:sp>
+          <p:sp>
+            <p:nvSpPr>
+              <p:cNvPr id="62" name="Triangle isocèle 61">
+                <a:extLst>
+                  <a:ext uri="{FF2B5EF4-FFF2-40B4-BE49-F238E27FC236}">
+                    <a16:creationId xmlns:a16="http://schemas.microsoft.com/office/drawing/2014/main" id="{7A3EA20A-0F4F-3667-F160-97753DD5DF4D}"/>
+                  </a:ext>
+                </a:extLst>
+              </p:cNvPr>
+              <p:cNvSpPr/>
+              <p:nvPr/>
+            </p:nvSpPr>
+            <p:spPr>
+              <a:xfrm rot="900000">
+                <a:off x="2152694" y="373920"/>
+                <a:ext cx="265235" cy="1348044"/>
+              </a:xfrm>
+              <a:prstGeom prst="triangle">
+                <a:avLst/>
+              </a:prstGeom>
+              <a:solidFill>
+                <a:schemeClr val="bg1"/>
+              </a:solidFill>
+              <a:ln>
+                <a:noFill/>
+              </a:ln>
+            </p:spPr>
+            <p:style>
+              <a:lnRef idx="2">
+                <a:schemeClr val="accent2">
+                  <a:shade val="15000"/>
+                </a:schemeClr>
+              </a:lnRef>
+              <a:fillRef idx="1">
+                <a:schemeClr val="accent2"/>
+              </a:fillRef>
+              <a:effectRef idx="0">
+                <a:schemeClr val="accent2"/>
+              </a:effectRef>
+              <a:fontRef idx="minor">
+                <a:schemeClr val="lt1"/>
+              </a:fontRef>
+            </p:style>
+            <p:txBody>
+              <a:bodyPr rtlCol="0" anchor="ctr"/>
+              <a:lstStyle/>
+              <a:p>
+                <a:pPr algn="ctr"/>
+                <a:endParaRPr lang="en-CA"/>
+              </a:p>
+            </p:txBody>
+          </p:sp>
+          <p:sp>
+            <p:nvSpPr>
+              <p:cNvPr id="61" name="Ellipse 60">
+                <a:extLst>
+                  <a:ext uri="{FF2B5EF4-FFF2-40B4-BE49-F238E27FC236}">
+                    <a16:creationId xmlns:a16="http://schemas.microsoft.com/office/drawing/2014/main" id="{DBE5D997-A2AA-D3B0-49AE-C8514E370662}"/>
+                  </a:ext>
+                </a:extLst>
+              </p:cNvPr>
+              <p:cNvSpPr/>
+              <p:nvPr/>
+            </p:nvSpPr>
+            <p:spPr>
+              <a:xfrm>
+                <a:off x="1908859" y="1614726"/>
+                <a:ext cx="348629" cy="348629"/>
+              </a:xfrm>
+              <a:prstGeom prst="ellipse">
+                <a:avLst/>
+              </a:prstGeom>
+              <a:solidFill>
+                <a:schemeClr val="bg1"/>
+              </a:solidFill>
+              <a:ln>
+                <a:noFill/>
+              </a:ln>
+            </p:spPr>
+            <p:style>
+              <a:lnRef idx="2">
+                <a:schemeClr val="accent2">
+                  <a:shade val="15000"/>
+                </a:schemeClr>
+              </a:lnRef>
+              <a:fillRef idx="1">
+                <a:schemeClr val="accent2"/>
+              </a:fillRef>
+              <a:effectRef idx="0">
+                <a:schemeClr val="accent2"/>
+              </a:effectRef>
+              <a:fontRef idx="minor">
+                <a:schemeClr val="lt1"/>
+              </a:fontRef>
+            </p:style>
+            <p:txBody>
+              <a:bodyPr rtlCol="0" anchor="ctr"/>
+              <a:lstStyle/>
+              <a:p>
+                <a:pPr algn="ctr"/>
+                <a:endParaRPr lang="en-CA"/>
+              </a:p>
+            </p:txBody>
+          </p:sp>
+        </p:grpSp>
       </p:grpSp>
     </p:spTree>
     <p:extLst>

--- a/graphics/graphics.pptx
+++ b/graphics/graphics.pptx
@@ -212,7 +212,7 @@
           <a:p>
             <a:fld id="{B8404A9E-F80D-47A3-9ABE-4E375F8C7A58}" type="datetimeFigureOut">
               <a:rPr lang="fr-CA" smtClean="0"/>
-              <a:t>2026-04-14</a:t>
+              <a:t>2026-04-19</a:t>
             </a:fld>
             <a:endParaRPr lang="fr-CA"/>
           </a:p>
@@ -713,7 +713,7 @@
           <a:p>
             <a:fld id="{B1B97C2F-ED53-40B2-8245-274A53568F1F}" type="datetimeFigureOut">
               <a:rPr lang="fr-CA" smtClean="0"/>
-              <a:t>2026-04-14</a:t>
+              <a:t>2026-04-19</a:t>
             </a:fld>
             <a:endParaRPr lang="fr-CA"/>
           </a:p>
@@ -913,7 +913,7 @@
           <a:p>
             <a:fld id="{B1B97C2F-ED53-40B2-8245-274A53568F1F}" type="datetimeFigureOut">
               <a:rPr lang="fr-CA" smtClean="0"/>
-              <a:t>2026-04-14</a:t>
+              <a:t>2026-04-19</a:t>
             </a:fld>
             <a:endParaRPr lang="fr-CA"/>
           </a:p>
@@ -1123,7 +1123,7 @@
           <a:p>
             <a:fld id="{B1B97C2F-ED53-40B2-8245-274A53568F1F}" type="datetimeFigureOut">
               <a:rPr lang="fr-CA" smtClean="0"/>
-              <a:t>2026-04-14</a:t>
+              <a:t>2026-04-19</a:t>
             </a:fld>
             <a:endParaRPr lang="fr-CA"/>
           </a:p>
@@ -1345,7 +1345,7 @@
           <a:p>
             <a:fld id="{3CFA78C3-2C03-4D26-BA08-5201FB292C09}" type="datetimeFigureOut">
               <a:rPr lang="fr-CA" smtClean="0"/>
-              <a:t>2026-04-14</a:t>
+              <a:t>2026-04-19</a:t>
             </a:fld>
             <a:endParaRPr lang="fr-CA"/>
           </a:p>
@@ -1545,7 +1545,7 @@
           <a:p>
             <a:fld id="{3CFA78C3-2C03-4D26-BA08-5201FB292C09}" type="datetimeFigureOut">
               <a:rPr lang="fr-CA" smtClean="0"/>
-              <a:t>2026-04-14</a:t>
+              <a:t>2026-04-19</a:t>
             </a:fld>
             <a:endParaRPr lang="fr-CA"/>
           </a:p>
@@ -1821,7 +1821,7 @@
           <a:p>
             <a:fld id="{3CFA78C3-2C03-4D26-BA08-5201FB292C09}" type="datetimeFigureOut">
               <a:rPr lang="fr-CA" smtClean="0"/>
-              <a:t>2026-04-14</a:t>
+              <a:t>2026-04-19</a:t>
             </a:fld>
             <a:endParaRPr lang="fr-CA"/>
           </a:p>
@@ -2089,7 +2089,7 @@
           <a:p>
             <a:fld id="{3CFA78C3-2C03-4D26-BA08-5201FB292C09}" type="datetimeFigureOut">
               <a:rPr lang="fr-CA" smtClean="0"/>
-              <a:t>2026-04-14</a:t>
+              <a:t>2026-04-19</a:t>
             </a:fld>
             <a:endParaRPr lang="fr-CA"/>
           </a:p>
@@ -2504,7 +2504,7 @@
           <a:p>
             <a:fld id="{3CFA78C3-2C03-4D26-BA08-5201FB292C09}" type="datetimeFigureOut">
               <a:rPr lang="fr-CA" smtClean="0"/>
-              <a:t>2026-04-14</a:t>
+              <a:t>2026-04-19</a:t>
             </a:fld>
             <a:endParaRPr lang="fr-CA"/>
           </a:p>
@@ -2646,7 +2646,7 @@
           <a:p>
             <a:fld id="{3CFA78C3-2C03-4D26-BA08-5201FB292C09}" type="datetimeFigureOut">
               <a:rPr lang="fr-CA" smtClean="0"/>
-              <a:t>2026-04-14</a:t>
+              <a:t>2026-04-19</a:t>
             </a:fld>
             <a:endParaRPr lang="fr-CA"/>
           </a:p>
@@ -2759,7 +2759,7 @@
           <a:p>
             <a:fld id="{3CFA78C3-2C03-4D26-BA08-5201FB292C09}" type="datetimeFigureOut">
               <a:rPr lang="fr-CA" smtClean="0"/>
-              <a:t>2026-04-14</a:t>
+              <a:t>2026-04-19</a:t>
             </a:fld>
             <a:endParaRPr lang="fr-CA"/>
           </a:p>
@@ -3072,7 +3072,7 @@
           <a:p>
             <a:fld id="{3CFA78C3-2C03-4D26-BA08-5201FB292C09}" type="datetimeFigureOut">
               <a:rPr lang="fr-CA" smtClean="0"/>
-              <a:t>2026-04-14</a:t>
+              <a:t>2026-04-19</a:t>
             </a:fld>
             <a:endParaRPr lang="fr-CA"/>
           </a:p>
@@ -3272,7 +3272,7 @@
           <a:p>
             <a:fld id="{B1B97C2F-ED53-40B2-8245-274A53568F1F}" type="datetimeFigureOut">
               <a:rPr lang="fr-CA" smtClean="0"/>
-              <a:t>2026-04-14</a:t>
+              <a:t>2026-04-19</a:t>
             </a:fld>
             <a:endParaRPr lang="fr-CA"/>
           </a:p>
@@ -3561,7 +3561,7 @@
           <a:p>
             <a:fld id="{3CFA78C3-2C03-4D26-BA08-5201FB292C09}" type="datetimeFigureOut">
               <a:rPr lang="fr-CA" smtClean="0"/>
-              <a:t>2026-04-14</a:t>
+              <a:t>2026-04-19</a:t>
             </a:fld>
             <a:endParaRPr lang="fr-CA"/>
           </a:p>
@@ -3761,7 +3761,7 @@
           <a:p>
             <a:fld id="{3CFA78C3-2C03-4D26-BA08-5201FB292C09}" type="datetimeFigureOut">
               <a:rPr lang="fr-CA" smtClean="0"/>
-              <a:t>2026-04-14</a:t>
+              <a:t>2026-04-19</a:t>
             </a:fld>
             <a:endParaRPr lang="fr-CA"/>
           </a:p>
@@ -3971,7 +3971,7 @@
           <a:p>
             <a:fld id="{3CFA78C3-2C03-4D26-BA08-5201FB292C09}" type="datetimeFigureOut">
               <a:rPr lang="fr-CA" smtClean="0"/>
-              <a:t>2026-04-14</a:t>
+              <a:t>2026-04-19</a:t>
             </a:fld>
             <a:endParaRPr lang="fr-CA"/>
           </a:p>
@@ -4247,7 +4247,7 @@
           <a:p>
             <a:fld id="{B1B97C2F-ED53-40B2-8245-274A53568F1F}" type="datetimeFigureOut">
               <a:rPr lang="fr-CA" smtClean="0"/>
-              <a:t>2026-04-14</a:t>
+              <a:t>2026-04-19</a:t>
             </a:fld>
             <a:endParaRPr lang="fr-CA"/>
           </a:p>
@@ -4515,7 +4515,7 @@
           <a:p>
             <a:fld id="{B1B97C2F-ED53-40B2-8245-274A53568F1F}" type="datetimeFigureOut">
               <a:rPr lang="fr-CA" smtClean="0"/>
-              <a:t>2026-04-14</a:t>
+              <a:t>2026-04-19</a:t>
             </a:fld>
             <a:endParaRPr lang="fr-CA"/>
           </a:p>
@@ -4930,7 +4930,7 @@
           <a:p>
             <a:fld id="{B1B97C2F-ED53-40B2-8245-274A53568F1F}" type="datetimeFigureOut">
               <a:rPr lang="fr-CA" smtClean="0"/>
-              <a:t>2026-04-14</a:t>
+              <a:t>2026-04-19</a:t>
             </a:fld>
             <a:endParaRPr lang="fr-CA"/>
           </a:p>
@@ -5072,7 +5072,7 @@
           <a:p>
             <a:fld id="{B1B97C2F-ED53-40B2-8245-274A53568F1F}" type="datetimeFigureOut">
               <a:rPr lang="fr-CA" smtClean="0"/>
-              <a:t>2026-04-14</a:t>
+              <a:t>2026-04-19</a:t>
             </a:fld>
             <a:endParaRPr lang="fr-CA"/>
           </a:p>
@@ -5185,7 +5185,7 @@
           <a:p>
             <a:fld id="{B1B97C2F-ED53-40B2-8245-274A53568F1F}" type="datetimeFigureOut">
               <a:rPr lang="fr-CA" smtClean="0"/>
-              <a:t>2026-04-14</a:t>
+              <a:t>2026-04-19</a:t>
             </a:fld>
             <a:endParaRPr lang="fr-CA"/>
           </a:p>
@@ -5498,7 +5498,7 @@
           <a:p>
             <a:fld id="{B1B97C2F-ED53-40B2-8245-274A53568F1F}" type="datetimeFigureOut">
               <a:rPr lang="fr-CA" smtClean="0"/>
-              <a:t>2026-04-14</a:t>
+              <a:t>2026-04-19</a:t>
             </a:fld>
             <a:endParaRPr lang="fr-CA"/>
           </a:p>
@@ -5787,7 +5787,7 @@
           <a:p>
             <a:fld id="{B1B97C2F-ED53-40B2-8245-274A53568F1F}" type="datetimeFigureOut">
               <a:rPr lang="fr-CA" smtClean="0"/>
-              <a:t>2026-04-14</a:t>
+              <a:t>2026-04-19</a:t>
             </a:fld>
             <a:endParaRPr lang="fr-CA"/>
           </a:p>
@@ -6030,7 +6030,7 @@
           <a:p>
             <a:fld id="{B1B97C2F-ED53-40B2-8245-274A53568F1F}" type="datetimeFigureOut">
               <a:rPr lang="fr-CA" smtClean="0"/>
-              <a:t>2026-04-14</a:t>
+              <a:t>2026-04-19</a:t>
             </a:fld>
             <a:endParaRPr lang="fr-CA"/>
           </a:p>
@@ -6600,7 +6600,7 @@
           <a:p>
             <a:fld id="{3CFA78C3-2C03-4D26-BA08-5201FB292C09}" type="datetimeFigureOut">
               <a:rPr lang="fr-CA" smtClean="0"/>
-              <a:t>2026-04-14</a:t>
+              <a:t>2026-04-19</a:t>
             </a:fld>
             <a:endParaRPr lang="fr-CA"/>
           </a:p>
@@ -22269,7 +22269,7 @@
             <a:lstStyle/>
             <a:p>
               <a:pPr algn="ctr"/>
-              <a:endParaRPr lang="en-CA"/>
+              <a:endParaRPr lang="en-CA" dirty="0"/>
             </a:p>
           </p:txBody>
         </p:sp>
@@ -22424,7 +22424,7 @@
             </a:prstGeom>
             <a:solidFill>
               <a:srgbClr val="92D050">
-                <a:alpha val="51000"/>
+                <a:alpha val="47000"/>
               </a:srgbClr>
             </a:solidFill>
             <a:ln w="38100">
@@ -22452,7 +22452,7 @@
             <a:lstStyle/>
             <a:p>
               <a:pPr algn="ctr"/>
-              <a:endParaRPr lang="en-CA">
+              <a:endParaRPr lang="en-CA" dirty="0">
                 <a:solidFill>
                   <a:schemeClr val="tx1"/>
                 </a:solidFill>
@@ -22523,8 +22523,8 @@
           </p:nvSpPr>
           <p:spPr>
             <a:xfrm rot="1542908">
-              <a:off x="10462101" y="538530"/>
-              <a:ext cx="510184" cy="1128020"/>
+              <a:off x="10625771" y="541105"/>
+              <a:ext cx="193540" cy="1128020"/>
             </a:xfrm>
             <a:prstGeom prst="triangle">
               <a:avLst>

--- a/graphics/graphics.pptx
+++ b/graphics/graphics.pptx
@@ -212,7 +212,7 @@
           <a:p>
             <a:fld id="{B8404A9E-F80D-47A3-9ABE-4E375F8C7A58}" type="datetimeFigureOut">
               <a:rPr lang="fr-CA" smtClean="0"/>
-              <a:t>2026-04-19</a:t>
+              <a:t>2026-05-03</a:t>
             </a:fld>
             <a:endParaRPr lang="fr-CA"/>
           </a:p>
@@ -713,7 +713,7 @@
           <a:p>
             <a:fld id="{B1B97C2F-ED53-40B2-8245-274A53568F1F}" type="datetimeFigureOut">
               <a:rPr lang="fr-CA" smtClean="0"/>
-              <a:t>2026-04-19</a:t>
+              <a:t>2026-05-03</a:t>
             </a:fld>
             <a:endParaRPr lang="fr-CA"/>
           </a:p>
@@ -913,7 +913,7 @@
           <a:p>
             <a:fld id="{B1B97C2F-ED53-40B2-8245-274A53568F1F}" type="datetimeFigureOut">
               <a:rPr lang="fr-CA" smtClean="0"/>
-              <a:t>2026-04-19</a:t>
+              <a:t>2026-05-03</a:t>
             </a:fld>
             <a:endParaRPr lang="fr-CA"/>
           </a:p>
@@ -1123,7 +1123,7 @@
           <a:p>
             <a:fld id="{B1B97C2F-ED53-40B2-8245-274A53568F1F}" type="datetimeFigureOut">
               <a:rPr lang="fr-CA" smtClean="0"/>
-              <a:t>2026-04-19</a:t>
+              <a:t>2026-05-03</a:t>
             </a:fld>
             <a:endParaRPr lang="fr-CA"/>
           </a:p>
@@ -1345,7 +1345,7 @@
           <a:p>
             <a:fld id="{3CFA78C3-2C03-4D26-BA08-5201FB292C09}" type="datetimeFigureOut">
               <a:rPr lang="fr-CA" smtClean="0"/>
-              <a:t>2026-04-19</a:t>
+              <a:t>2026-05-03</a:t>
             </a:fld>
             <a:endParaRPr lang="fr-CA"/>
           </a:p>
@@ -1545,7 +1545,7 @@
           <a:p>
             <a:fld id="{3CFA78C3-2C03-4D26-BA08-5201FB292C09}" type="datetimeFigureOut">
               <a:rPr lang="fr-CA" smtClean="0"/>
-              <a:t>2026-04-19</a:t>
+              <a:t>2026-05-03</a:t>
             </a:fld>
             <a:endParaRPr lang="fr-CA"/>
           </a:p>
@@ -1821,7 +1821,7 @@
           <a:p>
             <a:fld id="{3CFA78C3-2C03-4D26-BA08-5201FB292C09}" type="datetimeFigureOut">
               <a:rPr lang="fr-CA" smtClean="0"/>
-              <a:t>2026-04-19</a:t>
+              <a:t>2026-05-03</a:t>
             </a:fld>
             <a:endParaRPr lang="fr-CA"/>
           </a:p>
@@ -2089,7 +2089,7 @@
           <a:p>
             <a:fld id="{3CFA78C3-2C03-4D26-BA08-5201FB292C09}" type="datetimeFigureOut">
               <a:rPr lang="fr-CA" smtClean="0"/>
-              <a:t>2026-04-19</a:t>
+              <a:t>2026-05-03</a:t>
             </a:fld>
             <a:endParaRPr lang="fr-CA"/>
           </a:p>
@@ -2504,7 +2504,7 @@
           <a:p>
             <a:fld id="{3CFA78C3-2C03-4D26-BA08-5201FB292C09}" type="datetimeFigureOut">
               <a:rPr lang="fr-CA" smtClean="0"/>
-              <a:t>2026-04-19</a:t>
+              <a:t>2026-05-03</a:t>
             </a:fld>
             <a:endParaRPr lang="fr-CA"/>
           </a:p>
@@ -2646,7 +2646,7 @@
           <a:p>
             <a:fld id="{3CFA78C3-2C03-4D26-BA08-5201FB292C09}" type="datetimeFigureOut">
               <a:rPr lang="fr-CA" smtClean="0"/>
-              <a:t>2026-04-19</a:t>
+              <a:t>2026-05-03</a:t>
             </a:fld>
             <a:endParaRPr lang="fr-CA"/>
           </a:p>
@@ -2759,7 +2759,7 @@
           <a:p>
             <a:fld id="{3CFA78C3-2C03-4D26-BA08-5201FB292C09}" type="datetimeFigureOut">
               <a:rPr lang="fr-CA" smtClean="0"/>
-              <a:t>2026-04-19</a:t>
+              <a:t>2026-05-03</a:t>
             </a:fld>
             <a:endParaRPr lang="fr-CA"/>
           </a:p>
@@ -3072,7 +3072,7 @@
           <a:p>
             <a:fld id="{3CFA78C3-2C03-4D26-BA08-5201FB292C09}" type="datetimeFigureOut">
               <a:rPr lang="fr-CA" smtClean="0"/>
-              <a:t>2026-04-19</a:t>
+              <a:t>2026-05-03</a:t>
             </a:fld>
             <a:endParaRPr lang="fr-CA"/>
           </a:p>
@@ -3272,7 +3272,7 @@
           <a:p>
             <a:fld id="{B1B97C2F-ED53-40B2-8245-274A53568F1F}" type="datetimeFigureOut">
               <a:rPr lang="fr-CA" smtClean="0"/>
-              <a:t>2026-04-19</a:t>
+              <a:t>2026-05-03</a:t>
             </a:fld>
             <a:endParaRPr lang="fr-CA"/>
           </a:p>
@@ -3561,7 +3561,7 @@
           <a:p>
             <a:fld id="{3CFA78C3-2C03-4D26-BA08-5201FB292C09}" type="datetimeFigureOut">
               <a:rPr lang="fr-CA" smtClean="0"/>
-              <a:t>2026-04-19</a:t>
+              <a:t>2026-05-03</a:t>
             </a:fld>
             <a:endParaRPr lang="fr-CA"/>
           </a:p>
@@ -3761,7 +3761,7 @@
           <a:p>
             <a:fld id="{3CFA78C3-2C03-4D26-BA08-5201FB292C09}" type="datetimeFigureOut">
               <a:rPr lang="fr-CA" smtClean="0"/>
-              <a:t>2026-04-19</a:t>
+              <a:t>2026-05-03</a:t>
             </a:fld>
             <a:endParaRPr lang="fr-CA"/>
           </a:p>
@@ -3971,7 +3971,7 @@
           <a:p>
             <a:fld id="{3CFA78C3-2C03-4D26-BA08-5201FB292C09}" type="datetimeFigureOut">
               <a:rPr lang="fr-CA" smtClean="0"/>
-              <a:t>2026-04-19</a:t>
+              <a:t>2026-05-03</a:t>
             </a:fld>
             <a:endParaRPr lang="fr-CA"/>
           </a:p>
@@ -4247,7 +4247,7 @@
           <a:p>
             <a:fld id="{B1B97C2F-ED53-40B2-8245-274A53568F1F}" type="datetimeFigureOut">
               <a:rPr lang="fr-CA" smtClean="0"/>
-              <a:t>2026-04-19</a:t>
+              <a:t>2026-05-03</a:t>
             </a:fld>
             <a:endParaRPr lang="fr-CA"/>
           </a:p>
@@ -4515,7 +4515,7 @@
           <a:p>
             <a:fld id="{B1B97C2F-ED53-40B2-8245-274A53568F1F}" type="datetimeFigureOut">
               <a:rPr lang="fr-CA" smtClean="0"/>
-              <a:t>2026-04-19</a:t>
+              <a:t>2026-05-03</a:t>
             </a:fld>
             <a:endParaRPr lang="fr-CA"/>
           </a:p>
@@ -4930,7 +4930,7 @@
           <a:p>
             <a:fld id="{B1B97C2F-ED53-40B2-8245-274A53568F1F}" type="datetimeFigureOut">
               <a:rPr lang="fr-CA" smtClean="0"/>
-              <a:t>2026-04-19</a:t>
+              <a:t>2026-05-03</a:t>
             </a:fld>
             <a:endParaRPr lang="fr-CA"/>
           </a:p>
@@ -5072,7 +5072,7 @@
           <a:p>
             <a:fld id="{B1B97C2F-ED53-40B2-8245-274A53568F1F}" type="datetimeFigureOut">
               <a:rPr lang="fr-CA" smtClean="0"/>
-              <a:t>2026-04-19</a:t>
+              <a:t>2026-05-03</a:t>
             </a:fld>
             <a:endParaRPr lang="fr-CA"/>
           </a:p>
@@ -5185,7 +5185,7 @@
           <a:p>
             <a:fld id="{B1B97C2F-ED53-40B2-8245-274A53568F1F}" type="datetimeFigureOut">
               <a:rPr lang="fr-CA" smtClean="0"/>
-              <a:t>2026-04-19</a:t>
+              <a:t>2026-05-03</a:t>
             </a:fld>
             <a:endParaRPr lang="fr-CA"/>
           </a:p>
@@ -5498,7 +5498,7 @@
           <a:p>
             <a:fld id="{B1B97C2F-ED53-40B2-8245-274A53568F1F}" type="datetimeFigureOut">
               <a:rPr lang="fr-CA" smtClean="0"/>
-              <a:t>2026-04-19</a:t>
+              <a:t>2026-05-03</a:t>
             </a:fld>
             <a:endParaRPr lang="fr-CA"/>
           </a:p>
@@ -5787,7 +5787,7 @@
           <a:p>
             <a:fld id="{B1B97C2F-ED53-40B2-8245-274A53568F1F}" type="datetimeFigureOut">
               <a:rPr lang="fr-CA" smtClean="0"/>
-              <a:t>2026-04-19</a:t>
+              <a:t>2026-05-03</a:t>
             </a:fld>
             <a:endParaRPr lang="fr-CA"/>
           </a:p>
@@ -6030,7 +6030,7 @@
           <a:p>
             <a:fld id="{B1B97C2F-ED53-40B2-8245-274A53568F1F}" type="datetimeFigureOut">
               <a:rPr lang="fr-CA" smtClean="0"/>
-              <a:t>2026-04-19</a:t>
+              <a:t>2026-05-03</a:t>
             </a:fld>
             <a:endParaRPr lang="fr-CA"/>
           </a:p>
@@ -6600,7 +6600,7 @@
           <a:p>
             <a:fld id="{3CFA78C3-2C03-4D26-BA08-5201FB292C09}" type="datetimeFigureOut">
               <a:rPr lang="fr-CA" smtClean="0"/>
-              <a:t>2026-04-19</a:t>
+              <a:t>2026-05-03</a:t>
             </a:fld>
             <a:endParaRPr lang="fr-CA"/>
           </a:p>
@@ -11419,7 +11419,7 @@
         </p:nvSpPr>
         <p:spPr>
           <a:xfrm>
-            <a:off x="4724400" y="1356617"/>
+            <a:off x="3615447" y="296302"/>
             <a:ext cx="2589530" cy="2637534"/>
           </a:xfrm>
           <a:prstGeom prst="roundRect">
@@ -11487,7 +11487,7 @@
         </p:nvSpPr>
         <p:spPr>
           <a:xfrm>
-            <a:off x="8072284" y="1356617"/>
+            <a:off x="6963331" y="296302"/>
             <a:ext cx="2589530" cy="2637534"/>
           </a:xfrm>
           <a:prstGeom prst="roundRect">
@@ -11555,7 +11555,7 @@
         </p:nvSpPr>
         <p:spPr>
           <a:xfrm>
-            <a:off x="1376516" y="1356617"/>
+            <a:off x="267563" y="296302"/>
             <a:ext cx="2589530" cy="2637534"/>
           </a:xfrm>
           <a:prstGeom prst="roundRect">
@@ -11605,6 +11605,74 @@
                 <a:cs typeface="Aharoni" panose="02010803020104030203" pitchFamily="2" charset="-79"/>
               </a:rPr>
               <a:t>V</a:t>
+            </a:r>
+          </a:p>
+        </p:txBody>
+      </p:sp>
+      <p:sp>
+        <p:nvSpPr>
+          <p:cNvPr id="2" name="Rectangle : coins arrondis 1">
+            <a:extLst>
+              <a:ext uri="{FF2B5EF4-FFF2-40B4-BE49-F238E27FC236}">
+                <a16:creationId xmlns:a16="http://schemas.microsoft.com/office/drawing/2014/main" id="{F91379BB-3CF4-CFBE-9317-534D9B5B9F70}"/>
+              </a:ext>
+            </a:extLst>
+          </p:cNvPr>
+          <p:cNvSpPr/>
+          <p:nvPr/>
+        </p:nvSpPr>
+        <p:spPr>
+          <a:xfrm>
+            <a:off x="267563" y="3672192"/>
+            <a:ext cx="2589530" cy="2637534"/>
+          </a:xfrm>
+          <a:prstGeom prst="roundRect">
+            <a:avLst/>
+          </a:prstGeom>
+          <a:solidFill>
+            <a:srgbClr val="C6A0FE"/>
+          </a:solidFill>
+          <a:ln w="136525">
+            <a:solidFill>
+              <a:srgbClr val="7030A0"/>
+            </a:solidFill>
+          </a:ln>
+        </p:spPr>
+        <p:style>
+          <a:lnRef idx="2">
+            <a:schemeClr val="accent5">
+              <a:shade val="15000"/>
+            </a:schemeClr>
+          </a:lnRef>
+          <a:fillRef idx="1">
+            <a:schemeClr val="accent5"/>
+          </a:fillRef>
+          <a:effectRef idx="0">
+            <a:schemeClr val="accent5"/>
+          </a:effectRef>
+          <a:fontRef idx="minor">
+            <a:schemeClr val="lt1"/>
+          </a:fontRef>
+        </p:style>
+        <p:txBody>
+          <a:bodyPr tIns="144000" bIns="0" rtlCol="0" anchor="ctr"/>
+          <a:lstStyle/>
+          <a:p>
+            <a:pPr algn="ctr"/>
+            <a:r>
+              <a:rPr lang="fr-CA" sz="20000" dirty="0">
+                <a:ln w="114300">
+                  <a:solidFill>
+                    <a:srgbClr val="7030A0"/>
+                  </a:solidFill>
+                </a:ln>
+                <a:solidFill>
+                  <a:schemeClr val="bg1"/>
+                </a:solidFill>
+                <a:latin typeface="Aharoni" panose="02010803020104030203" pitchFamily="2" charset="-79"/>
+                <a:cs typeface="Aharoni" panose="02010803020104030203" pitchFamily="2" charset="-79"/>
+              </a:rPr>
+              <a:t>M</a:t>
             </a:r>
           </a:p>
         </p:txBody>
@@ -22619,7 +22687,7 @@
           </p:nvSpPr>
           <p:spPr>
             <a:xfrm>
-              <a:off x="9872663" y="2040537"/>
+              <a:off x="9854564" y="2328870"/>
               <a:ext cx="1143000" cy="348799"/>
             </a:xfrm>
             <a:prstGeom prst="rect">
@@ -23375,6 +23443,363 @@
             </p:txBody>
           </p:sp>
         </p:grpSp>
+      </p:grpSp>
+      <p:sp>
+        <p:nvSpPr>
+          <p:cNvPr id="6" name="Ellipse 5">
+            <a:extLst>
+              <a:ext uri="{FF2B5EF4-FFF2-40B4-BE49-F238E27FC236}">
+                <a16:creationId xmlns:a16="http://schemas.microsoft.com/office/drawing/2014/main" id="{D05D510F-54A0-8D0D-3136-D8F4D74AD65C}"/>
+              </a:ext>
+            </a:extLst>
+          </p:cNvPr>
+          <p:cNvSpPr/>
+          <p:nvPr/>
+        </p:nvSpPr>
+        <p:spPr>
+          <a:xfrm>
+            <a:off x="228969" y="2782184"/>
+            <a:ext cx="1479001" cy="1479001"/>
+          </a:xfrm>
+          <a:prstGeom prst="ellipse">
+            <a:avLst/>
+          </a:prstGeom>
+          <a:noFill/>
+          <a:ln w="127000">
+            <a:solidFill>
+              <a:schemeClr val="tx1"/>
+            </a:solidFill>
+          </a:ln>
+        </p:spPr>
+        <p:style>
+          <a:lnRef idx="2">
+            <a:schemeClr val="accent1">
+              <a:shade val="15000"/>
+            </a:schemeClr>
+          </a:lnRef>
+          <a:fillRef idx="1">
+            <a:schemeClr val="accent1"/>
+          </a:fillRef>
+          <a:effectRef idx="0">
+            <a:schemeClr val="accent1"/>
+          </a:effectRef>
+          <a:fontRef idx="minor">
+            <a:schemeClr val="lt1"/>
+          </a:fontRef>
+        </p:style>
+        <p:txBody>
+          <a:bodyPr rtlCol="0" anchor="ctr"/>
+          <a:lstStyle/>
+          <a:p>
+            <a:pPr algn="ctr"/>
+            <a:endParaRPr lang="en-CA" dirty="0"/>
+          </a:p>
+        </p:txBody>
+      </p:sp>
+      <p:sp>
+        <p:nvSpPr>
+          <p:cNvPr id="7" name="Rectangle 6">
+            <a:extLst>
+              <a:ext uri="{FF2B5EF4-FFF2-40B4-BE49-F238E27FC236}">
+                <a16:creationId xmlns:a16="http://schemas.microsoft.com/office/drawing/2014/main" id="{E71E1AED-C3EF-BF19-9201-2F49BCD9FCB0}"/>
+              </a:ext>
+            </a:extLst>
+          </p:cNvPr>
+          <p:cNvSpPr/>
+          <p:nvPr/>
+        </p:nvSpPr>
+        <p:spPr>
+          <a:xfrm>
+            <a:off x="2179312" y="2782185"/>
+            <a:ext cx="1479001" cy="1479001"/>
+          </a:xfrm>
+          <a:prstGeom prst="rect">
+            <a:avLst/>
+          </a:prstGeom>
+          <a:noFill/>
+          <a:ln w="127000">
+            <a:solidFill>
+              <a:schemeClr val="tx1"/>
+            </a:solidFill>
+          </a:ln>
+        </p:spPr>
+        <p:style>
+          <a:lnRef idx="2">
+            <a:schemeClr val="accent1">
+              <a:shade val="15000"/>
+            </a:schemeClr>
+          </a:lnRef>
+          <a:fillRef idx="1">
+            <a:schemeClr val="accent1"/>
+          </a:fillRef>
+          <a:effectRef idx="0">
+            <a:schemeClr val="accent1"/>
+          </a:effectRef>
+          <a:fontRef idx="minor">
+            <a:schemeClr val="lt1"/>
+          </a:fontRef>
+        </p:style>
+        <p:txBody>
+          <a:bodyPr rtlCol="0" anchor="ctr"/>
+          <a:lstStyle/>
+          <a:p>
+            <a:pPr algn="ctr"/>
+            <a:endParaRPr lang="en-CA"/>
+          </a:p>
+        </p:txBody>
+      </p:sp>
+      <p:cxnSp>
+        <p:nvCxnSpPr>
+          <p:cNvPr id="10" name="Connecteur droit 9">
+            <a:extLst>
+              <a:ext uri="{FF2B5EF4-FFF2-40B4-BE49-F238E27FC236}">
+                <a16:creationId xmlns:a16="http://schemas.microsoft.com/office/drawing/2014/main" id="{2525116F-C141-2417-437E-6CC138C3F83C}"/>
+              </a:ext>
+            </a:extLst>
+          </p:cNvPr>
+          <p:cNvCxnSpPr/>
+          <p:nvPr/>
+        </p:nvCxnSpPr>
+        <p:spPr>
+          <a:xfrm>
+            <a:off x="4027251" y="2849711"/>
+            <a:ext cx="1421166" cy="1421166"/>
+          </a:xfrm>
+          <a:prstGeom prst="line">
+            <a:avLst/>
+          </a:prstGeom>
+          <a:ln w="127000">
+            <a:solidFill>
+              <a:schemeClr val="tx1"/>
+            </a:solidFill>
+          </a:ln>
+        </p:spPr>
+        <p:style>
+          <a:lnRef idx="1">
+            <a:schemeClr val="accent1"/>
+          </a:lnRef>
+          <a:fillRef idx="0">
+            <a:schemeClr val="accent1"/>
+          </a:fillRef>
+          <a:effectRef idx="0">
+            <a:schemeClr val="accent1"/>
+          </a:effectRef>
+          <a:fontRef idx="minor">
+            <a:schemeClr val="tx1"/>
+          </a:fontRef>
+        </p:style>
+      </p:cxnSp>
+      <p:sp>
+        <p:nvSpPr>
+          <p:cNvPr id="13" name="Rectangle : coins arrondis 12">
+            <a:extLst>
+              <a:ext uri="{FF2B5EF4-FFF2-40B4-BE49-F238E27FC236}">
+                <a16:creationId xmlns:a16="http://schemas.microsoft.com/office/drawing/2014/main" id="{B041141D-4854-1DB1-F50B-DBAD249CB5DD}"/>
+              </a:ext>
+            </a:extLst>
+          </p:cNvPr>
+          <p:cNvSpPr/>
+          <p:nvPr/>
+        </p:nvSpPr>
+        <p:spPr>
+          <a:xfrm>
+            <a:off x="5699999" y="3036242"/>
+            <a:ext cx="2514173" cy="990266"/>
+          </a:xfrm>
+          <a:prstGeom prst="roundRect">
+            <a:avLst>
+              <a:gd name="adj" fmla="val 0"/>
+            </a:avLst>
+          </a:prstGeom>
+          <a:noFill/>
+          <a:ln w="76200">
+            <a:solidFill>
+              <a:schemeClr val="tx1">
+                <a:lumMod val="95000"/>
+                <a:lumOff val="5000"/>
+              </a:schemeClr>
+            </a:solidFill>
+          </a:ln>
+        </p:spPr>
+        <p:style>
+          <a:lnRef idx="2">
+            <a:schemeClr val="accent1">
+              <a:shade val="15000"/>
+            </a:schemeClr>
+          </a:lnRef>
+          <a:fillRef idx="1">
+            <a:schemeClr val="accent1"/>
+          </a:fillRef>
+          <a:effectRef idx="0">
+            <a:schemeClr val="accent1"/>
+          </a:effectRef>
+          <a:fontRef idx="minor">
+            <a:schemeClr val="lt1"/>
+          </a:fontRef>
+        </p:style>
+        <p:txBody>
+          <a:bodyPr rtlCol="0" anchor="ctr"/>
+          <a:lstStyle/>
+          <a:p>
+            <a:pPr algn="ctr"/>
+            <a:r>
+              <a:rPr lang="en-CA" sz="5400" b="1" dirty="0">
+                <a:solidFill>
+                  <a:schemeClr val="tx1"/>
+                </a:solidFill>
+                <a:latin typeface="Segoe UI" panose="020B0502040204020203" pitchFamily="34" charset="0"/>
+                <a:cs typeface="Segoe UI" panose="020B0502040204020203" pitchFamily="34" charset="0"/>
+              </a:rPr>
+              <a:t>ABC</a:t>
+            </a:r>
+          </a:p>
+        </p:txBody>
+      </p:sp>
+      <p:grpSp>
+        <p:nvGrpSpPr>
+          <p:cNvPr id="14" name="Groupe 13">
+            <a:extLst>
+              <a:ext uri="{FF2B5EF4-FFF2-40B4-BE49-F238E27FC236}">
+                <a16:creationId xmlns:a16="http://schemas.microsoft.com/office/drawing/2014/main" id="{583CACC3-949E-A13F-3EEE-63D73FE0B762}"/>
+              </a:ext>
+            </a:extLst>
+          </p:cNvPr>
+          <p:cNvGrpSpPr/>
+          <p:nvPr/>
+        </p:nvGrpSpPr>
+        <p:grpSpPr>
+          <a:xfrm>
+            <a:off x="228969" y="4954046"/>
+            <a:ext cx="1479001" cy="1479001"/>
+            <a:chOff x="5265516" y="4849279"/>
+            <a:chExt cx="1479001" cy="1479001"/>
+          </a:xfrm>
+        </p:grpSpPr>
+        <p:sp>
+          <p:nvSpPr>
+            <p:cNvPr id="8" name="Ellipse 7">
+              <a:extLst>
+                <a:ext uri="{FF2B5EF4-FFF2-40B4-BE49-F238E27FC236}">
+                  <a16:creationId xmlns:a16="http://schemas.microsoft.com/office/drawing/2014/main" id="{5591C1CB-1084-A6EA-AACD-07A8E79C1507}"/>
+                </a:ext>
+              </a:extLst>
+            </p:cNvPr>
+            <p:cNvSpPr/>
+            <p:nvPr/>
+          </p:nvSpPr>
+          <p:spPr>
+            <a:xfrm>
+              <a:off x="5265516" y="4849279"/>
+              <a:ext cx="1479001" cy="1479001"/>
+            </a:xfrm>
+            <a:prstGeom prst="ellipse">
+              <a:avLst/>
+            </a:prstGeom>
+            <a:solidFill>
+              <a:srgbClr val="FF0000"/>
+            </a:solidFill>
+            <a:ln w="127000">
+              <a:solidFill>
+                <a:schemeClr val="bg2">
+                  <a:lumMod val="50000"/>
+                </a:schemeClr>
+              </a:solidFill>
+            </a:ln>
+          </p:spPr>
+          <p:style>
+            <a:lnRef idx="2">
+              <a:schemeClr val="accent1">
+                <a:shade val="15000"/>
+              </a:schemeClr>
+            </a:lnRef>
+            <a:fillRef idx="1">
+              <a:schemeClr val="accent1"/>
+            </a:fillRef>
+            <a:effectRef idx="0">
+              <a:schemeClr val="accent1"/>
+            </a:effectRef>
+            <a:fontRef idx="minor">
+              <a:schemeClr val="lt1"/>
+            </a:fontRef>
+          </p:style>
+          <p:txBody>
+            <a:bodyPr rtlCol="0" anchor="ctr"/>
+            <a:lstStyle/>
+            <a:p>
+              <a:pPr algn="ctr"/>
+              <a:endParaRPr lang="en-CA" dirty="0"/>
+            </a:p>
+          </p:txBody>
+        </p:sp>
+        <p:sp>
+          <p:nvSpPr>
+            <p:cNvPr id="11" name="Ellipse 10">
+              <a:extLst>
+                <a:ext uri="{FF2B5EF4-FFF2-40B4-BE49-F238E27FC236}">
+                  <a16:creationId xmlns:a16="http://schemas.microsoft.com/office/drawing/2014/main" id="{99C10C05-4C56-4030-7994-34A165BE0900}"/>
+                </a:ext>
+              </a:extLst>
+            </p:cNvPr>
+            <p:cNvSpPr/>
+            <p:nvPr/>
+          </p:nvSpPr>
+          <p:spPr>
+            <a:xfrm>
+              <a:off x="5324327" y="4898243"/>
+              <a:ext cx="1359638" cy="1381073"/>
+            </a:xfrm>
+            <a:prstGeom prst="ellipse">
+              <a:avLst/>
+            </a:prstGeom>
+            <a:gradFill flip="none" rotWithShape="1">
+              <a:gsLst>
+                <a:gs pos="100000">
+                  <a:schemeClr val="tx1">
+                    <a:lumMod val="100000"/>
+                    <a:alpha val="30000"/>
+                  </a:schemeClr>
+                </a:gs>
+                <a:gs pos="15000">
+                  <a:schemeClr val="bg1">
+                    <a:lumMod val="100000"/>
+                    <a:alpha val="30000"/>
+                  </a:schemeClr>
+                </a:gs>
+              </a:gsLst>
+              <a:path path="circle">
+                <a:fillToRect l="50000" t="50000" r="50000" b="50000"/>
+              </a:path>
+              <a:tileRect/>
+            </a:gradFill>
+            <a:ln w="127000">
+              <a:noFill/>
+            </a:ln>
+          </p:spPr>
+          <p:style>
+            <a:lnRef idx="2">
+              <a:schemeClr val="accent1">
+                <a:shade val="15000"/>
+              </a:schemeClr>
+            </a:lnRef>
+            <a:fillRef idx="1">
+              <a:schemeClr val="accent1"/>
+            </a:fillRef>
+            <a:effectRef idx="0">
+              <a:schemeClr val="accent1"/>
+            </a:effectRef>
+            <a:fontRef idx="minor">
+              <a:schemeClr val="lt1"/>
+            </a:fontRef>
+          </p:style>
+          <p:txBody>
+            <a:bodyPr rtlCol="0" anchor="ctr"/>
+            <a:lstStyle/>
+            <a:p>
+              <a:pPr algn="ctr"/>
+              <a:endParaRPr lang="en-CA" dirty="0"/>
+            </a:p>
+          </p:txBody>
+        </p:sp>
       </p:grpSp>
     </p:spTree>
     <p:extLst>

--- a/graphics/graphics.pptx
+++ b/graphics/graphics.pptx
@@ -6,7 +6,7 @@
     <p:sldMasterId id="2147483660" r:id="rId2"/>
   </p:sldMasterIdLst>
   <p:notesMasterIdLst>
-    <p:notesMasterId r:id="rId18"/>
+    <p:notesMasterId r:id="rId19"/>
   </p:notesMasterIdLst>
   <p:sldIdLst>
     <p:sldId id="259" r:id="rId3"/>
@@ -18,12 +18,13 @@
     <p:sldId id="264" r:id="rId9"/>
     <p:sldId id="265" r:id="rId10"/>
     <p:sldId id="266" r:id="rId11"/>
-    <p:sldId id="268" r:id="rId12"/>
-    <p:sldId id="269" r:id="rId13"/>
-    <p:sldId id="270" r:id="rId14"/>
-    <p:sldId id="271" r:id="rId15"/>
-    <p:sldId id="272" r:id="rId16"/>
-    <p:sldId id="273" r:id="rId17"/>
+    <p:sldId id="274" r:id="rId12"/>
+    <p:sldId id="268" r:id="rId13"/>
+    <p:sldId id="269" r:id="rId14"/>
+    <p:sldId id="270" r:id="rId15"/>
+    <p:sldId id="271" r:id="rId16"/>
+    <p:sldId id="272" r:id="rId17"/>
+    <p:sldId id="273" r:id="rId18"/>
   </p:sldIdLst>
   <p:sldSz cx="12192000" cy="6858000"/>
   <p:notesSz cx="6858000" cy="9144000"/>
@@ -124,7 +125,18 @@
   </p:defaultTextStyle>
   <p:extLst>
     <p:ext uri="{EFAFB233-063F-42B5-8137-9DF3F51BA10A}">
-      <p15:sldGuideLst xmlns:p15="http://schemas.microsoft.com/office/powerpoint/2012/main"/>
+      <p15:sldGuideLst xmlns:p15="http://schemas.microsoft.com/office/powerpoint/2012/main">
+        <p15:guide id="1" orient="horz" pos="2001" userDrawn="1">
+          <p15:clr>
+            <a:srgbClr val="A4A3A4"/>
+          </p15:clr>
+        </p15:guide>
+        <p15:guide id="2" pos="3817" userDrawn="1">
+          <p15:clr>
+            <a:srgbClr val="A4A3A4"/>
+          </p15:clr>
+        </p15:guide>
+      </p15:sldGuideLst>
     </p:ext>
   </p:extLst>
 </p:presentation>
@@ -545,7 +557,7 @@
           <a:p>
             <a:fld id="{618211CF-4BFB-4EDA-B871-566ED73F112B}" type="slidenum">
               <a:rPr lang="en-CA" smtClean="0"/>
-              <a:t>10</a:t>
+              <a:t>11</a:t>
             </a:fld>
             <a:endParaRPr lang="en-CA"/>
           </a:p>
@@ -8505,6 +8517,1557 @@
           <a:chExt cx="0" cy="0"/>
         </a:xfrm>
       </p:grpSpPr>
+      <p:sp>
+        <p:nvSpPr>
+          <p:cNvPr id="74" name="Rectangle : coins arrondis 73">
+            <a:extLst>
+              <a:ext uri="{FF2B5EF4-FFF2-40B4-BE49-F238E27FC236}">
+                <a16:creationId xmlns:a16="http://schemas.microsoft.com/office/drawing/2014/main" id="{306D83D9-E422-277E-BA0B-C67C813D15BE}"/>
+              </a:ext>
+            </a:extLst>
+          </p:cNvPr>
+          <p:cNvSpPr/>
+          <p:nvPr/>
+        </p:nvSpPr>
+        <p:spPr>
+          <a:xfrm>
+            <a:off x="1720630" y="306943"/>
+            <a:ext cx="136208" cy="1087855"/>
+          </a:xfrm>
+          <a:prstGeom prst="roundRect">
+            <a:avLst>
+              <a:gd name="adj" fmla="val 11724"/>
+            </a:avLst>
+          </a:prstGeom>
+          <a:solidFill>
+            <a:srgbClr val="CE2E28"/>
+          </a:solidFill>
+          <a:ln w="76200">
+            <a:noFill/>
+          </a:ln>
+        </p:spPr>
+        <p:style>
+          <a:lnRef idx="2">
+            <a:schemeClr val="accent1">
+              <a:shade val="15000"/>
+            </a:schemeClr>
+          </a:lnRef>
+          <a:fillRef idx="1">
+            <a:schemeClr val="accent1"/>
+          </a:fillRef>
+          <a:effectRef idx="0">
+            <a:schemeClr val="accent1"/>
+          </a:effectRef>
+          <a:fontRef idx="minor">
+            <a:schemeClr val="lt1"/>
+          </a:fontRef>
+        </p:style>
+        <p:txBody>
+          <a:bodyPr rtlCol="0" anchor="ctr"/>
+          <a:lstStyle/>
+          <a:p>
+            <a:pPr algn="ctr"/>
+            <a:endParaRPr lang="en-CA"/>
+          </a:p>
+        </p:txBody>
+      </p:sp>
+      <p:sp>
+        <p:nvSpPr>
+          <p:cNvPr id="75" name="Rectangle : coins arrondis 74">
+            <a:extLst>
+              <a:ext uri="{FF2B5EF4-FFF2-40B4-BE49-F238E27FC236}">
+                <a16:creationId xmlns:a16="http://schemas.microsoft.com/office/drawing/2014/main" id="{9F823ADF-153C-2A3E-9965-D598C40964BF}"/>
+              </a:ext>
+            </a:extLst>
+          </p:cNvPr>
+          <p:cNvSpPr/>
+          <p:nvPr/>
+        </p:nvSpPr>
+        <p:spPr>
+          <a:xfrm>
+            <a:off x="1720629" y="1394798"/>
+            <a:ext cx="127405" cy="618481"/>
+          </a:xfrm>
+          <a:prstGeom prst="roundRect">
+            <a:avLst>
+              <a:gd name="adj" fmla="val 11724"/>
+            </a:avLst>
+          </a:prstGeom>
+          <a:solidFill>
+            <a:srgbClr val="E0E000"/>
+          </a:solidFill>
+          <a:ln w="76200">
+            <a:noFill/>
+          </a:ln>
+        </p:spPr>
+        <p:style>
+          <a:lnRef idx="2">
+            <a:schemeClr val="accent1">
+              <a:shade val="15000"/>
+            </a:schemeClr>
+          </a:lnRef>
+          <a:fillRef idx="1">
+            <a:schemeClr val="accent1"/>
+          </a:fillRef>
+          <a:effectRef idx="0">
+            <a:schemeClr val="accent1"/>
+          </a:effectRef>
+          <a:fontRef idx="minor">
+            <a:schemeClr val="lt1"/>
+          </a:fontRef>
+        </p:style>
+        <p:txBody>
+          <a:bodyPr rtlCol="0" anchor="ctr"/>
+          <a:lstStyle/>
+          <a:p>
+            <a:pPr algn="ctr"/>
+            <a:endParaRPr lang="en-CA" dirty="0"/>
+          </a:p>
+        </p:txBody>
+      </p:sp>
+      <p:sp>
+        <p:nvSpPr>
+          <p:cNvPr id="76" name="Rectangle : coins arrondis 75">
+            <a:extLst>
+              <a:ext uri="{FF2B5EF4-FFF2-40B4-BE49-F238E27FC236}">
+                <a16:creationId xmlns:a16="http://schemas.microsoft.com/office/drawing/2014/main" id="{4A5E2EF3-EDF0-9AC7-C6E6-8E2F075ADE38}"/>
+              </a:ext>
+            </a:extLst>
+          </p:cNvPr>
+          <p:cNvSpPr/>
+          <p:nvPr/>
+        </p:nvSpPr>
+        <p:spPr>
+          <a:xfrm>
+            <a:off x="1720628" y="2013279"/>
+            <a:ext cx="127405" cy="2678227"/>
+          </a:xfrm>
+          <a:prstGeom prst="roundRect">
+            <a:avLst>
+              <a:gd name="adj" fmla="val 11724"/>
+            </a:avLst>
+          </a:prstGeom>
+          <a:solidFill>
+            <a:srgbClr val="63A11F"/>
+          </a:solidFill>
+          <a:ln w="76200">
+            <a:noFill/>
+          </a:ln>
+        </p:spPr>
+        <p:style>
+          <a:lnRef idx="2">
+            <a:schemeClr val="accent1">
+              <a:shade val="15000"/>
+            </a:schemeClr>
+          </a:lnRef>
+          <a:fillRef idx="1">
+            <a:schemeClr val="accent1"/>
+          </a:fillRef>
+          <a:effectRef idx="0">
+            <a:schemeClr val="accent1"/>
+          </a:effectRef>
+          <a:fontRef idx="minor">
+            <a:schemeClr val="lt1"/>
+          </a:fontRef>
+        </p:style>
+        <p:txBody>
+          <a:bodyPr rtlCol="0" anchor="ctr"/>
+          <a:lstStyle/>
+          <a:p>
+            <a:pPr algn="ctr"/>
+            <a:endParaRPr lang="en-CA" dirty="0"/>
+          </a:p>
+        </p:txBody>
+      </p:sp>
+      <p:sp>
+        <p:nvSpPr>
+          <p:cNvPr id="87" name="Rectangle : coins arrondis 86">
+            <a:extLst>
+              <a:ext uri="{FF2B5EF4-FFF2-40B4-BE49-F238E27FC236}">
+                <a16:creationId xmlns:a16="http://schemas.microsoft.com/office/drawing/2014/main" id="{B80E2461-833F-F7D5-827F-449F85579DB5}"/>
+              </a:ext>
+            </a:extLst>
+          </p:cNvPr>
+          <p:cNvSpPr/>
+          <p:nvPr/>
+        </p:nvSpPr>
+        <p:spPr>
+          <a:xfrm>
+            <a:off x="782116" y="348568"/>
+            <a:ext cx="899578" cy="1323927"/>
+          </a:xfrm>
+          <a:prstGeom prst="roundRect">
+            <a:avLst>
+              <a:gd name="adj" fmla="val 0"/>
+            </a:avLst>
+          </a:prstGeom>
+          <a:solidFill>
+            <a:srgbClr val="A5A5A5"/>
+          </a:solidFill>
+          <a:ln w="76200">
+            <a:noFill/>
+          </a:ln>
+        </p:spPr>
+        <p:style>
+          <a:lnRef idx="2">
+            <a:schemeClr val="accent1">
+              <a:shade val="15000"/>
+            </a:schemeClr>
+          </a:lnRef>
+          <a:fillRef idx="1">
+            <a:schemeClr val="accent1"/>
+          </a:fillRef>
+          <a:effectRef idx="0">
+            <a:schemeClr val="accent1"/>
+          </a:effectRef>
+          <a:fontRef idx="minor">
+            <a:schemeClr val="lt1"/>
+          </a:fontRef>
+        </p:style>
+        <p:txBody>
+          <a:bodyPr rtlCol="0" anchor="ctr"/>
+          <a:lstStyle/>
+          <a:p>
+            <a:pPr algn="ctr"/>
+            <a:endParaRPr lang="en-CA" dirty="0"/>
+          </a:p>
+        </p:txBody>
+      </p:sp>
+      <p:sp>
+        <p:nvSpPr>
+          <p:cNvPr id="22" name="Rectangle : coins arrondis 21">
+            <a:extLst>
+              <a:ext uri="{FF2B5EF4-FFF2-40B4-BE49-F238E27FC236}">
+                <a16:creationId xmlns:a16="http://schemas.microsoft.com/office/drawing/2014/main" id="{7473241B-B808-3105-E22A-85540B737F36}"/>
+              </a:ext>
+            </a:extLst>
+          </p:cNvPr>
+          <p:cNvSpPr/>
+          <p:nvPr/>
+        </p:nvSpPr>
+        <p:spPr>
+          <a:xfrm>
+            <a:off x="803684" y="1661670"/>
+            <a:ext cx="899578" cy="3029836"/>
+          </a:xfrm>
+          <a:prstGeom prst="roundRect">
+            <a:avLst>
+              <a:gd name="adj" fmla="val 0"/>
+            </a:avLst>
+          </a:prstGeom>
+          <a:solidFill>
+            <a:srgbClr val="ED7D31"/>
+          </a:solidFill>
+          <a:ln w="76200">
+            <a:noFill/>
+          </a:ln>
+        </p:spPr>
+        <p:style>
+          <a:lnRef idx="2">
+            <a:schemeClr val="accent1">
+              <a:shade val="15000"/>
+            </a:schemeClr>
+          </a:lnRef>
+          <a:fillRef idx="1">
+            <a:schemeClr val="accent1"/>
+          </a:fillRef>
+          <a:effectRef idx="0">
+            <a:schemeClr val="accent1"/>
+          </a:effectRef>
+          <a:fontRef idx="minor">
+            <a:schemeClr val="lt1"/>
+          </a:fontRef>
+        </p:style>
+        <p:txBody>
+          <a:bodyPr rtlCol="0" anchor="ctr"/>
+          <a:lstStyle/>
+          <a:p>
+            <a:pPr algn="ctr"/>
+            <a:endParaRPr lang="en-CA" dirty="0"/>
+          </a:p>
+        </p:txBody>
+      </p:sp>
+      <p:cxnSp>
+        <p:nvCxnSpPr>
+          <p:cNvPr id="32" name="Connecteur droit 31">
+            <a:extLst>
+              <a:ext uri="{FF2B5EF4-FFF2-40B4-BE49-F238E27FC236}">
+                <a16:creationId xmlns:a16="http://schemas.microsoft.com/office/drawing/2014/main" id="{9611C969-831F-4225-34AB-2115D7189576}"/>
+              </a:ext>
+            </a:extLst>
+          </p:cNvPr>
+          <p:cNvCxnSpPr>
+            <a:cxnSpLocks/>
+          </p:cNvCxnSpPr>
+          <p:nvPr/>
+        </p:nvCxnSpPr>
+        <p:spPr>
+          <a:xfrm>
+            <a:off x="803684" y="1394798"/>
+            <a:ext cx="1291554" cy="0"/>
+          </a:xfrm>
+          <a:prstGeom prst="line">
+            <a:avLst/>
+          </a:prstGeom>
+          <a:ln w="57150">
+            <a:solidFill>
+              <a:srgbClr val="434343"/>
+            </a:solidFill>
+          </a:ln>
+        </p:spPr>
+        <p:style>
+          <a:lnRef idx="1">
+            <a:schemeClr val="accent1"/>
+          </a:lnRef>
+          <a:fillRef idx="0">
+            <a:schemeClr val="accent1"/>
+          </a:fillRef>
+          <a:effectRef idx="0">
+            <a:schemeClr val="accent1"/>
+          </a:effectRef>
+          <a:fontRef idx="minor">
+            <a:schemeClr val="tx1"/>
+          </a:fontRef>
+        </p:style>
+      </p:cxnSp>
+      <p:cxnSp>
+        <p:nvCxnSpPr>
+          <p:cNvPr id="44" name="Connecteur droit 43">
+            <a:extLst>
+              <a:ext uri="{FF2B5EF4-FFF2-40B4-BE49-F238E27FC236}">
+                <a16:creationId xmlns:a16="http://schemas.microsoft.com/office/drawing/2014/main" id="{064E89E7-44B3-D567-6AD0-3D1FFBADC969}"/>
+              </a:ext>
+            </a:extLst>
+          </p:cNvPr>
+          <p:cNvCxnSpPr>
+            <a:cxnSpLocks/>
+          </p:cNvCxnSpPr>
+          <p:nvPr/>
+        </p:nvCxnSpPr>
+        <p:spPr>
+          <a:xfrm>
+            <a:off x="782409" y="2273178"/>
+            <a:ext cx="258856" cy="0"/>
+          </a:xfrm>
+          <a:prstGeom prst="line">
+            <a:avLst/>
+          </a:prstGeom>
+          <a:ln w="57150">
+            <a:solidFill>
+              <a:srgbClr val="434343"/>
+            </a:solidFill>
+          </a:ln>
+        </p:spPr>
+        <p:style>
+          <a:lnRef idx="1">
+            <a:schemeClr val="accent1"/>
+          </a:lnRef>
+          <a:fillRef idx="0">
+            <a:schemeClr val="accent1"/>
+          </a:fillRef>
+          <a:effectRef idx="0">
+            <a:schemeClr val="accent1"/>
+          </a:effectRef>
+          <a:fontRef idx="minor">
+            <a:schemeClr val="tx1"/>
+          </a:fontRef>
+        </p:style>
+      </p:cxnSp>
+      <p:cxnSp>
+        <p:nvCxnSpPr>
+          <p:cNvPr id="46" name="Connecteur droit 45">
+            <a:extLst>
+              <a:ext uri="{FF2B5EF4-FFF2-40B4-BE49-F238E27FC236}">
+                <a16:creationId xmlns:a16="http://schemas.microsoft.com/office/drawing/2014/main" id="{941661A2-F8FA-5B51-787A-3D84C48EB27A}"/>
+              </a:ext>
+            </a:extLst>
+          </p:cNvPr>
+          <p:cNvCxnSpPr>
+            <a:cxnSpLocks/>
+          </p:cNvCxnSpPr>
+          <p:nvPr/>
+        </p:nvCxnSpPr>
+        <p:spPr>
+          <a:xfrm>
+            <a:off x="782409" y="2035688"/>
+            <a:ext cx="258856" cy="0"/>
+          </a:xfrm>
+          <a:prstGeom prst="line">
+            <a:avLst/>
+          </a:prstGeom>
+          <a:ln w="57150">
+            <a:solidFill>
+              <a:srgbClr val="434343"/>
+            </a:solidFill>
+          </a:ln>
+        </p:spPr>
+        <p:style>
+          <a:lnRef idx="1">
+            <a:schemeClr val="accent1"/>
+          </a:lnRef>
+          <a:fillRef idx="0">
+            <a:schemeClr val="accent1"/>
+          </a:fillRef>
+          <a:effectRef idx="0">
+            <a:schemeClr val="accent1"/>
+          </a:effectRef>
+          <a:fontRef idx="minor">
+            <a:schemeClr val="tx1"/>
+          </a:fontRef>
+        </p:style>
+      </p:cxnSp>
+      <p:cxnSp>
+        <p:nvCxnSpPr>
+          <p:cNvPr id="47" name="Connecteur droit 46">
+            <a:extLst>
+              <a:ext uri="{FF2B5EF4-FFF2-40B4-BE49-F238E27FC236}">
+                <a16:creationId xmlns:a16="http://schemas.microsoft.com/office/drawing/2014/main" id="{FD16D3D5-FC7C-53D1-B51E-CED74DF0BA2E}"/>
+              </a:ext>
+            </a:extLst>
+          </p:cNvPr>
+          <p:cNvCxnSpPr>
+            <a:cxnSpLocks/>
+          </p:cNvCxnSpPr>
+          <p:nvPr/>
+        </p:nvCxnSpPr>
+        <p:spPr>
+          <a:xfrm>
+            <a:off x="782409" y="1814231"/>
+            <a:ext cx="258856" cy="0"/>
+          </a:xfrm>
+          <a:prstGeom prst="line">
+            <a:avLst/>
+          </a:prstGeom>
+          <a:ln w="57150">
+            <a:solidFill>
+              <a:srgbClr val="434343"/>
+            </a:solidFill>
+          </a:ln>
+        </p:spPr>
+        <p:style>
+          <a:lnRef idx="1">
+            <a:schemeClr val="accent1"/>
+          </a:lnRef>
+          <a:fillRef idx="0">
+            <a:schemeClr val="accent1"/>
+          </a:fillRef>
+          <a:effectRef idx="0">
+            <a:schemeClr val="accent1"/>
+          </a:effectRef>
+          <a:fontRef idx="minor">
+            <a:schemeClr val="tx1"/>
+          </a:fontRef>
+        </p:style>
+      </p:cxnSp>
+      <p:cxnSp>
+        <p:nvCxnSpPr>
+          <p:cNvPr id="48" name="Connecteur droit 47">
+            <a:extLst>
+              <a:ext uri="{FF2B5EF4-FFF2-40B4-BE49-F238E27FC236}">
+                <a16:creationId xmlns:a16="http://schemas.microsoft.com/office/drawing/2014/main" id="{2276A1E3-23B4-AE51-7D1B-C26031AFE491}"/>
+              </a:ext>
+            </a:extLst>
+          </p:cNvPr>
+          <p:cNvCxnSpPr>
+            <a:cxnSpLocks/>
+          </p:cNvCxnSpPr>
+          <p:nvPr/>
+        </p:nvCxnSpPr>
+        <p:spPr>
+          <a:xfrm>
+            <a:off x="782409" y="1603094"/>
+            <a:ext cx="258856" cy="0"/>
+          </a:xfrm>
+          <a:prstGeom prst="line">
+            <a:avLst/>
+          </a:prstGeom>
+          <a:ln w="57150">
+            <a:solidFill>
+              <a:srgbClr val="434343"/>
+            </a:solidFill>
+          </a:ln>
+        </p:spPr>
+        <p:style>
+          <a:lnRef idx="1">
+            <a:schemeClr val="accent1"/>
+          </a:lnRef>
+          <a:fillRef idx="0">
+            <a:schemeClr val="accent1"/>
+          </a:fillRef>
+          <a:effectRef idx="0">
+            <a:schemeClr val="accent1"/>
+          </a:effectRef>
+          <a:fontRef idx="minor">
+            <a:schemeClr val="tx1"/>
+          </a:fontRef>
+        </p:style>
+      </p:cxnSp>
+      <p:cxnSp>
+        <p:nvCxnSpPr>
+          <p:cNvPr id="53" name="Connecteur droit 52">
+            <a:extLst>
+              <a:ext uri="{FF2B5EF4-FFF2-40B4-BE49-F238E27FC236}">
+                <a16:creationId xmlns:a16="http://schemas.microsoft.com/office/drawing/2014/main" id="{4F1F0D50-1661-C37E-49DE-287BE9E6EF22}"/>
+              </a:ext>
+            </a:extLst>
+          </p:cNvPr>
+          <p:cNvCxnSpPr>
+            <a:cxnSpLocks/>
+          </p:cNvCxnSpPr>
+          <p:nvPr/>
+        </p:nvCxnSpPr>
+        <p:spPr>
+          <a:xfrm>
+            <a:off x="803684" y="2510668"/>
+            <a:ext cx="1291554" cy="0"/>
+          </a:xfrm>
+          <a:prstGeom prst="line">
+            <a:avLst/>
+          </a:prstGeom>
+          <a:ln w="57150">
+            <a:solidFill>
+              <a:srgbClr val="434343"/>
+            </a:solidFill>
+          </a:ln>
+        </p:spPr>
+        <p:style>
+          <a:lnRef idx="1">
+            <a:schemeClr val="accent1"/>
+          </a:lnRef>
+          <a:fillRef idx="0">
+            <a:schemeClr val="accent1"/>
+          </a:fillRef>
+          <a:effectRef idx="0">
+            <a:schemeClr val="accent1"/>
+          </a:effectRef>
+          <a:fontRef idx="minor">
+            <a:schemeClr val="tx1"/>
+          </a:fontRef>
+        </p:style>
+      </p:cxnSp>
+      <p:cxnSp>
+        <p:nvCxnSpPr>
+          <p:cNvPr id="54" name="Connecteur droit 53">
+            <a:extLst>
+              <a:ext uri="{FF2B5EF4-FFF2-40B4-BE49-F238E27FC236}">
+                <a16:creationId xmlns:a16="http://schemas.microsoft.com/office/drawing/2014/main" id="{CA7CBF4B-6C94-D259-E055-77830FDEFF5D}"/>
+              </a:ext>
+            </a:extLst>
+          </p:cNvPr>
+          <p:cNvCxnSpPr>
+            <a:cxnSpLocks/>
+          </p:cNvCxnSpPr>
+          <p:nvPr/>
+        </p:nvCxnSpPr>
+        <p:spPr>
+          <a:xfrm>
+            <a:off x="782409" y="3389048"/>
+            <a:ext cx="258856" cy="0"/>
+          </a:xfrm>
+          <a:prstGeom prst="line">
+            <a:avLst/>
+          </a:prstGeom>
+          <a:ln w="57150">
+            <a:solidFill>
+              <a:srgbClr val="434343"/>
+            </a:solidFill>
+          </a:ln>
+        </p:spPr>
+        <p:style>
+          <a:lnRef idx="1">
+            <a:schemeClr val="accent1"/>
+          </a:lnRef>
+          <a:fillRef idx="0">
+            <a:schemeClr val="accent1"/>
+          </a:fillRef>
+          <a:effectRef idx="0">
+            <a:schemeClr val="accent1"/>
+          </a:effectRef>
+          <a:fontRef idx="minor">
+            <a:schemeClr val="tx1"/>
+          </a:fontRef>
+        </p:style>
+      </p:cxnSp>
+      <p:cxnSp>
+        <p:nvCxnSpPr>
+          <p:cNvPr id="55" name="Connecteur droit 54">
+            <a:extLst>
+              <a:ext uri="{FF2B5EF4-FFF2-40B4-BE49-F238E27FC236}">
+                <a16:creationId xmlns:a16="http://schemas.microsoft.com/office/drawing/2014/main" id="{65024328-9C09-FF40-B453-2E34C2128E87}"/>
+              </a:ext>
+            </a:extLst>
+          </p:cNvPr>
+          <p:cNvCxnSpPr>
+            <a:cxnSpLocks/>
+          </p:cNvCxnSpPr>
+          <p:nvPr/>
+        </p:nvCxnSpPr>
+        <p:spPr>
+          <a:xfrm>
+            <a:off x="782409" y="3151558"/>
+            <a:ext cx="258856" cy="0"/>
+          </a:xfrm>
+          <a:prstGeom prst="line">
+            <a:avLst/>
+          </a:prstGeom>
+          <a:ln w="57150">
+            <a:solidFill>
+              <a:srgbClr val="434343"/>
+            </a:solidFill>
+          </a:ln>
+        </p:spPr>
+        <p:style>
+          <a:lnRef idx="1">
+            <a:schemeClr val="accent1"/>
+          </a:lnRef>
+          <a:fillRef idx="0">
+            <a:schemeClr val="accent1"/>
+          </a:fillRef>
+          <a:effectRef idx="0">
+            <a:schemeClr val="accent1"/>
+          </a:effectRef>
+          <a:fontRef idx="minor">
+            <a:schemeClr val="tx1"/>
+          </a:fontRef>
+        </p:style>
+      </p:cxnSp>
+      <p:cxnSp>
+        <p:nvCxnSpPr>
+          <p:cNvPr id="56" name="Connecteur droit 55">
+            <a:extLst>
+              <a:ext uri="{FF2B5EF4-FFF2-40B4-BE49-F238E27FC236}">
+                <a16:creationId xmlns:a16="http://schemas.microsoft.com/office/drawing/2014/main" id="{E1004403-8F08-AE74-7A75-F64C28B25F9B}"/>
+              </a:ext>
+            </a:extLst>
+          </p:cNvPr>
+          <p:cNvCxnSpPr>
+            <a:cxnSpLocks/>
+          </p:cNvCxnSpPr>
+          <p:nvPr/>
+        </p:nvCxnSpPr>
+        <p:spPr>
+          <a:xfrm>
+            <a:off x="782409" y="2930101"/>
+            <a:ext cx="258856" cy="0"/>
+          </a:xfrm>
+          <a:prstGeom prst="line">
+            <a:avLst/>
+          </a:prstGeom>
+          <a:ln w="57150">
+            <a:solidFill>
+              <a:srgbClr val="434343"/>
+            </a:solidFill>
+          </a:ln>
+        </p:spPr>
+        <p:style>
+          <a:lnRef idx="1">
+            <a:schemeClr val="accent1"/>
+          </a:lnRef>
+          <a:fillRef idx="0">
+            <a:schemeClr val="accent1"/>
+          </a:fillRef>
+          <a:effectRef idx="0">
+            <a:schemeClr val="accent1"/>
+          </a:effectRef>
+          <a:fontRef idx="minor">
+            <a:schemeClr val="tx1"/>
+          </a:fontRef>
+        </p:style>
+      </p:cxnSp>
+      <p:cxnSp>
+        <p:nvCxnSpPr>
+          <p:cNvPr id="57" name="Connecteur droit 56">
+            <a:extLst>
+              <a:ext uri="{FF2B5EF4-FFF2-40B4-BE49-F238E27FC236}">
+                <a16:creationId xmlns:a16="http://schemas.microsoft.com/office/drawing/2014/main" id="{07252B0F-6977-0ACB-3560-B03F3C387FC5}"/>
+              </a:ext>
+            </a:extLst>
+          </p:cNvPr>
+          <p:cNvCxnSpPr>
+            <a:cxnSpLocks/>
+          </p:cNvCxnSpPr>
+          <p:nvPr/>
+        </p:nvCxnSpPr>
+        <p:spPr>
+          <a:xfrm>
+            <a:off x="782409" y="2718964"/>
+            <a:ext cx="258856" cy="0"/>
+          </a:xfrm>
+          <a:prstGeom prst="line">
+            <a:avLst/>
+          </a:prstGeom>
+          <a:ln w="57150">
+            <a:solidFill>
+              <a:srgbClr val="434343"/>
+            </a:solidFill>
+          </a:ln>
+        </p:spPr>
+        <p:style>
+          <a:lnRef idx="1">
+            <a:schemeClr val="accent1"/>
+          </a:lnRef>
+          <a:fillRef idx="0">
+            <a:schemeClr val="accent1"/>
+          </a:fillRef>
+          <a:effectRef idx="0">
+            <a:schemeClr val="accent1"/>
+          </a:effectRef>
+          <a:fontRef idx="minor">
+            <a:schemeClr val="tx1"/>
+          </a:fontRef>
+        </p:style>
+      </p:cxnSp>
+      <p:cxnSp>
+        <p:nvCxnSpPr>
+          <p:cNvPr id="58" name="Connecteur droit 57">
+            <a:extLst>
+              <a:ext uri="{FF2B5EF4-FFF2-40B4-BE49-F238E27FC236}">
+                <a16:creationId xmlns:a16="http://schemas.microsoft.com/office/drawing/2014/main" id="{29BD9619-F7DF-0152-E96C-03EE8BCDF7EA}"/>
+              </a:ext>
+            </a:extLst>
+          </p:cNvPr>
+          <p:cNvCxnSpPr>
+            <a:cxnSpLocks/>
+          </p:cNvCxnSpPr>
+          <p:nvPr/>
+        </p:nvCxnSpPr>
+        <p:spPr>
+          <a:xfrm>
+            <a:off x="782409" y="3626431"/>
+            <a:ext cx="1308194" cy="0"/>
+          </a:xfrm>
+          <a:prstGeom prst="line">
+            <a:avLst/>
+          </a:prstGeom>
+          <a:ln w="57150">
+            <a:solidFill>
+              <a:srgbClr val="434343"/>
+            </a:solidFill>
+          </a:ln>
+        </p:spPr>
+        <p:style>
+          <a:lnRef idx="1">
+            <a:schemeClr val="accent1"/>
+          </a:lnRef>
+          <a:fillRef idx="0">
+            <a:schemeClr val="accent1"/>
+          </a:fillRef>
+          <a:effectRef idx="0">
+            <a:schemeClr val="accent1"/>
+          </a:effectRef>
+          <a:fontRef idx="minor">
+            <a:schemeClr val="tx1"/>
+          </a:fontRef>
+        </p:style>
+      </p:cxnSp>
+      <p:cxnSp>
+        <p:nvCxnSpPr>
+          <p:cNvPr id="59" name="Connecteur droit 58">
+            <a:extLst>
+              <a:ext uri="{FF2B5EF4-FFF2-40B4-BE49-F238E27FC236}">
+                <a16:creationId xmlns:a16="http://schemas.microsoft.com/office/drawing/2014/main" id="{08FBB905-1B0D-D828-258F-48D01B1FF873}"/>
+              </a:ext>
+            </a:extLst>
+          </p:cNvPr>
+          <p:cNvCxnSpPr>
+            <a:cxnSpLocks/>
+          </p:cNvCxnSpPr>
+          <p:nvPr/>
+        </p:nvCxnSpPr>
+        <p:spPr>
+          <a:xfrm>
+            <a:off x="761134" y="4504811"/>
+            <a:ext cx="258856" cy="0"/>
+          </a:xfrm>
+          <a:prstGeom prst="line">
+            <a:avLst/>
+          </a:prstGeom>
+          <a:ln w="57150">
+            <a:solidFill>
+              <a:srgbClr val="434343"/>
+            </a:solidFill>
+          </a:ln>
+        </p:spPr>
+        <p:style>
+          <a:lnRef idx="1">
+            <a:schemeClr val="accent1"/>
+          </a:lnRef>
+          <a:fillRef idx="0">
+            <a:schemeClr val="accent1"/>
+          </a:fillRef>
+          <a:effectRef idx="0">
+            <a:schemeClr val="accent1"/>
+          </a:effectRef>
+          <a:fontRef idx="minor">
+            <a:schemeClr val="tx1"/>
+          </a:fontRef>
+        </p:style>
+      </p:cxnSp>
+      <p:cxnSp>
+        <p:nvCxnSpPr>
+          <p:cNvPr id="60" name="Connecteur droit 59">
+            <a:extLst>
+              <a:ext uri="{FF2B5EF4-FFF2-40B4-BE49-F238E27FC236}">
+                <a16:creationId xmlns:a16="http://schemas.microsoft.com/office/drawing/2014/main" id="{8438FBDF-13B2-C447-5515-C606F17E2496}"/>
+              </a:ext>
+            </a:extLst>
+          </p:cNvPr>
+          <p:cNvCxnSpPr>
+            <a:cxnSpLocks/>
+          </p:cNvCxnSpPr>
+          <p:nvPr/>
+        </p:nvCxnSpPr>
+        <p:spPr>
+          <a:xfrm>
+            <a:off x="761134" y="4267321"/>
+            <a:ext cx="258856" cy="0"/>
+          </a:xfrm>
+          <a:prstGeom prst="line">
+            <a:avLst/>
+          </a:prstGeom>
+          <a:ln w="57150">
+            <a:solidFill>
+              <a:srgbClr val="434343"/>
+            </a:solidFill>
+          </a:ln>
+        </p:spPr>
+        <p:style>
+          <a:lnRef idx="1">
+            <a:schemeClr val="accent1"/>
+          </a:lnRef>
+          <a:fillRef idx="0">
+            <a:schemeClr val="accent1"/>
+          </a:fillRef>
+          <a:effectRef idx="0">
+            <a:schemeClr val="accent1"/>
+          </a:effectRef>
+          <a:fontRef idx="minor">
+            <a:schemeClr val="tx1"/>
+          </a:fontRef>
+        </p:style>
+      </p:cxnSp>
+      <p:cxnSp>
+        <p:nvCxnSpPr>
+          <p:cNvPr id="61" name="Connecteur droit 60">
+            <a:extLst>
+              <a:ext uri="{FF2B5EF4-FFF2-40B4-BE49-F238E27FC236}">
+                <a16:creationId xmlns:a16="http://schemas.microsoft.com/office/drawing/2014/main" id="{5276A58C-7E83-6268-4023-489A8D5BA233}"/>
+              </a:ext>
+            </a:extLst>
+          </p:cNvPr>
+          <p:cNvCxnSpPr>
+            <a:cxnSpLocks/>
+          </p:cNvCxnSpPr>
+          <p:nvPr/>
+        </p:nvCxnSpPr>
+        <p:spPr>
+          <a:xfrm>
+            <a:off x="761134" y="4045864"/>
+            <a:ext cx="258856" cy="0"/>
+          </a:xfrm>
+          <a:prstGeom prst="line">
+            <a:avLst/>
+          </a:prstGeom>
+          <a:ln w="57150">
+            <a:solidFill>
+              <a:srgbClr val="434343"/>
+            </a:solidFill>
+          </a:ln>
+        </p:spPr>
+        <p:style>
+          <a:lnRef idx="1">
+            <a:schemeClr val="accent1"/>
+          </a:lnRef>
+          <a:fillRef idx="0">
+            <a:schemeClr val="accent1"/>
+          </a:fillRef>
+          <a:effectRef idx="0">
+            <a:schemeClr val="accent1"/>
+          </a:effectRef>
+          <a:fontRef idx="minor">
+            <a:schemeClr val="tx1"/>
+          </a:fontRef>
+        </p:style>
+      </p:cxnSp>
+      <p:cxnSp>
+        <p:nvCxnSpPr>
+          <p:cNvPr id="62" name="Connecteur droit 61">
+            <a:extLst>
+              <a:ext uri="{FF2B5EF4-FFF2-40B4-BE49-F238E27FC236}">
+                <a16:creationId xmlns:a16="http://schemas.microsoft.com/office/drawing/2014/main" id="{C34E5183-6BEC-6CF7-DF10-CCAA2D582C8E}"/>
+              </a:ext>
+            </a:extLst>
+          </p:cNvPr>
+          <p:cNvCxnSpPr>
+            <a:cxnSpLocks/>
+          </p:cNvCxnSpPr>
+          <p:nvPr/>
+        </p:nvCxnSpPr>
+        <p:spPr>
+          <a:xfrm>
+            <a:off x="761134" y="3834727"/>
+            <a:ext cx="258856" cy="0"/>
+          </a:xfrm>
+          <a:prstGeom prst="line">
+            <a:avLst/>
+          </a:prstGeom>
+          <a:ln w="57150">
+            <a:solidFill>
+              <a:srgbClr val="434343"/>
+            </a:solidFill>
+          </a:ln>
+        </p:spPr>
+        <p:style>
+          <a:lnRef idx="1">
+            <a:schemeClr val="accent1"/>
+          </a:lnRef>
+          <a:fillRef idx="0">
+            <a:schemeClr val="accent1"/>
+          </a:fillRef>
+          <a:effectRef idx="0">
+            <a:schemeClr val="accent1"/>
+          </a:effectRef>
+          <a:fontRef idx="minor">
+            <a:schemeClr val="tx1"/>
+          </a:fontRef>
+        </p:style>
+      </p:cxnSp>
+      <p:cxnSp>
+        <p:nvCxnSpPr>
+          <p:cNvPr id="63" name="Connecteur droit 62">
+            <a:extLst>
+              <a:ext uri="{FF2B5EF4-FFF2-40B4-BE49-F238E27FC236}">
+                <a16:creationId xmlns:a16="http://schemas.microsoft.com/office/drawing/2014/main" id="{CC00D4D7-E369-EE08-FE3B-B6CDBF24D155}"/>
+              </a:ext>
+            </a:extLst>
+          </p:cNvPr>
+          <p:cNvCxnSpPr>
+            <a:cxnSpLocks/>
+          </p:cNvCxnSpPr>
+          <p:nvPr/>
+        </p:nvCxnSpPr>
+        <p:spPr>
+          <a:xfrm>
+            <a:off x="803683" y="4683918"/>
+            <a:ext cx="1286919" cy="0"/>
+          </a:xfrm>
+          <a:prstGeom prst="line">
+            <a:avLst/>
+          </a:prstGeom>
+          <a:ln w="57150">
+            <a:solidFill>
+              <a:srgbClr val="434343"/>
+            </a:solidFill>
+          </a:ln>
+        </p:spPr>
+        <p:style>
+          <a:lnRef idx="1">
+            <a:schemeClr val="accent1"/>
+          </a:lnRef>
+          <a:fillRef idx="0">
+            <a:schemeClr val="accent1"/>
+          </a:fillRef>
+          <a:effectRef idx="0">
+            <a:schemeClr val="accent1"/>
+          </a:effectRef>
+          <a:fontRef idx="minor">
+            <a:schemeClr val="tx1"/>
+          </a:fontRef>
+        </p:style>
+      </p:cxnSp>
+      <p:cxnSp>
+        <p:nvCxnSpPr>
+          <p:cNvPr id="68" name="Connecteur droit 67">
+            <a:extLst>
+              <a:ext uri="{FF2B5EF4-FFF2-40B4-BE49-F238E27FC236}">
+                <a16:creationId xmlns:a16="http://schemas.microsoft.com/office/drawing/2014/main" id="{785E0AA0-4E6E-FAD3-5967-009F37EE1D13}"/>
+              </a:ext>
+            </a:extLst>
+          </p:cNvPr>
+          <p:cNvCxnSpPr>
+            <a:cxnSpLocks/>
+          </p:cNvCxnSpPr>
+          <p:nvPr/>
+        </p:nvCxnSpPr>
+        <p:spPr>
+          <a:xfrm>
+            <a:off x="761134" y="323713"/>
+            <a:ext cx="1334104" cy="0"/>
+          </a:xfrm>
+          <a:prstGeom prst="line">
+            <a:avLst/>
+          </a:prstGeom>
+          <a:ln w="57150">
+            <a:solidFill>
+              <a:srgbClr val="434343"/>
+            </a:solidFill>
+          </a:ln>
+        </p:spPr>
+        <p:style>
+          <a:lnRef idx="1">
+            <a:schemeClr val="accent1"/>
+          </a:lnRef>
+          <a:fillRef idx="0">
+            <a:schemeClr val="accent1"/>
+          </a:fillRef>
+          <a:effectRef idx="0">
+            <a:schemeClr val="accent1"/>
+          </a:effectRef>
+          <a:fontRef idx="minor">
+            <a:schemeClr val="tx1"/>
+          </a:fontRef>
+        </p:style>
+      </p:cxnSp>
+      <p:cxnSp>
+        <p:nvCxnSpPr>
+          <p:cNvPr id="69" name="Connecteur droit 68">
+            <a:extLst>
+              <a:ext uri="{FF2B5EF4-FFF2-40B4-BE49-F238E27FC236}">
+                <a16:creationId xmlns:a16="http://schemas.microsoft.com/office/drawing/2014/main" id="{20CF6D7C-6344-2D9D-13E5-9F672BCE930B}"/>
+              </a:ext>
+            </a:extLst>
+          </p:cNvPr>
+          <p:cNvCxnSpPr>
+            <a:cxnSpLocks/>
+          </p:cNvCxnSpPr>
+          <p:nvPr/>
+        </p:nvCxnSpPr>
+        <p:spPr>
+          <a:xfrm>
+            <a:off x="782409" y="1202096"/>
+            <a:ext cx="258856" cy="0"/>
+          </a:xfrm>
+          <a:prstGeom prst="line">
+            <a:avLst/>
+          </a:prstGeom>
+          <a:ln w="57150">
+            <a:solidFill>
+              <a:srgbClr val="434343"/>
+            </a:solidFill>
+          </a:ln>
+        </p:spPr>
+        <p:style>
+          <a:lnRef idx="1">
+            <a:schemeClr val="accent1"/>
+          </a:lnRef>
+          <a:fillRef idx="0">
+            <a:schemeClr val="accent1"/>
+          </a:fillRef>
+          <a:effectRef idx="0">
+            <a:schemeClr val="accent1"/>
+          </a:effectRef>
+          <a:fontRef idx="minor">
+            <a:schemeClr val="tx1"/>
+          </a:fontRef>
+        </p:style>
+      </p:cxnSp>
+      <p:cxnSp>
+        <p:nvCxnSpPr>
+          <p:cNvPr id="70" name="Connecteur droit 69">
+            <a:extLst>
+              <a:ext uri="{FF2B5EF4-FFF2-40B4-BE49-F238E27FC236}">
+                <a16:creationId xmlns:a16="http://schemas.microsoft.com/office/drawing/2014/main" id="{11C24872-376A-140E-3AD5-232C49B1C8A0}"/>
+              </a:ext>
+            </a:extLst>
+          </p:cNvPr>
+          <p:cNvCxnSpPr>
+            <a:cxnSpLocks/>
+          </p:cNvCxnSpPr>
+          <p:nvPr/>
+        </p:nvCxnSpPr>
+        <p:spPr>
+          <a:xfrm>
+            <a:off x="782409" y="964606"/>
+            <a:ext cx="258856" cy="0"/>
+          </a:xfrm>
+          <a:prstGeom prst="line">
+            <a:avLst/>
+          </a:prstGeom>
+          <a:ln w="57150">
+            <a:solidFill>
+              <a:srgbClr val="434343"/>
+            </a:solidFill>
+          </a:ln>
+        </p:spPr>
+        <p:style>
+          <a:lnRef idx="1">
+            <a:schemeClr val="accent1"/>
+          </a:lnRef>
+          <a:fillRef idx="0">
+            <a:schemeClr val="accent1"/>
+          </a:fillRef>
+          <a:effectRef idx="0">
+            <a:schemeClr val="accent1"/>
+          </a:effectRef>
+          <a:fontRef idx="minor">
+            <a:schemeClr val="tx1"/>
+          </a:fontRef>
+        </p:style>
+      </p:cxnSp>
+      <p:cxnSp>
+        <p:nvCxnSpPr>
+          <p:cNvPr id="71" name="Connecteur droit 70">
+            <a:extLst>
+              <a:ext uri="{FF2B5EF4-FFF2-40B4-BE49-F238E27FC236}">
+                <a16:creationId xmlns:a16="http://schemas.microsoft.com/office/drawing/2014/main" id="{F3582E11-B870-9033-1F22-B2901631D7DF}"/>
+              </a:ext>
+            </a:extLst>
+          </p:cNvPr>
+          <p:cNvCxnSpPr>
+            <a:cxnSpLocks/>
+          </p:cNvCxnSpPr>
+          <p:nvPr/>
+        </p:nvCxnSpPr>
+        <p:spPr>
+          <a:xfrm>
+            <a:off x="782409" y="743149"/>
+            <a:ext cx="258856" cy="0"/>
+          </a:xfrm>
+          <a:prstGeom prst="line">
+            <a:avLst/>
+          </a:prstGeom>
+          <a:ln w="57150">
+            <a:solidFill>
+              <a:srgbClr val="434343"/>
+            </a:solidFill>
+          </a:ln>
+        </p:spPr>
+        <p:style>
+          <a:lnRef idx="1">
+            <a:schemeClr val="accent1"/>
+          </a:lnRef>
+          <a:fillRef idx="0">
+            <a:schemeClr val="accent1"/>
+          </a:fillRef>
+          <a:effectRef idx="0">
+            <a:schemeClr val="accent1"/>
+          </a:effectRef>
+          <a:fontRef idx="minor">
+            <a:schemeClr val="tx1"/>
+          </a:fontRef>
+        </p:style>
+      </p:cxnSp>
+      <p:cxnSp>
+        <p:nvCxnSpPr>
+          <p:cNvPr id="72" name="Connecteur droit 71">
+            <a:extLst>
+              <a:ext uri="{FF2B5EF4-FFF2-40B4-BE49-F238E27FC236}">
+                <a16:creationId xmlns:a16="http://schemas.microsoft.com/office/drawing/2014/main" id="{440817C8-7EC9-B5A8-C3BE-11A2BFCF3BC0}"/>
+              </a:ext>
+            </a:extLst>
+          </p:cNvPr>
+          <p:cNvCxnSpPr>
+            <a:cxnSpLocks/>
+          </p:cNvCxnSpPr>
+          <p:nvPr/>
+        </p:nvCxnSpPr>
+        <p:spPr>
+          <a:xfrm>
+            <a:off x="782409" y="532012"/>
+            <a:ext cx="258856" cy="0"/>
+          </a:xfrm>
+          <a:prstGeom prst="line">
+            <a:avLst/>
+          </a:prstGeom>
+          <a:ln w="57150">
+            <a:solidFill>
+              <a:srgbClr val="434343"/>
+            </a:solidFill>
+          </a:ln>
+        </p:spPr>
+        <p:style>
+          <a:lnRef idx="1">
+            <a:schemeClr val="accent1"/>
+          </a:lnRef>
+          <a:fillRef idx="0">
+            <a:schemeClr val="accent1"/>
+          </a:fillRef>
+          <a:effectRef idx="0">
+            <a:schemeClr val="accent1"/>
+          </a:effectRef>
+          <a:fontRef idx="minor">
+            <a:schemeClr val="tx1"/>
+          </a:fontRef>
+        </p:style>
+      </p:cxnSp>
+      <p:sp>
+        <p:nvSpPr>
+          <p:cNvPr id="77" name="ZoneTexte 76">
+            <a:extLst>
+              <a:ext uri="{FF2B5EF4-FFF2-40B4-BE49-F238E27FC236}">
+                <a16:creationId xmlns:a16="http://schemas.microsoft.com/office/drawing/2014/main" id="{C750E088-B88B-A0F4-5C46-63BA74A8078E}"/>
+              </a:ext>
+            </a:extLst>
+          </p:cNvPr>
+          <p:cNvSpPr txBox="1"/>
+          <p:nvPr/>
+        </p:nvSpPr>
+        <p:spPr>
+          <a:xfrm>
+            <a:off x="2080823" y="141300"/>
+            <a:ext cx="776653" cy="400110"/>
+          </a:xfrm>
+          <a:prstGeom prst="rect">
+            <a:avLst/>
+          </a:prstGeom>
+          <a:noFill/>
+        </p:spPr>
+        <p:txBody>
+          <a:bodyPr wrap="square" rtlCol="0">
+            <a:spAutoFit/>
+          </a:bodyPr>
+          <a:lstStyle/>
+          <a:p>
+            <a:r>
+              <a:rPr lang="en-CA" sz="2000" b="1" dirty="0">
+                <a:latin typeface="Courier New" panose="02070309020205020404" pitchFamily="49" charset="0"/>
+                <a:cs typeface="Courier New" panose="02070309020205020404" pitchFamily="49" charset="0"/>
+              </a:rPr>
+              <a:t>100</a:t>
+            </a:r>
+          </a:p>
+        </p:txBody>
+      </p:sp>
+      <p:sp>
+        <p:nvSpPr>
+          <p:cNvPr id="80" name="ZoneTexte 79">
+            <a:extLst>
+              <a:ext uri="{FF2B5EF4-FFF2-40B4-BE49-F238E27FC236}">
+                <a16:creationId xmlns:a16="http://schemas.microsoft.com/office/drawing/2014/main" id="{69F173D4-93FD-4DDE-7678-02628BBD4B9D}"/>
+              </a:ext>
+            </a:extLst>
+          </p:cNvPr>
+          <p:cNvSpPr txBox="1"/>
+          <p:nvPr/>
+        </p:nvSpPr>
+        <p:spPr>
+          <a:xfrm>
+            <a:off x="2053552" y="3440606"/>
+            <a:ext cx="755651" cy="369332"/>
+          </a:xfrm>
+          <a:prstGeom prst="rect">
+            <a:avLst/>
+          </a:prstGeom>
+          <a:noFill/>
+        </p:spPr>
+        <p:txBody>
+          <a:bodyPr wrap="square">
+            <a:spAutoFit/>
+          </a:bodyPr>
+          <a:lstStyle/>
+          <a:p>
+            <a:r>
+              <a:rPr lang="en-CA" b="1" dirty="0">
+                <a:latin typeface="Courier New" panose="02070309020205020404" pitchFamily="49" charset="0"/>
+                <a:cs typeface="Courier New" panose="02070309020205020404" pitchFamily="49" charset="0"/>
+              </a:rPr>
+              <a:t>25</a:t>
+            </a:r>
+            <a:endParaRPr lang="en-CA" sz="1800" b="1" dirty="0">
+              <a:latin typeface="Courier New" panose="02070309020205020404" pitchFamily="49" charset="0"/>
+              <a:cs typeface="Courier New" panose="02070309020205020404" pitchFamily="49" charset="0"/>
+            </a:endParaRPr>
+          </a:p>
+        </p:txBody>
+      </p:sp>
+      <p:sp>
+        <p:nvSpPr>
+          <p:cNvPr id="81" name="ZoneTexte 80">
+            <a:extLst>
+              <a:ext uri="{FF2B5EF4-FFF2-40B4-BE49-F238E27FC236}">
+                <a16:creationId xmlns:a16="http://schemas.microsoft.com/office/drawing/2014/main" id="{07A3A413-E6B2-1C56-C3CC-7D464C44A593}"/>
+              </a:ext>
+            </a:extLst>
+          </p:cNvPr>
+          <p:cNvSpPr txBox="1"/>
+          <p:nvPr/>
+        </p:nvSpPr>
+        <p:spPr>
+          <a:xfrm>
+            <a:off x="2090603" y="4496304"/>
+            <a:ext cx="654333" cy="369332"/>
+          </a:xfrm>
+          <a:prstGeom prst="rect">
+            <a:avLst/>
+          </a:prstGeom>
+          <a:noFill/>
+        </p:spPr>
+        <p:txBody>
+          <a:bodyPr wrap="square">
+            <a:spAutoFit/>
+          </a:bodyPr>
+          <a:lstStyle/>
+          <a:p>
+            <a:r>
+              <a:rPr lang="en-CA" b="1" dirty="0">
+                <a:latin typeface="Courier New" panose="02070309020205020404" pitchFamily="49" charset="0"/>
+                <a:cs typeface="Courier New" panose="02070309020205020404" pitchFamily="49" charset="0"/>
+              </a:rPr>
+              <a:t>0</a:t>
+            </a:r>
+            <a:endParaRPr lang="en-CA" sz="1800" b="1" dirty="0">
+              <a:latin typeface="Courier New" panose="02070309020205020404" pitchFamily="49" charset="0"/>
+              <a:cs typeface="Courier New" panose="02070309020205020404" pitchFamily="49" charset="0"/>
+            </a:endParaRPr>
+          </a:p>
+        </p:txBody>
+      </p:sp>
+      <p:sp>
+        <p:nvSpPr>
+          <p:cNvPr id="82" name="ZoneTexte 81">
+            <a:extLst>
+              <a:ext uri="{FF2B5EF4-FFF2-40B4-BE49-F238E27FC236}">
+                <a16:creationId xmlns:a16="http://schemas.microsoft.com/office/drawing/2014/main" id="{D66625A6-F636-1A8E-1AC5-A0C7D1162D94}"/>
+              </a:ext>
+            </a:extLst>
+          </p:cNvPr>
+          <p:cNvSpPr txBox="1"/>
+          <p:nvPr/>
+        </p:nvSpPr>
+        <p:spPr>
+          <a:xfrm>
+            <a:off x="2090603" y="2328727"/>
+            <a:ext cx="574849" cy="369332"/>
+          </a:xfrm>
+          <a:prstGeom prst="rect">
+            <a:avLst/>
+          </a:prstGeom>
+          <a:noFill/>
+        </p:spPr>
+        <p:txBody>
+          <a:bodyPr wrap="square">
+            <a:spAutoFit/>
+          </a:bodyPr>
+          <a:lstStyle/>
+          <a:p>
+            <a:r>
+              <a:rPr lang="en-CA" b="1" dirty="0">
+                <a:latin typeface="Courier New" panose="02070309020205020404" pitchFamily="49" charset="0"/>
+                <a:cs typeface="Courier New" panose="02070309020205020404" pitchFamily="49" charset="0"/>
+              </a:rPr>
+              <a:t>50</a:t>
+            </a:r>
+            <a:endParaRPr lang="en-CA" sz="1800" b="1" dirty="0">
+              <a:latin typeface="Courier New" panose="02070309020205020404" pitchFamily="49" charset="0"/>
+              <a:cs typeface="Courier New" panose="02070309020205020404" pitchFamily="49" charset="0"/>
+            </a:endParaRPr>
+          </a:p>
+        </p:txBody>
+      </p:sp>
+      <p:sp>
+        <p:nvSpPr>
+          <p:cNvPr id="83" name="ZoneTexte 82">
+            <a:extLst>
+              <a:ext uri="{FF2B5EF4-FFF2-40B4-BE49-F238E27FC236}">
+                <a16:creationId xmlns:a16="http://schemas.microsoft.com/office/drawing/2014/main" id="{D4D17D66-5E8D-117B-2CA3-CF895C17EDB9}"/>
+              </a:ext>
+            </a:extLst>
+          </p:cNvPr>
+          <p:cNvSpPr txBox="1"/>
+          <p:nvPr/>
+        </p:nvSpPr>
+        <p:spPr>
+          <a:xfrm>
+            <a:off x="2090602" y="1195088"/>
+            <a:ext cx="574849" cy="369332"/>
+          </a:xfrm>
+          <a:prstGeom prst="rect">
+            <a:avLst/>
+          </a:prstGeom>
+          <a:noFill/>
+        </p:spPr>
+        <p:txBody>
+          <a:bodyPr wrap="square">
+            <a:spAutoFit/>
+          </a:bodyPr>
+          <a:lstStyle/>
+          <a:p>
+            <a:r>
+              <a:rPr lang="en-CA" sz="1800" b="1" dirty="0">
+                <a:latin typeface="Courier New" panose="02070309020205020404" pitchFamily="49" charset="0"/>
+                <a:cs typeface="Courier New" panose="02070309020205020404" pitchFamily="49" charset="0"/>
+              </a:rPr>
+              <a:t>75</a:t>
+            </a:r>
+          </a:p>
+        </p:txBody>
+      </p:sp>
+      <p:cxnSp>
+        <p:nvCxnSpPr>
+          <p:cNvPr id="85" name="Connecteur droit 84">
+            <a:extLst>
+              <a:ext uri="{FF2B5EF4-FFF2-40B4-BE49-F238E27FC236}">
+                <a16:creationId xmlns:a16="http://schemas.microsoft.com/office/drawing/2014/main" id="{D0419EAB-58E3-0C9D-FA21-A6EFB8B58D07}"/>
+              </a:ext>
+            </a:extLst>
+          </p:cNvPr>
+          <p:cNvCxnSpPr>
+            <a:cxnSpLocks/>
+          </p:cNvCxnSpPr>
+          <p:nvPr/>
+        </p:nvCxnSpPr>
+        <p:spPr>
+          <a:xfrm>
+            <a:off x="802114" y="1664909"/>
+            <a:ext cx="901148" cy="0"/>
+          </a:xfrm>
+          <a:prstGeom prst="line">
+            <a:avLst/>
+          </a:prstGeom>
+          <a:ln w="38100">
+            <a:solidFill>
+              <a:srgbClr val="64310F"/>
+            </a:solidFill>
+          </a:ln>
+        </p:spPr>
+        <p:style>
+          <a:lnRef idx="1">
+            <a:schemeClr val="accent1"/>
+          </a:lnRef>
+          <a:fillRef idx="0">
+            <a:schemeClr val="accent1"/>
+          </a:fillRef>
+          <a:effectRef idx="0">
+            <a:schemeClr val="accent1"/>
+          </a:effectRef>
+          <a:fontRef idx="minor">
+            <a:schemeClr val="tx1"/>
+          </a:fontRef>
+        </p:style>
+      </p:cxnSp>
+      <p:sp>
+        <p:nvSpPr>
+          <p:cNvPr id="36" name="Rectangle : coins arrondis 35">
+            <a:extLst>
+              <a:ext uri="{FF2B5EF4-FFF2-40B4-BE49-F238E27FC236}">
+                <a16:creationId xmlns:a16="http://schemas.microsoft.com/office/drawing/2014/main" id="{0598E804-5787-EF75-A611-B246F97C5A76}"/>
+              </a:ext>
+            </a:extLst>
+          </p:cNvPr>
+          <p:cNvSpPr/>
+          <p:nvPr/>
+        </p:nvSpPr>
+        <p:spPr>
+          <a:xfrm>
+            <a:off x="791213" y="331300"/>
+            <a:ext cx="912049" cy="4352618"/>
+          </a:xfrm>
+          <a:prstGeom prst="roundRect">
+            <a:avLst>
+              <a:gd name="adj" fmla="val 0"/>
+            </a:avLst>
+          </a:prstGeom>
+          <a:noFill/>
+          <a:ln w="63500">
+            <a:solidFill>
+              <a:srgbClr val="434343"/>
+            </a:solidFill>
+          </a:ln>
+        </p:spPr>
+        <p:style>
+          <a:lnRef idx="2">
+            <a:schemeClr val="accent1">
+              <a:shade val="15000"/>
+            </a:schemeClr>
+          </a:lnRef>
+          <a:fillRef idx="1">
+            <a:schemeClr val="accent1"/>
+          </a:fillRef>
+          <a:effectRef idx="0">
+            <a:schemeClr val="accent1"/>
+          </a:effectRef>
+          <a:fontRef idx="minor">
+            <a:schemeClr val="lt1"/>
+          </a:fontRef>
+        </p:style>
+        <p:txBody>
+          <a:bodyPr rtlCol="0" anchor="ctr"/>
+          <a:lstStyle/>
+          <a:p>
+            <a:pPr algn="ctr"/>
+            <a:endParaRPr lang="en-CA"/>
+          </a:p>
+        </p:txBody>
+      </p:sp>
+      <p:sp>
+        <p:nvSpPr>
+          <p:cNvPr id="84" name="Triangle isocèle 83">
+            <a:extLst>
+              <a:ext uri="{FF2B5EF4-FFF2-40B4-BE49-F238E27FC236}">
+                <a16:creationId xmlns:a16="http://schemas.microsoft.com/office/drawing/2014/main" id="{26814575-C828-9E67-19ED-7A67DC80BFD1}"/>
+              </a:ext>
+            </a:extLst>
+          </p:cNvPr>
+          <p:cNvSpPr/>
+          <p:nvPr/>
+        </p:nvSpPr>
+        <p:spPr>
+          <a:xfrm rot="16200000">
+            <a:off x="1709247" y="1573104"/>
+            <a:ext cx="246528" cy="177132"/>
+          </a:xfrm>
+          <a:prstGeom prst="triangle">
+            <a:avLst>
+              <a:gd name="adj" fmla="val 49774"/>
+            </a:avLst>
+          </a:prstGeom>
+          <a:ln w="38100"/>
+        </p:spPr>
+        <p:style>
+          <a:lnRef idx="2">
+            <a:schemeClr val="accent2">
+              <a:shade val="15000"/>
+            </a:schemeClr>
+          </a:lnRef>
+          <a:fillRef idx="1">
+            <a:schemeClr val="accent2"/>
+          </a:fillRef>
+          <a:effectRef idx="0">
+            <a:schemeClr val="accent2"/>
+          </a:effectRef>
+          <a:fontRef idx="minor">
+            <a:schemeClr val="lt1"/>
+          </a:fontRef>
+        </p:style>
+        <p:txBody>
+          <a:bodyPr rtlCol="0" anchor="ctr"/>
+          <a:lstStyle/>
+          <a:p>
+            <a:pPr algn="ctr"/>
+            <a:endParaRPr lang="en-CA"/>
+          </a:p>
+        </p:txBody>
+      </p:sp>
+    </p:spTree>
+    <p:extLst>
+      <p:ext uri="{BB962C8B-B14F-4D97-AF65-F5344CB8AC3E}">
+        <p14:creationId xmlns:p14="http://schemas.microsoft.com/office/powerpoint/2010/main" val="1895990196"/>
+      </p:ext>
+    </p:extLst>
+  </p:cSld>
+  <p:clrMapOvr>
+    <a:masterClrMapping/>
+  </p:clrMapOvr>
+</p:sld>
+</file>
+
+<file path=ppt/slides/slide11.xml><?xml version="1.0" encoding="utf-8"?>
+<p:sld xmlns:a="http://schemas.openxmlformats.org/drawingml/2006/main" xmlns:r="http://schemas.openxmlformats.org/officeDocument/2006/relationships" xmlns:p="http://schemas.openxmlformats.org/presentationml/2006/main">
+  <p:cSld>
+    <p:spTree>
+      <p:nvGrpSpPr>
+        <p:cNvPr id="1" name=""/>
+        <p:cNvGrpSpPr/>
+        <p:nvPr/>
+      </p:nvGrpSpPr>
+      <p:grpSpPr>
+        <a:xfrm>
+          <a:off x="0" y="0"/>
+          <a:ext cx="0" cy="0"/>
+          <a:chOff x="0" y="0"/>
+          <a:chExt cx="0" cy="0"/>
+        </a:xfrm>
+      </p:grpSpPr>
       <p:pic>
         <p:nvPicPr>
           <p:cNvPr id="5" name="Image 4">
@@ -9590,7 +11153,7 @@
 </p:sld>
 </file>
 
-<file path=ppt/slides/slide11.xml><?xml version="1.0" encoding="utf-8"?>
+<file path=ppt/slides/slide12.xml><?xml version="1.0" encoding="utf-8"?>
 <p:sld xmlns:a="http://schemas.openxmlformats.org/drawingml/2006/main" xmlns:r="http://schemas.openxmlformats.org/officeDocument/2006/relationships" xmlns:p="http://schemas.openxmlformats.org/presentationml/2006/main">
   <p:cSld>
     <p:spTree>
@@ -10260,7 +11823,7 @@
 </p:sld>
 </file>
 
-<file path=ppt/slides/slide12.xml><?xml version="1.0" encoding="utf-8"?>
+<file path=ppt/slides/slide13.xml><?xml version="1.0" encoding="utf-8"?>
 <p:sld xmlns:a="http://schemas.openxmlformats.org/drawingml/2006/main" xmlns:r="http://schemas.openxmlformats.org/officeDocument/2006/relationships" xmlns:p="http://schemas.openxmlformats.org/presentationml/2006/main">
   <p:cSld>
     <p:spTree>
@@ -10486,7 +12049,7 @@
 </p:sld>
 </file>
 
-<file path=ppt/slides/slide13.xml><?xml version="1.0" encoding="utf-8"?>
+<file path=ppt/slides/slide14.xml><?xml version="1.0" encoding="utf-8"?>
 <p:sld xmlns:a="http://schemas.openxmlformats.org/drawingml/2006/main" xmlns:r="http://schemas.openxmlformats.org/officeDocument/2006/relationships" xmlns:p="http://schemas.openxmlformats.org/presentationml/2006/main">
   <p:cSld>
     <p:spTree>
@@ -10707,7 +12270,7 @@
 </p:sld>
 </file>
 
-<file path=ppt/slides/slide14.xml><?xml version="1.0" encoding="utf-8"?>
+<file path=ppt/slides/slide15.xml><?xml version="1.0" encoding="utf-8"?>
 <p:sld xmlns:a="http://schemas.openxmlformats.org/drawingml/2006/main" xmlns:r="http://schemas.openxmlformats.org/officeDocument/2006/relationships" xmlns:p="http://schemas.openxmlformats.org/presentationml/2006/main">
   <p:cSld>
     <p:spTree>
@@ -11130,7 +12693,7 @@
 </p:sld>
 </file>
 
-<file path=ppt/slides/slide15.xml><?xml version="1.0" encoding="utf-8"?>
+<file path=ppt/slides/slide16.xml><?xml version="1.0" encoding="utf-8"?>
 <p:sld xmlns:a="http://schemas.openxmlformats.org/drawingml/2006/main" xmlns:r="http://schemas.openxmlformats.org/officeDocument/2006/relationships" xmlns:p="http://schemas.openxmlformats.org/presentationml/2006/main">
   <p:cSld>
     <p:spTree>

--- a/graphics/graphics.pptx
+++ b/graphics/graphics.pptx
@@ -131,7 +131,7 @@
             <a:srgbClr val="A4A3A4"/>
           </p15:clr>
         </p15:guide>
-        <p15:guide id="2" pos="3817" userDrawn="1">
+        <p15:guide id="2" pos="1255" userDrawn="1">
           <p15:clr>
             <a:srgbClr val="A4A3A4"/>
           </p15:clr>
@@ -224,7 +224,7 @@
           <a:p>
             <a:fld id="{B8404A9E-F80D-47A3-9ABE-4E375F8C7A58}" type="datetimeFigureOut">
               <a:rPr lang="fr-CA" smtClean="0"/>
-              <a:t>2026-05-03</a:t>
+              <a:t>2026-05-13</a:t>
             </a:fld>
             <a:endParaRPr lang="fr-CA"/>
           </a:p>
@@ -555,6 +555,90 @@
           <a:bodyPr/>
           <a:lstStyle/>
           <a:p>
+            <a:fld id="{1A8904C2-9749-44BA-8BF9-82B317B53FD5}" type="slidenum">
+              <a:rPr lang="fr-CA" smtClean="0"/>
+              <a:t>9</a:t>
+            </a:fld>
+            <a:endParaRPr lang="fr-CA"/>
+          </a:p>
+        </p:txBody>
+      </p:sp>
+    </p:spTree>
+    <p:extLst>
+      <p:ext uri="{BB962C8B-B14F-4D97-AF65-F5344CB8AC3E}">
+        <p14:creationId xmlns:p14="http://schemas.microsoft.com/office/powerpoint/2010/main" val="3188289003"/>
+      </p:ext>
+    </p:extLst>
+  </p:cSld>
+  <p:clrMapOvr>
+    <a:masterClrMapping/>
+  </p:clrMapOvr>
+</p:notes>
+</file>
+
+<file path=ppt/notesSlides/notesSlide2.xml><?xml version="1.0" encoding="utf-8"?>
+<p:notes xmlns:a="http://schemas.openxmlformats.org/drawingml/2006/main" xmlns:r="http://schemas.openxmlformats.org/officeDocument/2006/relationships" xmlns:p="http://schemas.openxmlformats.org/presentationml/2006/main">
+  <p:cSld>
+    <p:spTree>
+      <p:nvGrpSpPr>
+        <p:cNvPr id="1" name=""/>
+        <p:cNvGrpSpPr/>
+        <p:nvPr/>
+      </p:nvGrpSpPr>
+      <p:grpSpPr>
+        <a:xfrm>
+          <a:off x="0" y="0"/>
+          <a:ext cx="0" cy="0"/>
+          <a:chOff x="0" y="0"/>
+          <a:chExt cx="0" cy="0"/>
+        </a:xfrm>
+      </p:grpSpPr>
+      <p:sp>
+        <p:nvSpPr>
+          <p:cNvPr id="2" name="Espace réservé de l'image des diapositives 1"/>
+          <p:cNvSpPr>
+            <a:spLocks noGrp="1" noRot="1" noChangeAspect="1"/>
+          </p:cNvSpPr>
+          <p:nvPr>
+            <p:ph type="sldImg"/>
+          </p:nvPr>
+        </p:nvSpPr>
+        <p:spPr/>
+      </p:sp>
+      <p:sp>
+        <p:nvSpPr>
+          <p:cNvPr id="3" name="Espace réservé des notes 2"/>
+          <p:cNvSpPr>
+            <a:spLocks noGrp="1"/>
+          </p:cNvSpPr>
+          <p:nvPr>
+            <p:ph type="body" idx="1"/>
+          </p:nvPr>
+        </p:nvSpPr>
+        <p:spPr/>
+        <p:txBody>
+          <a:bodyPr/>
+          <a:lstStyle/>
+          <a:p>
+            <a:endParaRPr lang="en-CA" dirty="0"/>
+          </a:p>
+        </p:txBody>
+      </p:sp>
+      <p:sp>
+        <p:nvSpPr>
+          <p:cNvPr id="4" name="Espace réservé du numéro de diapositive 3"/>
+          <p:cNvSpPr>
+            <a:spLocks noGrp="1"/>
+          </p:cNvSpPr>
+          <p:nvPr>
+            <p:ph type="sldNum" sz="quarter" idx="5"/>
+          </p:nvPr>
+        </p:nvSpPr>
+        <p:spPr/>
+        <p:txBody>
+          <a:bodyPr/>
+          <a:lstStyle/>
+          <a:p>
             <a:fld id="{618211CF-4BFB-4EDA-B871-566ED73F112B}" type="slidenum">
               <a:rPr lang="en-CA" smtClean="0"/>
               <a:t>11</a:t>
@@ -725,7 +809,7 @@
           <a:p>
             <a:fld id="{B1B97C2F-ED53-40B2-8245-274A53568F1F}" type="datetimeFigureOut">
               <a:rPr lang="fr-CA" smtClean="0"/>
-              <a:t>2026-05-03</a:t>
+              <a:t>2026-05-13</a:t>
             </a:fld>
             <a:endParaRPr lang="fr-CA"/>
           </a:p>
@@ -925,7 +1009,7 @@
           <a:p>
             <a:fld id="{B1B97C2F-ED53-40B2-8245-274A53568F1F}" type="datetimeFigureOut">
               <a:rPr lang="fr-CA" smtClean="0"/>
-              <a:t>2026-05-03</a:t>
+              <a:t>2026-05-13</a:t>
             </a:fld>
             <a:endParaRPr lang="fr-CA"/>
           </a:p>
@@ -1135,7 +1219,7 @@
           <a:p>
             <a:fld id="{B1B97C2F-ED53-40B2-8245-274A53568F1F}" type="datetimeFigureOut">
               <a:rPr lang="fr-CA" smtClean="0"/>
-              <a:t>2026-05-03</a:t>
+              <a:t>2026-05-13</a:t>
             </a:fld>
             <a:endParaRPr lang="fr-CA"/>
           </a:p>
@@ -1357,7 +1441,7 @@
           <a:p>
             <a:fld id="{3CFA78C3-2C03-4D26-BA08-5201FB292C09}" type="datetimeFigureOut">
               <a:rPr lang="fr-CA" smtClean="0"/>
-              <a:t>2026-05-03</a:t>
+              <a:t>2026-05-13</a:t>
             </a:fld>
             <a:endParaRPr lang="fr-CA"/>
           </a:p>
@@ -1557,7 +1641,7 @@
           <a:p>
             <a:fld id="{3CFA78C3-2C03-4D26-BA08-5201FB292C09}" type="datetimeFigureOut">
               <a:rPr lang="fr-CA" smtClean="0"/>
-              <a:t>2026-05-03</a:t>
+              <a:t>2026-05-13</a:t>
             </a:fld>
             <a:endParaRPr lang="fr-CA"/>
           </a:p>
@@ -1833,7 +1917,7 @@
           <a:p>
             <a:fld id="{3CFA78C3-2C03-4D26-BA08-5201FB292C09}" type="datetimeFigureOut">
               <a:rPr lang="fr-CA" smtClean="0"/>
-              <a:t>2026-05-03</a:t>
+              <a:t>2026-05-13</a:t>
             </a:fld>
             <a:endParaRPr lang="fr-CA"/>
           </a:p>
@@ -2101,7 +2185,7 @@
           <a:p>
             <a:fld id="{3CFA78C3-2C03-4D26-BA08-5201FB292C09}" type="datetimeFigureOut">
               <a:rPr lang="fr-CA" smtClean="0"/>
-              <a:t>2026-05-03</a:t>
+              <a:t>2026-05-13</a:t>
             </a:fld>
             <a:endParaRPr lang="fr-CA"/>
           </a:p>
@@ -2516,7 +2600,7 @@
           <a:p>
             <a:fld id="{3CFA78C3-2C03-4D26-BA08-5201FB292C09}" type="datetimeFigureOut">
               <a:rPr lang="fr-CA" smtClean="0"/>
-              <a:t>2026-05-03</a:t>
+              <a:t>2026-05-13</a:t>
             </a:fld>
             <a:endParaRPr lang="fr-CA"/>
           </a:p>
@@ -2658,7 +2742,7 @@
           <a:p>
             <a:fld id="{3CFA78C3-2C03-4D26-BA08-5201FB292C09}" type="datetimeFigureOut">
               <a:rPr lang="fr-CA" smtClean="0"/>
-              <a:t>2026-05-03</a:t>
+              <a:t>2026-05-13</a:t>
             </a:fld>
             <a:endParaRPr lang="fr-CA"/>
           </a:p>
@@ -2771,7 +2855,7 @@
           <a:p>
             <a:fld id="{3CFA78C3-2C03-4D26-BA08-5201FB292C09}" type="datetimeFigureOut">
               <a:rPr lang="fr-CA" smtClean="0"/>
-              <a:t>2026-05-03</a:t>
+              <a:t>2026-05-13</a:t>
             </a:fld>
             <a:endParaRPr lang="fr-CA"/>
           </a:p>
@@ -3084,7 +3168,7 @@
           <a:p>
             <a:fld id="{3CFA78C3-2C03-4D26-BA08-5201FB292C09}" type="datetimeFigureOut">
               <a:rPr lang="fr-CA" smtClean="0"/>
-              <a:t>2026-05-03</a:t>
+              <a:t>2026-05-13</a:t>
             </a:fld>
             <a:endParaRPr lang="fr-CA"/>
           </a:p>
@@ -3284,7 +3368,7 @@
           <a:p>
             <a:fld id="{B1B97C2F-ED53-40B2-8245-274A53568F1F}" type="datetimeFigureOut">
               <a:rPr lang="fr-CA" smtClean="0"/>
-              <a:t>2026-05-03</a:t>
+              <a:t>2026-05-13</a:t>
             </a:fld>
             <a:endParaRPr lang="fr-CA"/>
           </a:p>
@@ -3573,7 +3657,7 @@
           <a:p>
             <a:fld id="{3CFA78C3-2C03-4D26-BA08-5201FB292C09}" type="datetimeFigureOut">
               <a:rPr lang="fr-CA" smtClean="0"/>
-              <a:t>2026-05-03</a:t>
+              <a:t>2026-05-13</a:t>
             </a:fld>
             <a:endParaRPr lang="fr-CA"/>
           </a:p>
@@ -3773,7 +3857,7 @@
           <a:p>
             <a:fld id="{3CFA78C3-2C03-4D26-BA08-5201FB292C09}" type="datetimeFigureOut">
               <a:rPr lang="fr-CA" smtClean="0"/>
-              <a:t>2026-05-03</a:t>
+              <a:t>2026-05-13</a:t>
             </a:fld>
             <a:endParaRPr lang="fr-CA"/>
           </a:p>
@@ -3983,7 +4067,7 @@
           <a:p>
             <a:fld id="{3CFA78C3-2C03-4D26-BA08-5201FB292C09}" type="datetimeFigureOut">
               <a:rPr lang="fr-CA" smtClean="0"/>
-              <a:t>2026-05-03</a:t>
+              <a:t>2026-05-13</a:t>
             </a:fld>
             <a:endParaRPr lang="fr-CA"/>
           </a:p>
@@ -4259,7 +4343,7 @@
           <a:p>
             <a:fld id="{B1B97C2F-ED53-40B2-8245-274A53568F1F}" type="datetimeFigureOut">
               <a:rPr lang="fr-CA" smtClean="0"/>
-              <a:t>2026-05-03</a:t>
+              <a:t>2026-05-13</a:t>
             </a:fld>
             <a:endParaRPr lang="fr-CA"/>
           </a:p>
@@ -4527,7 +4611,7 @@
           <a:p>
             <a:fld id="{B1B97C2F-ED53-40B2-8245-274A53568F1F}" type="datetimeFigureOut">
               <a:rPr lang="fr-CA" smtClean="0"/>
-              <a:t>2026-05-03</a:t>
+              <a:t>2026-05-13</a:t>
             </a:fld>
             <a:endParaRPr lang="fr-CA"/>
           </a:p>
@@ -4942,7 +5026,7 @@
           <a:p>
             <a:fld id="{B1B97C2F-ED53-40B2-8245-274A53568F1F}" type="datetimeFigureOut">
               <a:rPr lang="fr-CA" smtClean="0"/>
-              <a:t>2026-05-03</a:t>
+              <a:t>2026-05-13</a:t>
             </a:fld>
             <a:endParaRPr lang="fr-CA"/>
           </a:p>
@@ -5084,7 +5168,7 @@
           <a:p>
             <a:fld id="{B1B97C2F-ED53-40B2-8245-274A53568F1F}" type="datetimeFigureOut">
               <a:rPr lang="fr-CA" smtClean="0"/>
-              <a:t>2026-05-03</a:t>
+              <a:t>2026-05-13</a:t>
             </a:fld>
             <a:endParaRPr lang="fr-CA"/>
           </a:p>
@@ -5197,7 +5281,7 @@
           <a:p>
             <a:fld id="{B1B97C2F-ED53-40B2-8245-274A53568F1F}" type="datetimeFigureOut">
               <a:rPr lang="fr-CA" smtClean="0"/>
-              <a:t>2026-05-03</a:t>
+              <a:t>2026-05-13</a:t>
             </a:fld>
             <a:endParaRPr lang="fr-CA"/>
           </a:p>
@@ -5510,7 +5594,7 @@
           <a:p>
             <a:fld id="{B1B97C2F-ED53-40B2-8245-274A53568F1F}" type="datetimeFigureOut">
               <a:rPr lang="fr-CA" smtClean="0"/>
-              <a:t>2026-05-03</a:t>
+              <a:t>2026-05-13</a:t>
             </a:fld>
             <a:endParaRPr lang="fr-CA"/>
           </a:p>
@@ -5799,7 +5883,7 @@
           <a:p>
             <a:fld id="{B1B97C2F-ED53-40B2-8245-274A53568F1F}" type="datetimeFigureOut">
               <a:rPr lang="fr-CA" smtClean="0"/>
-              <a:t>2026-05-03</a:t>
+              <a:t>2026-05-13</a:t>
             </a:fld>
             <a:endParaRPr lang="fr-CA"/>
           </a:p>
@@ -6042,7 +6126,7 @@
           <a:p>
             <a:fld id="{B1B97C2F-ED53-40B2-8245-274A53568F1F}" type="datetimeFigureOut">
               <a:rPr lang="fr-CA" smtClean="0"/>
-              <a:t>2026-05-03</a:t>
+              <a:t>2026-05-13</a:t>
             </a:fld>
             <a:endParaRPr lang="fr-CA"/>
           </a:p>
@@ -6612,7 +6696,7 @@
           <a:p>
             <a:fld id="{3CFA78C3-2C03-4D26-BA08-5201FB292C09}" type="datetimeFigureOut">
               <a:rPr lang="fr-CA" smtClean="0"/>
-              <a:t>2026-05-03</a:t>
+              <a:t>2026-05-13</a:t>
             </a:fld>
             <a:endParaRPr lang="fr-CA"/>
           </a:p>
@@ -8531,8 +8615,8 @@
         </p:nvSpPr>
         <p:spPr>
           <a:xfrm>
-            <a:off x="1720630" y="306943"/>
-            <a:ext cx="136208" cy="1087855"/>
+            <a:off x="2006380" y="559355"/>
+            <a:ext cx="127403" cy="1087855"/>
           </a:xfrm>
           <a:prstGeom prst="roundRect">
             <a:avLst>
@@ -8585,7 +8669,7 @@
         </p:nvSpPr>
         <p:spPr>
           <a:xfrm>
-            <a:off x="1720629" y="1394798"/>
+            <a:off x="2006379" y="1647210"/>
             <a:ext cx="127405" cy="618481"/>
           </a:xfrm>
           <a:prstGeom prst="roundRect">
@@ -8639,7 +8723,7 @@
         </p:nvSpPr>
         <p:spPr>
           <a:xfrm>
-            <a:off x="1720628" y="2013279"/>
+            <a:off x="2006378" y="2265691"/>
             <a:ext cx="127405" cy="2678227"/>
           </a:xfrm>
           <a:prstGeom prst="roundRect">
@@ -8693,8 +8777,8 @@
         </p:nvSpPr>
         <p:spPr>
           <a:xfrm>
-            <a:off x="782116" y="348568"/>
-            <a:ext cx="899578" cy="1323927"/>
+            <a:off x="1438992" y="600980"/>
+            <a:ext cx="528452" cy="4352617"/>
           </a:xfrm>
           <a:prstGeom prst="roundRect">
             <a:avLst>
@@ -8747,8 +8831,8 @@
         </p:nvSpPr>
         <p:spPr>
           <a:xfrm>
-            <a:off x="803684" y="1661670"/>
-            <a:ext cx="899578" cy="3029836"/>
+            <a:off x="1442293" y="1914082"/>
+            <a:ext cx="546719" cy="3029836"/>
           </a:xfrm>
           <a:prstGeom prst="roundRect">
             <a:avLst>
@@ -8756,7 +8840,10 @@
             </a:avLst>
           </a:prstGeom>
           <a:solidFill>
-            <a:srgbClr val="ED7D31"/>
+            <a:schemeClr val="accent1">
+              <a:lumMod val="60000"/>
+              <a:lumOff val="40000"/>
+            </a:schemeClr>
           </a:solidFill>
           <a:ln w="76200">
             <a:noFill/>
@@ -8803,15 +8890,15 @@
         </p:nvCxnSpPr>
         <p:spPr>
           <a:xfrm>
-            <a:off x="803684" y="1394798"/>
-            <a:ext cx="1291554" cy="0"/>
+            <a:off x="1606550" y="1647210"/>
+            <a:ext cx="385763" cy="0"/>
           </a:xfrm>
           <a:prstGeom prst="line">
             <a:avLst/>
           </a:prstGeom>
           <a:ln w="57150">
             <a:solidFill>
-              <a:srgbClr val="434343"/>
+              <a:srgbClr val="ED7D31"/>
             </a:solidFill>
           </a:ln>
         </p:spPr>
@@ -8846,15 +8933,15 @@
         </p:nvCxnSpPr>
         <p:spPr>
           <a:xfrm>
-            <a:off x="782409" y="2273178"/>
+            <a:off x="1729863" y="2499106"/>
             <a:ext cx="258856" cy="0"/>
           </a:xfrm>
           <a:prstGeom prst="line">
             <a:avLst/>
           </a:prstGeom>
-          <a:ln w="57150">
+          <a:ln w="19050">
             <a:solidFill>
-              <a:srgbClr val="434343"/>
+              <a:srgbClr val="ED7D31"/>
             </a:solidFill>
           </a:ln>
         </p:spPr>
@@ -8889,15 +8976,15 @@
         </p:nvCxnSpPr>
         <p:spPr>
           <a:xfrm>
-            <a:off x="782409" y="2035688"/>
+            <a:off x="1729863" y="2261616"/>
             <a:ext cx="258856" cy="0"/>
           </a:xfrm>
           <a:prstGeom prst="line">
             <a:avLst/>
           </a:prstGeom>
-          <a:ln w="57150">
+          <a:ln w="19050">
             <a:solidFill>
-              <a:srgbClr val="434343"/>
+              <a:srgbClr val="ED7D31"/>
             </a:solidFill>
           </a:ln>
         </p:spPr>
@@ -8932,15 +9019,15 @@
         </p:nvCxnSpPr>
         <p:spPr>
           <a:xfrm>
-            <a:off x="782409" y="1814231"/>
+            <a:off x="1729863" y="2040159"/>
             <a:ext cx="258856" cy="0"/>
           </a:xfrm>
           <a:prstGeom prst="line">
             <a:avLst/>
           </a:prstGeom>
-          <a:ln w="57150">
+          <a:ln w="19050">
             <a:solidFill>
-              <a:srgbClr val="434343"/>
+              <a:srgbClr val="ED7D31"/>
             </a:solidFill>
           </a:ln>
         </p:spPr>
@@ -8975,15 +9062,15 @@
         </p:nvCxnSpPr>
         <p:spPr>
           <a:xfrm>
-            <a:off x="782409" y="1603094"/>
+            <a:off x="1729863" y="1829022"/>
             <a:ext cx="258856" cy="0"/>
           </a:xfrm>
           <a:prstGeom prst="line">
             <a:avLst/>
           </a:prstGeom>
-          <a:ln w="57150">
+          <a:ln w="19050">
             <a:solidFill>
-              <a:srgbClr val="434343"/>
+              <a:srgbClr val="ED7D31"/>
             </a:solidFill>
           </a:ln>
         </p:spPr>
@@ -9013,20 +9100,21 @@
           </p:cNvPr>
           <p:cNvCxnSpPr>
             <a:cxnSpLocks/>
+            <a:endCxn id="36" idx="3"/>
           </p:cNvCxnSpPr>
           <p:nvPr/>
         </p:nvCxnSpPr>
         <p:spPr>
           <a:xfrm>
-            <a:off x="803684" y="2510668"/>
-            <a:ext cx="1291554" cy="0"/>
+            <a:off x="1606550" y="2760021"/>
+            <a:ext cx="382462" cy="0"/>
           </a:xfrm>
           <a:prstGeom prst="line">
             <a:avLst/>
           </a:prstGeom>
           <a:ln w="57150">
             <a:solidFill>
-              <a:srgbClr val="434343"/>
+              <a:srgbClr val="ED7D31"/>
             </a:solidFill>
           </a:ln>
         </p:spPr>
@@ -9061,15 +9149,15 @@
         </p:nvCxnSpPr>
         <p:spPr>
           <a:xfrm>
-            <a:off x="782409" y="3389048"/>
+            <a:off x="1729863" y="3614976"/>
             <a:ext cx="258856" cy="0"/>
           </a:xfrm>
           <a:prstGeom prst="line">
             <a:avLst/>
           </a:prstGeom>
-          <a:ln w="57150">
+          <a:ln w="19050">
             <a:solidFill>
-              <a:srgbClr val="434343"/>
+              <a:srgbClr val="ED7D31"/>
             </a:solidFill>
           </a:ln>
         </p:spPr>
@@ -9104,15 +9192,15 @@
         </p:nvCxnSpPr>
         <p:spPr>
           <a:xfrm>
-            <a:off x="782409" y="3151558"/>
+            <a:off x="1729863" y="3377486"/>
             <a:ext cx="258856" cy="0"/>
           </a:xfrm>
           <a:prstGeom prst="line">
             <a:avLst/>
           </a:prstGeom>
-          <a:ln w="57150">
+          <a:ln w="19050">
             <a:solidFill>
-              <a:srgbClr val="434343"/>
+              <a:srgbClr val="ED7D31"/>
             </a:solidFill>
           </a:ln>
         </p:spPr>
@@ -9147,15 +9235,15 @@
         </p:nvCxnSpPr>
         <p:spPr>
           <a:xfrm>
-            <a:off x="782409" y="2930101"/>
+            <a:off x="1729863" y="3156029"/>
             <a:ext cx="258856" cy="0"/>
           </a:xfrm>
           <a:prstGeom prst="line">
             <a:avLst/>
           </a:prstGeom>
-          <a:ln w="57150">
+          <a:ln w="19050">
             <a:solidFill>
-              <a:srgbClr val="434343"/>
+              <a:srgbClr val="ED7D31"/>
             </a:solidFill>
           </a:ln>
         </p:spPr>
@@ -9190,15 +9278,15 @@
         </p:nvCxnSpPr>
         <p:spPr>
           <a:xfrm>
-            <a:off x="782409" y="2718964"/>
+            <a:off x="1729863" y="2944892"/>
             <a:ext cx="258856" cy="0"/>
           </a:xfrm>
           <a:prstGeom prst="line">
             <a:avLst/>
           </a:prstGeom>
-          <a:ln w="57150">
+          <a:ln w="19050">
             <a:solidFill>
-              <a:srgbClr val="434343"/>
+              <a:srgbClr val="ED7D31"/>
             </a:solidFill>
           </a:ln>
         </p:spPr>
@@ -9233,15 +9321,15 @@
         </p:nvCxnSpPr>
         <p:spPr>
           <a:xfrm>
-            <a:off x="782409" y="3626431"/>
-            <a:ext cx="1308194" cy="0"/>
+            <a:off x="1606550" y="3878843"/>
+            <a:ext cx="382462" cy="0"/>
           </a:xfrm>
           <a:prstGeom prst="line">
             <a:avLst/>
           </a:prstGeom>
           <a:ln w="57150">
             <a:solidFill>
-              <a:srgbClr val="434343"/>
+              <a:srgbClr val="ED7D31"/>
             </a:solidFill>
           </a:ln>
         </p:spPr>
@@ -9276,15 +9364,15 @@
         </p:nvCxnSpPr>
         <p:spPr>
           <a:xfrm>
-            <a:off x="761134" y="4504811"/>
+            <a:off x="1708588" y="4730739"/>
             <a:ext cx="258856" cy="0"/>
           </a:xfrm>
           <a:prstGeom prst="line">
             <a:avLst/>
           </a:prstGeom>
-          <a:ln w="57150">
+          <a:ln w="19050">
             <a:solidFill>
-              <a:srgbClr val="434343"/>
+              <a:srgbClr val="ED7D31"/>
             </a:solidFill>
           </a:ln>
         </p:spPr>
@@ -9319,15 +9407,15 @@
         </p:nvCxnSpPr>
         <p:spPr>
           <a:xfrm>
-            <a:off x="761134" y="4267321"/>
+            <a:off x="1708588" y="4493249"/>
             <a:ext cx="258856" cy="0"/>
           </a:xfrm>
           <a:prstGeom prst="line">
             <a:avLst/>
           </a:prstGeom>
-          <a:ln w="57150">
+          <a:ln w="19050">
             <a:solidFill>
-              <a:srgbClr val="434343"/>
+              <a:srgbClr val="ED7D31"/>
             </a:solidFill>
           </a:ln>
         </p:spPr>
@@ -9362,15 +9450,15 @@
         </p:nvCxnSpPr>
         <p:spPr>
           <a:xfrm>
-            <a:off x="761134" y="4045864"/>
+            <a:off x="1708588" y="4271792"/>
             <a:ext cx="258856" cy="0"/>
           </a:xfrm>
           <a:prstGeom prst="line">
             <a:avLst/>
           </a:prstGeom>
-          <a:ln w="57150">
+          <a:ln w="19050">
             <a:solidFill>
-              <a:srgbClr val="434343"/>
+              <a:srgbClr val="ED7D31"/>
             </a:solidFill>
           </a:ln>
         </p:spPr>
@@ -9405,15 +9493,15 @@
         </p:nvCxnSpPr>
         <p:spPr>
           <a:xfrm>
-            <a:off x="761134" y="3834727"/>
+            <a:off x="1708588" y="4060655"/>
             <a:ext cx="258856" cy="0"/>
           </a:xfrm>
           <a:prstGeom prst="line">
             <a:avLst/>
           </a:prstGeom>
-          <a:ln w="57150">
+          <a:ln w="19050">
             <a:solidFill>
-              <a:srgbClr val="434343"/>
+              <a:srgbClr val="ED7D31"/>
             </a:solidFill>
           </a:ln>
         </p:spPr>
@@ -9448,8 +9536,8 @@
         </p:nvCxnSpPr>
         <p:spPr>
           <a:xfrm>
-            <a:off x="803683" y="4683918"/>
-            <a:ext cx="1286919" cy="0"/>
+            <a:off x="1445594" y="4936330"/>
+            <a:ext cx="930758" cy="0"/>
           </a:xfrm>
           <a:prstGeom prst="line">
             <a:avLst/>
@@ -9491,8 +9579,8 @@
         </p:nvCxnSpPr>
         <p:spPr>
           <a:xfrm>
-            <a:off x="761134" y="323713"/>
-            <a:ext cx="1334104" cy="0"/>
+            <a:off x="1988719" y="576125"/>
+            <a:ext cx="392269" cy="0"/>
           </a:xfrm>
           <a:prstGeom prst="line">
             <a:avLst/>
@@ -9534,15 +9622,15 @@
         </p:nvCxnSpPr>
         <p:spPr>
           <a:xfrm>
-            <a:off x="782409" y="1202096"/>
+            <a:off x="1729863" y="1428024"/>
             <a:ext cx="258856" cy="0"/>
           </a:xfrm>
           <a:prstGeom prst="line">
             <a:avLst/>
           </a:prstGeom>
-          <a:ln w="57150">
+          <a:ln w="19050">
             <a:solidFill>
-              <a:srgbClr val="434343"/>
+              <a:srgbClr val="ED7D31"/>
             </a:solidFill>
           </a:ln>
         </p:spPr>
@@ -9577,15 +9665,15 @@
         </p:nvCxnSpPr>
         <p:spPr>
           <a:xfrm>
-            <a:off x="782409" y="964606"/>
+            <a:off x="1729863" y="1190534"/>
             <a:ext cx="258856" cy="0"/>
           </a:xfrm>
           <a:prstGeom prst="line">
             <a:avLst/>
           </a:prstGeom>
-          <a:ln w="57150">
+          <a:ln w="19050">
             <a:solidFill>
-              <a:srgbClr val="434343"/>
+              <a:srgbClr val="ED7D31"/>
             </a:solidFill>
           </a:ln>
         </p:spPr>
@@ -9620,15 +9708,15 @@
         </p:nvCxnSpPr>
         <p:spPr>
           <a:xfrm>
-            <a:off x="782409" y="743149"/>
+            <a:off x="1729863" y="969077"/>
             <a:ext cx="258856" cy="0"/>
           </a:xfrm>
           <a:prstGeom prst="line">
             <a:avLst/>
           </a:prstGeom>
-          <a:ln w="57150">
+          <a:ln w="19050">
             <a:solidFill>
-              <a:srgbClr val="434343"/>
+              <a:srgbClr val="ED7D31"/>
             </a:solidFill>
           </a:ln>
         </p:spPr>
@@ -9663,15 +9751,15 @@
         </p:nvCxnSpPr>
         <p:spPr>
           <a:xfrm>
-            <a:off x="782409" y="532012"/>
+            <a:off x="1729863" y="757940"/>
             <a:ext cx="258856" cy="0"/>
           </a:xfrm>
           <a:prstGeom prst="line">
             <a:avLst/>
           </a:prstGeom>
-          <a:ln w="57150">
+          <a:ln w="19050">
             <a:solidFill>
-              <a:srgbClr val="434343"/>
+              <a:srgbClr val="ED7D31"/>
             </a:solidFill>
           </a:ln>
         </p:spPr>
@@ -9704,7 +9792,7 @@
         </p:nvSpPr>
         <p:spPr>
           <a:xfrm>
-            <a:off x="2080823" y="141300"/>
+            <a:off x="2366573" y="393712"/>
             <a:ext cx="776653" cy="400110"/>
           </a:xfrm>
           <a:prstGeom prst="rect">
@@ -9742,7 +9830,7 @@
         </p:nvSpPr>
         <p:spPr>
           <a:xfrm>
-            <a:off x="2053552" y="3440606"/>
+            <a:off x="2339302" y="3693018"/>
             <a:ext cx="755651" cy="369332"/>
           </a:xfrm>
           <a:prstGeom prst="rect">
@@ -9784,7 +9872,7 @@
         </p:nvSpPr>
         <p:spPr>
           <a:xfrm>
-            <a:off x="2090603" y="4496304"/>
+            <a:off x="2376353" y="4748716"/>
             <a:ext cx="654333" cy="369332"/>
           </a:xfrm>
           <a:prstGeom prst="rect">
@@ -9826,7 +9914,7 @@
         </p:nvSpPr>
         <p:spPr>
           <a:xfrm>
-            <a:off x="2090603" y="2328727"/>
+            <a:off x="2376353" y="2581139"/>
             <a:ext cx="574849" cy="369332"/>
           </a:xfrm>
           <a:prstGeom prst="rect">
@@ -9868,7 +9956,7 @@
         </p:nvSpPr>
         <p:spPr>
           <a:xfrm>
-            <a:off x="2090602" y="1195088"/>
+            <a:off x="2376352" y="1447500"/>
             <a:ext cx="574849" cy="369332"/>
           </a:xfrm>
           <a:prstGeom prst="rect">
@@ -9908,15 +9996,15 @@
         </p:nvCxnSpPr>
         <p:spPr>
           <a:xfrm>
-            <a:off x="802114" y="1664909"/>
-            <a:ext cx="901148" cy="0"/>
+            <a:off x="1442293" y="1914082"/>
+            <a:ext cx="546719" cy="3239"/>
           </a:xfrm>
           <a:prstGeom prst="line">
             <a:avLst/>
           </a:prstGeom>
-          <a:ln w="38100">
+          <a:ln w="19050">
             <a:solidFill>
-              <a:srgbClr val="64310F"/>
+              <a:schemeClr val="accent1"/>
             </a:solidFill>
           </a:ln>
         </p:spPr>
@@ -9949,8 +10037,8 @@
         </p:nvSpPr>
         <p:spPr>
           <a:xfrm>
-            <a:off x="791213" y="331300"/>
-            <a:ext cx="912049" cy="4352618"/>
+            <a:off x="1445594" y="583712"/>
+            <a:ext cx="543418" cy="4352618"/>
           </a:xfrm>
           <a:prstGeom prst="roundRect">
             <a:avLst>
@@ -10003,7 +10091,7 @@
         </p:nvSpPr>
         <p:spPr>
           <a:xfrm rot="16200000">
-            <a:off x="1709247" y="1573104"/>
+            <a:off x="2018533" y="1848308"/>
             <a:ext cx="246528" cy="177132"/>
           </a:xfrm>
           <a:prstGeom prst="triangle">
@@ -10038,6 +10126,683 @@
           </a:p>
         </p:txBody>
       </p:sp>
+      <p:cxnSp>
+        <p:nvCxnSpPr>
+          <p:cNvPr id="6" name="Connecteur droit 5">
+            <a:extLst>
+              <a:ext uri="{FF2B5EF4-FFF2-40B4-BE49-F238E27FC236}">
+                <a16:creationId xmlns:a16="http://schemas.microsoft.com/office/drawing/2014/main" id="{C1057164-E394-57EE-8248-9C16BC1B55D1}"/>
+              </a:ext>
+            </a:extLst>
+          </p:cNvPr>
+          <p:cNvCxnSpPr>
+            <a:cxnSpLocks/>
+          </p:cNvCxnSpPr>
+          <p:nvPr/>
+        </p:nvCxnSpPr>
+        <p:spPr>
+          <a:xfrm>
+            <a:off x="2006378" y="3878843"/>
+            <a:ext cx="384039" cy="0"/>
+          </a:xfrm>
+          <a:prstGeom prst="line">
+            <a:avLst/>
+          </a:prstGeom>
+          <a:ln w="57150">
+            <a:solidFill>
+              <a:srgbClr val="434343"/>
+            </a:solidFill>
+          </a:ln>
+        </p:spPr>
+        <p:style>
+          <a:lnRef idx="1">
+            <a:schemeClr val="accent1"/>
+          </a:lnRef>
+          <a:fillRef idx="0">
+            <a:schemeClr val="accent1"/>
+          </a:fillRef>
+          <a:effectRef idx="0">
+            <a:schemeClr val="accent1"/>
+          </a:effectRef>
+          <a:fontRef idx="minor">
+            <a:schemeClr val="tx1"/>
+          </a:fontRef>
+        </p:style>
+      </p:cxnSp>
+      <p:cxnSp>
+        <p:nvCxnSpPr>
+          <p:cNvPr id="9" name="Connecteur droit 8">
+            <a:extLst>
+              <a:ext uri="{FF2B5EF4-FFF2-40B4-BE49-F238E27FC236}">
+                <a16:creationId xmlns:a16="http://schemas.microsoft.com/office/drawing/2014/main" id="{EEF7FCA6-8251-10B8-625C-5C40B542FABF}"/>
+              </a:ext>
+            </a:extLst>
+          </p:cNvPr>
+          <p:cNvCxnSpPr>
+            <a:cxnSpLocks/>
+          </p:cNvCxnSpPr>
+          <p:nvPr/>
+        </p:nvCxnSpPr>
+        <p:spPr>
+          <a:xfrm>
+            <a:off x="1967444" y="2760021"/>
+            <a:ext cx="384039" cy="0"/>
+          </a:xfrm>
+          <a:prstGeom prst="line">
+            <a:avLst/>
+          </a:prstGeom>
+          <a:ln w="57150">
+            <a:solidFill>
+              <a:srgbClr val="434343"/>
+            </a:solidFill>
+          </a:ln>
+        </p:spPr>
+        <p:style>
+          <a:lnRef idx="1">
+            <a:schemeClr val="accent1"/>
+          </a:lnRef>
+          <a:fillRef idx="0">
+            <a:schemeClr val="accent1"/>
+          </a:fillRef>
+          <a:effectRef idx="0">
+            <a:schemeClr val="accent1"/>
+          </a:effectRef>
+          <a:fontRef idx="minor">
+            <a:schemeClr val="tx1"/>
+          </a:fontRef>
+        </p:style>
+      </p:cxnSp>
+      <p:cxnSp>
+        <p:nvCxnSpPr>
+          <p:cNvPr id="10" name="Connecteur droit 9">
+            <a:extLst>
+              <a:ext uri="{FF2B5EF4-FFF2-40B4-BE49-F238E27FC236}">
+                <a16:creationId xmlns:a16="http://schemas.microsoft.com/office/drawing/2014/main" id="{C07BED7D-80D0-B394-E4B4-E978A86F8608}"/>
+              </a:ext>
+            </a:extLst>
+          </p:cNvPr>
+          <p:cNvCxnSpPr>
+            <a:cxnSpLocks/>
+          </p:cNvCxnSpPr>
+          <p:nvPr/>
+        </p:nvCxnSpPr>
+        <p:spPr>
+          <a:xfrm>
+            <a:off x="2006378" y="1647210"/>
+            <a:ext cx="384039" cy="0"/>
+          </a:xfrm>
+          <a:prstGeom prst="line">
+            <a:avLst/>
+          </a:prstGeom>
+          <a:ln w="57150">
+            <a:solidFill>
+              <a:srgbClr val="434343"/>
+            </a:solidFill>
+          </a:ln>
+        </p:spPr>
+        <p:style>
+          <a:lnRef idx="1">
+            <a:schemeClr val="accent1"/>
+          </a:lnRef>
+          <a:fillRef idx="0">
+            <a:schemeClr val="accent1"/>
+          </a:fillRef>
+          <a:effectRef idx="0">
+            <a:schemeClr val="accent1"/>
+          </a:effectRef>
+          <a:fontRef idx="minor">
+            <a:schemeClr val="tx1"/>
+          </a:fontRef>
+        </p:style>
+      </p:cxnSp>
+      <p:grpSp>
+        <p:nvGrpSpPr>
+          <p:cNvPr id="35" name="Groupe 34">
+            <a:extLst>
+              <a:ext uri="{FF2B5EF4-FFF2-40B4-BE49-F238E27FC236}">
+                <a16:creationId xmlns:a16="http://schemas.microsoft.com/office/drawing/2014/main" id="{135BB72A-4BE4-674F-76C6-83ECE001D03B}"/>
+              </a:ext>
+            </a:extLst>
+          </p:cNvPr>
+          <p:cNvGrpSpPr/>
+          <p:nvPr/>
+        </p:nvGrpSpPr>
+        <p:grpSpPr>
+          <a:xfrm>
+            <a:off x="3781311" y="349326"/>
+            <a:ext cx="1055955" cy="2559054"/>
+            <a:chOff x="5451361" y="1788371"/>
+            <a:chExt cx="1055955" cy="2559054"/>
+          </a:xfrm>
+        </p:grpSpPr>
+        <p:sp>
+          <p:nvSpPr>
+            <p:cNvPr id="4" name="Rectangle : coins arrondis 3">
+              <a:extLst>
+                <a:ext uri="{FF2B5EF4-FFF2-40B4-BE49-F238E27FC236}">
+                  <a16:creationId xmlns:a16="http://schemas.microsoft.com/office/drawing/2014/main" id="{991CCEB5-75C3-E745-ED22-C1715AC0ACA1}"/>
+                </a:ext>
+              </a:extLst>
+            </p:cNvPr>
+            <p:cNvSpPr/>
+            <p:nvPr/>
+          </p:nvSpPr>
+          <p:spPr>
+            <a:xfrm>
+              <a:off x="5523347" y="1988426"/>
+              <a:ext cx="102285" cy="2158918"/>
+            </a:xfrm>
+            <a:prstGeom prst="roundRect">
+              <a:avLst>
+                <a:gd name="adj" fmla="val 0"/>
+              </a:avLst>
+            </a:prstGeom>
+            <a:solidFill>
+              <a:srgbClr val="A5A5A5"/>
+            </a:solidFill>
+            <a:ln w="38100">
+              <a:solidFill>
+                <a:srgbClr val="434343"/>
+              </a:solidFill>
+            </a:ln>
+          </p:spPr>
+          <p:style>
+            <a:lnRef idx="2">
+              <a:schemeClr val="accent1">
+                <a:shade val="15000"/>
+              </a:schemeClr>
+            </a:lnRef>
+            <a:fillRef idx="1">
+              <a:schemeClr val="accent1"/>
+            </a:fillRef>
+            <a:effectRef idx="0">
+              <a:schemeClr val="accent1"/>
+            </a:effectRef>
+            <a:fontRef idx="minor">
+              <a:schemeClr val="lt1"/>
+            </a:fontRef>
+          </p:style>
+          <p:txBody>
+            <a:bodyPr rtlCol="0" anchor="ctr"/>
+            <a:lstStyle/>
+            <a:p>
+              <a:pPr algn="ctr"/>
+              <a:endParaRPr lang="en-CA"/>
+            </a:p>
+          </p:txBody>
+        </p:sp>
+        <p:cxnSp>
+          <p:nvCxnSpPr>
+            <p:cNvPr id="13" name="Connecteur droit 12">
+              <a:extLst>
+                <a:ext uri="{FF2B5EF4-FFF2-40B4-BE49-F238E27FC236}">
+                  <a16:creationId xmlns:a16="http://schemas.microsoft.com/office/drawing/2014/main" id="{BE52F32F-3292-642F-1518-A2707D07B600}"/>
+                </a:ext>
+              </a:extLst>
+            </p:cNvPr>
+            <p:cNvCxnSpPr>
+              <a:cxnSpLocks/>
+            </p:cNvCxnSpPr>
+            <p:nvPr/>
+          </p:nvCxnSpPr>
+          <p:spPr>
+            <a:xfrm flipH="1">
+              <a:off x="5625632" y="4147345"/>
+              <a:ext cx="127468" cy="0"/>
+            </a:xfrm>
+            <a:prstGeom prst="line">
+              <a:avLst/>
+            </a:prstGeom>
+            <a:ln w="38100">
+              <a:solidFill>
+                <a:srgbClr val="434343"/>
+              </a:solidFill>
+            </a:ln>
+          </p:spPr>
+          <p:style>
+            <a:lnRef idx="1">
+              <a:schemeClr val="accent1"/>
+            </a:lnRef>
+            <a:fillRef idx="0">
+              <a:schemeClr val="accent1"/>
+            </a:fillRef>
+            <a:effectRef idx="0">
+              <a:schemeClr val="accent1"/>
+            </a:effectRef>
+            <a:fontRef idx="minor">
+              <a:schemeClr val="tx1"/>
+            </a:fontRef>
+          </p:style>
+        </p:cxnSp>
+        <p:sp>
+          <p:nvSpPr>
+            <p:cNvPr id="17" name="Rectangle 16">
+              <a:extLst>
+                <a:ext uri="{FF2B5EF4-FFF2-40B4-BE49-F238E27FC236}">
+                  <a16:creationId xmlns:a16="http://schemas.microsoft.com/office/drawing/2014/main" id="{DEBB98F9-B4F4-CD78-52CA-9AD1613F2500}"/>
+                </a:ext>
+              </a:extLst>
+            </p:cNvPr>
+            <p:cNvSpPr/>
+            <p:nvPr/>
+          </p:nvSpPr>
+          <p:spPr>
+            <a:xfrm>
+              <a:off x="5451361" y="2774130"/>
+              <a:ext cx="237287" cy="118540"/>
+            </a:xfrm>
+            <a:prstGeom prst="rect">
+              <a:avLst/>
+            </a:prstGeom>
+            <a:solidFill>
+              <a:srgbClr val="ED7D31"/>
+            </a:solidFill>
+            <a:ln w="44450">
+              <a:solidFill>
+                <a:srgbClr val="64310F"/>
+              </a:solidFill>
+            </a:ln>
+          </p:spPr>
+          <p:style>
+            <a:lnRef idx="2">
+              <a:schemeClr val="accent1">
+                <a:shade val="15000"/>
+              </a:schemeClr>
+            </a:lnRef>
+            <a:fillRef idx="1">
+              <a:schemeClr val="accent1"/>
+            </a:fillRef>
+            <a:effectRef idx="0">
+              <a:schemeClr val="accent1"/>
+            </a:effectRef>
+            <a:fontRef idx="minor">
+              <a:schemeClr val="lt1"/>
+            </a:fontRef>
+          </p:style>
+          <p:txBody>
+            <a:bodyPr rtlCol="0" anchor="ctr"/>
+            <a:lstStyle/>
+            <a:p>
+              <a:pPr algn="ctr"/>
+              <a:endParaRPr lang="en-CA"/>
+            </a:p>
+          </p:txBody>
+        </p:sp>
+        <p:sp>
+          <p:nvSpPr>
+            <p:cNvPr id="18" name="ZoneTexte 17">
+              <a:extLst>
+                <a:ext uri="{FF2B5EF4-FFF2-40B4-BE49-F238E27FC236}">
+                  <a16:creationId xmlns:a16="http://schemas.microsoft.com/office/drawing/2014/main" id="{E3B52C90-775F-A330-5C8B-74902AE9B146}"/>
+                </a:ext>
+              </a:extLst>
+            </p:cNvPr>
+            <p:cNvSpPr txBox="1"/>
+            <p:nvPr/>
+          </p:nvSpPr>
+          <p:spPr>
+            <a:xfrm>
+              <a:off x="5725452" y="1788371"/>
+              <a:ext cx="709628" cy="400110"/>
+            </a:xfrm>
+            <a:prstGeom prst="rect">
+              <a:avLst/>
+            </a:prstGeom>
+            <a:noFill/>
+          </p:spPr>
+          <p:txBody>
+            <a:bodyPr wrap="square" rtlCol="0" anchor="ctr">
+              <a:spAutoFit/>
+            </a:bodyPr>
+            <a:lstStyle/>
+            <a:p>
+              <a:r>
+                <a:rPr lang="en-CA" sz="2000" b="1" dirty="0">
+                  <a:latin typeface="Courier New" panose="02070309020205020404" pitchFamily="49" charset="0"/>
+                  <a:cs typeface="Courier New" panose="02070309020205020404" pitchFamily="49" charset="0"/>
+                </a:rPr>
+                <a:t>100</a:t>
+              </a:r>
+            </a:p>
+          </p:txBody>
+        </p:sp>
+        <p:sp>
+          <p:nvSpPr>
+            <p:cNvPr id="19" name="ZoneTexte 18">
+              <a:extLst>
+                <a:ext uri="{FF2B5EF4-FFF2-40B4-BE49-F238E27FC236}">
+                  <a16:creationId xmlns:a16="http://schemas.microsoft.com/office/drawing/2014/main" id="{4B76684A-8C2E-2EEE-34DF-D9DEE845752F}"/>
+                </a:ext>
+              </a:extLst>
+            </p:cNvPr>
+            <p:cNvSpPr txBox="1"/>
+            <p:nvPr/>
+          </p:nvSpPr>
+          <p:spPr>
+            <a:xfrm>
+              <a:off x="5751665" y="3435113"/>
+              <a:ext cx="755651" cy="369332"/>
+            </a:xfrm>
+            <a:prstGeom prst="rect">
+              <a:avLst/>
+            </a:prstGeom>
+            <a:noFill/>
+          </p:spPr>
+          <p:txBody>
+            <a:bodyPr wrap="square" anchor="ctr">
+              <a:spAutoFit/>
+            </a:bodyPr>
+            <a:lstStyle/>
+            <a:p>
+              <a:r>
+                <a:rPr lang="en-CA" b="1" dirty="0">
+                  <a:latin typeface="Courier New" panose="02070309020205020404" pitchFamily="49" charset="0"/>
+                  <a:cs typeface="Courier New" panose="02070309020205020404" pitchFamily="49" charset="0"/>
+                </a:rPr>
+                <a:t>25</a:t>
+              </a:r>
+              <a:endParaRPr lang="en-CA" sz="1800" b="1" dirty="0">
+                <a:latin typeface="Courier New" panose="02070309020205020404" pitchFamily="49" charset="0"/>
+                <a:cs typeface="Courier New" panose="02070309020205020404" pitchFamily="49" charset="0"/>
+              </a:endParaRPr>
+            </a:p>
+          </p:txBody>
+        </p:sp>
+        <p:sp>
+          <p:nvSpPr>
+            <p:cNvPr id="20" name="ZoneTexte 19">
+              <a:extLst>
+                <a:ext uri="{FF2B5EF4-FFF2-40B4-BE49-F238E27FC236}">
+                  <a16:creationId xmlns:a16="http://schemas.microsoft.com/office/drawing/2014/main" id="{F76A0BD9-C9D6-1638-3DEA-CA324DE39191}"/>
+                </a:ext>
+              </a:extLst>
+            </p:cNvPr>
+            <p:cNvSpPr txBox="1"/>
+            <p:nvPr/>
+          </p:nvSpPr>
+          <p:spPr>
+            <a:xfrm>
+              <a:off x="5753100" y="3978093"/>
+              <a:ext cx="654333" cy="369332"/>
+            </a:xfrm>
+            <a:prstGeom prst="rect">
+              <a:avLst/>
+            </a:prstGeom>
+            <a:noFill/>
+          </p:spPr>
+          <p:txBody>
+            <a:bodyPr wrap="square" anchor="ctr">
+              <a:spAutoFit/>
+            </a:bodyPr>
+            <a:lstStyle/>
+            <a:p>
+              <a:r>
+                <a:rPr lang="en-CA" b="1" dirty="0">
+                  <a:latin typeface="Courier New" panose="02070309020205020404" pitchFamily="49" charset="0"/>
+                  <a:cs typeface="Courier New" panose="02070309020205020404" pitchFamily="49" charset="0"/>
+                </a:rPr>
+                <a:t>0</a:t>
+              </a:r>
+              <a:endParaRPr lang="en-CA" sz="1800" b="1" dirty="0">
+                <a:latin typeface="Courier New" panose="02070309020205020404" pitchFamily="49" charset="0"/>
+                <a:cs typeface="Courier New" panose="02070309020205020404" pitchFamily="49" charset="0"/>
+              </a:endParaRPr>
+            </a:p>
+          </p:txBody>
+        </p:sp>
+        <p:sp>
+          <p:nvSpPr>
+            <p:cNvPr id="21" name="ZoneTexte 20">
+              <a:extLst>
+                <a:ext uri="{FF2B5EF4-FFF2-40B4-BE49-F238E27FC236}">
+                  <a16:creationId xmlns:a16="http://schemas.microsoft.com/office/drawing/2014/main" id="{57584779-40F9-0159-C48D-DB158D12EA83}"/>
+                </a:ext>
+              </a:extLst>
+            </p:cNvPr>
+            <p:cNvSpPr txBox="1"/>
+            <p:nvPr/>
+          </p:nvSpPr>
+          <p:spPr>
+            <a:xfrm>
+              <a:off x="5751665" y="2874034"/>
+              <a:ext cx="574849" cy="369332"/>
+            </a:xfrm>
+            <a:prstGeom prst="rect">
+              <a:avLst/>
+            </a:prstGeom>
+            <a:noFill/>
+          </p:spPr>
+          <p:txBody>
+            <a:bodyPr wrap="square" anchor="ctr">
+              <a:spAutoFit/>
+            </a:bodyPr>
+            <a:lstStyle/>
+            <a:p>
+              <a:r>
+                <a:rPr lang="en-CA" b="1" dirty="0">
+                  <a:latin typeface="Courier New" panose="02070309020205020404" pitchFamily="49" charset="0"/>
+                  <a:cs typeface="Courier New" panose="02070309020205020404" pitchFamily="49" charset="0"/>
+                </a:rPr>
+                <a:t>50</a:t>
+              </a:r>
+              <a:endParaRPr lang="en-CA" sz="1800" b="1" dirty="0">
+                <a:latin typeface="Courier New" panose="02070309020205020404" pitchFamily="49" charset="0"/>
+                <a:cs typeface="Courier New" panose="02070309020205020404" pitchFamily="49" charset="0"/>
+              </a:endParaRPr>
+            </a:p>
+          </p:txBody>
+        </p:sp>
+        <p:sp>
+          <p:nvSpPr>
+            <p:cNvPr id="23" name="ZoneTexte 22">
+              <a:extLst>
+                <a:ext uri="{FF2B5EF4-FFF2-40B4-BE49-F238E27FC236}">
+                  <a16:creationId xmlns:a16="http://schemas.microsoft.com/office/drawing/2014/main" id="{46AAE30E-5CA2-47D8-8CF9-A8530419D510}"/>
+                </a:ext>
+              </a:extLst>
+            </p:cNvPr>
+            <p:cNvSpPr txBox="1"/>
+            <p:nvPr/>
+          </p:nvSpPr>
+          <p:spPr>
+            <a:xfrm>
+              <a:off x="5777807" y="2357686"/>
+              <a:ext cx="466379" cy="369332"/>
+            </a:xfrm>
+            <a:prstGeom prst="rect">
+              <a:avLst/>
+            </a:prstGeom>
+            <a:noFill/>
+          </p:spPr>
+          <p:txBody>
+            <a:bodyPr wrap="square" anchor="ctr">
+              <a:spAutoFit/>
+            </a:bodyPr>
+            <a:lstStyle/>
+            <a:p>
+              <a:r>
+                <a:rPr lang="en-CA" sz="1800" b="1" dirty="0">
+                  <a:latin typeface="Courier New" panose="02070309020205020404" pitchFamily="49" charset="0"/>
+                  <a:cs typeface="Courier New" panose="02070309020205020404" pitchFamily="49" charset="0"/>
+                </a:rPr>
+                <a:t>75</a:t>
+              </a:r>
+            </a:p>
+          </p:txBody>
+        </p:sp>
+        <p:cxnSp>
+          <p:nvCxnSpPr>
+            <p:cNvPr id="25" name="Connecteur droit 24">
+              <a:extLst>
+                <a:ext uri="{FF2B5EF4-FFF2-40B4-BE49-F238E27FC236}">
+                  <a16:creationId xmlns:a16="http://schemas.microsoft.com/office/drawing/2014/main" id="{4728F7BD-03F9-A4FE-ECBA-A014DE10971F}"/>
+                </a:ext>
+              </a:extLst>
+            </p:cNvPr>
+            <p:cNvCxnSpPr>
+              <a:cxnSpLocks/>
+            </p:cNvCxnSpPr>
+            <p:nvPr/>
+          </p:nvCxnSpPr>
+          <p:spPr>
+            <a:xfrm flipH="1">
+              <a:off x="5624197" y="3614976"/>
+              <a:ext cx="127468" cy="0"/>
+            </a:xfrm>
+            <a:prstGeom prst="line">
+              <a:avLst/>
+            </a:prstGeom>
+            <a:ln w="38100">
+              <a:solidFill>
+                <a:srgbClr val="434343"/>
+              </a:solidFill>
+            </a:ln>
+          </p:spPr>
+          <p:style>
+            <a:lnRef idx="1">
+              <a:schemeClr val="accent1"/>
+            </a:lnRef>
+            <a:fillRef idx="0">
+              <a:schemeClr val="accent1"/>
+            </a:fillRef>
+            <a:effectRef idx="0">
+              <a:schemeClr val="accent1"/>
+            </a:effectRef>
+            <a:fontRef idx="minor">
+              <a:schemeClr val="tx1"/>
+            </a:fontRef>
+          </p:style>
+        </p:cxnSp>
+        <p:cxnSp>
+          <p:nvCxnSpPr>
+            <p:cNvPr id="26" name="Connecteur droit 25">
+              <a:extLst>
+                <a:ext uri="{FF2B5EF4-FFF2-40B4-BE49-F238E27FC236}">
+                  <a16:creationId xmlns:a16="http://schemas.microsoft.com/office/drawing/2014/main" id="{D8531FA4-8DB7-D5F2-E319-B8AB4BF55523}"/>
+                </a:ext>
+              </a:extLst>
+            </p:cNvPr>
+            <p:cNvCxnSpPr>
+              <a:cxnSpLocks/>
+            </p:cNvCxnSpPr>
+            <p:nvPr/>
+          </p:nvCxnSpPr>
+          <p:spPr>
+            <a:xfrm flipH="1">
+              <a:off x="5624197" y="3053555"/>
+              <a:ext cx="127468" cy="0"/>
+            </a:xfrm>
+            <a:prstGeom prst="line">
+              <a:avLst/>
+            </a:prstGeom>
+            <a:ln w="38100">
+              <a:solidFill>
+                <a:srgbClr val="434343"/>
+              </a:solidFill>
+            </a:ln>
+          </p:spPr>
+          <p:style>
+            <a:lnRef idx="1">
+              <a:schemeClr val="accent1"/>
+            </a:lnRef>
+            <a:fillRef idx="0">
+              <a:schemeClr val="accent1"/>
+            </a:fillRef>
+            <a:effectRef idx="0">
+              <a:schemeClr val="accent1"/>
+            </a:effectRef>
+            <a:fontRef idx="minor">
+              <a:schemeClr val="tx1"/>
+            </a:fontRef>
+          </p:style>
+        </p:cxnSp>
+        <p:cxnSp>
+          <p:nvCxnSpPr>
+            <p:cNvPr id="27" name="Connecteur droit 26">
+              <a:extLst>
+                <a:ext uri="{FF2B5EF4-FFF2-40B4-BE49-F238E27FC236}">
+                  <a16:creationId xmlns:a16="http://schemas.microsoft.com/office/drawing/2014/main" id="{1E839463-8744-2C3E-E0FB-441852C0729B}"/>
+                </a:ext>
+              </a:extLst>
+            </p:cNvPr>
+            <p:cNvCxnSpPr>
+              <a:cxnSpLocks/>
+            </p:cNvCxnSpPr>
+            <p:nvPr/>
+          </p:nvCxnSpPr>
+          <p:spPr>
+            <a:xfrm flipH="1">
+              <a:off x="5637523" y="2542352"/>
+              <a:ext cx="127468" cy="0"/>
+            </a:xfrm>
+            <a:prstGeom prst="line">
+              <a:avLst/>
+            </a:prstGeom>
+            <a:ln w="38100">
+              <a:solidFill>
+                <a:srgbClr val="434343"/>
+              </a:solidFill>
+            </a:ln>
+          </p:spPr>
+          <p:style>
+            <a:lnRef idx="1">
+              <a:schemeClr val="accent1"/>
+            </a:lnRef>
+            <a:fillRef idx="0">
+              <a:schemeClr val="accent1"/>
+            </a:fillRef>
+            <a:effectRef idx="0">
+              <a:schemeClr val="accent1"/>
+            </a:effectRef>
+            <a:fontRef idx="minor">
+              <a:schemeClr val="tx1"/>
+            </a:fontRef>
+          </p:style>
+        </p:cxnSp>
+        <p:cxnSp>
+          <p:nvCxnSpPr>
+            <p:cNvPr id="28" name="Connecteur droit 27">
+              <a:extLst>
+                <a:ext uri="{FF2B5EF4-FFF2-40B4-BE49-F238E27FC236}">
+                  <a16:creationId xmlns:a16="http://schemas.microsoft.com/office/drawing/2014/main" id="{252DCB4C-B229-DCF0-AE94-E0DDE03918C4}"/>
+                </a:ext>
+              </a:extLst>
+            </p:cNvPr>
+            <p:cNvCxnSpPr>
+              <a:cxnSpLocks/>
+            </p:cNvCxnSpPr>
+            <p:nvPr/>
+          </p:nvCxnSpPr>
+          <p:spPr>
+            <a:xfrm flipH="1">
+              <a:off x="5624197" y="1988426"/>
+              <a:ext cx="127468" cy="0"/>
+            </a:xfrm>
+            <a:prstGeom prst="line">
+              <a:avLst/>
+            </a:prstGeom>
+            <a:ln w="38100">
+              <a:solidFill>
+                <a:srgbClr val="434343"/>
+              </a:solidFill>
+            </a:ln>
+          </p:spPr>
+          <p:style>
+            <a:lnRef idx="1">
+              <a:schemeClr val="accent1"/>
+            </a:lnRef>
+            <a:fillRef idx="0">
+              <a:schemeClr val="accent1"/>
+            </a:fillRef>
+            <a:effectRef idx="0">
+              <a:schemeClr val="accent1"/>
+            </a:effectRef>
+            <a:fontRef idx="minor">
+              <a:schemeClr val="tx1"/>
+            </a:fontRef>
+          </p:style>
+        </p:cxnSp>
+      </p:grpSp>
     </p:spTree>
     <p:extLst>
       <p:ext uri="{BB962C8B-B14F-4D97-AF65-F5344CB8AC3E}">
@@ -23830,7 +24595,11 @@
             <a:prstGeom prst="ellipse">
               <a:avLst/>
             </a:prstGeom>
-            <a:ln w="38100"/>
+            <a:ln w="38100">
+              <a:solidFill>
+                <a:srgbClr val="434343"/>
+              </a:solidFill>
+            </a:ln>
           </p:spPr>
           <p:style>
             <a:lnRef idx="2">
@@ -23877,7 +24646,11 @@
             <a:prstGeom prst="ellipse">
               <a:avLst/>
             </a:prstGeom>
-            <a:ln w="38100"/>
+            <a:ln w="38100">
+              <a:solidFill>
+                <a:srgbClr val="434343"/>
+              </a:solidFill>
+            </a:ln>
           </p:spPr>
           <p:style>
             <a:lnRef idx="2">
@@ -23933,7 +24706,9 @@
               </a:srgbClr>
             </a:solidFill>
             <a:ln w="38100">
-              <a:noFill/>
+              <a:solidFill>
+                <a:srgbClr val="434343"/>
+              </a:solidFill>
             </a:ln>
           </p:spPr>
           <p:style>
@@ -23996,7 +24771,9 @@
               </a:srgbClr>
             </a:solidFill>
             <a:ln w="38100">
-              <a:noFill/>
+              <a:solidFill>
+                <a:srgbClr val="434343"/>
+              </a:solidFill>
             </a:ln>
           </p:spPr>
           <p:style>
@@ -24059,7 +24836,9 @@
               </a:srgbClr>
             </a:solidFill>
             <a:ln w="38100">
-              <a:noFill/>
+              <a:solidFill>
+                <a:srgbClr val="434343"/>
+              </a:solidFill>
             </a:ln>
           </p:spPr>
           <p:style>
@@ -24111,8 +24890,13 @@
             <a:prstGeom prst="ellipse">
               <a:avLst/>
             </a:prstGeom>
+            <a:solidFill>
+              <a:srgbClr val="A5A5A5"/>
+            </a:solidFill>
             <a:ln w="38100">
-              <a:noFill/>
+              <a:solidFill>
+                <a:srgbClr val="434343"/>
+              </a:solidFill>
             </a:ln>
           </p:spPr>
           <p:style>
@@ -24136,7 +24920,7 @@
             <a:lstStyle/>
             <a:p>
               <a:pPr algn="ctr"/>
-              <a:endParaRPr lang="en-CA"/>
+              <a:endParaRPr lang="en-CA" dirty="0"/>
             </a:p>
           </p:txBody>
         </p:sp>
@@ -24162,7 +24946,11 @@
                 <a:gd name="adj" fmla="val 54925"/>
               </a:avLst>
             </a:prstGeom>
-            <a:ln w="38100"/>
+            <a:ln w="38100">
+              <a:solidFill>
+                <a:srgbClr val="434343"/>
+              </a:solidFill>
+            </a:ln>
           </p:spPr>
           <p:style>
             <a:lnRef idx="2">
@@ -24209,7 +24997,11 @@
             <a:prstGeom prst="ellipse">
               <a:avLst/>
             </a:prstGeom>
-            <a:ln w="38100"/>
+            <a:ln w="38100">
+              <a:solidFill>
+                <a:srgbClr val="434343"/>
+              </a:solidFill>
+            </a:ln>
           </p:spPr>
           <p:style>
             <a:lnRef idx="2">
@@ -24264,9 +25056,7 @@
             </a:solidFill>
             <a:ln w="28575">
               <a:solidFill>
-                <a:schemeClr val="bg2">
-                  <a:lumMod val="25000"/>
-                </a:schemeClr>
+                <a:srgbClr val="434343"/>
               </a:solidFill>
             </a:ln>
           </p:spPr>
@@ -24326,9 +25116,7 @@
             </a:prstGeom>
             <a:ln w="38100">
               <a:solidFill>
-                <a:schemeClr val="bg2">
-                  <a:lumMod val="25000"/>
-                </a:schemeClr>
+                <a:srgbClr val="434343"/>
               </a:solidFill>
             </a:ln>
           </p:spPr>
@@ -24371,9 +25159,7 @@
             </a:prstGeom>
             <a:ln w="38100">
               <a:solidFill>
-                <a:schemeClr val="bg2">
-                  <a:lumMod val="25000"/>
-                </a:schemeClr>
+                <a:srgbClr val="434343"/>
               </a:solidFill>
             </a:ln>
           </p:spPr>
@@ -24416,9 +25202,7 @@
             </a:prstGeom>
             <a:ln w="38100">
               <a:solidFill>
-                <a:schemeClr val="bg2">
-                  <a:lumMod val="25000"/>
-                </a:schemeClr>
+                <a:srgbClr val="434343"/>
               </a:solidFill>
             </a:ln>
           </p:spPr>
@@ -24462,9 +25246,7 @@
             </a:prstGeom>
             <a:ln w="38100">
               <a:solidFill>
-                <a:schemeClr val="bg2">
-                  <a:lumMod val="25000"/>
-                </a:schemeClr>
+                <a:srgbClr val="434343"/>
               </a:solidFill>
             </a:ln>
           </p:spPr>
@@ -24507,9 +25289,7 @@
             </a:prstGeom>
             <a:ln w="38100">
               <a:solidFill>
-                <a:schemeClr val="bg2">
-                  <a:lumMod val="25000"/>
-                </a:schemeClr>
+                <a:srgbClr val="434343"/>
               </a:solidFill>
             </a:ln>
           </p:spPr>
@@ -24552,9 +25332,7 @@
             </a:prstGeom>
             <a:ln w="38100">
               <a:solidFill>
-                <a:schemeClr val="bg2">
-                  <a:lumMod val="25000"/>
-                </a:schemeClr>
+                <a:srgbClr val="434343"/>
               </a:solidFill>
             </a:ln>
           </p:spPr>
@@ -24597,9 +25375,7 @@
             </a:prstGeom>
             <a:ln w="38100">
               <a:solidFill>
-                <a:schemeClr val="bg2">
-                  <a:lumMod val="25000"/>
-                </a:schemeClr>
+                <a:srgbClr val="434343"/>
               </a:solidFill>
             </a:ln>
           </p:spPr>
@@ -25363,6 +26139,276 @@
             </a:p>
           </p:txBody>
         </p:sp>
+      </p:grpSp>
+      <p:grpSp>
+        <p:nvGrpSpPr>
+          <p:cNvPr id="36" name="Groupe 35">
+            <a:extLst>
+              <a:ext uri="{FF2B5EF4-FFF2-40B4-BE49-F238E27FC236}">
+                <a16:creationId xmlns:a16="http://schemas.microsoft.com/office/drawing/2014/main" id="{578EA2A6-3878-125F-4661-1840B7DD1328}"/>
+              </a:ext>
+            </a:extLst>
+          </p:cNvPr>
+          <p:cNvGrpSpPr/>
+          <p:nvPr/>
+        </p:nvGrpSpPr>
+        <p:grpSpPr>
+          <a:xfrm>
+            <a:off x="3206983" y="4886324"/>
+            <a:ext cx="2155751" cy="1077396"/>
+            <a:chOff x="3206984" y="4845770"/>
+            <a:chExt cx="1987978" cy="755093"/>
+          </a:xfrm>
+        </p:grpSpPr>
+        <p:sp>
+          <p:nvSpPr>
+            <p:cNvPr id="15" name="Rectangle : coins arrondis 14">
+              <a:extLst>
+                <a:ext uri="{FF2B5EF4-FFF2-40B4-BE49-F238E27FC236}">
+                  <a16:creationId xmlns:a16="http://schemas.microsoft.com/office/drawing/2014/main" id="{D7A19E59-9441-3AB3-EC6A-9EAE4F22D166}"/>
+                </a:ext>
+              </a:extLst>
+            </p:cNvPr>
+            <p:cNvSpPr/>
+            <p:nvPr/>
+          </p:nvSpPr>
+          <p:spPr>
+            <a:xfrm>
+              <a:off x="3209365" y="4895470"/>
+              <a:ext cx="1929105" cy="705393"/>
+            </a:xfrm>
+            <a:prstGeom prst="roundRect">
+              <a:avLst>
+                <a:gd name="adj" fmla="val 0"/>
+              </a:avLst>
+            </a:prstGeom>
+            <a:solidFill>
+              <a:srgbClr val="A5A5A5"/>
+            </a:solidFill>
+            <a:ln w="38100" cap="rnd">
+              <a:solidFill>
+                <a:srgbClr val="434343"/>
+              </a:solidFill>
+              <a:round/>
+            </a:ln>
+          </p:spPr>
+          <p:style>
+            <a:lnRef idx="2">
+              <a:schemeClr val="accent1">
+                <a:shade val="15000"/>
+              </a:schemeClr>
+            </a:lnRef>
+            <a:fillRef idx="1">
+              <a:schemeClr val="accent1"/>
+            </a:fillRef>
+            <a:effectRef idx="0">
+              <a:schemeClr val="accent1"/>
+            </a:effectRef>
+            <a:fontRef idx="minor">
+              <a:schemeClr val="lt1"/>
+            </a:fontRef>
+          </p:style>
+          <p:txBody>
+            <a:bodyPr rtlCol="0" anchor="ctr"/>
+            <a:lstStyle/>
+            <a:p>
+              <a:pPr algn="ctr"/>
+              <a:endParaRPr lang="en-CA"/>
+            </a:p>
+          </p:txBody>
+        </p:sp>
+        <p:sp>
+          <p:nvSpPr>
+            <p:cNvPr id="16" name="Rectangle : coins arrondis 15">
+              <a:extLst>
+                <a:ext uri="{FF2B5EF4-FFF2-40B4-BE49-F238E27FC236}">
+                  <a16:creationId xmlns:a16="http://schemas.microsoft.com/office/drawing/2014/main" id="{6D4F893F-C220-139A-E30D-76A285D73D7B}"/>
+                </a:ext>
+              </a:extLst>
+            </p:cNvPr>
+            <p:cNvSpPr/>
+            <p:nvPr/>
+          </p:nvSpPr>
+          <p:spPr>
+            <a:xfrm>
+              <a:off x="3265195" y="4845770"/>
+              <a:ext cx="1929105" cy="705393"/>
+            </a:xfrm>
+            <a:prstGeom prst="roundRect">
+              <a:avLst>
+                <a:gd name="adj" fmla="val 0"/>
+              </a:avLst>
+            </a:prstGeom>
+            <a:solidFill>
+              <a:srgbClr val="A5A5A5"/>
+            </a:solidFill>
+            <a:ln w="38100" cap="rnd">
+              <a:solidFill>
+                <a:srgbClr val="434343"/>
+              </a:solidFill>
+              <a:round/>
+            </a:ln>
+          </p:spPr>
+          <p:style>
+            <a:lnRef idx="2">
+              <a:schemeClr val="accent1">
+                <a:shade val="15000"/>
+              </a:schemeClr>
+            </a:lnRef>
+            <a:fillRef idx="1">
+              <a:schemeClr val="accent1"/>
+            </a:fillRef>
+            <a:effectRef idx="0">
+              <a:schemeClr val="accent1"/>
+            </a:effectRef>
+            <a:fontRef idx="minor">
+              <a:schemeClr val="lt1"/>
+            </a:fontRef>
+          </p:style>
+          <p:txBody>
+            <a:bodyPr rtlCol="0" anchor="ctr"/>
+            <a:lstStyle/>
+            <a:p>
+              <a:pPr algn="ctr"/>
+              <a:r>
+                <a:rPr lang="en-CA" sz="3600" dirty="0"/>
+                <a:t>Button</a:t>
+              </a:r>
+            </a:p>
+          </p:txBody>
+        </p:sp>
+        <p:cxnSp>
+          <p:nvCxnSpPr>
+            <p:cNvPr id="18" name="Connecteur droit 17">
+              <a:extLst>
+                <a:ext uri="{FF2B5EF4-FFF2-40B4-BE49-F238E27FC236}">
+                  <a16:creationId xmlns:a16="http://schemas.microsoft.com/office/drawing/2014/main" id="{7AD11A85-FA29-3B09-86FC-819D958F02E8}"/>
+                </a:ext>
+              </a:extLst>
+            </p:cNvPr>
+            <p:cNvCxnSpPr>
+              <a:cxnSpLocks/>
+            </p:cNvCxnSpPr>
+            <p:nvPr/>
+          </p:nvCxnSpPr>
+          <p:spPr>
+            <a:xfrm flipH="1">
+              <a:off x="5143894" y="5551163"/>
+              <a:ext cx="51068" cy="44938"/>
+            </a:xfrm>
+            <a:prstGeom prst="line">
+              <a:avLst/>
+            </a:prstGeom>
+            <a:ln w="38100" cap="rnd">
+              <a:solidFill>
+                <a:srgbClr val="434343"/>
+              </a:solidFill>
+              <a:round/>
+            </a:ln>
+          </p:spPr>
+          <p:style>
+            <a:lnRef idx="1">
+              <a:schemeClr val="accent1"/>
+            </a:lnRef>
+            <a:fillRef idx="0">
+              <a:schemeClr val="accent1"/>
+            </a:fillRef>
+            <a:effectRef idx="0">
+              <a:schemeClr val="accent1"/>
+            </a:effectRef>
+            <a:fontRef idx="minor">
+              <a:schemeClr val="tx1"/>
+            </a:fontRef>
+          </p:style>
+        </p:cxnSp>
+        <p:cxnSp>
+          <p:nvCxnSpPr>
+            <p:cNvPr id="26" name="Connecteur droit 25">
+              <a:extLst>
+                <a:ext uri="{FF2B5EF4-FFF2-40B4-BE49-F238E27FC236}">
+                  <a16:creationId xmlns:a16="http://schemas.microsoft.com/office/drawing/2014/main" id="{9907CE72-7D54-2796-F37F-5E662C104FE6}"/>
+                </a:ext>
+              </a:extLst>
+            </p:cNvPr>
+            <p:cNvCxnSpPr>
+              <a:cxnSpLocks/>
+            </p:cNvCxnSpPr>
+            <p:nvPr/>
+          </p:nvCxnSpPr>
+          <p:spPr>
+            <a:xfrm flipH="1">
+              <a:off x="3206984" y="5551163"/>
+              <a:ext cx="55830" cy="49700"/>
+            </a:xfrm>
+            <a:prstGeom prst="line">
+              <a:avLst/>
+            </a:prstGeom>
+            <a:ln w="38100" cap="rnd">
+              <a:solidFill>
+                <a:srgbClr val="434343"/>
+              </a:solidFill>
+              <a:round/>
+            </a:ln>
+          </p:spPr>
+          <p:style>
+            <a:lnRef idx="1">
+              <a:schemeClr val="accent1"/>
+            </a:lnRef>
+            <a:fillRef idx="0">
+              <a:schemeClr val="accent1"/>
+            </a:fillRef>
+            <a:effectRef idx="0">
+              <a:schemeClr val="accent1"/>
+            </a:effectRef>
+            <a:fontRef idx="minor">
+              <a:schemeClr val="tx1"/>
+            </a:fontRef>
+          </p:style>
+        </p:cxnSp>
+        <p:cxnSp>
+          <p:nvCxnSpPr>
+            <p:cNvPr id="28" name="Connecteur droit 27">
+              <a:extLst>
+                <a:ext uri="{FF2B5EF4-FFF2-40B4-BE49-F238E27FC236}">
+                  <a16:creationId xmlns:a16="http://schemas.microsoft.com/office/drawing/2014/main" id="{38B368BF-184C-925E-870A-995C19542E77}"/>
+                </a:ext>
+              </a:extLst>
+            </p:cNvPr>
+            <p:cNvCxnSpPr>
+              <a:cxnSpLocks/>
+            </p:cNvCxnSpPr>
+            <p:nvPr/>
+          </p:nvCxnSpPr>
+          <p:spPr>
+            <a:xfrm flipH="1">
+              <a:off x="3208703" y="4845770"/>
+              <a:ext cx="51068" cy="47319"/>
+            </a:xfrm>
+            <a:prstGeom prst="line">
+              <a:avLst/>
+            </a:prstGeom>
+            <a:ln w="38100" cap="rnd">
+              <a:solidFill>
+                <a:srgbClr val="434343"/>
+              </a:solidFill>
+              <a:round/>
+            </a:ln>
+          </p:spPr>
+          <p:style>
+            <a:lnRef idx="1">
+              <a:schemeClr val="accent1"/>
+            </a:lnRef>
+            <a:fillRef idx="0">
+              <a:schemeClr val="accent1"/>
+            </a:fillRef>
+            <a:effectRef idx="0">
+              <a:schemeClr val="accent1"/>
+            </a:effectRef>
+            <a:fontRef idx="minor">
+              <a:schemeClr val="tx1"/>
+            </a:fontRef>
+          </p:style>
+        </p:cxnSp>
       </p:grpSp>
     </p:spTree>
     <p:extLst>

--- a/graphics/graphics.pptx
+++ b/graphics/graphics.pptx
@@ -6,7 +6,7 @@
     <p:sldMasterId id="2147483660" r:id="rId2"/>
   </p:sldMasterIdLst>
   <p:notesMasterIdLst>
-    <p:notesMasterId r:id="rId19"/>
+    <p:notesMasterId r:id="rId23"/>
   </p:notesMasterIdLst>
   <p:sldIdLst>
     <p:sldId id="259" r:id="rId3"/>
@@ -20,11 +20,15 @@
     <p:sldId id="266" r:id="rId11"/>
     <p:sldId id="274" r:id="rId12"/>
     <p:sldId id="268" r:id="rId13"/>
-    <p:sldId id="269" r:id="rId14"/>
-    <p:sldId id="270" r:id="rId15"/>
-    <p:sldId id="271" r:id="rId16"/>
-    <p:sldId id="272" r:id="rId17"/>
-    <p:sldId id="273" r:id="rId18"/>
+    <p:sldId id="275" r:id="rId14"/>
+    <p:sldId id="276" r:id="rId15"/>
+    <p:sldId id="277" r:id="rId16"/>
+    <p:sldId id="278" r:id="rId17"/>
+    <p:sldId id="269" r:id="rId18"/>
+    <p:sldId id="270" r:id="rId19"/>
+    <p:sldId id="271" r:id="rId20"/>
+    <p:sldId id="272" r:id="rId21"/>
+    <p:sldId id="273" r:id="rId22"/>
   </p:sldIdLst>
   <p:sldSz cx="12192000" cy="6858000"/>
   <p:notesSz cx="6858000" cy="9144000"/>
@@ -224,7 +228,7 @@
           <a:p>
             <a:fld id="{B8404A9E-F80D-47A3-9ABE-4E375F8C7A58}" type="datetimeFigureOut">
               <a:rPr lang="fr-CA" smtClean="0"/>
-              <a:t>2026-05-13</a:t>
+              <a:t>2026-05-22</a:t>
             </a:fld>
             <a:endParaRPr lang="fr-CA"/>
           </a:p>
@@ -660,6 +664,438 @@
 </p:notes>
 </file>
 
+<file path=ppt/notesSlides/notesSlide3.xml><?xml version="1.0" encoding="utf-8"?>
+<p:notes xmlns:a="http://schemas.openxmlformats.org/drawingml/2006/main" xmlns:r="http://schemas.openxmlformats.org/officeDocument/2006/relationships" xmlns:p="http://schemas.openxmlformats.org/presentationml/2006/main">
+  <p:cSld>
+    <p:spTree>
+      <p:nvGrpSpPr>
+        <p:cNvPr id="1" name="">
+          <a:extLst>
+            <a:ext uri="{FF2B5EF4-FFF2-40B4-BE49-F238E27FC236}">
+              <a16:creationId xmlns:a16="http://schemas.microsoft.com/office/drawing/2014/main" id="{59436EAC-24DD-AC3C-B596-846B3F25A84D}"/>
+            </a:ext>
+          </a:extLst>
+        </p:cNvPr>
+        <p:cNvGrpSpPr/>
+        <p:nvPr/>
+      </p:nvGrpSpPr>
+      <p:grpSpPr>
+        <a:xfrm>
+          <a:off x="0" y="0"/>
+          <a:ext cx="0" cy="0"/>
+          <a:chOff x="0" y="0"/>
+          <a:chExt cx="0" cy="0"/>
+        </a:xfrm>
+      </p:grpSpPr>
+      <p:sp>
+        <p:nvSpPr>
+          <p:cNvPr id="2" name="Espace réservé de l'image des diapositives 1">
+            <a:extLst>
+              <a:ext uri="{FF2B5EF4-FFF2-40B4-BE49-F238E27FC236}">
+                <a16:creationId xmlns:a16="http://schemas.microsoft.com/office/drawing/2014/main" id="{F59CD6D8-84B2-CC9A-D00A-FCE8BC6F4D28}"/>
+              </a:ext>
+            </a:extLst>
+          </p:cNvPr>
+          <p:cNvSpPr>
+            <a:spLocks noGrp="1" noRot="1" noChangeAspect="1"/>
+          </p:cNvSpPr>
+          <p:nvPr>
+            <p:ph type="sldImg"/>
+          </p:nvPr>
+        </p:nvSpPr>
+        <p:spPr/>
+      </p:sp>
+      <p:sp>
+        <p:nvSpPr>
+          <p:cNvPr id="3" name="Espace réservé des notes 2">
+            <a:extLst>
+              <a:ext uri="{FF2B5EF4-FFF2-40B4-BE49-F238E27FC236}">
+                <a16:creationId xmlns:a16="http://schemas.microsoft.com/office/drawing/2014/main" id="{60F498B6-39F4-E08B-8BE4-D64DAB4F1577}"/>
+              </a:ext>
+            </a:extLst>
+          </p:cNvPr>
+          <p:cNvSpPr>
+            <a:spLocks noGrp="1"/>
+          </p:cNvSpPr>
+          <p:nvPr>
+            <p:ph type="body" idx="1"/>
+          </p:nvPr>
+        </p:nvSpPr>
+        <p:spPr/>
+        <p:txBody>
+          <a:bodyPr/>
+          <a:lstStyle/>
+          <a:p>
+            <a:endParaRPr lang="en-CA" dirty="0"/>
+          </a:p>
+        </p:txBody>
+      </p:sp>
+      <p:sp>
+        <p:nvSpPr>
+          <p:cNvPr id="4" name="Espace réservé du numéro de diapositive 3">
+            <a:extLst>
+              <a:ext uri="{FF2B5EF4-FFF2-40B4-BE49-F238E27FC236}">
+                <a16:creationId xmlns:a16="http://schemas.microsoft.com/office/drawing/2014/main" id="{42CAD7C3-4785-D86F-E0A0-487372AA54F8}"/>
+              </a:ext>
+            </a:extLst>
+          </p:cNvPr>
+          <p:cNvSpPr>
+            <a:spLocks noGrp="1"/>
+          </p:cNvSpPr>
+          <p:nvPr>
+            <p:ph type="sldNum" sz="quarter" idx="5"/>
+          </p:nvPr>
+        </p:nvSpPr>
+        <p:spPr/>
+        <p:txBody>
+          <a:bodyPr/>
+          <a:lstStyle/>
+          <a:p>
+            <a:fld id="{618211CF-4BFB-4EDA-B871-566ED73F112B}" type="slidenum">
+              <a:rPr lang="en-CA" smtClean="0"/>
+              <a:t>12</a:t>
+            </a:fld>
+            <a:endParaRPr lang="en-CA"/>
+          </a:p>
+        </p:txBody>
+      </p:sp>
+    </p:spTree>
+    <p:extLst>
+      <p:ext uri="{BB962C8B-B14F-4D97-AF65-F5344CB8AC3E}">
+        <p14:creationId xmlns:p14="http://schemas.microsoft.com/office/powerpoint/2010/main" val="354330480"/>
+      </p:ext>
+    </p:extLst>
+  </p:cSld>
+  <p:clrMapOvr>
+    <a:masterClrMapping/>
+  </p:clrMapOvr>
+</p:notes>
+</file>
+
+<file path=ppt/notesSlides/notesSlide4.xml><?xml version="1.0" encoding="utf-8"?>
+<p:notes xmlns:a="http://schemas.openxmlformats.org/drawingml/2006/main" xmlns:r="http://schemas.openxmlformats.org/officeDocument/2006/relationships" xmlns:p="http://schemas.openxmlformats.org/presentationml/2006/main">
+  <p:cSld>
+    <p:spTree>
+      <p:nvGrpSpPr>
+        <p:cNvPr id="1" name="">
+          <a:extLst>
+            <a:ext uri="{FF2B5EF4-FFF2-40B4-BE49-F238E27FC236}">
+              <a16:creationId xmlns:a16="http://schemas.microsoft.com/office/drawing/2014/main" id="{3D5AECF6-23E7-671C-CA2D-4132BBF2B36F}"/>
+            </a:ext>
+          </a:extLst>
+        </p:cNvPr>
+        <p:cNvGrpSpPr/>
+        <p:nvPr/>
+      </p:nvGrpSpPr>
+      <p:grpSpPr>
+        <a:xfrm>
+          <a:off x="0" y="0"/>
+          <a:ext cx="0" cy="0"/>
+          <a:chOff x="0" y="0"/>
+          <a:chExt cx="0" cy="0"/>
+        </a:xfrm>
+      </p:grpSpPr>
+      <p:sp>
+        <p:nvSpPr>
+          <p:cNvPr id="2" name="Espace réservé de l'image des diapositives 1">
+            <a:extLst>
+              <a:ext uri="{FF2B5EF4-FFF2-40B4-BE49-F238E27FC236}">
+                <a16:creationId xmlns:a16="http://schemas.microsoft.com/office/drawing/2014/main" id="{E97A8ADE-786C-9437-AD43-92889D18D015}"/>
+              </a:ext>
+            </a:extLst>
+          </p:cNvPr>
+          <p:cNvSpPr>
+            <a:spLocks noGrp="1" noRot="1" noChangeAspect="1"/>
+          </p:cNvSpPr>
+          <p:nvPr>
+            <p:ph type="sldImg"/>
+          </p:nvPr>
+        </p:nvSpPr>
+        <p:spPr/>
+      </p:sp>
+      <p:sp>
+        <p:nvSpPr>
+          <p:cNvPr id="3" name="Espace réservé des notes 2">
+            <a:extLst>
+              <a:ext uri="{FF2B5EF4-FFF2-40B4-BE49-F238E27FC236}">
+                <a16:creationId xmlns:a16="http://schemas.microsoft.com/office/drawing/2014/main" id="{D47E14D4-2844-33F9-5617-F55C7EE35B76}"/>
+              </a:ext>
+            </a:extLst>
+          </p:cNvPr>
+          <p:cNvSpPr>
+            <a:spLocks noGrp="1"/>
+          </p:cNvSpPr>
+          <p:nvPr>
+            <p:ph type="body" idx="1"/>
+          </p:nvPr>
+        </p:nvSpPr>
+        <p:spPr/>
+        <p:txBody>
+          <a:bodyPr/>
+          <a:lstStyle/>
+          <a:p>
+            <a:endParaRPr lang="en-CA" dirty="0"/>
+          </a:p>
+        </p:txBody>
+      </p:sp>
+      <p:sp>
+        <p:nvSpPr>
+          <p:cNvPr id="4" name="Espace réservé du numéro de diapositive 3">
+            <a:extLst>
+              <a:ext uri="{FF2B5EF4-FFF2-40B4-BE49-F238E27FC236}">
+                <a16:creationId xmlns:a16="http://schemas.microsoft.com/office/drawing/2014/main" id="{0E4BB99F-13F9-2CF5-1A60-BB0E218A53AC}"/>
+              </a:ext>
+            </a:extLst>
+          </p:cNvPr>
+          <p:cNvSpPr>
+            <a:spLocks noGrp="1"/>
+          </p:cNvSpPr>
+          <p:nvPr>
+            <p:ph type="sldNum" sz="quarter" idx="5"/>
+          </p:nvPr>
+        </p:nvSpPr>
+        <p:spPr/>
+        <p:txBody>
+          <a:bodyPr/>
+          <a:lstStyle/>
+          <a:p>
+            <a:fld id="{618211CF-4BFB-4EDA-B871-566ED73F112B}" type="slidenum">
+              <a:rPr lang="en-CA" smtClean="0"/>
+              <a:t>13</a:t>
+            </a:fld>
+            <a:endParaRPr lang="en-CA"/>
+          </a:p>
+        </p:txBody>
+      </p:sp>
+    </p:spTree>
+    <p:extLst>
+      <p:ext uri="{BB962C8B-B14F-4D97-AF65-F5344CB8AC3E}">
+        <p14:creationId xmlns:p14="http://schemas.microsoft.com/office/powerpoint/2010/main" val="2799020698"/>
+      </p:ext>
+    </p:extLst>
+  </p:cSld>
+  <p:clrMapOvr>
+    <a:masterClrMapping/>
+  </p:clrMapOvr>
+</p:notes>
+</file>
+
+<file path=ppt/notesSlides/notesSlide5.xml><?xml version="1.0" encoding="utf-8"?>
+<p:notes xmlns:a="http://schemas.openxmlformats.org/drawingml/2006/main" xmlns:r="http://schemas.openxmlformats.org/officeDocument/2006/relationships" xmlns:p="http://schemas.openxmlformats.org/presentationml/2006/main">
+  <p:cSld>
+    <p:spTree>
+      <p:nvGrpSpPr>
+        <p:cNvPr id="1" name="">
+          <a:extLst>
+            <a:ext uri="{FF2B5EF4-FFF2-40B4-BE49-F238E27FC236}">
+              <a16:creationId xmlns:a16="http://schemas.microsoft.com/office/drawing/2014/main" id="{D36D6E84-27A2-A270-D828-47172ED2CFD0}"/>
+            </a:ext>
+          </a:extLst>
+        </p:cNvPr>
+        <p:cNvGrpSpPr/>
+        <p:nvPr/>
+      </p:nvGrpSpPr>
+      <p:grpSpPr>
+        <a:xfrm>
+          <a:off x="0" y="0"/>
+          <a:ext cx="0" cy="0"/>
+          <a:chOff x="0" y="0"/>
+          <a:chExt cx="0" cy="0"/>
+        </a:xfrm>
+      </p:grpSpPr>
+      <p:sp>
+        <p:nvSpPr>
+          <p:cNvPr id="2" name="Espace réservé de l'image des diapositives 1">
+            <a:extLst>
+              <a:ext uri="{FF2B5EF4-FFF2-40B4-BE49-F238E27FC236}">
+                <a16:creationId xmlns:a16="http://schemas.microsoft.com/office/drawing/2014/main" id="{51A70E4A-E578-6EFB-FAAA-5C173502834B}"/>
+              </a:ext>
+            </a:extLst>
+          </p:cNvPr>
+          <p:cNvSpPr>
+            <a:spLocks noGrp="1" noRot="1" noChangeAspect="1"/>
+          </p:cNvSpPr>
+          <p:nvPr>
+            <p:ph type="sldImg"/>
+          </p:nvPr>
+        </p:nvSpPr>
+        <p:spPr/>
+      </p:sp>
+      <p:sp>
+        <p:nvSpPr>
+          <p:cNvPr id="3" name="Espace réservé des notes 2">
+            <a:extLst>
+              <a:ext uri="{FF2B5EF4-FFF2-40B4-BE49-F238E27FC236}">
+                <a16:creationId xmlns:a16="http://schemas.microsoft.com/office/drawing/2014/main" id="{46378BBF-1241-4DB0-7D58-6529830CABAF}"/>
+              </a:ext>
+            </a:extLst>
+          </p:cNvPr>
+          <p:cNvSpPr>
+            <a:spLocks noGrp="1"/>
+          </p:cNvSpPr>
+          <p:nvPr>
+            <p:ph type="body" idx="1"/>
+          </p:nvPr>
+        </p:nvSpPr>
+        <p:spPr/>
+        <p:txBody>
+          <a:bodyPr/>
+          <a:lstStyle/>
+          <a:p>
+            <a:endParaRPr lang="en-CA" dirty="0"/>
+          </a:p>
+        </p:txBody>
+      </p:sp>
+      <p:sp>
+        <p:nvSpPr>
+          <p:cNvPr id="4" name="Espace réservé du numéro de diapositive 3">
+            <a:extLst>
+              <a:ext uri="{FF2B5EF4-FFF2-40B4-BE49-F238E27FC236}">
+                <a16:creationId xmlns:a16="http://schemas.microsoft.com/office/drawing/2014/main" id="{006CEA23-D601-E0DA-CA58-33AC03A85A6A}"/>
+              </a:ext>
+            </a:extLst>
+          </p:cNvPr>
+          <p:cNvSpPr>
+            <a:spLocks noGrp="1"/>
+          </p:cNvSpPr>
+          <p:nvPr>
+            <p:ph type="sldNum" sz="quarter" idx="5"/>
+          </p:nvPr>
+        </p:nvSpPr>
+        <p:spPr/>
+        <p:txBody>
+          <a:bodyPr/>
+          <a:lstStyle/>
+          <a:p>
+            <a:fld id="{618211CF-4BFB-4EDA-B871-566ED73F112B}" type="slidenum">
+              <a:rPr lang="en-CA" smtClean="0"/>
+              <a:t>14</a:t>
+            </a:fld>
+            <a:endParaRPr lang="en-CA"/>
+          </a:p>
+        </p:txBody>
+      </p:sp>
+    </p:spTree>
+    <p:extLst>
+      <p:ext uri="{BB962C8B-B14F-4D97-AF65-F5344CB8AC3E}">
+        <p14:creationId xmlns:p14="http://schemas.microsoft.com/office/powerpoint/2010/main" val="1695666595"/>
+      </p:ext>
+    </p:extLst>
+  </p:cSld>
+  <p:clrMapOvr>
+    <a:masterClrMapping/>
+  </p:clrMapOvr>
+</p:notes>
+</file>
+
+<file path=ppt/notesSlides/notesSlide6.xml><?xml version="1.0" encoding="utf-8"?>
+<p:notes xmlns:a="http://schemas.openxmlformats.org/drawingml/2006/main" xmlns:r="http://schemas.openxmlformats.org/officeDocument/2006/relationships" xmlns:p="http://schemas.openxmlformats.org/presentationml/2006/main">
+  <p:cSld>
+    <p:spTree>
+      <p:nvGrpSpPr>
+        <p:cNvPr id="1" name="">
+          <a:extLst>
+            <a:ext uri="{FF2B5EF4-FFF2-40B4-BE49-F238E27FC236}">
+              <a16:creationId xmlns:a16="http://schemas.microsoft.com/office/drawing/2014/main" id="{D266B9A4-453C-659C-1C57-8EFCF0F319FA}"/>
+            </a:ext>
+          </a:extLst>
+        </p:cNvPr>
+        <p:cNvGrpSpPr/>
+        <p:nvPr/>
+      </p:nvGrpSpPr>
+      <p:grpSpPr>
+        <a:xfrm>
+          <a:off x="0" y="0"/>
+          <a:ext cx="0" cy="0"/>
+          <a:chOff x="0" y="0"/>
+          <a:chExt cx="0" cy="0"/>
+        </a:xfrm>
+      </p:grpSpPr>
+      <p:sp>
+        <p:nvSpPr>
+          <p:cNvPr id="2" name="Espace réservé de l'image des diapositives 1">
+            <a:extLst>
+              <a:ext uri="{FF2B5EF4-FFF2-40B4-BE49-F238E27FC236}">
+                <a16:creationId xmlns:a16="http://schemas.microsoft.com/office/drawing/2014/main" id="{51D814F6-4273-9EE2-CEB5-D9262B82DC8F}"/>
+              </a:ext>
+            </a:extLst>
+          </p:cNvPr>
+          <p:cNvSpPr>
+            <a:spLocks noGrp="1" noRot="1" noChangeAspect="1"/>
+          </p:cNvSpPr>
+          <p:nvPr>
+            <p:ph type="sldImg"/>
+          </p:nvPr>
+        </p:nvSpPr>
+        <p:spPr/>
+      </p:sp>
+      <p:sp>
+        <p:nvSpPr>
+          <p:cNvPr id="3" name="Espace réservé des notes 2">
+            <a:extLst>
+              <a:ext uri="{FF2B5EF4-FFF2-40B4-BE49-F238E27FC236}">
+                <a16:creationId xmlns:a16="http://schemas.microsoft.com/office/drawing/2014/main" id="{C8598EB5-5F9E-EC2C-352B-DFBF75253CCC}"/>
+              </a:ext>
+            </a:extLst>
+          </p:cNvPr>
+          <p:cNvSpPr>
+            <a:spLocks noGrp="1"/>
+          </p:cNvSpPr>
+          <p:nvPr>
+            <p:ph type="body" idx="1"/>
+          </p:nvPr>
+        </p:nvSpPr>
+        <p:spPr/>
+        <p:txBody>
+          <a:bodyPr/>
+          <a:lstStyle/>
+          <a:p>
+            <a:endParaRPr lang="en-CA" dirty="0"/>
+          </a:p>
+        </p:txBody>
+      </p:sp>
+      <p:sp>
+        <p:nvSpPr>
+          <p:cNvPr id="4" name="Espace réservé du numéro de diapositive 3">
+            <a:extLst>
+              <a:ext uri="{FF2B5EF4-FFF2-40B4-BE49-F238E27FC236}">
+                <a16:creationId xmlns:a16="http://schemas.microsoft.com/office/drawing/2014/main" id="{B429333E-BF29-374B-D623-D3CDF9BBDDA3}"/>
+              </a:ext>
+            </a:extLst>
+          </p:cNvPr>
+          <p:cNvSpPr>
+            <a:spLocks noGrp="1"/>
+          </p:cNvSpPr>
+          <p:nvPr>
+            <p:ph type="sldNum" sz="quarter" idx="5"/>
+          </p:nvPr>
+        </p:nvSpPr>
+        <p:spPr/>
+        <p:txBody>
+          <a:bodyPr/>
+          <a:lstStyle/>
+          <a:p>
+            <a:fld id="{618211CF-4BFB-4EDA-B871-566ED73F112B}" type="slidenum">
+              <a:rPr lang="en-CA" smtClean="0"/>
+              <a:t>15</a:t>
+            </a:fld>
+            <a:endParaRPr lang="en-CA"/>
+          </a:p>
+        </p:txBody>
+      </p:sp>
+    </p:spTree>
+    <p:extLst>
+      <p:ext uri="{BB962C8B-B14F-4D97-AF65-F5344CB8AC3E}">
+        <p14:creationId xmlns:p14="http://schemas.microsoft.com/office/powerpoint/2010/main" val="1473949761"/>
+      </p:ext>
+    </p:extLst>
+  </p:cSld>
+  <p:clrMapOvr>
+    <a:masterClrMapping/>
+  </p:clrMapOvr>
+</p:notes>
+</file>
+
 <file path=ppt/slideLayouts/slideLayout1.xml><?xml version="1.0" encoding="utf-8"?>
 <p:sldLayout xmlns:a="http://schemas.openxmlformats.org/drawingml/2006/main" xmlns:r="http://schemas.openxmlformats.org/officeDocument/2006/relationships" xmlns:p="http://schemas.openxmlformats.org/presentationml/2006/main" type="title" preserve="1">
   <p:cSld name="Diapositive de titre">
@@ -809,7 +1245,7 @@
           <a:p>
             <a:fld id="{B1B97C2F-ED53-40B2-8245-274A53568F1F}" type="datetimeFigureOut">
               <a:rPr lang="fr-CA" smtClean="0"/>
-              <a:t>2026-05-13</a:t>
+              <a:t>2026-05-22</a:t>
             </a:fld>
             <a:endParaRPr lang="fr-CA"/>
           </a:p>
@@ -1009,7 +1445,7 @@
           <a:p>
             <a:fld id="{B1B97C2F-ED53-40B2-8245-274A53568F1F}" type="datetimeFigureOut">
               <a:rPr lang="fr-CA" smtClean="0"/>
-              <a:t>2026-05-13</a:t>
+              <a:t>2026-05-22</a:t>
             </a:fld>
             <a:endParaRPr lang="fr-CA"/>
           </a:p>
@@ -1219,7 +1655,7 @@
           <a:p>
             <a:fld id="{B1B97C2F-ED53-40B2-8245-274A53568F1F}" type="datetimeFigureOut">
               <a:rPr lang="fr-CA" smtClean="0"/>
-              <a:t>2026-05-13</a:t>
+              <a:t>2026-05-22</a:t>
             </a:fld>
             <a:endParaRPr lang="fr-CA"/>
           </a:p>
@@ -1441,7 +1877,7 @@
           <a:p>
             <a:fld id="{3CFA78C3-2C03-4D26-BA08-5201FB292C09}" type="datetimeFigureOut">
               <a:rPr lang="fr-CA" smtClean="0"/>
-              <a:t>2026-05-13</a:t>
+              <a:t>2026-05-22</a:t>
             </a:fld>
             <a:endParaRPr lang="fr-CA"/>
           </a:p>
@@ -1641,7 +2077,7 @@
           <a:p>
             <a:fld id="{3CFA78C3-2C03-4D26-BA08-5201FB292C09}" type="datetimeFigureOut">
               <a:rPr lang="fr-CA" smtClean="0"/>
-              <a:t>2026-05-13</a:t>
+              <a:t>2026-05-22</a:t>
             </a:fld>
             <a:endParaRPr lang="fr-CA"/>
           </a:p>
@@ -1917,7 +2353,7 @@
           <a:p>
             <a:fld id="{3CFA78C3-2C03-4D26-BA08-5201FB292C09}" type="datetimeFigureOut">
               <a:rPr lang="fr-CA" smtClean="0"/>
-              <a:t>2026-05-13</a:t>
+              <a:t>2026-05-22</a:t>
             </a:fld>
             <a:endParaRPr lang="fr-CA"/>
           </a:p>
@@ -2185,7 +2621,7 @@
           <a:p>
             <a:fld id="{3CFA78C3-2C03-4D26-BA08-5201FB292C09}" type="datetimeFigureOut">
               <a:rPr lang="fr-CA" smtClean="0"/>
-              <a:t>2026-05-13</a:t>
+              <a:t>2026-05-22</a:t>
             </a:fld>
             <a:endParaRPr lang="fr-CA"/>
           </a:p>
@@ -2600,7 +3036,7 @@
           <a:p>
             <a:fld id="{3CFA78C3-2C03-4D26-BA08-5201FB292C09}" type="datetimeFigureOut">
               <a:rPr lang="fr-CA" smtClean="0"/>
-              <a:t>2026-05-13</a:t>
+              <a:t>2026-05-22</a:t>
             </a:fld>
             <a:endParaRPr lang="fr-CA"/>
           </a:p>
@@ -2742,7 +3178,7 @@
           <a:p>
             <a:fld id="{3CFA78C3-2C03-4D26-BA08-5201FB292C09}" type="datetimeFigureOut">
               <a:rPr lang="fr-CA" smtClean="0"/>
-              <a:t>2026-05-13</a:t>
+              <a:t>2026-05-22</a:t>
             </a:fld>
             <a:endParaRPr lang="fr-CA"/>
           </a:p>
@@ -2855,7 +3291,7 @@
           <a:p>
             <a:fld id="{3CFA78C3-2C03-4D26-BA08-5201FB292C09}" type="datetimeFigureOut">
               <a:rPr lang="fr-CA" smtClean="0"/>
-              <a:t>2026-05-13</a:t>
+              <a:t>2026-05-22</a:t>
             </a:fld>
             <a:endParaRPr lang="fr-CA"/>
           </a:p>
@@ -3168,7 +3604,7 @@
           <a:p>
             <a:fld id="{3CFA78C3-2C03-4D26-BA08-5201FB292C09}" type="datetimeFigureOut">
               <a:rPr lang="fr-CA" smtClean="0"/>
-              <a:t>2026-05-13</a:t>
+              <a:t>2026-05-22</a:t>
             </a:fld>
             <a:endParaRPr lang="fr-CA"/>
           </a:p>
@@ -3368,7 +3804,7 @@
           <a:p>
             <a:fld id="{B1B97C2F-ED53-40B2-8245-274A53568F1F}" type="datetimeFigureOut">
               <a:rPr lang="fr-CA" smtClean="0"/>
-              <a:t>2026-05-13</a:t>
+              <a:t>2026-05-22</a:t>
             </a:fld>
             <a:endParaRPr lang="fr-CA"/>
           </a:p>
@@ -3657,7 +4093,7 @@
           <a:p>
             <a:fld id="{3CFA78C3-2C03-4D26-BA08-5201FB292C09}" type="datetimeFigureOut">
               <a:rPr lang="fr-CA" smtClean="0"/>
-              <a:t>2026-05-13</a:t>
+              <a:t>2026-05-22</a:t>
             </a:fld>
             <a:endParaRPr lang="fr-CA"/>
           </a:p>
@@ -3857,7 +4293,7 @@
           <a:p>
             <a:fld id="{3CFA78C3-2C03-4D26-BA08-5201FB292C09}" type="datetimeFigureOut">
               <a:rPr lang="fr-CA" smtClean="0"/>
-              <a:t>2026-05-13</a:t>
+              <a:t>2026-05-22</a:t>
             </a:fld>
             <a:endParaRPr lang="fr-CA"/>
           </a:p>
@@ -4067,7 +4503,7 @@
           <a:p>
             <a:fld id="{3CFA78C3-2C03-4D26-BA08-5201FB292C09}" type="datetimeFigureOut">
               <a:rPr lang="fr-CA" smtClean="0"/>
-              <a:t>2026-05-13</a:t>
+              <a:t>2026-05-22</a:t>
             </a:fld>
             <a:endParaRPr lang="fr-CA"/>
           </a:p>
@@ -4343,7 +4779,7 @@
           <a:p>
             <a:fld id="{B1B97C2F-ED53-40B2-8245-274A53568F1F}" type="datetimeFigureOut">
               <a:rPr lang="fr-CA" smtClean="0"/>
-              <a:t>2026-05-13</a:t>
+              <a:t>2026-05-22</a:t>
             </a:fld>
             <a:endParaRPr lang="fr-CA"/>
           </a:p>
@@ -4611,7 +5047,7 @@
           <a:p>
             <a:fld id="{B1B97C2F-ED53-40B2-8245-274A53568F1F}" type="datetimeFigureOut">
               <a:rPr lang="fr-CA" smtClean="0"/>
-              <a:t>2026-05-13</a:t>
+              <a:t>2026-05-22</a:t>
             </a:fld>
             <a:endParaRPr lang="fr-CA"/>
           </a:p>
@@ -5026,7 +5462,7 @@
           <a:p>
             <a:fld id="{B1B97C2F-ED53-40B2-8245-274A53568F1F}" type="datetimeFigureOut">
               <a:rPr lang="fr-CA" smtClean="0"/>
-              <a:t>2026-05-13</a:t>
+              <a:t>2026-05-22</a:t>
             </a:fld>
             <a:endParaRPr lang="fr-CA"/>
           </a:p>
@@ -5168,7 +5604,7 @@
           <a:p>
             <a:fld id="{B1B97C2F-ED53-40B2-8245-274A53568F1F}" type="datetimeFigureOut">
               <a:rPr lang="fr-CA" smtClean="0"/>
-              <a:t>2026-05-13</a:t>
+              <a:t>2026-05-22</a:t>
             </a:fld>
             <a:endParaRPr lang="fr-CA"/>
           </a:p>
@@ -5281,7 +5717,7 @@
           <a:p>
             <a:fld id="{B1B97C2F-ED53-40B2-8245-274A53568F1F}" type="datetimeFigureOut">
               <a:rPr lang="fr-CA" smtClean="0"/>
-              <a:t>2026-05-13</a:t>
+              <a:t>2026-05-22</a:t>
             </a:fld>
             <a:endParaRPr lang="fr-CA"/>
           </a:p>
@@ -5594,7 +6030,7 @@
           <a:p>
             <a:fld id="{B1B97C2F-ED53-40B2-8245-274A53568F1F}" type="datetimeFigureOut">
               <a:rPr lang="fr-CA" smtClean="0"/>
-              <a:t>2026-05-13</a:t>
+              <a:t>2026-05-22</a:t>
             </a:fld>
             <a:endParaRPr lang="fr-CA"/>
           </a:p>
@@ -5883,7 +6319,7 @@
           <a:p>
             <a:fld id="{B1B97C2F-ED53-40B2-8245-274A53568F1F}" type="datetimeFigureOut">
               <a:rPr lang="fr-CA" smtClean="0"/>
-              <a:t>2026-05-13</a:t>
+              <a:t>2026-05-22</a:t>
             </a:fld>
             <a:endParaRPr lang="fr-CA"/>
           </a:p>
@@ -6126,7 +6562,7 @@
           <a:p>
             <a:fld id="{B1B97C2F-ED53-40B2-8245-274A53568F1F}" type="datetimeFigureOut">
               <a:rPr lang="fr-CA" smtClean="0"/>
-              <a:t>2026-05-13</a:t>
+              <a:t>2026-05-22</a:t>
             </a:fld>
             <a:endParaRPr lang="fr-CA"/>
           </a:p>
@@ -6696,7 +7132,7 @@
           <a:p>
             <a:fld id="{3CFA78C3-2C03-4D26-BA08-5201FB292C09}" type="datetimeFigureOut">
               <a:rPr lang="fr-CA" smtClean="0"/>
-              <a:t>2026-05-13</a:t>
+              <a:t>2026-05-22</a:t>
             </a:fld>
             <a:endParaRPr lang="fr-CA"/>
           </a:p>
@@ -11923,6 +12359,2408 @@
   <p:cSld>
     <p:spTree>
       <p:nvGrpSpPr>
+        <p:cNvPr id="1" name="">
+          <a:extLst>
+            <a:ext uri="{FF2B5EF4-FFF2-40B4-BE49-F238E27FC236}">
+              <a16:creationId xmlns:a16="http://schemas.microsoft.com/office/drawing/2014/main" id="{E140BEAD-72D2-8585-CBA3-D79D8072B7A4}"/>
+            </a:ext>
+          </a:extLst>
+        </p:cNvPr>
+        <p:cNvGrpSpPr/>
+        <p:nvPr/>
+      </p:nvGrpSpPr>
+      <p:grpSpPr>
+        <a:xfrm>
+          <a:off x="0" y="0"/>
+          <a:ext cx="0" cy="0"/>
+          <a:chOff x="0" y="0"/>
+          <a:chExt cx="0" cy="0"/>
+        </a:xfrm>
+      </p:grpSpPr>
+      <p:pic>
+        <p:nvPicPr>
+          <p:cNvPr id="12" name="Image 11">
+            <a:extLst>
+              <a:ext uri="{FF2B5EF4-FFF2-40B4-BE49-F238E27FC236}">
+                <a16:creationId xmlns:a16="http://schemas.microsoft.com/office/drawing/2014/main" id="{401EEE45-A391-D3E6-7CCD-3FCACB70177A}"/>
+              </a:ext>
+            </a:extLst>
+          </p:cNvPr>
+          <p:cNvPicPr>
+            <a:picLocks noChangeAspect="1"/>
+          </p:cNvPicPr>
+          <p:nvPr/>
+        </p:nvPicPr>
+        <p:blipFill>
+          <a:blip r:embed="rId3"/>
+          <a:stretch>
+            <a:fillRect/>
+          </a:stretch>
+        </p:blipFill>
+        <p:spPr>
+          <a:xfrm>
+            <a:off x="1509072" y="1009312"/>
+            <a:ext cx="9173855" cy="4839375"/>
+          </a:xfrm>
+          <a:prstGeom prst="rect">
+            <a:avLst/>
+          </a:prstGeom>
+        </p:spPr>
+      </p:pic>
+      <p:sp>
+        <p:nvSpPr>
+          <p:cNvPr id="8" name="Rectangle : coins arrondis 7">
+            <a:extLst>
+              <a:ext uri="{FF2B5EF4-FFF2-40B4-BE49-F238E27FC236}">
+                <a16:creationId xmlns:a16="http://schemas.microsoft.com/office/drawing/2014/main" id="{B2D453B3-F716-27AA-04BF-DD69D6B844D8}"/>
+              </a:ext>
+            </a:extLst>
+          </p:cNvPr>
+          <p:cNvSpPr/>
+          <p:nvPr/>
+        </p:nvSpPr>
+        <p:spPr>
+          <a:xfrm>
+            <a:off x="4945983" y="1305612"/>
+            <a:ext cx="5324540" cy="4543074"/>
+          </a:xfrm>
+          <a:prstGeom prst="roundRect">
+            <a:avLst>
+              <a:gd name="adj" fmla="val 0"/>
+            </a:avLst>
+          </a:prstGeom>
+          <a:noFill/>
+          <a:ln w="25400">
+            <a:solidFill>
+              <a:srgbClr val="FF0000"/>
+            </a:solidFill>
+          </a:ln>
+        </p:spPr>
+        <p:style>
+          <a:lnRef idx="2">
+            <a:schemeClr val="accent1">
+              <a:shade val="15000"/>
+            </a:schemeClr>
+          </a:lnRef>
+          <a:fillRef idx="1">
+            <a:schemeClr val="accent1"/>
+          </a:fillRef>
+          <a:effectRef idx="0">
+            <a:schemeClr val="accent1"/>
+          </a:effectRef>
+          <a:fontRef idx="minor">
+            <a:schemeClr val="lt1"/>
+          </a:fontRef>
+        </p:style>
+        <p:txBody>
+          <a:bodyPr rtlCol="0" anchor="ctr"/>
+          <a:lstStyle/>
+          <a:p>
+            <a:pPr algn="ctr"/>
+            <a:endParaRPr lang="en-CA" sz="2800" dirty="0">
+              <a:solidFill>
+                <a:srgbClr val="FF0000"/>
+              </a:solidFill>
+            </a:endParaRPr>
+          </a:p>
+        </p:txBody>
+      </p:sp>
+      <p:sp>
+        <p:nvSpPr>
+          <p:cNvPr id="60" name="ZoneTexte 59">
+            <a:extLst>
+              <a:ext uri="{FF2B5EF4-FFF2-40B4-BE49-F238E27FC236}">
+                <a16:creationId xmlns:a16="http://schemas.microsoft.com/office/drawing/2014/main" id="{F20D7410-680F-C5A4-DB0E-790FD5E27DC2}"/>
+              </a:ext>
+            </a:extLst>
+          </p:cNvPr>
+          <p:cNvSpPr txBox="1"/>
+          <p:nvPr/>
+        </p:nvSpPr>
+        <p:spPr>
+          <a:xfrm>
+            <a:off x="3745105" y="1939241"/>
+            <a:ext cx="1070040" cy="461665"/>
+          </a:xfrm>
+          <a:prstGeom prst="rect">
+            <a:avLst/>
+          </a:prstGeom>
+          <a:noFill/>
+        </p:spPr>
+        <p:txBody>
+          <a:bodyPr wrap="square" rtlCol="0">
+            <a:spAutoFit/>
+          </a:bodyPr>
+          <a:lstStyle/>
+          <a:p>
+            <a:pPr algn="ctr"/>
+            <a:r>
+              <a:rPr lang="en-CA" sz="1200" dirty="0">
+                <a:solidFill>
+                  <a:srgbClr val="FF0000"/>
+                </a:solidFill>
+              </a:rPr>
+              <a:t>Available Widgets</a:t>
+            </a:r>
+          </a:p>
+        </p:txBody>
+      </p:sp>
+      <p:cxnSp>
+        <p:nvCxnSpPr>
+          <p:cNvPr id="14" name="Connecteur droit avec flèche 13">
+            <a:extLst>
+              <a:ext uri="{FF2B5EF4-FFF2-40B4-BE49-F238E27FC236}">
+                <a16:creationId xmlns:a16="http://schemas.microsoft.com/office/drawing/2014/main" id="{D7E29A6C-580F-D0A7-1ADA-BF7240D3B17A}"/>
+              </a:ext>
+            </a:extLst>
+          </p:cNvPr>
+          <p:cNvCxnSpPr>
+            <a:cxnSpLocks/>
+          </p:cNvCxnSpPr>
+          <p:nvPr/>
+        </p:nvCxnSpPr>
+        <p:spPr>
+          <a:xfrm flipH="1" flipV="1">
+            <a:off x="3179040" y="2158738"/>
+            <a:ext cx="734301" cy="135668"/>
+          </a:xfrm>
+          <a:prstGeom prst="straightConnector1">
+            <a:avLst/>
+          </a:prstGeom>
+          <a:ln w="25400">
+            <a:solidFill>
+              <a:srgbClr val="FF0000"/>
+            </a:solidFill>
+            <a:tailEnd type="triangle"/>
+          </a:ln>
+        </p:spPr>
+        <p:style>
+          <a:lnRef idx="2">
+            <a:schemeClr val="accent1"/>
+          </a:lnRef>
+          <a:fillRef idx="0">
+            <a:schemeClr val="accent1"/>
+          </a:fillRef>
+          <a:effectRef idx="1">
+            <a:schemeClr val="accent1"/>
+          </a:effectRef>
+          <a:fontRef idx="minor">
+            <a:schemeClr val="tx1"/>
+          </a:fontRef>
+        </p:style>
+      </p:cxnSp>
+      <p:cxnSp>
+        <p:nvCxnSpPr>
+          <p:cNvPr id="20" name="Connecteur droit avec flèche 19">
+            <a:extLst>
+              <a:ext uri="{FF2B5EF4-FFF2-40B4-BE49-F238E27FC236}">
+                <a16:creationId xmlns:a16="http://schemas.microsoft.com/office/drawing/2014/main" id="{568E9C44-F6D5-3459-0AE4-207C668887E4}"/>
+              </a:ext>
+            </a:extLst>
+          </p:cNvPr>
+          <p:cNvCxnSpPr>
+            <a:cxnSpLocks/>
+          </p:cNvCxnSpPr>
+          <p:nvPr/>
+        </p:nvCxnSpPr>
+        <p:spPr>
+          <a:xfrm flipH="1">
+            <a:off x="3228749" y="2294407"/>
+            <a:ext cx="684592" cy="882181"/>
+          </a:xfrm>
+          <a:prstGeom prst="straightConnector1">
+            <a:avLst/>
+          </a:prstGeom>
+          <a:ln w="25400">
+            <a:solidFill>
+              <a:srgbClr val="FF0000"/>
+            </a:solidFill>
+            <a:tailEnd type="triangle"/>
+          </a:ln>
+        </p:spPr>
+        <p:style>
+          <a:lnRef idx="2">
+            <a:schemeClr val="accent1"/>
+          </a:lnRef>
+          <a:fillRef idx="0">
+            <a:schemeClr val="accent1"/>
+          </a:fillRef>
+          <a:effectRef idx="1">
+            <a:schemeClr val="accent1"/>
+          </a:effectRef>
+          <a:fontRef idx="minor">
+            <a:schemeClr val="tx1"/>
+          </a:fontRef>
+        </p:style>
+      </p:cxnSp>
+      <p:cxnSp>
+        <p:nvCxnSpPr>
+          <p:cNvPr id="24" name="Connecteur droit avec flèche 23">
+            <a:extLst>
+              <a:ext uri="{FF2B5EF4-FFF2-40B4-BE49-F238E27FC236}">
+                <a16:creationId xmlns:a16="http://schemas.microsoft.com/office/drawing/2014/main" id="{88C558DE-2AD0-76B5-5C1A-235A54248CF2}"/>
+              </a:ext>
+            </a:extLst>
+          </p:cNvPr>
+          <p:cNvCxnSpPr>
+            <a:cxnSpLocks/>
+          </p:cNvCxnSpPr>
+          <p:nvPr/>
+        </p:nvCxnSpPr>
+        <p:spPr>
+          <a:xfrm flipH="1">
+            <a:off x="3714161" y="2294408"/>
+            <a:ext cx="217335" cy="2287019"/>
+          </a:xfrm>
+          <a:prstGeom prst="straightConnector1">
+            <a:avLst/>
+          </a:prstGeom>
+          <a:ln w="25400">
+            <a:solidFill>
+              <a:srgbClr val="FF0000"/>
+            </a:solidFill>
+            <a:tailEnd type="triangle"/>
+          </a:ln>
+        </p:spPr>
+        <p:style>
+          <a:lnRef idx="2">
+            <a:schemeClr val="accent1"/>
+          </a:lnRef>
+          <a:fillRef idx="0">
+            <a:schemeClr val="accent1"/>
+          </a:fillRef>
+          <a:effectRef idx="1">
+            <a:schemeClr val="accent1"/>
+          </a:effectRef>
+          <a:fontRef idx="minor">
+            <a:schemeClr val="tx1"/>
+          </a:fontRef>
+        </p:style>
+      </p:cxnSp>
+      <p:sp>
+        <p:nvSpPr>
+          <p:cNvPr id="27" name="ZoneTexte 26">
+            <a:extLst>
+              <a:ext uri="{FF2B5EF4-FFF2-40B4-BE49-F238E27FC236}">
+                <a16:creationId xmlns:a16="http://schemas.microsoft.com/office/drawing/2014/main" id="{33132E9D-3347-728C-0FC5-C1B085EBDF52}"/>
+              </a:ext>
+            </a:extLst>
+          </p:cNvPr>
+          <p:cNvSpPr txBox="1"/>
+          <p:nvPr/>
+        </p:nvSpPr>
+        <p:spPr>
+          <a:xfrm>
+            <a:off x="6979684" y="1305612"/>
+            <a:ext cx="1070040" cy="461665"/>
+          </a:xfrm>
+          <a:prstGeom prst="rect">
+            <a:avLst/>
+          </a:prstGeom>
+          <a:noFill/>
+        </p:spPr>
+        <p:txBody>
+          <a:bodyPr wrap="square" rtlCol="0">
+            <a:spAutoFit/>
+          </a:bodyPr>
+          <a:lstStyle/>
+          <a:p>
+            <a:pPr algn="ctr"/>
+            <a:r>
+              <a:rPr lang="en-CA" sz="1200" b="1" dirty="0">
+                <a:solidFill>
+                  <a:srgbClr val="FF0000"/>
+                </a:solidFill>
+              </a:rPr>
+              <a:t>Work zone</a:t>
+            </a:r>
+          </a:p>
+          <a:p>
+            <a:pPr algn="ctr"/>
+            <a:r>
+              <a:rPr lang="en-CA" sz="1200" b="1" dirty="0">
+                <a:solidFill>
+                  <a:srgbClr val="FF0000"/>
+                </a:solidFill>
+              </a:rPr>
+              <a:t>(edit mode)</a:t>
+            </a:r>
+          </a:p>
+        </p:txBody>
+      </p:sp>
+      <p:sp>
+        <p:nvSpPr>
+          <p:cNvPr id="28" name="ZoneTexte 27">
+            <a:extLst>
+              <a:ext uri="{FF2B5EF4-FFF2-40B4-BE49-F238E27FC236}">
+                <a16:creationId xmlns:a16="http://schemas.microsoft.com/office/drawing/2014/main" id="{29EA9F49-1023-41D1-3E98-F9A89EE76791}"/>
+              </a:ext>
+            </a:extLst>
+          </p:cNvPr>
+          <p:cNvSpPr txBox="1"/>
+          <p:nvPr/>
+        </p:nvSpPr>
+        <p:spPr>
+          <a:xfrm>
+            <a:off x="8288429" y="2899589"/>
+            <a:ext cx="1070040" cy="461665"/>
+          </a:xfrm>
+          <a:prstGeom prst="rect">
+            <a:avLst/>
+          </a:prstGeom>
+          <a:noFill/>
+        </p:spPr>
+        <p:txBody>
+          <a:bodyPr wrap="square" rtlCol="0">
+            <a:spAutoFit/>
+          </a:bodyPr>
+          <a:lstStyle/>
+          <a:p>
+            <a:pPr algn="ctr"/>
+            <a:r>
+              <a:rPr lang="en-CA" sz="1200" dirty="0">
+                <a:solidFill>
+                  <a:srgbClr val="FF0000"/>
+                </a:solidFill>
+              </a:rPr>
+              <a:t>User placed widgets</a:t>
+            </a:r>
+          </a:p>
+        </p:txBody>
+      </p:sp>
+      <p:cxnSp>
+        <p:nvCxnSpPr>
+          <p:cNvPr id="29" name="Connecteur droit avec flèche 28">
+            <a:extLst>
+              <a:ext uri="{FF2B5EF4-FFF2-40B4-BE49-F238E27FC236}">
+                <a16:creationId xmlns:a16="http://schemas.microsoft.com/office/drawing/2014/main" id="{E1C62237-59B0-1505-CA57-C42C579CE1B8}"/>
+              </a:ext>
+            </a:extLst>
+          </p:cNvPr>
+          <p:cNvCxnSpPr>
+            <a:cxnSpLocks/>
+          </p:cNvCxnSpPr>
+          <p:nvPr/>
+        </p:nvCxnSpPr>
+        <p:spPr>
+          <a:xfrm flipH="1" flipV="1">
+            <a:off x="6749592" y="2572723"/>
+            <a:ext cx="1640264" cy="472135"/>
+          </a:xfrm>
+          <a:prstGeom prst="straightConnector1">
+            <a:avLst/>
+          </a:prstGeom>
+          <a:ln w="25400">
+            <a:solidFill>
+              <a:srgbClr val="FF0000"/>
+            </a:solidFill>
+            <a:tailEnd type="triangle"/>
+          </a:ln>
+        </p:spPr>
+        <p:style>
+          <a:lnRef idx="2">
+            <a:schemeClr val="accent1"/>
+          </a:lnRef>
+          <a:fillRef idx="0">
+            <a:schemeClr val="accent1"/>
+          </a:fillRef>
+          <a:effectRef idx="1">
+            <a:schemeClr val="accent1"/>
+          </a:effectRef>
+          <a:fontRef idx="minor">
+            <a:schemeClr val="tx1"/>
+          </a:fontRef>
+        </p:style>
+      </p:cxnSp>
+      <p:cxnSp>
+        <p:nvCxnSpPr>
+          <p:cNvPr id="33" name="Connecteur droit avec flèche 32">
+            <a:extLst>
+              <a:ext uri="{FF2B5EF4-FFF2-40B4-BE49-F238E27FC236}">
+                <a16:creationId xmlns:a16="http://schemas.microsoft.com/office/drawing/2014/main" id="{20C2DA27-2705-E312-E7AE-A2ED6CBF8D81}"/>
+              </a:ext>
+            </a:extLst>
+          </p:cNvPr>
+          <p:cNvCxnSpPr>
+            <a:cxnSpLocks/>
+          </p:cNvCxnSpPr>
+          <p:nvPr/>
+        </p:nvCxnSpPr>
+        <p:spPr>
+          <a:xfrm flipH="1">
+            <a:off x="7608253" y="3176588"/>
+            <a:ext cx="866444" cy="1520823"/>
+          </a:xfrm>
+          <a:prstGeom prst="straightConnector1">
+            <a:avLst/>
+          </a:prstGeom>
+          <a:ln w="25400">
+            <a:solidFill>
+              <a:srgbClr val="FF0000"/>
+            </a:solidFill>
+            <a:tailEnd type="triangle"/>
+          </a:ln>
+        </p:spPr>
+        <p:style>
+          <a:lnRef idx="2">
+            <a:schemeClr val="accent1"/>
+          </a:lnRef>
+          <a:fillRef idx="0">
+            <a:schemeClr val="accent1"/>
+          </a:fillRef>
+          <a:effectRef idx="1">
+            <a:schemeClr val="accent1"/>
+          </a:effectRef>
+          <a:fontRef idx="minor">
+            <a:schemeClr val="tx1"/>
+          </a:fontRef>
+        </p:style>
+      </p:cxnSp>
+      <p:sp>
+        <p:nvSpPr>
+          <p:cNvPr id="43" name="Rectangle : coins arrondis 42">
+            <a:extLst>
+              <a:ext uri="{FF2B5EF4-FFF2-40B4-BE49-F238E27FC236}">
+                <a16:creationId xmlns:a16="http://schemas.microsoft.com/office/drawing/2014/main" id="{9D13BFA1-D2C3-2310-8794-18C13374F8FB}"/>
+              </a:ext>
+            </a:extLst>
+          </p:cNvPr>
+          <p:cNvSpPr/>
+          <p:nvPr/>
+        </p:nvSpPr>
+        <p:spPr>
+          <a:xfrm>
+            <a:off x="1509072" y="1305612"/>
+            <a:ext cx="3436911" cy="4543074"/>
+          </a:xfrm>
+          <a:prstGeom prst="roundRect">
+            <a:avLst>
+              <a:gd name="adj" fmla="val 0"/>
+            </a:avLst>
+          </a:prstGeom>
+          <a:noFill/>
+          <a:ln w="25400">
+            <a:solidFill>
+              <a:srgbClr val="FF0000"/>
+            </a:solidFill>
+          </a:ln>
+        </p:spPr>
+        <p:style>
+          <a:lnRef idx="2">
+            <a:schemeClr val="accent1">
+              <a:shade val="15000"/>
+            </a:schemeClr>
+          </a:lnRef>
+          <a:fillRef idx="1">
+            <a:schemeClr val="accent1"/>
+          </a:fillRef>
+          <a:effectRef idx="0">
+            <a:schemeClr val="accent1"/>
+          </a:effectRef>
+          <a:fontRef idx="minor">
+            <a:schemeClr val="lt1"/>
+          </a:fontRef>
+        </p:style>
+        <p:txBody>
+          <a:bodyPr rtlCol="0" anchor="ctr"/>
+          <a:lstStyle/>
+          <a:p>
+            <a:pPr algn="ctr"/>
+            <a:endParaRPr lang="en-CA" sz="2800" dirty="0">
+              <a:solidFill>
+                <a:srgbClr val="FF0000"/>
+              </a:solidFill>
+            </a:endParaRPr>
+          </a:p>
+        </p:txBody>
+      </p:sp>
+      <p:sp>
+        <p:nvSpPr>
+          <p:cNvPr id="50" name="ZoneTexte 49">
+            <a:extLst>
+              <a:ext uri="{FF2B5EF4-FFF2-40B4-BE49-F238E27FC236}">
+                <a16:creationId xmlns:a16="http://schemas.microsoft.com/office/drawing/2014/main" id="{F808FE48-D532-833F-0A54-848B58DD7F16}"/>
+              </a:ext>
+            </a:extLst>
+          </p:cNvPr>
+          <p:cNvSpPr txBox="1"/>
+          <p:nvPr/>
+        </p:nvSpPr>
+        <p:spPr>
+          <a:xfrm>
+            <a:off x="2861456" y="1305612"/>
+            <a:ext cx="1070040" cy="461665"/>
+          </a:xfrm>
+          <a:prstGeom prst="rect">
+            <a:avLst/>
+          </a:prstGeom>
+          <a:noFill/>
+        </p:spPr>
+        <p:txBody>
+          <a:bodyPr wrap="square" rtlCol="0">
+            <a:spAutoFit/>
+          </a:bodyPr>
+          <a:lstStyle/>
+          <a:p>
+            <a:pPr algn="ctr"/>
+            <a:r>
+              <a:rPr lang="en-CA" sz="1200" b="1" dirty="0">
+                <a:solidFill>
+                  <a:srgbClr val="FF0000"/>
+                </a:solidFill>
+              </a:rPr>
+              <a:t>Left menu</a:t>
+            </a:r>
+          </a:p>
+          <a:p>
+            <a:pPr algn="ctr"/>
+            <a:r>
+              <a:rPr lang="en-CA" sz="1200" b="1" dirty="0">
+                <a:solidFill>
+                  <a:srgbClr val="FF0000"/>
+                </a:solidFill>
+              </a:rPr>
+              <a:t>(edit mode)</a:t>
+            </a:r>
+          </a:p>
+        </p:txBody>
+      </p:sp>
+    </p:spTree>
+    <p:extLst>
+      <p:ext uri="{BB962C8B-B14F-4D97-AF65-F5344CB8AC3E}">
+        <p14:creationId xmlns:p14="http://schemas.microsoft.com/office/powerpoint/2010/main" val="1453415493"/>
+      </p:ext>
+    </p:extLst>
+  </p:cSld>
+  <p:clrMapOvr>
+    <a:masterClrMapping/>
+  </p:clrMapOvr>
+</p:sld>
+</file>
+
+<file path=ppt/slides/slide13.xml><?xml version="1.0" encoding="utf-8"?>
+<p:sld xmlns:a="http://schemas.openxmlformats.org/drawingml/2006/main" xmlns:r="http://schemas.openxmlformats.org/officeDocument/2006/relationships" xmlns:p="http://schemas.openxmlformats.org/presentationml/2006/main">
+  <p:cSld>
+    <p:spTree>
+      <p:nvGrpSpPr>
+        <p:cNvPr id="1" name="">
+          <a:extLst>
+            <a:ext uri="{FF2B5EF4-FFF2-40B4-BE49-F238E27FC236}">
+              <a16:creationId xmlns:a16="http://schemas.microsoft.com/office/drawing/2014/main" id="{B41F39C1-E060-1411-19ED-E4787B575A61}"/>
+            </a:ext>
+          </a:extLst>
+        </p:cNvPr>
+        <p:cNvGrpSpPr/>
+        <p:nvPr/>
+      </p:nvGrpSpPr>
+      <p:grpSpPr>
+        <a:xfrm>
+          <a:off x="0" y="0"/>
+          <a:ext cx="0" cy="0"/>
+          <a:chOff x="0" y="0"/>
+          <a:chExt cx="0" cy="0"/>
+        </a:xfrm>
+      </p:grpSpPr>
+      <p:pic>
+        <p:nvPicPr>
+          <p:cNvPr id="9" name="Image 8">
+            <a:extLst>
+              <a:ext uri="{FF2B5EF4-FFF2-40B4-BE49-F238E27FC236}">
+                <a16:creationId xmlns:a16="http://schemas.microsoft.com/office/drawing/2014/main" id="{65B80316-59F0-6A75-C3D9-774DA78E9180}"/>
+              </a:ext>
+            </a:extLst>
+          </p:cNvPr>
+          <p:cNvPicPr>
+            <a:picLocks noChangeAspect="1"/>
+          </p:cNvPicPr>
+          <p:nvPr/>
+        </p:nvPicPr>
+        <p:blipFill>
+          <a:blip r:embed="rId3"/>
+          <a:stretch>
+            <a:fillRect/>
+          </a:stretch>
+        </p:blipFill>
+        <p:spPr>
+          <a:xfrm>
+            <a:off x="2748539" y="561575"/>
+            <a:ext cx="6935168" cy="5734850"/>
+          </a:xfrm>
+          <a:prstGeom prst="rect">
+            <a:avLst/>
+          </a:prstGeom>
+        </p:spPr>
+      </p:pic>
+      <p:sp>
+        <p:nvSpPr>
+          <p:cNvPr id="6" name="Rectangle : coins arrondis 5">
+            <a:extLst>
+              <a:ext uri="{FF2B5EF4-FFF2-40B4-BE49-F238E27FC236}">
+                <a16:creationId xmlns:a16="http://schemas.microsoft.com/office/drawing/2014/main" id="{6DF9B8FE-8576-94AE-E954-A41C7766CAC8}"/>
+              </a:ext>
+            </a:extLst>
+          </p:cNvPr>
+          <p:cNvSpPr/>
+          <p:nvPr/>
+        </p:nvSpPr>
+        <p:spPr>
+          <a:xfrm>
+            <a:off x="2760323" y="2384980"/>
+            <a:ext cx="3335677" cy="3987655"/>
+          </a:xfrm>
+          <a:prstGeom prst="roundRect">
+            <a:avLst>
+              <a:gd name="adj" fmla="val 0"/>
+            </a:avLst>
+          </a:prstGeom>
+          <a:solidFill>
+            <a:schemeClr val="accent6">
+              <a:lumMod val="40000"/>
+              <a:lumOff val="60000"/>
+              <a:alpha val="25000"/>
+            </a:schemeClr>
+          </a:solidFill>
+          <a:ln>
+            <a:solidFill>
+              <a:srgbClr val="FF0000"/>
+            </a:solidFill>
+          </a:ln>
+        </p:spPr>
+        <p:style>
+          <a:lnRef idx="2">
+            <a:schemeClr val="accent1">
+              <a:shade val="15000"/>
+            </a:schemeClr>
+          </a:lnRef>
+          <a:fillRef idx="1">
+            <a:schemeClr val="accent1"/>
+          </a:fillRef>
+          <a:effectRef idx="0">
+            <a:schemeClr val="accent1"/>
+          </a:effectRef>
+          <a:fontRef idx="minor">
+            <a:schemeClr val="lt1"/>
+          </a:fontRef>
+        </p:style>
+        <p:txBody>
+          <a:bodyPr rtlCol="0" anchor="ctr"/>
+          <a:lstStyle/>
+          <a:p>
+            <a:pPr algn="ctr"/>
+            <a:endParaRPr lang="en-CA" dirty="0"/>
+          </a:p>
+        </p:txBody>
+      </p:sp>
+      <p:sp>
+        <p:nvSpPr>
+          <p:cNvPr id="60" name="ZoneTexte 59">
+            <a:extLst>
+              <a:ext uri="{FF2B5EF4-FFF2-40B4-BE49-F238E27FC236}">
+                <a16:creationId xmlns:a16="http://schemas.microsoft.com/office/drawing/2014/main" id="{C664ABDE-353E-837F-A858-3CFF6FF2B2BF}"/>
+              </a:ext>
+            </a:extLst>
+          </p:cNvPr>
+          <p:cNvSpPr txBox="1"/>
+          <p:nvPr/>
+        </p:nvSpPr>
+        <p:spPr>
+          <a:xfrm>
+            <a:off x="7036255" y="4657543"/>
+            <a:ext cx="1570898" cy="276999"/>
+          </a:xfrm>
+          <a:prstGeom prst="rect">
+            <a:avLst/>
+          </a:prstGeom>
+          <a:noFill/>
+        </p:spPr>
+        <p:txBody>
+          <a:bodyPr wrap="square" rtlCol="0">
+            <a:spAutoFit/>
+          </a:bodyPr>
+          <a:lstStyle/>
+          <a:p>
+            <a:pPr algn="ctr"/>
+            <a:r>
+              <a:rPr lang="en-CA" sz="1200" dirty="0">
+                <a:solidFill>
+                  <a:srgbClr val="FF0000"/>
+                </a:solidFill>
+              </a:rPr>
+              <a:t>Selected widget</a:t>
+            </a:r>
+          </a:p>
+        </p:txBody>
+      </p:sp>
+      <p:sp>
+        <p:nvSpPr>
+          <p:cNvPr id="4" name="Rectangle : coins arrondis 3">
+            <a:extLst>
+              <a:ext uri="{FF2B5EF4-FFF2-40B4-BE49-F238E27FC236}">
+                <a16:creationId xmlns:a16="http://schemas.microsoft.com/office/drawing/2014/main" id="{B9822253-8ECA-F381-A0DF-637A8316859D}"/>
+              </a:ext>
+            </a:extLst>
+          </p:cNvPr>
+          <p:cNvSpPr/>
+          <p:nvPr/>
+        </p:nvSpPr>
+        <p:spPr>
+          <a:xfrm>
+            <a:off x="2760323" y="1023240"/>
+            <a:ext cx="3335677" cy="1361739"/>
+          </a:xfrm>
+          <a:prstGeom prst="roundRect">
+            <a:avLst>
+              <a:gd name="adj" fmla="val 0"/>
+            </a:avLst>
+          </a:prstGeom>
+          <a:solidFill>
+            <a:schemeClr val="accent1">
+              <a:lumMod val="40000"/>
+              <a:lumOff val="60000"/>
+              <a:alpha val="25000"/>
+            </a:schemeClr>
+          </a:solidFill>
+          <a:ln>
+            <a:solidFill>
+              <a:srgbClr val="FF0000"/>
+            </a:solidFill>
+          </a:ln>
+        </p:spPr>
+        <p:style>
+          <a:lnRef idx="2">
+            <a:schemeClr val="accent1">
+              <a:shade val="15000"/>
+            </a:schemeClr>
+          </a:lnRef>
+          <a:fillRef idx="1">
+            <a:schemeClr val="accent1"/>
+          </a:fillRef>
+          <a:effectRef idx="0">
+            <a:schemeClr val="accent1"/>
+          </a:effectRef>
+          <a:fontRef idx="minor">
+            <a:schemeClr val="lt1"/>
+          </a:fontRef>
+        </p:style>
+        <p:txBody>
+          <a:bodyPr rtlCol="0" anchor="ctr"/>
+          <a:lstStyle/>
+          <a:p>
+            <a:pPr algn="ctr"/>
+            <a:endParaRPr lang="en-CA" dirty="0"/>
+          </a:p>
+        </p:txBody>
+      </p:sp>
+      <p:sp>
+        <p:nvSpPr>
+          <p:cNvPr id="11" name="ZoneTexte 10">
+            <a:extLst>
+              <a:ext uri="{FF2B5EF4-FFF2-40B4-BE49-F238E27FC236}">
+                <a16:creationId xmlns:a16="http://schemas.microsoft.com/office/drawing/2014/main" id="{56C82EA6-DC28-ACA5-4443-CE45531E17F5}"/>
+              </a:ext>
+            </a:extLst>
+          </p:cNvPr>
+          <p:cNvSpPr txBox="1"/>
+          <p:nvPr/>
+        </p:nvSpPr>
+        <p:spPr>
+          <a:xfrm>
+            <a:off x="3758870" y="1023240"/>
+            <a:ext cx="1710248" cy="461665"/>
+          </a:xfrm>
+          <a:prstGeom prst="rect">
+            <a:avLst/>
+          </a:prstGeom>
+          <a:noFill/>
+        </p:spPr>
+        <p:txBody>
+          <a:bodyPr wrap="square" rtlCol="0">
+            <a:spAutoFit/>
+          </a:bodyPr>
+          <a:lstStyle/>
+          <a:p>
+            <a:pPr algn="ctr"/>
+            <a:r>
+              <a:rPr lang="en-CA" sz="1200" dirty="0">
+                <a:solidFill>
+                  <a:srgbClr val="FF0000"/>
+                </a:solidFill>
+              </a:rPr>
+              <a:t>Input values</a:t>
+            </a:r>
+            <a:br>
+              <a:rPr lang="en-CA" sz="1200" dirty="0">
+                <a:solidFill>
+                  <a:srgbClr val="FF0000"/>
+                </a:solidFill>
+              </a:rPr>
+            </a:br>
+            <a:r>
+              <a:rPr lang="en-CA" sz="1200" dirty="0">
+                <a:solidFill>
+                  <a:srgbClr val="FF0000"/>
+                </a:solidFill>
+              </a:rPr>
+              <a:t>(tied to </a:t>
+            </a:r>
+            <a:r>
+              <a:rPr lang="en-CA" sz="1200" dirty="0" err="1">
+                <a:solidFill>
+                  <a:srgbClr val="FF0000"/>
+                </a:solidFill>
+              </a:rPr>
+              <a:t>watchables</a:t>
+            </a:r>
+            <a:r>
+              <a:rPr lang="en-CA" sz="1200" dirty="0">
+                <a:solidFill>
+                  <a:srgbClr val="FF0000"/>
+                </a:solidFill>
+              </a:rPr>
+              <a:t>)</a:t>
+            </a:r>
+          </a:p>
+        </p:txBody>
+      </p:sp>
+      <p:sp>
+        <p:nvSpPr>
+          <p:cNvPr id="13" name="ZoneTexte 12">
+            <a:extLst>
+              <a:ext uri="{FF2B5EF4-FFF2-40B4-BE49-F238E27FC236}">
+                <a16:creationId xmlns:a16="http://schemas.microsoft.com/office/drawing/2014/main" id="{EDC5E0E8-5AAC-2F97-5EFD-F174AC5BC095}"/>
+              </a:ext>
+            </a:extLst>
+          </p:cNvPr>
+          <p:cNvSpPr txBox="1"/>
+          <p:nvPr/>
+        </p:nvSpPr>
+        <p:spPr>
+          <a:xfrm>
+            <a:off x="3758870" y="5772348"/>
+            <a:ext cx="1710248" cy="461665"/>
+          </a:xfrm>
+          <a:prstGeom prst="rect">
+            <a:avLst/>
+          </a:prstGeom>
+          <a:noFill/>
+        </p:spPr>
+        <p:txBody>
+          <a:bodyPr wrap="square" rtlCol="0">
+            <a:spAutoFit/>
+          </a:bodyPr>
+          <a:lstStyle/>
+          <a:p>
+            <a:pPr algn="ctr"/>
+            <a:r>
+              <a:rPr lang="en-CA" sz="1200" dirty="0">
+                <a:solidFill>
+                  <a:srgbClr val="FF0000"/>
+                </a:solidFill>
+              </a:rPr>
+              <a:t>Constant configuration</a:t>
+            </a:r>
+            <a:br>
+              <a:rPr lang="en-CA" sz="1200" dirty="0">
+                <a:solidFill>
+                  <a:srgbClr val="FF0000"/>
+                </a:solidFill>
+              </a:rPr>
+            </a:br>
+            <a:r>
+              <a:rPr lang="en-CA" sz="1200" dirty="0">
+                <a:solidFill>
+                  <a:srgbClr val="FF0000"/>
+                </a:solidFill>
+              </a:rPr>
+              <a:t>(Not tied to </a:t>
+            </a:r>
+            <a:r>
+              <a:rPr lang="en-CA" sz="1200" dirty="0" err="1">
+                <a:solidFill>
+                  <a:srgbClr val="FF0000"/>
+                </a:solidFill>
+              </a:rPr>
+              <a:t>watchables</a:t>
+            </a:r>
+            <a:r>
+              <a:rPr lang="en-CA" sz="1200" dirty="0">
+                <a:solidFill>
+                  <a:srgbClr val="FF0000"/>
+                </a:solidFill>
+              </a:rPr>
+              <a:t>)</a:t>
+            </a:r>
+          </a:p>
+        </p:txBody>
+      </p:sp>
+      <p:sp>
+        <p:nvSpPr>
+          <p:cNvPr id="15" name="ZoneTexte 14">
+            <a:extLst>
+              <a:ext uri="{FF2B5EF4-FFF2-40B4-BE49-F238E27FC236}">
+                <a16:creationId xmlns:a16="http://schemas.microsoft.com/office/drawing/2014/main" id="{126E6EB1-3DDC-4389-69D0-7FEDD1C4B8D2}"/>
+              </a:ext>
+            </a:extLst>
+          </p:cNvPr>
+          <p:cNvSpPr txBox="1"/>
+          <p:nvPr/>
+        </p:nvSpPr>
+        <p:spPr>
+          <a:xfrm>
+            <a:off x="7354833" y="840532"/>
+            <a:ext cx="1070040" cy="461665"/>
+          </a:xfrm>
+          <a:prstGeom prst="rect">
+            <a:avLst/>
+          </a:prstGeom>
+          <a:noFill/>
+        </p:spPr>
+        <p:txBody>
+          <a:bodyPr wrap="square" rtlCol="0">
+            <a:spAutoFit/>
+          </a:bodyPr>
+          <a:lstStyle/>
+          <a:p>
+            <a:pPr algn="ctr"/>
+            <a:r>
+              <a:rPr lang="en-CA" sz="1200" b="1" dirty="0">
+                <a:solidFill>
+                  <a:srgbClr val="FF0000"/>
+                </a:solidFill>
+              </a:rPr>
+              <a:t>Work zone</a:t>
+            </a:r>
+          </a:p>
+          <a:p>
+            <a:pPr algn="ctr"/>
+            <a:r>
+              <a:rPr lang="en-CA" sz="1200" b="1" dirty="0">
+                <a:solidFill>
+                  <a:srgbClr val="FF0000"/>
+                </a:solidFill>
+              </a:rPr>
+              <a:t>(edit mode)</a:t>
+            </a:r>
+          </a:p>
+        </p:txBody>
+      </p:sp>
+      <p:sp>
+        <p:nvSpPr>
+          <p:cNvPr id="16" name="ZoneTexte 15">
+            <a:extLst>
+              <a:ext uri="{FF2B5EF4-FFF2-40B4-BE49-F238E27FC236}">
+                <a16:creationId xmlns:a16="http://schemas.microsoft.com/office/drawing/2014/main" id="{1B72CA12-E178-0875-AF2B-769B6EDB1DD7}"/>
+              </a:ext>
+            </a:extLst>
+          </p:cNvPr>
+          <p:cNvSpPr txBox="1"/>
+          <p:nvPr/>
+        </p:nvSpPr>
+        <p:spPr>
+          <a:xfrm>
+            <a:off x="8705579" y="1603656"/>
+            <a:ext cx="1071696" cy="276999"/>
+          </a:xfrm>
+          <a:prstGeom prst="rect">
+            <a:avLst/>
+          </a:prstGeom>
+          <a:noFill/>
+        </p:spPr>
+        <p:txBody>
+          <a:bodyPr wrap="square" rtlCol="0">
+            <a:spAutoFit/>
+          </a:bodyPr>
+          <a:lstStyle/>
+          <a:p>
+            <a:pPr algn="ctr"/>
+            <a:r>
+              <a:rPr lang="en-CA" sz="1200" dirty="0">
+                <a:solidFill>
+                  <a:srgbClr val="FF0000"/>
+                </a:solidFill>
+              </a:rPr>
+              <a:t>Resize handle</a:t>
+            </a:r>
+          </a:p>
+        </p:txBody>
+      </p:sp>
+      <p:cxnSp>
+        <p:nvCxnSpPr>
+          <p:cNvPr id="17" name="Connecteur droit avec flèche 16">
+            <a:extLst>
+              <a:ext uri="{FF2B5EF4-FFF2-40B4-BE49-F238E27FC236}">
+                <a16:creationId xmlns:a16="http://schemas.microsoft.com/office/drawing/2014/main" id="{965F60D8-F79A-4865-63E6-32AA5323FD97}"/>
+              </a:ext>
+            </a:extLst>
+          </p:cNvPr>
+          <p:cNvCxnSpPr>
+            <a:cxnSpLocks/>
+            <a:stCxn id="16" idx="2"/>
+          </p:cNvCxnSpPr>
+          <p:nvPr/>
+        </p:nvCxnSpPr>
+        <p:spPr>
+          <a:xfrm flipH="1">
+            <a:off x="8955464" y="1880655"/>
+            <a:ext cx="285963" cy="598594"/>
+          </a:xfrm>
+          <a:prstGeom prst="straightConnector1">
+            <a:avLst/>
+          </a:prstGeom>
+          <a:ln w="25400">
+            <a:solidFill>
+              <a:srgbClr val="FF0000"/>
+            </a:solidFill>
+            <a:tailEnd type="triangle"/>
+          </a:ln>
+        </p:spPr>
+        <p:style>
+          <a:lnRef idx="2">
+            <a:schemeClr val="accent1"/>
+          </a:lnRef>
+          <a:fillRef idx="0">
+            <a:schemeClr val="accent1"/>
+          </a:fillRef>
+          <a:effectRef idx="1">
+            <a:schemeClr val="accent1"/>
+          </a:effectRef>
+          <a:fontRef idx="minor">
+            <a:schemeClr val="tx1"/>
+          </a:fontRef>
+        </p:style>
+      </p:cxnSp>
+    </p:spTree>
+    <p:extLst>
+      <p:ext uri="{BB962C8B-B14F-4D97-AF65-F5344CB8AC3E}">
+        <p14:creationId xmlns:p14="http://schemas.microsoft.com/office/powerpoint/2010/main" val="3933568187"/>
+      </p:ext>
+    </p:extLst>
+  </p:cSld>
+  <p:clrMapOvr>
+    <a:masterClrMapping/>
+  </p:clrMapOvr>
+</p:sld>
+</file>
+
+<file path=ppt/slides/slide14.xml><?xml version="1.0" encoding="utf-8"?>
+<p:sld xmlns:a="http://schemas.openxmlformats.org/drawingml/2006/main" xmlns:r="http://schemas.openxmlformats.org/officeDocument/2006/relationships" xmlns:p="http://schemas.openxmlformats.org/presentationml/2006/main">
+  <p:cSld>
+    <p:spTree>
+      <p:nvGrpSpPr>
+        <p:cNvPr id="1" name="">
+          <a:extLst>
+            <a:ext uri="{FF2B5EF4-FFF2-40B4-BE49-F238E27FC236}">
+              <a16:creationId xmlns:a16="http://schemas.microsoft.com/office/drawing/2014/main" id="{6E10B7C7-2869-43CA-1329-C75CDEE6EC90}"/>
+            </a:ext>
+          </a:extLst>
+        </p:cNvPr>
+        <p:cNvGrpSpPr/>
+        <p:nvPr/>
+      </p:nvGrpSpPr>
+      <p:grpSpPr>
+        <a:xfrm>
+          <a:off x="0" y="0"/>
+          <a:ext cx="0" cy="0"/>
+          <a:chOff x="0" y="0"/>
+          <a:chExt cx="0" cy="0"/>
+        </a:xfrm>
+      </p:grpSpPr>
+      <p:pic>
+        <p:nvPicPr>
+          <p:cNvPr id="27" name="Image 26">
+            <a:extLst>
+              <a:ext uri="{FF2B5EF4-FFF2-40B4-BE49-F238E27FC236}">
+                <a16:creationId xmlns:a16="http://schemas.microsoft.com/office/drawing/2014/main" id="{3C848212-FE54-1B65-6E16-DF7B569DED5B}"/>
+              </a:ext>
+            </a:extLst>
+          </p:cNvPr>
+          <p:cNvPicPr>
+            <a:picLocks noChangeAspect="1"/>
+          </p:cNvPicPr>
+          <p:nvPr/>
+        </p:nvPicPr>
+        <p:blipFill>
+          <a:blip r:embed="rId3"/>
+          <a:stretch>
+            <a:fillRect/>
+          </a:stretch>
+        </p:blipFill>
+        <p:spPr>
+          <a:xfrm>
+            <a:off x="3796590" y="1651262"/>
+            <a:ext cx="4505954" cy="4048690"/>
+          </a:xfrm>
+          <a:prstGeom prst="rect">
+            <a:avLst/>
+          </a:prstGeom>
+        </p:spPr>
+      </p:pic>
+      <p:sp>
+        <p:nvSpPr>
+          <p:cNvPr id="16" name="ZoneTexte 15">
+            <a:extLst>
+              <a:ext uri="{FF2B5EF4-FFF2-40B4-BE49-F238E27FC236}">
+                <a16:creationId xmlns:a16="http://schemas.microsoft.com/office/drawing/2014/main" id="{F42E5AAB-C053-120B-64D2-FCBD58778485}"/>
+              </a:ext>
+            </a:extLst>
+          </p:cNvPr>
+          <p:cNvSpPr txBox="1"/>
+          <p:nvPr/>
+        </p:nvSpPr>
+        <p:spPr>
+          <a:xfrm>
+            <a:off x="2885150" y="2982724"/>
+            <a:ext cx="1071696" cy="338554"/>
+          </a:xfrm>
+          <a:prstGeom prst="rect">
+            <a:avLst/>
+          </a:prstGeom>
+          <a:noFill/>
+        </p:spPr>
+        <p:txBody>
+          <a:bodyPr wrap="square" rtlCol="0">
+            <a:spAutoFit/>
+          </a:bodyPr>
+          <a:lstStyle/>
+          <a:p>
+            <a:pPr algn="ctr"/>
+            <a:r>
+              <a:rPr lang="en-CA" sz="1600" dirty="0">
+                <a:solidFill>
+                  <a:srgbClr val="FF0000"/>
+                </a:solidFill>
+              </a:rPr>
+              <a:t>Pointer</a:t>
+            </a:r>
+          </a:p>
+        </p:txBody>
+      </p:sp>
+      <p:cxnSp>
+        <p:nvCxnSpPr>
+          <p:cNvPr id="17" name="Connecteur droit avec flèche 16">
+            <a:extLst>
+              <a:ext uri="{FF2B5EF4-FFF2-40B4-BE49-F238E27FC236}">
+                <a16:creationId xmlns:a16="http://schemas.microsoft.com/office/drawing/2014/main" id="{E08C26F5-10A8-2739-7744-FD2CE93696A3}"/>
+              </a:ext>
+            </a:extLst>
+          </p:cNvPr>
+          <p:cNvCxnSpPr>
+            <a:cxnSpLocks/>
+          </p:cNvCxnSpPr>
+          <p:nvPr/>
+        </p:nvCxnSpPr>
+        <p:spPr>
+          <a:xfrm>
+            <a:off x="3806823" y="3152001"/>
+            <a:ext cx="1406200" cy="0"/>
+          </a:xfrm>
+          <a:prstGeom prst="straightConnector1">
+            <a:avLst/>
+          </a:prstGeom>
+          <a:ln w="25400">
+            <a:solidFill>
+              <a:srgbClr val="FF0000"/>
+            </a:solidFill>
+            <a:tailEnd type="triangle"/>
+          </a:ln>
+        </p:spPr>
+        <p:style>
+          <a:lnRef idx="2">
+            <a:schemeClr val="accent1"/>
+          </a:lnRef>
+          <a:fillRef idx="0">
+            <a:schemeClr val="accent1"/>
+          </a:fillRef>
+          <a:effectRef idx="1">
+            <a:schemeClr val="accent1"/>
+          </a:effectRef>
+          <a:fontRef idx="minor">
+            <a:schemeClr val="tx1"/>
+          </a:fontRef>
+        </p:style>
+      </p:cxnSp>
+      <p:sp>
+        <p:nvSpPr>
+          <p:cNvPr id="10" name="ZoneTexte 9">
+            <a:extLst>
+              <a:ext uri="{FF2B5EF4-FFF2-40B4-BE49-F238E27FC236}">
+                <a16:creationId xmlns:a16="http://schemas.microsoft.com/office/drawing/2014/main" id="{BD93E596-5423-32FD-06F1-2A565254D501}"/>
+              </a:ext>
+            </a:extLst>
+          </p:cNvPr>
+          <p:cNvSpPr txBox="1"/>
+          <p:nvPr/>
+        </p:nvSpPr>
+        <p:spPr>
+          <a:xfrm>
+            <a:off x="5589703" y="1040805"/>
+            <a:ext cx="1071696" cy="338554"/>
+          </a:xfrm>
+          <a:prstGeom prst="rect">
+            <a:avLst/>
+          </a:prstGeom>
+          <a:noFill/>
+        </p:spPr>
+        <p:txBody>
+          <a:bodyPr wrap="square" rtlCol="0">
+            <a:spAutoFit/>
+          </a:bodyPr>
+          <a:lstStyle/>
+          <a:p>
+            <a:pPr algn="ctr"/>
+            <a:r>
+              <a:rPr lang="en-CA" sz="1600" dirty="0">
+                <a:solidFill>
+                  <a:srgbClr val="FF0000"/>
+                </a:solidFill>
+              </a:rPr>
+              <a:t>Label</a:t>
+            </a:r>
+          </a:p>
+        </p:txBody>
+      </p:sp>
+      <p:sp>
+        <p:nvSpPr>
+          <p:cNvPr id="12" name="ZoneTexte 11">
+            <a:extLst>
+              <a:ext uri="{FF2B5EF4-FFF2-40B4-BE49-F238E27FC236}">
+                <a16:creationId xmlns:a16="http://schemas.microsoft.com/office/drawing/2014/main" id="{B328989E-2C2E-C95D-A3C8-0F9CCBC8ED72}"/>
+              </a:ext>
+            </a:extLst>
+          </p:cNvPr>
+          <p:cNvSpPr txBox="1"/>
+          <p:nvPr/>
+        </p:nvSpPr>
+        <p:spPr>
+          <a:xfrm>
+            <a:off x="8142288" y="1874479"/>
+            <a:ext cx="1071696" cy="338554"/>
+          </a:xfrm>
+          <a:prstGeom prst="rect">
+            <a:avLst/>
+          </a:prstGeom>
+          <a:noFill/>
+        </p:spPr>
+        <p:txBody>
+          <a:bodyPr wrap="square" rtlCol="0">
+            <a:spAutoFit/>
+          </a:bodyPr>
+          <a:lstStyle/>
+          <a:p>
+            <a:pPr algn="ctr"/>
+            <a:r>
+              <a:rPr lang="en-CA" sz="1600" dirty="0">
+                <a:solidFill>
+                  <a:srgbClr val="FF0000"/>
+                </a:solidFill>
+              </a:rPr>
+              <a:t>Minor tick</a:t>
+            </a:r>
+          </a:p>
+        </p:txBody>
+      </p:sp>
+      <p:sp>
+        <p:nvSpPr>
+          <p:cNvPr id="14" name="ZoneTexte 13">
+            <a:extLst>
+              <a:ext uri="{FF2B5EF4-FFF2-40B4-BE49-F238E27FC236}">
+                <a16:creationId xmlns:a16="http://schemas.microsoft.com/office/drawing/2014/main" id="{C85C9807-21FC-4C98-AE10-1904497D236C}"/>
+              </a:ext>
+            </a:extLst>
+          </p:cNvPr>
+          <p:cNvSpPr txBox="1"/>
+          <p:nvPr/>
+        </p:nvSpPr>
+        <p:spPr>
+          <a:xfrm>
+            <a:off x="8033879" y="4243634"/>
+            <a:ext cx="1071696" cy="584775"/>
+          </a:xfrm>
+          <a:prstGeom prst="rect">
+            <a:avLst/>
+          </a:prstGeom>
+          <a:noFill/>
+        </p:spPr>
+        <p:txBody>
+          <a:bodyPr wrap="square" rtlCol="0">
+            <a:spAutoFit/>
+          </a:bodyPr>
+          <a:lstStyle/>
+          <a:p>
+            <a:pPr algn="ctr"/>
+            <a:r>
+              <a:rPr lang="en-CA" sz="1600" dirty="0">
+                <a:solidFill>
+                  <a:srgbClr val="FF0000"/>
+                </a:solidFill>
+              </a:rPr>
+              <a:t>Color bands</a:t>
+            </a:r>
+          </a:p>
+        </p:txBody>
+      </p:sp>
+      <p:cxnSp>
+        <p:nvCxnSpPr>
+          <p:cNvPr id="18" name="Connecteur droit avec flèche 17">
+            <a:extLst>
+              <a:ext uri="{FF2B5EF4-FFF2-40B4-BE49-F238E27FC236}">
+                <a16:creationId xmlns:a16="http://schemas.microsoft.com/office/drawing/2014/main" id="{C824997C-A42E-5486-35FE-4ABB7E8743E6}"/>
+              </a:ext>
+            </a:extLst>
+          </p:cNvPr>
+          <p:cNvCxnSpPr>
+            <a:cxnSpLocks/>
+          </p:cNvCxnSpPr>
+          <p:nvPr/>
+        </p:nvCxnSpPr>
+        <p:spPr>
+          <a:xfrm flipH="1">
+            <a:off x="5871342" y="1353679"/>
+            <a:ext cx="254209" cy="831705"/>
+          </a:xfrm>
+          <a:prstGeom prst="straightConnector1">
+            <a:avLst/>
+          </a:prstGeom>
+          <a:ln w="25400">
+            <a:solidFill>
+              <a:srgbClr val="FF0000"/>
+            </a:solidFill>
+            <a:tailEnd type="triangle"/>
+          </a:ln>
+        </p:spPr>
+        <p:style>
+          <a:lnRef idx="2">
+            <a:schemeClr val="accent1"/>
+          </a:lnRef>
+          <a:fillRef idx="0">
+            <a:schemeClr val="accent1"/>
+          </a:fillRef>
+          <a:effectRef idx="1">
+            <a:schemeClr val="accent1"/>
+          </a:effectRef>
+          <a:fontRef idx="minor">
+            <a:schemeClr val="tx1"/>
+          </a:fontRef>
+        </p:style>
+      </p:cxnSp>
+      <p:cxnSp>
+        <p:nvCxnSpPr>
+          <p:cNvPr id="20" name="Connecteur droit avec flèche 19">
+            <a:extLst>
+              <a:ext uri="{FF2B5EF4-FFF2-40B4-BE49-F238E27FC236}">
+                <a16:creationId xmlns:a16="http://schemas.microsoft.com/office/drawing/2014/main" id="{5198F88F-9CBA-64AC-E38B-87F07E354974}"/>
+              </a:ext>
+            </a:extLst>
+          </p:cNvPr>
+          <p:cNvCxnSpPr>
+            <a:cxnSpLocks/>
+          </p:cNvCxnSpPr>
+          <p:nvPr/>
+        </p:nvCxnSpPr>
+        <p:spPr>
+          <a:xfrm flipH="1">
+            <a:off x="7294942" y="2185384"/>
+            <a:ext cx="985204" cy="428983"/>
+          </a:xfrm>
+          <a:prstGeom prst="straightConnector1">
+            <a:avLst/>
+          </a:prstGeom>
+          <a:ln w="25400">
+            <a:solidFill>
+              <a:srgbClr val="FF0000"/>
+            </a:solidFill>
+            <a:tailEnd type="triangle"/>
+          </a:ln>
+        </p:spPr>
+        <p:style>
+          <a:lnRef idx="2">
+            <a:schemeClr val="accent1"/>
+          </a:lnRef>
+          <a:fillRef idx="0">
+            <a:schemeClr val="accent1"/>
+          </a:fillRef>
+          <a:effectRef idx="1">
+            <a:schemeClr val="accent1"/>
+          </a:effectRef>
+          <a:fontRef idx="minor">
+            <a:schemeClr val="tx1"/>
+          </a:fontRef>
+        </p:style>
+      </p:cxnSp>
+      <p:cxnSp>
+        <p:nvCxnSpPr>
+          <p:cNvPr id="22" name="Connecteur droit avec flèche 21">
+            <a:extLst>
+              <a:ext uri="{FF2B5EF4-FFF2-40B4-BE49-F238E27FC236}">
+                <a16:creationId xmlns:a16="http://schemas.microsoft.com/office/drawing/2014/main" id="{C3E783F5-6CC9-CAC5-E164-6E81EC395F8D}"/>
+              </a:ext>
+            </a:extLst>
+          </p:cNvPr>
+          <p:cNvCxnSpPr>
+            <a:cxnSpLocks/>
+          </p:cNvCxnSpPr>
+          <p:nvPr/>
+        </p:nvCxnSpPr>
+        <p:spPr>
+          <a:xfrm flipH="1">
+            <a:off x="7294942" y="4520058"/>
+            <a:ext cx="927474" cy="0"/>
+          </a:xfrm>
+          <a:prstGeom prst="straightConnector1">
+            <a:avLst/>
+          </a:prstGeom>
+          <a:ln w="25400">
+            <a:solidFill>
+              <a:srgbClr val="FF0000"/>
+            </a:solidFill>
+            <a:tailEnd type="triangle"/>
+          </a:ln>
+        </p:spPr>
+        <p:style>
+          <a:lnRef idx="2">
+            <a:schemeClr val="accent1"/>
+          </a:lnRef>
+          <a:fillRef idx="0">
+            <a:schemeClr val="accent1"/>
+          </a:fillRef>
+          <a:effectRef idx="1">
+            <a:schemeClr val="accent1"/>
+          </a:effectRef>
+          <a:fontRef idx="minor">
+            <a:schemeClr val="tx1"/>
+          </a:fontRef>
+        </p:style>
+      </p:cxnSp>
+      <p:cxnSp>
+        <p:nvCxnSpPr>
+          <p:cNvPr id="29" name="Connecteur droit avec flèche 28">
+            <a:extLst>
+              <a:ext uri="{FF2B5EF4-FFF2-40B4-BE49-F238E27FC236}">
+                <a16:creationId xmlns:a16="http://schemas.microsoft.com/office/drawing/2014/main" id="{CFB5E617-776C-FCC2-606B-10D8ADEDBCC5}"/>
+              </a:ext>
+            </a:extLst>
+          </p:cNvPr>
+          <p:cNvCxnSpPr>
+            <a:cxnSpLocks/>
+          </p:cNvCxnSpPr>
+          <p:nvPr/>
+        </p:nvCxnSpPr>
+        <p:spPr>
+          <a:xfrm flipH="1" flipV="1">
+            <a:off x="7491010" y="3824158"/>
+            <a:ext cx="731406" cy="695900"/>
+          </a:xfrm>
+          <a:prstGeom prst="straightConnector1">
+            <a:avLst/>
+          </a:prstGeom>
+          <a:ln w="25400">
+            <a:solidFill>
+              <a:srgbClr val="FF0000"/>
+            </a:solidFill>
+            <a:tailEnd type="triangle"/>
+          </a:ln>
+        </p:spPr>
+        <p:style>
+          <a:lnRef idx="2">
+            <a:schemeClr val="accent1"/>
+          </a:lnRef>
+          <a:fillRef idx="0">
+            <a:schemeClr val="accent1"/>
+          </a:fillRef>
+          <a:effectRef idx="1">
+            <a:schemeClr val="accent1"/>
+          </a:effectRef>
+          <a:fontRef idx="minor">
+            <a:schemeClr val="tx1"/>
+          </a:fontRef>
+        </p:style>
+      </p:cxnSp>
+      <p:cxnSp>
+        <p:nvCxnSpPr>
+          <p:cNvPr id="35" name="Connecteur droit avec flèche 34">
+            <a:extLst>
+              <a:ext uri="{FF2B5EF4-FFF2-40B4-BE49-F238E27FC236}">
+                <a16:creationId xmlns:a16="http://schemas.microsoft.com/office/drawing/2014/main" id="{D1C99C2E-415C-5034-6F0F-12796D869B83}"/>
+              </a:ext>
+            </a:extLst>
+          </p:cNvPr>
+          <p:cNvCxnSpPr>
+            <a:cxnSpLocks/>
+          </p:cNvCxnSpPr>
+          <p:nvPr/>
+        </p:nvCxnSpPr>
+        <p:spPr>
+          <a:xfrm flipH="1">
+            <a:off x="7079980" y="1687637"/>
+            <a:ext cx="274887" cy="712238"/>
+          </a:xfrm>
+          <a:prstGeom prst="straightConnector1">
+            <a:avLst/>
+          </a:prstGeom>
+          <a:ln w="25400">
+            <a:solidFill>
+              <a:srgbClr val="FF0000"/>
+            </a:solidFill>
+            <a:tailEnd type="triangle"/>
+          </a:ln>
+        </p:spPr>
+        <p:style>
+          <a:lnRef idx="2">
+            <a:schemeClr val="accent1"/>
+          </a:lnRef>
+          <a:fillRef idx="0">
+            <a:schemeClr val="accent1"/>
+          </a:fillRef>
+          <a:effectRef idx="1">
+            <a:schemeClr val="accent1"/>
+          </a:effectRef>
+          <a:fontRef idx="minor">
+            <a:schemeClr val="tx1"/>
+          </a:fontRef>
+        </p:style>
+      </p:cxnSp>
+      <p:sp>
+        <p:nvSpPr>
+          <p:cNvPr id="37" name="ZoneTexte 36">
+            <a:extLst>
+              <a:ext uri="{FF2B5EF4-FFF2-40B4-BE49-F238E27FC236}">
+                <a16:creationId xmlns:a16="http://schemas.microsoft.com/office/drawing/2014/main" id="{D5F43E15-3B8D-15E0-2A2B-EA7FE255B608}"/>
+              </a:ext>
+            </a:extLst>
+          </p:cNvPr>
+          <p:cNvSpPr txBox="1"/>
+          <p:nvPr/>
+        </p:nvSpPr>
+        <p:spPr>
+          <a:xfrm>
+            <a:off x="6819019" y="1353679"/>
+            <a:ext cx="1071696" cy="338554"/>
+          </a:xfrm>
+          <a:prstGeom prst="rect">
+            <a:avLst/>
+          </a:prstGeom>
+          <a:noFill/>
+        </p:spPr>
+        <p:txBody>
+          <a:bodyPr wrap="square" rtlCol="0">
+            <a:spAutoFit/>
+          </a:bodyPr>
+          <a:lstStyle/>
+          <a:p>
+            <a:pPr algn="ctr"/>
+            <a:r>
+              <a:rPr lang="en-CA" sz="1600" dirty="0">
+                <a:solidFill>
+                  <a:srgbClr val="FF0000"/>
+                </a:solidFill>
+              </a:rPr>
+              <a:t>Major tick</a:t>
+            </a:r>
+          </a:p>
+        </p:txBody>
+      </p:sp>
+      <p:sp>
+        <p:nvSpPr>
+          <p:cNvPr id="41" name="ZoneTexte 40">
+            <a:extLst>
+              <a:ext uri="{FF2B5EF4-FFF2-40B4-BE49-F238E27FC236}">
+                <a16:creationId xmlns:a16="http://schemas.microsoft.com/office/drawing/2014/main" id="{EA9D46A2-9370-BD81-E578-32BE1259603E}"/>
+              </a:ext>
+            </a:extLst>
+          </p:cNvPr>
+          <p:cNvSpPr txBox="1"/>
+          <p:nvPr/>
+        </p:nvSpPr>
+        <p:spPr>
+          <a:xfrm>
+            <a:off x="2885150" y="4791239"/>
+            <a:ext cx="1071696" cy="584775"/>
+          </a:xfrm>
+          <a:prstGeom prst="rect">
+            <a:avLst/>
+          </a:prstGeom>
+          <a:noFill/>
+        </p:spPr>
+        <p:txBody>
+          <a:bodyPr wrap="square" rtlCol="0">
+            <a:spAutoFit/>
+          </a:bodyPr>
+          <a:lstStyle/>
+          <a:p>
+            <a:pPr algn="ctr"/>
+            <a:r>
+              <a:rPr lang="en-CA" sz="1600" dirty="0">
+                <a:solidFill>
+                  <a:srgbClr val="FF0000"/>
+                </a:solidFill>
+              </a:rPr>
+              <a:t>Text display</a:t>
+            </a:r>
+          </a:p>
+        </p:txBody>
+      </p:sp>
+      <p:cxnSp>
+        <p:nvCxnSpPr>
+          <p:cNvPr id="42" name="Connecteur droit avec flèche 41">
+            <a:extLst>
+              <a:ext uri="{FF2B5EF4-FFF2-40B4-BE49-F238E27FC236}">
+                <a16:creationId xmlns:a16="http://schemas.microsoft.com/office/drawing/2014/main" id="{EF9B612C-572D-F434-2446-B329B815F3CA}"/>
+              </a:ext>
+            </a:extLst>
+          </p:cNvPr>
+          <p:cNvCxnSpPr>
+            <a:cxnSpLocks/>
+          </p:cNvCxnSpPr>
+          <p:nvPr/>
+        </p:nvCxnSpPr>
+        <p:spPr>
+          <a:xfrm flipV="1">
+            <a:off x="3806823" y="5068238"/>
+            <a:ext cx="1271195" cy="14539"/>
+          </a:xfrm>
+          <a:prstGeom prst="straightConnector1">
+            <a:avLst/>
+          </a:prstGeom>
+          <a:ln w="25400">
+            <a:solidFill>
+              <a:srgbClr val="FF0000"/>
+            </a:solidFill>
+            <a:tailEnd type="triangle"/>
+          </a:ln>
+        </p:spPr>
+        <p:style>
+          <a:lnRef idx="2">
+            <a:schemeClr val="accent1"/>
+          </a:lnRef>
+          <a:fillRef idx="0">
+            <a:schemeClr val="accent1"/>
+          </a:fillRef>
+          <a:effectRef idx="1">
+            <a:schemeClr val="accent1"/>
+          </a:effectRef>
+          <a:fontRef idx="minor">
+            <a:schemeClr val="tx1"/>
+          </a:fontRef>
+        </p:style>
+      </p:cxnSp>
+    </p:spTree>
+    <p:extLst>
+      <p:ext uri="{BB962C8B-B14F-4D97-AF65-F5344CB8AC3E}">
+        <p14:creationId xmlns:p14="http://schemas.microsoft.com/office/powerpoint/2010/main" val="2724448597"/>
+      </p:ext>
+    </p:extLst>
+  </p:cSld>
+  <p:clrMapOvr>
+    <a:masterClrMapping/>
+  </p:clrMapOvr>
+</p:sld>
+</file>
+
+<file path=ppt/slides/slide15.xml><?xml version="1.0" encoding="utf-8"?>
+<p:sld xmlns:a="http://schemas.openxmlformats.org/drawingml/2006/main" xmlns:r="http://schemas.openxmlformats.org/officeDocument/2006/relationships" xmlns:p="http://schemas.openxmlformats.org/presentationml/2006/main">
+  <p:cSld>
+    <p:spTree>
+      <p:nvGrpSpPr>
+        <p:cNvPr id="1" name="">
+          <a:extLst>
+            <a:ext uri="{FF2B5EF4-FFF2-40B4-BE49-F238E27FC236}">
+              <a16:creationId xmlns:a16="http://schemas.microsoft.com/office/drawing/2014/main" id="{277C2CD7-1BBA-1618-0136-0F5B600A8BC0}"/>
+            </a:ext>
+          </a:extLst>
+        </p:cNvPr>
+        <p:cNvGrpSpPr/>
+        <p:nvPr/>
+      </p:nvGrpSpPr>
+      <p:grpSpPr>
+        <a:xfrm>
+          <a:off x="0" y="0"/>
+          <a:ext cx="0" cy="0"/>
+          <a:chOff x="0" y="0"/>
+          <a:chExt cx="0" cy="0"/>
+        </a:xfrm>
+      </p:grpSpPr>
+      <p:pic>
+        <p:nvPicPr>
+          <p:cNvPr id="3" name="Image 2">
+            <a:extLst>
+              <a:ext uri="{FF2B5EF4-FFF2-40B4-BE49-F238E27FC236}">
+                <a16:creationId xmlns:a16="http://schemas.microsoft.com/office/drawing/2014/main" id="{76114C9D-A096-43A2-06F5-629900CA3BAE}"/>
+              </a:ext>
+            </a:extLst>
+          </p:cNvPr>
+          <p:cNvPicPr>
+            <a:picLocks noChangeAspect="1"/>
+          </p:cNvPicPr>
+          <p:nvPr/>
+        </p:nvPicPr>
+        <p:blipFill>
+          <a:blip r:embed="rId3"/>
+          <a:stretch>
+            <a:fillRect/>
+          </a:stretch>
+        </p:blipFill>
+        <p:spPr>
+          <a:xfrm>
+            <a:off x="4767077" y="1123628"/>
+            <a:ext cx="2657846" cy="4610743"/>
+          </a:xfrm>
+          <a:prstGeom prst="rect">
+            <a:avLst/>
+          </a:prstGeom>
+        </p:spPr>
+      </p:pic>
+      <p:sp>
+        <p:nvSpPr>
+          <p:cNvPr id="16" name="ZoneTexte 15">
+            <a:extLst>
+              <a:ext uri="{FF2B5EF4-FFF2-40B4-BE49-F238E27FC236}">
+                <a16:creationId xmlns:a16="http://schemas.microsoft.com/office/drawing/2014/main" id="{1201A9C2-B173-C1F5-D326-B833EB854A53}"/>
+              </a:ext>
+            </a:extLst>
+          </p:cNvPr>
+          <p:cNvSpPr txBox="1"/>
+          <p:nvPr/>
+        </p:nvSpPr>
+        <p:spPr>
+          <a:xfrm>
+            <a:off x="3217500" y="3190113"/>
+            <a:ext cx="1071696" cy="338554"/>
+          </a:xfrm>
+          <a:prstGeom prst="rect">
+            <a:avLst/>
+          </a:prstGeom>
+          <a:noFill/>
+        </p:spPr>
+        <p:txBody>
+          <a:bodyPr wrap="square" rtlCol="0">
+            <a:spAutoFit/>
+          </a:bodyPr>
+          <a:lstStyle/>
+          <a:p>
+            <a:pPr algn="ctr"/>
+            <a:r>
+              <a:rPr lang="en-CA" sz="1600" dirty="0">
+                <a:solidFill>
+                  <a:srgbClr val="FF0000"/>
+                </a:solidFill>
+              </a:rPr>
+              <a:t>Zero Point</a:t>
+            </a:r>
+          </a:p>
+        </p:txBody>
+      </p:sp>
+      <p:cxnSp>
+        <p:nvCxnSpPr>
+          <p:cNvPr id="17" name="Connecteur droit avec flèche 16">
+            <a:extLst>
+              <a:ext uri="{FF2B5EF4-FFF2-40B4-BE49-F238E27FC236}">
+                <a16:creationId xmlns:a16="http://schemas.microsoft.com/office/drawing/2014/main" id="{D284FD48-2DCC-1B80-DBB8-A5F01B1E014F}"/>
+              </a:ext>
+            </a:extLst>
+          </p:cNvPr>
+          <p:cNvCxnSpPr>
+            <a:cxnSpLocks/>
+          </p:cNvCxnSpPr>
+          <p:nvPr/>
+        </p:nvCxnSpPr>
+        <p:spPr>
+          <a:xfrm>
+            <a:off x="4289196" y="3359390"/>
+            <a:ext cx="650449" cy="0"/>
+          </a:xfrm>
+          <a:prstGeom prst="straightConnector1">
+            <a:avLst/>
+          </a:prstGeom>
+          <a:ln w="25400">
+            <a:solidFill>
+              <a:srgbClr val="FF0000"/>
+            </a:solidFill>
+            <a:tailEnd type="triangle"/>
+          </a:ln>
+        </p:spPr>
+        <p:style>
+          <a:lnRef idx="2">
+            <a:schemeClr val="accent1"/>
+          </a:lnRef>
+          <a:fillRef idx="0">
+            <a:schemeClr val="accent1"/>
+          </a:fillRef>
+          <a:effectRef idx="1">
+            <a:schemeClr val="accent1"/>
+          </a:effectRef>
+          <a:fontRef idx="minor">
+            <a:schemeClr val="tx1"/>
+          </a:fontRef>
+        </p:style>
+      </p:cxnSp>
+      <p:sp>
+        <p:nvSpPr>
+          <p:cNvPr id="10" name="ZoneTexte 9">
+            <a:extLst>
+              <a:ext uri="{FF2B5EF4-FFF2-40B4-BE49-F238E27FC236}">
+                <a16:creationId xmlns:a16="http://schemas.microsoft.com/office/drawing/2014/main" id="{56D1C98B-034F-0DA6-E2DC-F98435B642F0}"/>
+              </a:ext>
+            </a:extLst>
+          </p:cNvPr>
+          <p:cNvSpPr txBox="1"/>
+          <p:nvPr/>
+        </p:nvSpPr>
+        <p:spPr>
+          <a:xfrm>
+            <a:off x="7316687" y="1739913"/>
+            <a:ext cx="1071696" cy="338554"/>
+          </a:xfrm>
+          <a:prstGeom prst="rect">
+            <a:avLst/>
+          </a:prstGeom>
+          <a:noFill/>
+        </p:spPr>
+        <p:txBody>
+          <a:bodyPr wrap="square" rtlCol="0">
+            <a:spAutoFit/>
+          </a:bodyPr>
+          <a:lstStyle/>
+          <a:p>
+            <a:pPr algn="ctr"/>
+            <a:r>
+              <a:rPr lang="en-CA" sz="1600" dirty="0">
+                <a:solidFill>
+                  <a:srgbClr val="FF0000"/>
+                </a:solidFill>
+              </a:rPr>
+              <a:t>Label</a:t>
+            </a:r>
+          </a:p>
+        </p:txBody>
+      </p:sp>
+      <p:sp>
+        <p:nvSpPr>
+          <p:cNvPr id="12" name="ZoneTexte 11">
+            <a:extLst>
+              <a:ext uri="{FF2B5EF4-FFF2-40B4-BE49-F238E27FC236}">
+                <a16:creationId xmlns:a16="http://schemas.microsoft.com/office/drawing/2014/main" id="{7FA9A950-2701-BC36-0239-07F8A51BF9A1}"/>
+              </a:ext>
+            </a:extLst>
+          </p:cNvPr>
+          <p:cNvSpPr txBox="1"/>
+          <p:nvPr/>
+        </p:nvSpPr>
+        <p:spPr>
+          <a:xfrm>
+            <a:off x="3467705" y="2016107"/>
+            <a:ext cx="1071696" cy="338554"/>
+          </a:xfrm>
+          <a:prstGeom prst="rect">
+            <a:avLst/>
+          </a:prstGeom>
+          <a:noFill/>
+        </p:spPr>
+        <p:txBody>
+          <a:bodyPr wrap="square" rtlCol="0">
+            <a:spAutoFit/>
+          </a:bodyPr>
+          <a:lstStyle/>
+          <a:p>
+            <a:pPr algn="ctr"/>
+            <a:r>
+              <a:rPr lang="en-CA" sz="1600" dirty="0">
+                <a:solidFill>
+                  <a:srgbClr val="FF0000"/>
+                </a:solidFill>
+              </a:rPr>
+              <a:t>Minor tick</a:t>
+            </a:r>
+          </a:p>
+        </p:txBody>
+      </p:sp>
+      <p:sp>
+        <p:nvSpPr>
+          <p:cNvPr id="14" name="ZoneTexte 13">
+            <a:extLst>
+              <a:ext uri="{FF2B5EF4-FFF2-40B4-BE49-F238E27FC236}">
+                <a16:creationId xmlns:a16="http://schemas.microsoft.com/office/drawing/2014/main" id="{3610DDC3-AB08-00E9-D251-F3F291169751}"/>
+              </a:ext>
+            </a:extLst>
+          </p:cNvPr>
+          <p:cNvSpPr txBox="1"/>
+          <p:nvPr/>
+        </p:nvSpPr>
+        <p:spPr>
+          <a:xfrm>
+            <a:off x="6605441" y="4875230"/>
+            <a:ext cx="1071696" cy="584775"/>
+          </a:xfrm>
+          <a:prstGeom prst="rect">
+            <a:avLst/>
+          </a:prstGeom>
+          <a:noFill/>
+        </p:spPr>
+        <p:txBody>
+          <a:bodyPr wrap="square" rtlCol="0">
+            <a:spAutoFit/>
+          </a:bodyPr>
+          <a:lstStyle/>
+          <a:p>
+            <a:pPr algn="ctr"/>
+            <a:r>
+              <a:rPr lang="en-CA" sz="1600" dirty="0">
+                <a:solidFill>
+                  <a:srgbClr val="FF0000"/>
+                </a:solidFill>
+              </a:rPr>
+              <a:t>Color bands</a:t>
+            </a:r>
+          </a:p>
+        </p:txBody>
+      </p:sp>
+      <p:cxnSp>
+        <p:nvCxnSpPr>
+          <p:cNvPr id="18" name="Connecteur droit avec flèche 17">
+            <a:extLst>
+              <a:ext uri="{FF2B5EF4-FFF2-40B4-BE49-F238E27FC236}">
+                <a16:creationId xmlns:a16="http://schemas.microsoft.com/office/drawing/2014/main" id="{F59E1A45-E391-F5EF-8E84-3FC16C325329}"/>
+              </a:ext>
+            </a:extLst>
+          </p:cNvPr>
+          <p:cNvCxnSpPr>
+            <a:cxnSpLocks/>
+          </p:cNvCxnSpPr>
+          <p:nvPr/>
+        </p:nvCxnSpPr>
+        <p:spPr>
+          <a:xfrm flipH="1">
+            <a:off x="6546792" y="1901360"/>
+            <a:ext cx="944218" cy="0"/>
+          </a:xfrm>
+          <a:prstGeom prst="straightConnector1">
+            <a:avLst/>
+          </a:prstGeom>
+          <a:ln w="25400">
+            <a:solidFill>
+              <a:srgbClr val="FF0000"/>
+            </a:solidFill>
+            <a:tailEnd type="triangle"/>
+          </a:ln>
+        </p:spPr>
+        <p:style>
+          <a:lnRef idx="2">
+            <a:schemeClr val="accent1"/>
+          </a:lnRef>
+          <a:fillRef idx="0">
+            <a:schemeClr val="accent1"/>
+          </a:fillRef>
+          <a:effectRef idx="1">
+            <a:schemeClr val="accent1"/>
+          </a:effectRef>
+          <a:fontRef idx="minor">
+            <a:schemeClr val="tx1"/>
+          </a:fontRef>
+        </p:style>
+      </p:cxnSp>
+      <p:cxnSp>
+        <p:nvCxnSpPr>
+          <p:cNvPr id="22" name="Connecteur droit avec flèche 21">
+            <a:extLst>
+              <a:ext uri="{FF2B5EF4-FFF2-40B4-BE49-F238E27FC236}">
+                <a16:creationId xmlns:a16="http://schemas.microsoft.com/office/drawing/2014/main" id="{57F6D3ED-4909-9C24-0665-F46D87A5D9B0}"/>
+              </a:ext>
+            </a:extLst>
+          </p:cNvPr>
+          <p:cNvCxnSpPr>
+            <a:cxnSpLocks/>
+          </p:cNvCxnSpPr>
+          <p:nvPr/>
+        </p:nvCxnSpPr>
+        <p:spPr>
+          <a:xfrm flipH="1">
+            <a:off x="5866504" y="5151654"/>
+            <a:ext cx="927474" cy="0"/>
+          </a:xfrm>
+          <a:prstGeom prst="straightConnector1">
+            <a:avLst/>
+          </a:prstGeom>
+          <a:ln w="25400">
+            <a:solidFill>
+              <a:srgbClr val="FF0000"/>
+            </a:solidFill>
+            <a:tailEnd type="triangle"/>
+          </a:ln>
+        </p:spPr>
+        <p:style>
+          <a:lnRef idx="2">
+            <a:schemeClr val="accent1"/>
+          </a:lnRef>
+          <a:fillRef idx="0">
+            <a:schemeClr val="accent1"/>
+          </a:fillRef>
+          <a:effectRef idx="1">
+            <a:schemeClr val="accent1"/>
+          </a:effectRef>
+          <a:fontRef idx="minor">
+            <a:schemeClr val="tx1"/>
+          </a:fontRef>
+        </p:style>
+      </p:cxnSp>
+      <p:cxnSp>
+        <p:nvCxnSpPr>
+          <p:cNvPr id="29" name="Connecteur droit avec flèche 28">
+            <a:extLst>
+              <a:ext uri="{FF2B5EF4-FFF2-40B4-BE49-F238E27FC236}">
+                <a16:creationId xmlns:a16="http://schemas.microsoft.com/office/drawing/2014/main" id="{1E92E46F-FEA3-B2C9-0077-93F777D80CDF}"/>
+              </a:ext>
+            </a:extLst>
+          </p:cNvPr>
+          <p:cNvCxnSpPr>
+            <a:cxnSpLocks/>
+          </p:cNvCxnSpPr>
+          <p:nvPr/>
+        </p:nvCxnSpPr>
+        <p:spPr>
+          <a:xfrm flipH="1" flipV="1">
+            <a:off x="5888249" y="4956640"/>
+            <a:ext cx="905729" cy="195014"/>
+          </a:xfrm>
+          <a:prstGeom prst="straightConnector1">
+            <a:avLst/>
+          </a:prstGeom>
+          <a:ln w="25400">
+            <a:solidFill>
+              <a:srgbClr val="FF0000"/>
+            </a:solidFill>
+            <a:tailEnd type="triangle"/>
+          </a:ln>
+        </p:spPr>
+        <p:style>
+          <a:lnRef idx="2">
+            <a:schemeClr val="accent1"/>
+          </a:lnRef>
+          <a:fillRef idx="0">
+            <a:schemeClr val="accent1"/>
+          </a:fillRef>
+          <a:effectRef idx="1">
+            <a:schemeClr val="accent1"/>
+          </a:effectRef>
+          <a:fontRef idx="minor">
+            <a:schemeClr val="tx1"/>
+          </a:fontRef>
+        </p:style>
+      </p:cxnSp>
+      <p:cxnSp>
+        <p:nvCxnSpPr>
+          <p:cNvPr id="35" name="Connecteur droit avec flèche 34">
+            <a:extLst>
+              <a:ext uri="{FF2B5EF4-FFF2-40B4-BE49-F238E27FC236}">
+                <a16:creationId xmlns:a16="http://schemas.microsoft.com/office/drawing/2014/main" id="{069181EE-65FC-0482-9C35-2580C0C6861D}"/>
+              </a:ext>
+            </a:extLst>
+          </p:cNvPr>
+          <p:cNvCxnSpPr>
+            <a:cxnSpLocks/>
+            <a:stCxn id="37" idx="3"/>
+          </p:cNvCxnSpPr>
+          <p:nvPr/>
+        </p:nvCxnSpPr>
+        <p:spPr>
+          <a:xfrm>
+            <a:off x="4529683" y="1909190"/>
+            <a:ext cx="703100" cy="0"/>
+          </a:xfrm>
+          <a:prstGeom prst="straightConnector1">
+            <a:avLst/>
+          </a:prstGeom>
+          <a:ln w="25400">
+            <a:solidFill>
+              <a:srgbClr val="FF0000"/>
+            </a:solidFill>
+            <a:tailEnd type="triangle"/>
+          </a:ln>
+        </p:spPr>
+        <p:style>
+          <a:lnRef idx="2">
+            <a:schemeClr val="accent1"/>
+          </a:lnRef>
+          <a:fillRef idx="0">
+            <a:schemeClr val="accent1"/>
+          </a:fillRef>
+          <a:effectRef idx="1">
+            <a:schemeClr val="accent1"/>
+          </a:effectRef>
+          <a:fontRef idx="minor">
+            <a:schemeClr val="tx1"/>
+          </a:fontRef>
+        </p:style>
+      </p:cxnSp>
+      <p:sp>
+        <p:nvSpPr>
+          <p:cNvPr id="37" name="ZoneTexte 36">
+            <a:extLst>
+              <a:ext uri="{FF2B5EF4-FFF2-40B4-BE49-F238E27FC236}">
+                <a16:creationId xmlns:a16="http://schemas.microsoft.com/office/drawing/2014/main" id="{2FB4FAB0-96EF-0095-CF4E-8CC1CF842C6C}"/>
+              </a:ext>
+            </a:extLst>
+          </p:cNvPr>
+          <p:cNvSpPr txBox="1"/>
+          <p:nvPr/>
+        </p:nvSpPr>
+        <p:spPr>
+          <a:xfrm>
+            <a:off x="3457987" y="1739913"/>
+            <a:ext cx="1071696" cy="338554"/>
+          </a:xfrm>
+          <a:prstGeom prst="rect">
+            <a:avLst/>
+          </a:prstGeom>
+          <a:noFill/>
+        </p:spPr>
+        <p:txBody>
+          <a:bodyPr wrap="square" rtlCol="0">
+            <a:spAutoFit/>
+          </a:bodyPr>
+          <a:lstStyle/>
+          <a:p>
+            <a:pPr algn="ctr"/>
+            <a:r>
+              <a:rPr lang="en-CA" sz="1600" dirty="0">
+                <a:solidFill>
+                  <a:srgbClr val="FF0000"/>
+                </a:solidFill>
+              </a:rPr>
+              <a:t>Major tick</a:t>
+            </a:r>
+          </a:p>
+        </p:txBody>
+      </p:sp>
+      <p:cxnSp>
+        <p:nvCxnSpPr>
+          <p:cNvPr id="7" name="Connecteur droit avec flèche 6">
+            <a:extLst>
+              <a:ext uri="{FF2B5EF4-FFF2-40B4-BE49-F238E27FC236}">
+                <a16:creationId xmlns:a16="http://schemas.microsoft.com/office/drawing/2014/main" id="{3A4CAA69-5535-C282-C658-F226534B4697}"/>
+              </a:ext>
+            </a:extLst>
+          </p:cNvPr>
+          <p:cNvCxnSpPr>
+            <a:cxnSpLocks/>
+          </p:cNvCxnSpPr>
+          <p:nvPr/>
+        </p:nvCxnSpPr>
+        <p:spPr>
+          <a:xfrm>
+            <a:off x="4539401" y="2157735"/>
+            <a:ext cx="966144" cy="0"/>
+          </a:xfrm>
+          <a:prstGeom prst="straightConnector1">
+            <a:avLst/>
+          </a:prstGeom>
+          <a:ln w="25400">
+            <a:solidFill>
+              <a:srgbClr val="FF0000"/>
+            </a:solidFill>
+            <a:tailEnd type="triangle"/>
+          </a:ln>
+        </p:spPr>
+        <p:style>
+          <a:lnRef idx="2">
+            <a:schemeClr val="accent1"/>
+          </a:lnRef>
+          <a:fillRef idx="0">
+            <a:schemeClr val="accent1"/>
+          </a:fillRef>
+          <a:effectRef idx="1">
+            <a:schemeClr val="accent1"/>
+          </a:effectRef>
+          <a:fontRef idx="minor">
+            <a:schemeClr val="tx1"/>
+          </a:fontRef>
+        </p:style>
+      </p:cxnSp>
+      <p:sp>
+        <p:nvSpPr>
+          <p:cNvPr id="21" name="ZoneTexte 20">
+            <a:extLst>
+              <a:ext uri="{FF2B5EF4-FFF2-40B4-BE49-F238E27FC236}">
+                <a16:creationId xmlns:a16="http://schemas.microsoft.com/office/drawing/2014/main" id="{8BC35698-5B94-A50D-DA32-C5CDC02BC210}"/>
+              </a:ext>
+            </a:extLst>
+          </p:cNvPr>
+          <p:cNvSpPr txBox="1"/>
+          <p:nvPr/>
+        </p:nvSpPr>
+        <p:spPr>
+          <a:xfrm>
+            <a:off x="6955162" y="2813447"/>
+            <a:ext cx="1071696" cy="338554"/>
+          </a:xfrm>
+          <a:prstGeom prst="rect">
+            <a:avLst/>
+          </a:prstGeom>
+          <a:noFill/>
+        </p:spPr>
+        <p:txBody>
+          <a:bodyPr wrap="square" rtlCol="0">
+            <a:spAutoFit/>
+          </a:bodyPr>
+          <a:lstStyle/>
+          <a:p>
+            <a:pPr algn="ctr"/>
+            <a:r>
+              <a:rPr lang="en-CA" sz="1600" dirty="0">
+                <a:solidFill>
+                  <a:srgbClr val="FF0000"/>
+                </a:solidFill>
+              </a:rPr>
+              <a:t>Pointer</a:t>
+            </a:r>
+          </a:p>
+        </p:txBody>
+      </p:sp>
+      <p:cxnSp>
+        <p:nvCxnSpPr>
+          <p:cNvPr id="23" name="Connecteur droit avec flèche 22">
+            <a:extLst>
+              <a:ext uri="{FF2B5EF4-FFF2-40B4-BE49-F238E27FC236}">
+                <a16:creationId xmlns:a16="http://schemas.microsoft.com/office/drawing/2014/main" id="{F0ABC503-D31A-7206-02EB-9D464A9D2A41}"/>
+              </a:ext>
+            </a:extLst>
+          </p:cNvPr>
+          <p:cNvCxnSpPr>
+            <a:cxnSpLocks/>
+          </p:cNvCxnSpPr>
+          <p:nvPr/>
+        </p:nvCxnSpPr>
+        <p:spPr>
+          <a:xfrm flipH="1" flipV="1">
+            <a:off x="5988011" y="2514262"/>
+            <a:ext cx="1117561" cy="468462"/>
+          </a:xfrm>
+          <a:prstGeom prst="straightConnector1">
+            <a:avLst/>
+          </a:prstGeom>
+          <a:ln w="25400">
+            <a:solidFill>
+              <a:srgbClr val="FF0000"/>
+            </a:solidFill>
+            <a:tailEnd type="triangle"/>
+          </a:ln>
+        </p:spPr>
+        <p:style>
+          <a:lnRef idx="2">
+            <a:schemeClr val="accent1"/>
+          </a:lnRef>
+          <a:fillRef idx="0">
+            <a:schemeClr val="accent1"/>
+          </a:fillRef>
+          <a:effectRef idx="1">
+            <a:schemeClr val="accent1"/>
+          </a:effectRef>
+          <a:fontRef idx="minor">
+            <a:schemeClr val="tx1"/>
+          </a:fontRef>
+        </p:style>
+      </p:cxnSp>
+      <p:sp>
+        <p:nvSpPr>
+          <p:cNvPr id="28" name="ZoneTexte 27">
+            <a:extLst>
+              <a:ext uri="{FF2B5EF4-FFF2-40B4-BE49-F238E27FC236}">
+                <a16:creationId xmlns:a16="http://schemas.microsoft.com/office/drawing/2014/main" id="{15434A21-B981-5E6B-E40A-0AE26E2509F4}"/>
+              </a:ext>
+            </a:extLst>
+          </p:cNvPr>
+          <p:cNvSpPr txBox="1"/>
+          <p:nvPr/>
+        </p:nvSpPr>
+        <p:spPr>
+          <a:xfrm>
+            <a:off x="3482627" y="2518472"/>
+            <a:ext cx="1071696" cy="338554"/>
+          </a:xfrm>
+          <a:prstGeom prst="rect">
+            <a:avLst/>
+          </a:prstGeom>
+          <a:noFill/>
+        </p:spPr>
+        <p:txBody>
+          <a:bodyPr wrap="square" rtlCol="0">
+            <a:spAutoFit/>
+          </a:bodyPr>
+          <a:lstStyle/>
+          <a:p>
+            <a:pPr algn="ctr"/>
+            <a:r>
+              <a:rPr lang="en-CA" sz="1600" dirty="0">
+                <a:solidFill>
+                  <a:srgbClr val="FF0000"/>
+                </a:solidFill>
+              </a:rPr>
+              <a:t>Fill color</a:t>
+            </a:r>
+          </a:p>
+        </p:txBody>
+      </p:sp>
+      <p:cxnSp>
+        <p:nvCxnSpPr>
+          <p:cNvPr id="30" name="Connecteur droit avec flèche 29">
+            <a:extLst>
+              <a:ext uri="{FF2B5EF4-FFF2-40B4-BE49-F238E27FC236}">
+                <a16:creationId xmlns:a16="http://schemas.microsoft.com/office/drawing/2014/main" id="{AE52B9E2-77AB-C90C-97CC-4E63A6AD6925}"/>
+              </a:ext>
+            </a:extLst>
+          </p:cNvPr>
+          <p:cNvCxnSpPr>
+            <a:cxnSpLocks/>
+            <a:stCxn id="28" idx="3"/>
+          </p:cNvCxnSpPr>
+          <p:nvPr/>
+        </p:nvCxnSpPr>
+        <p:spPr>
+          <a:xfrm flipV="1">
+            <a:off x="4554323" y="2685920"/>
+            <a:ext cx="574747" cy="1829"/>
+          </a:xfrm>
+          <a:prstGeom prst="straightConnector1">
+            <a:avLst/>
+          </a:prstGeom>
+          <a:ln w="25400">
+            <a:solidFill>
+              <a:srgbClr val="FF0000"/>
+            </a:solidFill>
+            <a:tailEnd type="triangle"/>
+          </a:ln>
+        </p:spPr>
+        <p:style>
+          <a:lnRef idx="2">
+            <a:schemeClr val="accent1"/>
+          </a:lnRef>
+          <a:fillRef idx="0">
+            <a:schemeClr val="accent1"/>
+          </a:fillRef>
+          <a:effectRef idx="1">
+            <a:schemeClr val="accent1"/>
+          </a:effectRef>
+          <a:fontRef idx="minor">
+            <a:schemeClr val="tx1"/>
+          </a:fontRef>
+        </p:style>
+      </p:cxnSp>
+    </p:spTree>
+    <p:extLst>
+      <p:ext uri="{BB962C8B-B14F-4D97-AF65-F5344CB8AC3E}">
+        <p14:creationId xmlns:p14="http://schemas.microsoft.com/office/powerpoint/2010/main" val="2868094851"/>
+      </p:ext>
+    </p:extLst>
+  </p:cSld>
+  <p:clrMapOvr>
+    <a:masterClrMapping/>
+  </p:clrMapOvr>
+</p:sld>
+</file>
+
+<file path=ppt/slides/slide16.xml><?xml version="1.0" encoding="utf-8"?>
+<p:sld xmlns:a="http://schemas.openxmlformats.org/drawingml/2006/main" xmlns:r="http://schemas.openxmlformats.org/officeDocument/2006/relationships" xmlns:p="http://schemas.openxmlformats.org/presentationml/2006/main">
+  <p:cSld>
+    <p:spTree>
+      <p:nvGrpSpPr>
         <p:cNvPr id="1" name=""/>
         <p:cNvGrpSpPr/>
         <p:nvPr/>
@@ -12588,7 +15426,7 @@
 </p:sld>
 </file>
 
-<file path=ppt/slides/slide13.xml><?xml version="1.0" encoding="utf-8"?>
+<file path=ppt/slides/slide17.xml><?xml version="1.0" encoding="utf-8"?>
 <p:sld xmlns:a="http://schemas.openxmlformats.org/drawingml/2006/main" xmlns:r="http://schemas.openxmlformats.org/officeDocument/2006/relationships" xmlns:p="http://schemas.openxmlformats.org/presentationml/2006/main">
   <p:cSld>
     <p:spTree>
@@ -12814,7 +15652,7 @@
 </p:sld>
 </file>
 
-<file path=ppt/slides/slide14.xml><?xml version="1.0" encoding="utf-8"?>
+<file path=ppt/slides/slide18.xml><?xml version="1.0" encoding="utf-8"?>
 <p:sld xmlns:a="http://schemas.openxmlformats.org/drawingml/2006/main" xmlns:r="http://schemas.openxmlformats.org/officeDocument/2006/relationships" xmlns:p="http://schemas.openxmlformats.org/presentationml/2006/main">
   <p:cSld>
     <p:spTree>
@@ -13035,7 +15873,7 @@
 </p:sld>
 </file>
 
-<file path=ppt/slides/slide15.xml><?xml version="1.0" encoding="utf-8"?>
+<file path=ppt/slides/slide19.xml><?xml version="1.0" encoding="utf-8"?>
 <p:sld xmlns:a="http://schemas.openxmlformats.org/drawingml/2006/main" xmlns:r="http://schemas.openxmlformats.org/officeDocument/2006/relationships" xmlns:p="http://schemas.openxmlformats.org/presentationml/2006/main">
   <p:cSld>
     <p:spTree>
@@ -13458,264 +16296,6 @@
 </p:sld>
 </file>
 
-<file path=ppt/slides/slide16.xml><?xml version="1.0" encoding="utf-8"?>
-<p:sld xmlns:a="http://schemas.openxmlformats.org/drawingml/2006/main" xmlns:r="http://schemas.openxmlformats.org/officeDocument/2006/relationships" xmlns:p="http://schemas.openxmlformats.org/presentationml/2006/main">
-  <p:cSld>
-    <p:spTree>
-      <p:nvGrpSpPr>
-        <p:cNvPr id="1" name=""/>
-        <p:cNvGrpSpPr/>
-        <p:nvPr/>
-      </p:nvGrpSpPr>
-      <p:grpSpPr>
-        <a:xfrm>
-          <a:off x="0" y="0"/>
-          <a:ext cx="0" cy="0"/>
-          <a:chOff x="0" y="0"/>
-          <a:chExt cx="0" cy="0"/>
-        </a:xfrm>
-      </p:grpSpPr>
-      <p:pic>
-        <p:nvPicPr>
-          <p:cNvPr id="5" name="Image 4">
-            <a:extLst>
-              <a:ext uri="{FF2B5EF4-FFF2-40B4-BE49-F238E27FC236}">
-                <a16:creationId xmlns:a16="http://schemas.microsoft.com/office/drawing/2014/main" id="{F9A279E6-A31B-D63E-D094-5A9C6A061378}"/>
-              </a:ext>
-            </a:extLst>
-          </p:cNvPr>
-          <p:cNvPicPr>
-            <a:picLocks noChangeAspect="1"/>
-          </p:cNvPicPr>
-          <p:nvPr/>
-        </p:nvPicPr>
-        <p:blipFill>
-          <a:blip r:embed="rId2">
-            <a:extLst>
-              <a:ext uri="{28A0092B-C50C-407E-A947-70E740481C1C}">
-                <a14:useLocalDpi xmlns:a14="http://schemas.microsoft.com/office/drawing/2010/main" val="0"/>
-              </a:ext>
-            </a:extLst>
-          </a:blip>
-          <a:stretch>
-            <a:fillRect/>
-          </a:stretch>
-        </p:blipFill>
-        <p:spPr>
-          <a:xfrm>
-            <a:off x="1147302" y="1104611"/>
-            <a:ext cx="6601746" cy="4134427"/>
-          </a:xfrm>
-          <a:prstGeom prst="rect">
-            <a:avLst/>
-          </a:prstGeom>
-        </p:spPr>
-      </p:pic>
-      <p:sp>
-        <p:nvSpPr>
-          <p:cNvPr id="6" name="ZoneTexte 5">
-            <a:extLst>
-              <a:ext uri="{FF2B5EF4-FFF2-40B4-BE49-F238E27FC236}">
-                <a16:creationId xmlns:a16="http://schemas.microsoft.com/office/drawing/2014/main" id="{361A756C-3B4A-C495-8CCF-1B63BFB16BEB}"/>
-              </a:ext>
-            </a:extLst>
-          </p:cNvPr>
-          <p:cNvSpPr txBox="1"/>
-          <p:nvPr/>
-        </p:nvSpPr>
-        <p:spPr>
-          <a:xfrm>
-            <a:off x="2622698" y="1618962"/>
-            <a:ext cx="2339827" cy="307777"/>
-          </a:xfrm>
-          <a:prstGeom prst="rect">
-            <a:avLst/>
-          </a:prstGeom>
-          <a:noFill/>
-        </p:spPr>
-        <p:txBody>
-          <a:bodyPr wrap="square" rtlCol="0">
-            <a:spAutoFit/>
-          </a:bodyPr>
-          <a:lstStyle/>
-          <a:p>
-            <a:r>
-              <a:rPr lang="en-CA" sz="1400" dirty="0">
-                <a:solidFill>
-                  <a:schemeClr val="accent1"/>
-                </a:solidFill>
-              </a:rPr>
-              <a:t>Upload: GUI </a:t>
-            </a:r>
-            <a:r>
-              <a:rPr lang="en-CA" sz="1400" dirty="0">
-                <a:solidFill>
-                  <a:schemeClr val="accent1"/>
-                </a:solidFill>
-                <a:sym typeface="Wingdings" panose="05000000000000000000" pitchFamily="2" charset="2"/>
-              </a:rPr>
-              <a:t> Server</a:t>
-            </a:r>
-            <a:endParaRPr lang="en-CA" sz="1400" dirty="0">
-              <a:solidFill>
-                <a:schemeClr val="accent1"/>
-              </a:solidFill>
-            </a:endParaRPr>
-          </a:p>
-        </p:txBody>
-      </p:sp>
-      <p:cxnSp>
-        <p:nvCxnSpPr>
-          <p:cNvPr id="7" name="Connecteur droit avec flèche 6">
-            <a:extLst>
-              <a:ext uri="{FF2B5EF4-FFF2-40B4-BE49-F238E27FC236}">
-                <a16:creationId xmlns:a16="http://schemas.microsoft.com/office/drawing/2014/main" id="{CAC0E080-37BF-D5AC-DD84-FECC7014C00D}"/>
-              </a:ext>
-            </a:extLst>
-          </p:cNvPr>
-          <p:cNvCxnSpPr>
-            <a:cxnSpLocks/>
-            <a:stCxn id="6" idx="1"/>
-          </p:cNvCxnSpPr>
-          <p:nvPr/>
-        </p:nvCxnSpPr>
-        <p:spPr>
-          <a:xfrm flipH="1" flipV="1">
-            <a:off x="1657350" y="1618962"/>
-            <a:ext cx="965348" cy="153889"/>
-          </a:xfrm>
-          <a:prstGeom prst="straightConnector1">
-            <a:avLst/>
-          </a:prstGeom>
-          <a:ln w="19050">
-            <a:tailEnd type="triangle"/>
-          </a:ln>
-        </p:spPr>
-        <p:style>
-          <a:lnRef idx="1">
-            <a:schemeClr val="accent1"/>
-          </a:lnRef>
-          <a:fillRef idx="0">
-            <a:schemeClr val="accent1"/>
-          </a:fillRef>
-          <a:effectRef idx="0">
-            <a:schemeClr val="accent1"/>
-          </a:effectRef>
-          <a:fontRef idx="minor">
-            <a:schemeClr val="tx1"/>
-          </a:fontRef>
-        </p:style>
-      </p:cxnSp>
-      <p:sp>
-        <p:nvSpPr>
-          <p:cNvPr id="11" name="ZoneTexte 10">
-            <a:extLst>
-              <a:ext uri="{FF2B5EF4-FFF2-40B4-BE49-F238E27FC236}">
-                <a16:creationId xmlns:a16="http://schemas.microsoft.com/office/drawing/2014/main" id="{60C6FFA1-8D56-8CCE-220C-E4742B167899}"/>
-              </a:ext>
-            </a:extLst>
-          </p:cNvPr>
-          <p:cNvSpPr txBox="1"/>
-          <p:nvPr/>
-        </p:nvSpPr>
-        <p:spPr>
-          <a:xfrm>
-            <a:off x="5694481" y="1618961"/>
-            <a:ext cx="2339827" cy="307777"/>
-          </a:xfrm>
-          <a:prstGeom prst="rect">
-            <a:avLst/>
-          </a:prstGeom>
-          <a:noFill/>
-        </p:spPr>
-        <p:txBody>
-          <a:bodyPr wrap="square" rtlCol="0">
-            <a:spAutoFit/>
-          </a:bodyPr>
-          <a:lstStyle/>
-          <a:p>
-            <a:r>
-              <a:rPr lang="en-CA" sz="1400" dirty="0">
-                <a:solidFill>
-                  <a:schemeClr val="accent1"/>
-                </a:solidFill>
-              </a:rPr>
-              <a:t>Download: Server </a:t>
-            </a:r>
-            <a:r>
-              <a:rPr lang="en-CA" sz="1400" dirty="0">
-                <a:solidFill>
-                  <a:schemeClr val="accent1"/>
-                </a:solidFill>
-                <a:sym typeface="Wingdings" panose="05000000000000000000" pitchFamily="2" charset="2"/>
-              </a:rPr>
-              <a:t> </a:t>
-            </a:r>
-            <a:r>
-              <a:rPr lang="en-CA" sz="1400" dirty="0">
-                <a:solidFill>
-                  <a:schemeClr val="accent1"/>
-                </a:solidFill>
-              </a:rPr>
-              <a:t>GUI </a:t>
-            </a:r>
-          </a:p>
-        </p:txBody>
-      </p:sp>
-      <p:cxnSp>
-        <p:nvCxnSpPr>
-          <p:cNvPr id="12" name="Connecteur droit avec flèche 11">
-            <a:extLst>
-              <a:ext uri="{FF2B5EF4-FFF2-40B4-BE49-F238E27FC236}">
-                <a16:creationId xmlns:a16="http://schemas.microsoft.com/office/drawing/2014/main" id="{FABE117C-34D1-F22D-A00F-7A69A3630F4E}"/>
-              </a:ext>
-            </a:extLst>
-          </p:cNvPr>
-          <p:cNvCxnSpPr>
-            <a:cxnSpLocks/>
-          </p:cNvCxnSpPr>
-          <p:nvPr/>
-        </p:nvCxnSpPr>
-        <p:spPr>
-          <a:xfrm flipH="1">
-            <a:off x="4962525" y="1926738"/>
-            <a:ext cx="1133475" cy="1597512"/>
-          </a:xfrm>
-          <a:prstGeom prst="straightConnector1">
-            <a:avLst/>
-          </a:prstGeom>
-          <a:ln w="19050">
-            <a:tailEnd type="triangle"/>
-          </a:ln>
-        </p:spPr>
-        <p:style>
-          <a:lnRef idx="1">
-            <a:schemeClr val="accent1"/>
-          </a:lnRef>
-          <a:fillRef idx="0">
-            <a:schemeClr val="accent1"/>
-          </a:fillRef>
-          <a:effectRef idx="0">
-            <a:schemeClr val="accent1"/>
-          </a:effectRef>
-          <a:fontRef idx="minor">
-            <a:schemeClr val="tx1"/>
-          </a:fontRef>
-        </p:style>
-      </p:cxnSp>
-    </p:spTree>
-    <p:extLst>
-      <p:ext uri="{BB962C8B-B14F-4D97-AF65-F5344CB8AC3E}">
-        <p14:creationId xmlns:p14="http://schemas.microsoft.com/office/powerpoint/2010/main" val="2275816658"/>
-      </p:ext>
-    </p:extLst>
-  </p:cSld>
-  <p:clrMapOvr>
-    <a:masterClrMapping/>
-  </p:clrMapOvr>
-</p:sld>
-</file>
-
 <file path=ppt/slides/slide2.xml><?xml version="1.0" encoding="utf-8"?>
 <p:sld xmlns:a="http://schemas.openxmlformats.org/drawingml/2006/main" xmlns:r="http://schemas.openxmlformats.org/officeDocument/2006/relationships" xmlns:p="http://schemas.openxmlformats.org/presentationml/2006/main">
   <p:cSld>
@@ -14009,6 +16589,264 @@
     <p:extLst>
       <p:ext uri="{BB962C8B-B14F-4D97-AF65-F5344CB8AC3E}">
         <p14:creationId xmlns:p14="http://schemas.microsoft.com/office/powerpoint/2010/main" val="2252349214"/>
+      </p:ext>
+    </p:extLst>
+  </p:cSld>
+  <p:clrMapOvr>
+    <a:masterClrMapping/>
+  </p:clrMapOvr>
+</p:sld>
+</file>
+
+<file path=ppt/slides/slide20.xml><?xml version="1.0" encoding="utf-8"?>
+<p:sld xmlns:a="http://schemas.openxmlformats.org/drawingml/2006/main" xmlns:r="http://schemas.openxmlformats.org/officeDocument/2006/relationships" xmlns:p="http://schemas.openxmlformats.org/presentationml/2006/main">
+  <p:cSld>
+    <p:spTree>
+      <p:nvGrpSpPr>
+        <p:cNvPr id="1" name=""/>
+        <p:cNvGrpSpPr/>
+        <p:nvPr/>
+      </p:nvGrpSpPr>
+      <p:grpSpPr>
+        <a:xfrm>
+          <a:off x="0" y="0"/>
+          <a:ext cx="0" cy="0"/>
+          <a:chOff x="0" y="0"/>
+          <a:chExt cx="0" cy="0"/>
+        </a:xfrm>
+      </p:grpSpPr>
+      <p:pic>
+        <p:nvPicPr>
+          <p:cNvPr id="5" name="Image 4">
+            <a:extLst>
+              <a:ext uri="{FF2B5EF4-FFF2-40B4-BE49-F238E27FC236}">
+                <a16:creationId xmlns:a16="http://schemas.microsoft.com/office/drawing/2014/main" id="{F9A279E6-A31B-D63E-D094-5A9C6A061378}"/>
+              </a:ext>
+            </a:extLst>
+          </p:cNvPr>
+          <p:cNvPicPr>
+            <a:picLocks noChangeAspect="1"/>
+          </p:cNvPicPr>
+          <p:nvPr/>
+        </p:nvPicPr>
+        <p:blipFill>
+          <a:blip r:embed="rId2">
+            <a:extLst>
+              <a:ext uri="{28A0092B-C50C-407E-A947-70E740481C1C}">
+                <a14:useLocalDpi xmlns:a14="http://schemas.microsoft.com/office/drawing/2010/main" val="0"/>
+              </a:ext>
+            </a:extLst>
+          </a:blip>
+          <a:stretch>
+            <a:fillRect/>
+          </a:stretch>
+        </p:blipFill>
+        <p:spPr>
+          <a:xfrm>
+            <a:off x="1147302" y="1104611"/>
+            <a:ext cx="6601746" cy="4134427"/>
+          </a:xfrm>
+          <a:prstGeom prst="rect">
+            <a:avLst/>
+          </a:prstGeom>
+        </p:spPr>
+      </p:pic>
+      <p:sp>
+        <p:nvSpPr>
+          <p:cNvPr id="6" name="ZoneTexte 5">
+            <a:extLst>
+              <a:ext uri="{FF2B5EF4-FFF2-40B4-BE49-F238E27FC236}">
+                <a16:creationId xmlns:a16="http://schemas.microsoft.com/office/drawing/2014/main" id="{361A756C-3B4A-C495-8CCF-1B63BFB16BEB}"/>
+              </a:ext>
+            </a:extLst>
+          </p:cNvPr>
+          <p:cNvSpPr txBox="1"/>
+          <p:nvPr/>
+        </p:nvSpPr>
+        <p:spPr>
+          <a:xfrm>
+            <a:off x="2622698" y="1618962"/>
+            <a:ext cx="2339827" cy="307777"/>
+          </a:xfrm>
+          <a:prstGeom prst="rect">
+            <a:avLst/>
+          </a:prstGeom>
+          <a:noFill/>
+        </p:spPr>
+        <p:txBody>
+          <a:bodyPr wrap="square" rtlCol="0">
+            <a:spAutoFit/>
+          </a:bodyPr>
+          <a:lstStyle/>
+          <a:p>
+            <a:r>
+              <a:rPr lang="en-CA" sz="1400" dirty="0">
+                <a:solidFill>
+                  <a:schemeClr val="accent1"/>
+                </a:solidFill>
+              </a:rPr>
+              <a:t>Upload: GUI </a:t>
+            </a:r>
+            <a:r>
+              <a:rPr lang="en-CA" sz="1400" dirty="0">
+                <a:solidFill>
+                  <a:schemeClr val="accent1"/>
+                </a:solidFill>
+                <a:sym typeface="Wingdings" panose="05000000000000000000" pitchFamily="2" charset="2"/>
+              </a:rPr>
+              <a:t> Server</a:t>
+            </a:r>
+            <a:endParaRPr lang="en-CA" sz="1400" dirty="0">
+              <a:solidFill>
+                <a:schemeClr val="accent1"/>
+              </a:solidFill>
+            </a:endParaRPr>
+          </a:p>
+        </p:txBody>
+      </p:sp>
+      <p:cxnSp>
+        <p:nvCxnSpPr>
+          <p:cNvPr id="7" name="Connecteur droit avec flèche 6">
+            <a:extLst>
+              <a:ext uri="{FF2B5EF4-FFF2-40B4-BE49-F238E27FC236}">
+                <a16:creationId xmlns:a16="http://schemas.microsoft.com/office/drawing/2014/main" id="{CAC0E080-37BF-D5AC-DD84-FECC7014C00D}"/>
+              </a:ext>
+            </a:extLst>
+          </p:cNvPr>
+          <p:cNvCxnSpPr>
+            <a:cxnSpLocks/>
+            <a:stCxn id="6" idx="1"/>
+          </p:cNvCxnSpPr>
+          <p:nvPr/>
+        </p:nvCxnSpPr>
+        <p:spPr>
+          <a:xfrm flipH="1" flipV="1">
+            <a:off x="1657350" y="1618962"/>
+            <a:ext cx="965348" cy="153889"/>
+          </a:xfrm>
+          <a:prstGeom prst="straightConnector1">
+            <a:avLst/>
+          </a:prstGeom>
+          <a:ln w="19050">
+            <a:tailEnd type="triangle"/>
+          </a:ln>
+        </p:spPr>
+        <p:style>
+          <a:lnRef idx="1">
+            <a:schemeClr val="accent1"/>
+          </a:lnRef>
+          <a:fillRef idx="0">
+            <a:schemeClr val="accent1"/>
+          </a:fillRef>
+          <a:effectRef idx="0">
+            <a:schemeClr val="accent1"/>
+          </a:effectRef>
+          <a:fontRef idx="minor">
+            <a:schemeClr val="tx1"/>
+          </a:fontRef>
+        </p:style>
+      </p:cxnSp>
+      <p:sp>
+        <p:nvSpPr>
+          <p:cNvPr id="11" name="ZoneTexte 10">
+            <a:extLst>
+              <a:ext uri="{FF2B5EF4-FFF2-40B4-BE49-F238E27FC236}">
+                <a16:creationId xmlns:a16="http://schemas.microsoft.com/office/drawing/2014/main" id="{60C6FFA1-8D56-8CCE-220C-E4742B167899}"/>
+              </a:ext>
+            </a:extLst>
+          </p:cNvPr>
+          <p:cNvSpPr txBox="1"/>
+          <p:nvPr/>
+        </p:nvSpPr>
+        <p:spPr>
+          <a:xfrm>
+            <a:off x="5694481" y="1618961"/>
+            <a:ext cx="2339827" cy="307777"/>
+          </a:xfrm>
+          <a:prstGeom prst="rect">
+            <a:avLst/>
+          </a:prstGeom>
+          <a:noFill/>
+        </p:spPr>
+        <p:txBody>
+          <a:bodyPr wrap="square" rtlCol="0">
+            <a:spAutoFit/>
+          </a:bodyPr>
+          <a:lstStyle/>
+          <a:p>
+            <a:r>
+              <a:rPr lang="en-CA" sz="1400" dirty="0">
+                <a:solidFill>
+                  <a:schemeClr val="accent1"/>
+                </a:solidFill>
+              </a:rPr>
+              <a:t>Download: Server </a:t>
+            </a:r>
+            <a:r>
+              <a:rPr lang="en-CA" sz="1400" dirty="0">
+                <a:solidFill>
+                  <a:schemeClr val="accent1"/>
+                </a:solidFill>
+                <a:sym typeface="Wingdings" panose="05000000000000000000" pitchFamily="2" charset="2"/>
+              </a:rPr>
+              <a:t> </a:t>
+            </a:r>
+            <a:r>
+              <a:rPr lang="en-CA" sz="1400" dirty="0">
+                <a:solidFill>
+                  <a:schemeClr val="accent1"/>
+                </a:solidFill>
+              </a:rPr>
+              <a:t>GUI </a:t>
+            </a:r>
+          </a:p>
+        </p:txBody>
+      </p:sp>
+      <p:cxnSp>
+        <p:nvCxnSpPr>
+          <p:cNvPr id="12" name="Connecteur droit avec flèche 11">
+            <a:extLst>
+              <a:ext uri="{FF2B5EF4-FFF2-40B4-BE49-F238E27FC236}">
+                <a16:creationId xmlns:a16="http://schemas.microsoft.com/office/drawing/2014/main" id="{FABE117C-34D1-F22D-A00F-7A69A3630F4E}"/>
+              </a:ext>
+            </a:extLst>
+          </p:cNvPr>
+          <p:cNvCxnSpPr>
+            <a:cxnSpLocks/>
+          </p:cNvCxnSpPr>
+          <p:nvPr/>
+        </p:nvCxnSpPr>
+        <p:spPr>
+          <a:xfrm flipH="1">
+            <a:off x="4962525" y="1926738"/>
+            <a:ext cx="1133475" cy="1597512"/>
+          </a:xfrm>
+          <a:prstGeom prst="straightConnector1">
+            <a:avLst/>
+          </a:prstGeom>
+          <a:ln w="19050">
+            <a:tailEnd type="triangle"/>
+          </a:ln>
+        </p:spPr>
+        <p:style>
+          <a:lnRef idx="1">
+            <a:schemeClr val="accent1"/>
+          </a:lnRef>
+          <a:fillRef idx="0">
+            <a:schemeClr val="accent1"/>
+          </a:fillRef>
+          <a:effectRef idx="0">
+            <a:schemeClr val="accent1"/>
+          </a:effectRef>
+          <a:fontRef idx="minor">
+            <a:schemeClr val="tx1"/>
+          </a:fontRef>
+        </p:style>
+      </p:cxnSp>
+    </p:spTree>
+    <p:extLst>
+      <p:ext uri="{BB962C8B-B14F-4D97-AF65-F5344CB8AC3E}">
+        <p14:creationId xmlns:p14="http://schemas.microsoft.com/office/powerpoint/2010/main" val="2275816658"/>
       </p:ext>
     </p:extLst>
   </p:cSld>
